--- a/output/wordlabs-heat-3day.pptx
+++ b/output/wordlabs-heat-3day.pptx
@@ -4240,7 +4240,7 @@
                 <a:ea typeface="Calibri" pitchFamily="34" charset="-122"/>
                 <a:cs typeface="Calibri" pitchFamily="34" charset="-120"/>
               </a:rPr>
-              <a:t>"warmth, high temperature"</a:t>
+              <a:t>"warmth or high temperature"</a:t>
             </a:r>
             <a:endParaRPr lang="en-US" sz="2200" dirty="0"/>
           </a:p>
@@ -5288,7 +5288,7 @@
                 <a:ea typeface="Calibri" pitchFamily="34" charset="-122"/>
                 <a:cs typeface="Calibri" pitchFamily="34" charset="-120"/>
               </a:rPr>
-              <a:t>Word Labs  •  wordlabs.app  •  Root: 'heat' = warmth, high temperature</a:t>
+              <a:t>Word Labs  •  wordlabs.app  •  Root: 'heat' = warmth or high temperature</a:t>
             </a:r>
             <a:endParaRPr lang="en-US" sz="800" dirty="0"/>
           </a:p>
@@ -5622,7 +5622,7 @@
                 <a:ea typeface="Trebuchet MS" pitchFamily="34" charset="-122"/>
                 <a:cs typeface="Trebuchet MS" pitchFamily="34" charset="-120"/>
               </a:rPr>
-              <a:t>0</a:t>
+              <a:t>1</a:t>
             </a:r>
             <a:pPr algn="ctr" indent="0" marL="0">
               <a:buNone/>
@@ -5928,7 +5928,7 @@
                 <a:ea typeface="Calibri" pitchFamily="34" charset="-122"/>
                 <a:cs typeface="Calibri" pitchFamily="34" charset="-120"/>
               </a:rPr>
-              <a:t>Word Labs  •  wordlabs.app  •  Root: 'heat' = warmth, high temperature</a:t>
+              <a:t>Word Labs  •  wordlabs.app  •  Root: 'heat' = warmth or high temperature</a:t>
             </a:r>
             <a:endParaRPr lang="en-US" sz="800" dirty="0"/>
           </a:p>
@@ -6040,7 +6040,7 @@
                 <a:ea typeface="Calibri" pitchFamily="34" charset="-122"/>
                 <a:cs typeface="Calibri" pitchFamily="34" charset="-120"/>
               </a:rPr>
-              <a:t>Mum asked me to </a:t>
+              <a:t>Make sure you </a:t>
             </a:r>
             <a:pPr algn="l" indent="0" marL="0">
               <a:buNone/>
@@ -6057,7 +6057,7 @@
                 <a:ea typeface="Calibri" pitchFamily="34" charset="-122"/>
                 <a:cs typeface="Calibri" pitchFamily="34" charset="-120"/>
               </a:rPr>
-              <a:t>reheat</a:t>
+              <a:t>preheat</a:t>
             </a:r>
             <a:pPr algn="l" indent="0" marL="0">
               <a:buNone/>
@@ -6071,7 +6071,7 @@
                 <a:ea typeface="Calibri" pitchFamily="34" charset="-122"/>
                 <a:cs typeface="Calibri" pitchFamily="34" charset="-120"/>
               </a:rPr>
-              <a:t> the soup because the </a:t>
+              <a:t> the oven, because </a:t>
             </a:r>
             <a:pPr algn="l" indent="0" marL="0">
               <a:buNone/>
@@ -6088,7 +6088,7 @@
                 <a:ea typeface="Calibri" pitchFamily="34" charset="-122"/>
                 <a:cs typeface="Calibri" pitchFamily="34" charset="-120"/>
               </a:rPr>
-              <a:t>heater</a:t>
+              <a:t>reheated</a:t>
             </a:r>
             <a:pPr algn="l" indent="0" marL="0">
               <a:buNone/>
@@ -6102,7 +6102,7 @@
                 <a:ea typeface="Calibri" pitchFamily="34" charset="-122"/>
                 <a:cs typeface="Calibri" pitchFamily="34" charset="-120"/>
               </a:rPr>
-              <a:t> in the kitchen had broken down.</a:t>
+              <a:t> pizza always tastes better when it is properly warmed through.</a:t>
             </a:r>
             <a:endParaRPr lang="en-US" sz="1800" dirty="0"/>
           </a:p>
@@ -6257,7 +6257,7 @@
                 <a:ea typeface="Trebuchet MS" pitchFamily="34" charset="-122"/>
                 <a:cs typeface="Trebuchet MS" pitchFamily="34" charset="-120"/>
               </a:rPr>
-              <a:t>reheat</a:t>
+              <a:t>preheat</a:t>
             </a:r>
             <a:endParaRPr lang="en-US" sz="1400" dirty="0"/>
           </a:p>
@@ -6385,7 +6385,7 @@
                 <a:ea typeface="Trebuchet MS" pitchFamily="34" charset="-122"/>
                 <a:cs typeface="Trebuchet MS" pitchFamily="34" charset="-120"/>
               </a:rPr>
-              <a:t>heater</a:t>
+              <a:t>reheated</a:t>
             </a:r>
             <a:endParaRPr lang="en-US" sz="1400" dirty="0"/>
           </a:p>
@@ -6716,7 +6716,7 @@
                 <a:ea typeface="Calibri" pitchFamily="34" charset="-122"/>
                 <a:cs typeface="Calibri" pitchFamily="34" charset="-120"/>
               </a:rPr>
-              <a:t>Word Labs  •  wordlabs.app  •  Root: 'heat' = warmth, high temperature</a:t>
+              <a:t>Word Labs  •  wordlabs.app  •  Root: 'heat' = warmth or high temperature</a:t>
             </a:r>
             <a:endParaRPr lang="en-US" sz="800" dirty="0"/>
           </a:p>
@@ -6855,7 +6855,7 @@
                 <a:ea typeface="Trebuchet MS" pitchFamily="34" charset="-122"/>
                 <a:cs typeface="Trebuchet MS" pitchFamily="34" charset="-120"/>
               </a:rPr>
-              <a:t>reheat</a:t>
+              <a:t>preheat</a:t>
             </a:r>
             <a:endParaRPr lang="en-US" sz="2800" dirty="0"/>
           </a:p>
@@ -7543,7 +7543,7 @@
                 <a:ea typeface="Calibri" pitchFamily="34" charset="-122"/>
                 <a:cs typeface="Calibri" pitchFamily="34" charset="-120"/>
               </a:rPr>
-              <a:t>Word Labs  •  wordlabs.app  •  Root: 'heat' = warmth, high temperature</a:t>
+              <a:t>Word Labs  •  wordlabs.app  •  Root: 'heat' = warmth or high temperature</a:t>
             </a:r>
             <a:endParaRPr lang="en-US" sz="800" dirty="0"/>
           </a:p>
@@ -7682,7 +7682,7 @@
                 <a:ea typeface="Trebuchet MS" pitchFamily="34" charset="-122"/>
                 <a:cs typeface="Trebuchet MS" pitchFamily="34" charset="-120"/>
               </a:rPr>
-              <a:t>reheat</a:t>
+              <a:t>preheat</a:t>
             </a:r>
             <a:endParaRPr lang="en-US" sz="2800" dirty="0"/>
           </a:p>
@@ -7821,7 +7821,7 @@
                 <a:ea typeface="Trebuchet MS" pitchFamily="34" charset="-122"/>
                 <a:cs typeface="Trebuchet MS" pitchFamily="34" charset="-120"/>
               </a:rPr>
-              <a:t>re</a:t>
+              <a:t>pre</a:t>
             </a:r>
             <a:endParaRPr lang="en-US" sz="1300" dirty="0"/>
           </a:p>
@@ -7860,7 +7860,7 @@
                 <a:ea typeface="Calibri" pitchFamily="34" charset="-122"/>
                 <a:cs typeface="Calibri" pitchFamily="34" charset="-120"/>
               </a:rPr>
-              <a:t>again</a:t>
+              <a:t>before</a:t>
             </a:r>
             <a:endParaRPr lang="en-US" sz="850" dirty="0"/>
           </a:p>
@@ -7972,7 +7972,7 @@
                 <a:ea typeface="Calibri" pitchFamily="34" charset="-122"/>
                 <a:cs typeface="Calibri" pitchFamily="34" charset="-120"/>
               </a:rPr>
-              <a:t>warmth, high temperature</a:t>
+              <a:t>warmth or high temperature</a:t>
             </a:r>
             <a:endParaRPr lang="en-US" sz="850" dirty="0"/>
           </a:p>
@@ -8528,7 +8528,7 @@
                 <a:ea typeface="Calibri" pitchFamily="34" charset="-122"/>
                 <a:cs typeface="Calibri" pitchFamily="34" charset="-120"/>
               </a:rPr>
-              <a:t>Word Labs  •  wordlabs.app  •  Root: 'heat' = warmth, high temperature</a:t>
+              <a:t>Word Labs  •  wordlabs.app  •  Root: 'heat' = warmth or high temperature</a:t>
             </a:r>
             <a:endParaRPr lang="en-US" sz="800" dirty="0"/>
           </a:p>
@@ -8667,7 +8667,7 @@
                 <a:ea typeface="Trebuchet MS" pitchFamily="34" charset="-122"/>
                 <a:cs typeface="Trebuchet MS" pitchFamily="34" charset="-120"/>
               </a:rPr>
-              <a:t>reheat</a:t>
+              <a:t>preheat</a:t>
             </a:r>
             <a:endParaRPr lang="en-US" sz="2800" dirty="0"/>
           </a:p>
@@ -8806,7 +8806,7 @@
                 <a:ea typeface="Trebuchet MS" pitchFamily="34" charset="-122"/>
                 <a:cs typeface="Trebuchet MS" pitchFamily="34" charset="-120"/>
               </a:rPr>
-              <a:t>re</a:t>
+              <a:t>pre</a:t>
             </a:r>
             <a:endParaRPr lang="en-US" sz="1300" dirty="0"/>
           </a:p>
@@ -8845,7 +8845,7 @@
                 <a:ea typeface="Calibri" pitchFamily="34" charset="-122"/>
                 <a:cs typeface="Calibri" pitchFamily="34" charset="-120"/>
               </a:rPr>
-              <a:t>again</a:t>
+              <a:t>before</a:t>
             </a:r>
             <a:endParaRPr lang="en-US" sz="850" dirty="0"/>
           </a:p>
@@ -8957,7 +8957,7 @@
                 <a:ea typeface="Calibri" pitchFamily="34" charset="-122"/>
                 <a:cs typeface="Calibri" pitchFamily="34" charset="-120"/>
               </a:rPr>
-              <a:t>warmth, high temperature</a:t>
+              <a:t>warmth or high temperature</a:t>
             </a:r>
             <a:endParaRPr lang="en-US" sz="850" dirty="0"/>
           </a:p>
@@ -9116,7 +9116,7 @@
                 <a:ea typeface="Trebuchet MS" pitchFamily="34" charset="-122"/>
                 <a:cs typeface="Trebuchet MS" pitchFamily="34" charset="-120"/>
               </a:rPr>
-              <a:t>re</a:t>
+              <a:t>pre</a:t>
             </a:r>
             <a:endParaRPr lang="en-US" sz="1400" dirty="0"/>
           </a:p>
@@ -9645,7 +9645,7 @@
                 <a:ea typeface="Calibri" pitchFamily="34" charset="-122"/>
                 <a:cs typeface="Calibri" pitchFamily="34" charset="-120"/>
               </a:rPr>
-              <a:t>Word Labs  •  wordlabs.app  •  Root: 'heat' = warmth, high temperature</a:t>
+              <a:t>Word Labs  •  wordlabs.app  •  Root: 'heat' = warmth or high temperature</a:t>
             </a:r>
             <a:endParaRPr lang="en-US" sz="800" dirty="0"/>
           </a:p>
@@ -9784,7 +9784,7 @@
                 <a:ea typeface="Trebuchet MS" pitchFamily="34" charset="-122"/>
                 <a:cs typeface="Trebuchet MS" pitchFamily="34" charset="-120"/>
               </a:rPr>
-              <a:t>reheat</a:t>
+              <a:t>preheat</a:t>
             </a:r>
             <a:endParaRPr lang="en-US" sz="2800" dirty="0"/>
           </a:p>
@@ -9923,7 +9923,7 @@
                 <a:ea typeface="Trebuchet MS" pitchFamily="34" charset="-122"/>
                 <a:cs typeface="Trebuchet MS" pitchFamily="34" charset="-120"/>
               </a:rPr>
-              <a:t>re</a:t>
+              <a:t>pre</a:t>
             </a:r>
             <a:endParaRPr lang="en-US" sz="1300" dirty="0"/>
           </a:p>
@@ -9962,7 +9962,7 @@
                 <a:ea typeface="Calibri" pitchFamily="34" charset="-122"/>
                 <a:cs typeface="Calibri" pitchFamily="34" charset="-120"/>
               </a:rPr>
-              <a:t>again</a:t>
+              <a:t>before</a:t>
             </a:r>
             <a:endParaRPr lang="en-US" sz="850" dirty="0"/>
           </a:p>
@@ -10074,7 +10074,7 @@
                 <a:ea typeface="Calibri" pitchFamily="34" charset="-122"/>
                 <a:cs typeface="Calibri" pitchFamily="34" charset="-120"/>
               </a:rPr>
-              <a:t>warmth, high temperature</a:t>
+              <a:t>warmth or high temperature</a:t>
             </a:r>
             <a:endParaRPr lang="en-US" sz="850" dirty="0"/>
           </a:p>
@@ -10233,7 +10233,7 @@
                 <a:ea typeface="Trebuchet MS" pitchFamily="34" charset="-122"/>
                 <a:cs typeface="Trebuchet MS" pitchFamily="34" charset="-120"/>
               </a:rPr>
-              <a:t>re</a:t>
+              <a:t>pre</a:t>
             </a:r>
             <a:endParaRPr lang="en-US" sz="1400" dirty="0"/>
           </a:p>
@@ -10445,7 +10445,7 @@
         </p:nvSpPr>
         <p:spPr>
           <a:xfrm>
-            <a:off x="2427732" y="4169664"/>
+            <a:off x="2254649" y="4169664"/>
             <a:ext cx="685800" cy="475488"/>
           </a:xfrm>
           <a:prstGeom prst="rect">
@@ -10472,7 +10472,7 @@
         </p:nvSpPr>
         <p:spPr>
           <a:xfrm>
-            <a:off x="2427732" y="4169664"/>
+            <a:off x="2254649" y="4169664"/>
             <a:ext cx="685800" cy="475488"/>
           </a:xfrm>
           <a:prstGeom prst="rect">
@@ -10497,7 +10497,7 @@
                 <a:ea typeface="Trebuchet MS" pitchFamily="34" charset="-122"/>
                 <a:cs typeface="Trebuchet MS" pitchFamily="34" charset="-120"/>
               </a:rPr>
-              <a:t>r</a:t>
+              <a:t>p</a:t>
             </a:r>
             <a:endParaRPr lang="en-US" sz="900" dirty="0"/>
           </a:p>
@@ -10511,7 +10511,7 @@
         </p:nvSpPr>
         <p:spPr>
           <a:xfrm>
-            <a:off x="3639312" y="4169664"/>
+            <a:off x="3293146" y="4169664"/>
             <a:ext cx="685800" cy="475488"/>
           </a:xfrm>
           <a:prstGeom prst="rect">
@@ -10538,7 +10538,7 @@
         </p:nvSpPr>
         <p:spPr>
           <a:xfrm>
-            <a:off x="3639312" y="4169664"/>
+            <a:off x="3293146" y="4169664"/>
             <a:ext cx="685800" cy="475488"/>
           </a:xfrm>
           <a:prstGeom prst="rect">
@@ -10563,7 +10563,7 @@
                 <a:ea typeface="Trebuchet MS" pitchFamily="34" charset="-122"/>
                 <a:cs typeface="Trebuchet MS" pitchFamily="34" charset="-120"/>
               </a:rPr>
-              <a:t>e</a:t>
+              <a:t>r</a:t>
             </a:r>
             <a:endParaRPr lang="en-US" sz="900" dirty="0"/>
           </a:p>
@@ -10577,7 +10577,7 @@
         </p:nvSpPr>
         <p:spPr>
           <a:xfrm>
-            <a:off x="4850892" y="4169664"/>
+            <a:off x="4331643" y="4169664"/>
             <a:ext cx="685800" cy="475488"/>
           </a:xfrm>
           <a:prstGeom prst="rect">
@@ -10604,7 +10604,7 @@
         </p:nvSpPr>
         <p:spPr>
           <a:xfrm>
-            <a:off x="4850892" y="4169664"/>
+            <a:off x="4331643" y="4169664"/>
             <a:ext cx="685800" cy="475488"/>
           </a:xfrm>
           <a:prstGeom prst="rect">
@@ -10629,7 +10629,7 @@
                 <a:ea typeface="Trebuchet MS" pitchFamily="34" charset="-122"/>
                 <a:cs typeface="Trebuchet MS" pitchFamily="34" charset="-120"/>
               </a:rPr>
-              <a:t>h</a:t>
+              <a:t>e</a:t>
             </a:r>
             <a:endParaRPr lang="en-US" sz="900" dirty="0"/>
           </a:p>
@@ -10643,7 +10643,7 @@
         </p:nvSpPr>
         <p:spPr>
           <a:xfrm>
-            <a:off x="6062472" y="4169664"/>
+            <a:off x="5370141" y="4169664"/>
             <a:ext cx="685800" cy="475488"/>
           </a:xfrm>
           <a:prstGeom prst="rect">
@@ -10670,7 +10670,7 @@
         </p:nvSpPr>
         <p:spPr>
           <a:xfrm>
-            <a:off x="6062472" y="4169664"/>
+            <a:off x="5370141" y="4169664"/>
             <a:ext cx="685800" cy="475488"/>
           </a:xfrm>
           <a:prstGeom prst="rect">
@@ -10695,7 +10695,7 @@
                 <a:ea typeface="Trebuchet MS" pitchFamily="34" charset="-122"/>
                 <a:cs typeface="Trebuchet MS" pitchFamily="34" charset="-120"/>
               </a:rPr>
-              <a:t>ea</a:t>
+              <a:t>h</a:t>
             </a:r>
             <a:endParaRPr lang="en-US" sz="900" dirty="0"/>
           </a:p>
@@ -10709,7 +10709,7 @@
         </p:nvSpPr>
         <p:spPr>
           <a:xfrm>
-            <a:off x="7274052" y="4169664"/>
+            <a:off x="6408638" y="4169664"/>
             <a:ext cx="685800" cy="475488"/>
           </a:xfrm>
           <a:prstGeom prst="rect">
@@ -10736,7 +10736,73 @@
         </p:nvSpPr>
         <p:spPr>
           <a:xfrm>
-            <a:off x="7274052" y="4169664"/>
+            <a:off x="6408638" y="4169664"/>
+            <a:ext cx="685800" cy="475488"/>
+          </a:xfrm>
+          <a:prstGeom prst="rect">
+            <a:avLst/>
+          </a:prstGeom>
+          <a:noFill/>
+          <a:ln/>
+        </p:spPr>
+        <p:txBody>
+          <a:bodyPr wrap="square" lIns="0" tIns="0" rIns="0" bIns="0" rtlCol="0" anchor="ctr"/>
+          <a:lstStyle/>
+          <a:p>
+            <a:pPr algn="ctr" indent="0" marL="0">
+              <a:buNone/>
+            </a:pPr>
+            <a:r>
+              <a:rPr lang="en-US" sz="900" b="1" dirty="0">
+                <a:solidFill>
+                  <a:srgbClr val="9D174D"/>
+                </a:solidFill>
+                <a:latin typeface="Trebuchet MS" pitchFamily="34" charset="0"/>
+                <a:ea typeface="Trebuchet MS" pitchFamily="34" charset="-122"/>
+                <a:cs typeface="Trebuchet MS" pitchFamily="34" charset="-120"/>
+              </a:rPr>
+              <a:t>ea</a:t>
+            </a:r>
+            <a:endParaRPr lang="en-US" sz="900" dirty="0"/>
+          </a:p>
+        </p:txBody>
+      </p:sp>
+      <p:sp>
+        <p:nvSpPr>
+          <p:cNvPr id="43" name="Shape 41"/>
+          <p:cNvSpPr/>
+          <p:nvPr/>
+        </p:nvSpPr>
+        <p:spPr>
+          <a:xfrm>
+            <a:off x="7447135" y="4169664"/>
+            <a:ext cx="685800" cy="475488"/>
+          </a:xfrm>
+          <a:prstGeom prst="rect">
+            <a:avLst>
+              <a:gd name="adj" fmla="val 7692"/>
+            </a:avLst>
+          </a:prstGeom>
+          <a:solidFill>
+            <a:srgbClr val="FFFFFF"/>
+          </a:solidFill>
+          <a:ln w="12700">
+            <a:solidFill>
+              <a:srgbClr val="DB2777"/>
+            </a:solidFill>
+            <a:prstDash val="solid"/>
+          </a:ln>
+        </p:spPr>
+      </p:sp>
+      <p:sp>
+        <p:nvSpPr>
+          <p:cNvPr id="44" name="Text 42"/>
+          <p:cNvSpPr/>
+          <p:nvPr/>
+        </p:nvSpPr>
+        <p:spPr>
+          <a:xfrm>
+            <a:off x="7447135" y="4169664"/>
             <a:ext cx="685800" cy="475488"/>
           </a:xfrm>
           <a:prstGeom prst="rect">
@@ -11053,7 +11119,7 @@
                 <a:ea typeface="Calibri" pitchFamily="34" charset="-122"/>
                 <a:cs typeface="Calibri" pitchFamily="34" charset="-120"/>
               </a:rPr>
-              <a:t>Word Labs  •  wordlabs.app  •  Root: 'heat' = warmth, high temperature</a:t>
+              <a:t>Word Labs  •  wordlabs.app  •  Root: 'heat' = warmth or high temperature</a:t>
             </a:r>
             <a:endParaRPr lang="en-US" sz="800" dirty="0"/>
           </a:p>
@@ -11192,7 +11258,7 @@
                 <a:ea typeface="Trebuchet MS" pitchFamily="34" charset="-122"/>
                 <a:cs typeface="Trebuchet MS" pitchFamily="34" charset="-120"/>
               </a:rPr>
-              <a:t>heater</a:t>
+              <a:t>reheated</a:t>
             </a:r>
             <a:endParaRPr lang="en-US" sz="2800" dirty="0"/>
           </a:p>
@@ -11880,7 +11946,7 @@
                 <a:ea typeface="Calibri" pitchFamily="34" charset="-122"/>
                 <a:cs typeface="Calibri" pitchFamily="34" charset="-120"/>
               </a:rPr>
-              <a:t>Word Labs  •  wordlabs.app  •  Root: 'heat' = warmth, high temperature</a:t>
+              <a:t>Word Labs  •  wordlabs.app  •  Root: 'heat' = warmth or high temperature</a:t>
             </a:r>
             <a:endParaRPr lang="en-US" sz="800" dirty="0"/>
           </a:p>
@@ -12019,7 +12085,7 @@
                 <a:ea typeface="Trebuchet MS" pitchFamily="34" charset="-122"/>
                 <a:cs typeface="Trebuchet MS" pitchFamily="34" charset="-120"/>
               </a:rPr>
-              <a:t>heater</a:t>
+              <a:t>reheated</a:t>
             </a:r>
             <a:endParaRPr lang="en-US" sz="2800" dirty="0"/>
           </a:p>
@@ -12099,7 +12165,7 @@
         </p:nvSpPr>
         <p:spPr>
           <a:xfrm>
-            <a:off x="2938272" y="2258568"/>
+            <a:off x="2221992" y="2258568"/>
             <a:ext cx="1828800" cy="292608"/>
           </a:xfrm>
           <a:prstGeom prst="rect">
@@ -12108,11 +12174,11 @@
             </a:avLst>
           </a:prstGeom>
           <a:solidFill>
-            <a:srgbClr val="CCFBF1"/>
+            <a:srgbClr val="DDD6FE"/>
           </a:solidFill>
           <a:ln w="19050">
             <a:solidFill>
-              <a:srgbClr val="0D9488"/>
+              <a:srgbClr val="7C3AED"/>
             </a:solidFill>
             <a:prstDash val="solid"/>
           </a:ln>
@@ -12133,7 +12199,7 @@
         </p:nvSpPr>
         <p:spPr>
           <a:xfrm>
-            <a:off x="2938272" y="2258568"/>
+            <a:off x="2221992" y="2258568"/>
             <a:ext cx="1828800" cy="292608"/>
           </a:xfrm>
           <a:prstGeom prst="rect">
@@ -12152,13 +12218,13 @@
             <a:r>
               <a:rPr lang="en-US" sz="1300" b="1" dirty="0">
                 <a:solidFill>
-                  <a:srgbClr val="0F766E"/>
+                  <a:srgbClr val="4C1D95"/>
                 </a:solidFill>
                 <a:latin typeface="Trebuchet MS" pitchFamily="34" charset="0"/>
                 <a:ea typeface="Trebuchet MS" pitchFamily="34" charset="-122"/>
                 <a:cs typeface="Trebuchet MS" pitchFamily="34" charset="-120"/>
               </a:rPr>
-              <a:t>heat</a:t>
+              <a:t>re</a:t>
             </a:r>
             <a:endParaRPr lang="en-US" sz="1300" dirty="0"/>
           </a:p>
@@ -12172,7 +12238,7 @@
         </p:nvSpPr>
         <p:spPr>
           <a:xfrm>
-            <a:off x="2938272" y="2569464"/>
+            <a:off x="2221992" y="2569464"/>
             <a:ext cx="1828800" cy="201168"/>
           </a:xfrm>
           <a:prstGeom prst="rect">
@@ -12197,7 +12263,7 @@
                 <a:ea typeface="Calibri" pitchFamily="34" charset="-122"/>
                 <a:cs typeface="Calibri" pitchFamily="34" charset="-120"/>
               </a:rPr>
-              <a:t>warmth, high temperature</a:t>
+              <a:t>again</a:t>
             </a:r>
             <a:endParaRPr lang="en-US" sz="850" dirty="0"/>
           </a:p>
@@ -12211,7 +12277,7 @@
         </p:nvSpPr>
         <p:spPr>
           <a:xfrm>
-            <a:off x="5803392" y="2258568"/>
+            <a:off x="4370832" y="2258568"/>
             <a:ext cx="1828800" cy="292608"/>
           </a:xfrm>
           <a:prstGeom prst="rect">
@@ -12220,11 +12286,11 @@
             </a:avLst>
           </a:prstGeom>
           <a:solidFill>
-            <a:srgbClr val="FCE7F3"/>
+            <a:srgbClr val="CCFBF1"/>
           </a:solidFill>
           <a:ln w="19050">
             <a:solidFill>
-              <a:srgbClr val="DB2777"/>
+              <a:srgbClr val="0D9488"/>
             </a:solidFill>
             <a:prstDash val="solid"/>
           </a:ln>
@@ -12245,7 +12311,7 @@
         </p:nvSpPr>
         <p:spPr>
           <a:xfrm>
-            <a:off x="5803392" y="2258568"/>
+            <a:off x="4370832" y="2258568"/>
             <a:ext cx="1828800" cy="292608"/>
           </a:xfrm>
           <a:prstGeom prst="rect">
@@ -12264,13 +12330,13 @@
             <a:r>
               <a:rPr lang="en-US" sz="1300" b="1" dirty="0">
                 <a:solidFill>
-                  <a:srgbClr val="9D174D"/>
+                  <a:srgbClr val="0F766E"/>
                 </a:solidFill>
                 <a:latin typeface="Trebuchet MS" pitchFamily="34" charset="0"/>
                 <a:ea typeface="Trebuchet MS" pitchFamily="34" charset="-122"/>
                 <a:cs typeface="Trebuchet MS" pitchFamily="34" charset="-120"/>
               </a:rPr>
-              <a:t>er</a:t>
+              <a:t>heat</a:t>
             </a:r>
             <a:endParaRPr lang="en-US" sz="1300" dirty="0"/>
           </a:p>
@@ -12284,7 +12350,7 @@
         </p:nvSpPr>
         <p:spPr>
           <a:xfrm>
-            <a:off x="5803392" y="2569464"/>
+            <a:off x="4370832" y="2569464"/>
             <a:ext cx="1828800" cy="201168"/>
           </a:xfrm>
           <a:prstGeom prst="rect">
@@ -12309,7 +12375,7 @@
                 <a:ea typeface="Calibri" pitchFamily="34" charset="-122"/>
                 <a:cs typeface="Calibri" pitchFamily="34" charset="-120"/>
               </a:rPr>
-              <a:t>a person or thing that does something</a:t>
+              <a:t>warmth or high temperature</a:t>
             </a:r>
             <a:endParaRPr lang="en-US" sz="850" dirty="0"/>
           </a:p>
@@ -12318,6 +12384,118 @@
       <p:sp>
         <p:nvSpPr>
           <p:cNvPr id="22" name="Shape 20"/>
+          <p:cNvSpPr/>
+          <p:nvPr/>
+        </p:nvSpPr>
+        <p:spPr>
+          <a:xfrm>
+            <a:off x="6519672" y="2258568"/>
+            <a:ext cx="1828800" cy="292608"/>
+          </a:xfrm>
+          <a:prstGeom prst="rect">
+            <a:avLst>
+              <a:gd name="adj" fmla="val 25000"/>
+            </a:avLst>
+          </a:prstGeom>
+          <a:solidFill>
+            <a:srgbClr val="FCE7F3"/>
+          </a:solidFill>
+          <a:ln w="19050">
+            <a:solidFill>
+              <a:srgbClr val="DB2777"/>
+            </a:solidFill>
+            <a:prstDash val="solid"/>
+          </a:ln>
+          <a:effectLst>
+            <a:outerShdw sx="100000" sy="100000" kx="0" ky="0" algn="bl" rotWithShape="0" blurRad="101600" dist="38100" dir="8100000">
+              <a:srgbClr val="000000">
+                <a:alpha val="12000"/>
+              </a:srgbClr>
+            </a:outerShdw>
+          </a:effectLst>
+        </p:spPr>
+      </p:sp>
+      <p:sp>
+        <p:nvSpPr>
+          <p:cNvPr id="23" name="Text 21"/>
+          <p:cNvSpPr/>
+          <p:nvPr/>
+        </p:nvSpPr>
+        <p:spPr>
+          <a:xfrm>
+            <a:off x="6519672" y="2258568"/>
+            <a:ext cx="1828800" cy="292608"/>
+          </a:xfrm>
+          <a:prstGeom prst="rect">
+            <a:avLst/>
+          </a:prstGeom>
+          <a:noFill/>
+          <a:ln/>
+        </p:spPr>
+        <p:txBody>
+          <a:bodyPr wrap="square" lIns="0" tIns="0" rIns="0" bIns="0" rtlCol="0" anchor="ctr"/>
+          <a:lstStyle/>
+          <a:p>
+            <a:pPr algn="ctr" indent="0" marL="0">
+              <a:buNone/>
+            </a:pPr>
+            <a:r>
+              <a:rPr lang="en-US" sz="1300" b="1" dirty="0">
+                <a:solidFill>
+                  <a:srgbClr val="9D174D"/>
+                </a:solidFill>
+                <a:latin typeface="Trebuchet MS" pitchFamily="34" charset="0"/>
+                <a:ea typeface="Trebuchet MS" pitchFamily="34" charset="-122"/>
+                <a:cs typeface="Trebuchet MS" pitchFamily="34" charset="-120"/>
+              </a:rPr>
+              <a:t>ed</a:t>
+            </a:r>
+            <a:endParaRPr lang="en-US" sz="1300" dirty="0"/>
+          </a:p>
+        </p:txBody>
+      </p:sp>
+      <p:sp>
+        <p:nvSpPr>
+          <p:cNvPr id="24" name="Text 22"/>
+          <p:cNvSpPr/>
+          <p:nvPr/>
+        </p:nvSpPr>
+        <p:spPr>
+          <a:xfrm>
+            <a:off x="6519672" y="2569464"/>
+            <a:ext cx="1828800" cy="201168"/>
+          </a:xfrm>
+          <a:prstGeom prst="rect">
+            <a:avLst/>
+          </a:prstGeom>
+          <a:noFill/>
+          <a:ln/>
+        </p:spPr>
+        <p:txBody>
+          <a:bodyPr wrap="square" lIns="0" tIns="0" rIns="0" bIns="0" rtlCol="0" anchor="t"/>
+          <a:lstStyle/>
+          <a:p>
+            <a:pPr algn="ctr" indent="0" marL="0">
+              <a:buNone/>
+            </a:pPr>
+            <a:r>
+              <a:rPr lang="en-US" sz="850" dirty="0">
+                <a:solidFill>
+                  <a:srgbClr val="475569"/>
+                </a:solidFill>
+                <a:latin typeface="Calibri" pitchFamily="34" charset="0"/>
+                <a:ea typeface="Calibri" pitchFamily="34" charset="-122"/>
+                <a:cs typeface="Calibri" pitchFamily="34" charset="-120"/>
+              </a:rPr>
+              <a:t>past tense</a:t>
+            </a:r>
+            <a:endParaRPr lang="en-US" sz="850" dirty="0"/>
+          </a:p>
+        </p:txBody>
+      </p:sp>
+      <p:sp>
+        <p:nvSpPr>
+          <p:cNvPr id="25" name="Shape 23"/>
           <p:cNvSpPr/>
           <p:nvPr/>
         </p:nvSpPr>
@@ -12344,7 +12522,7 @@
       </p:sp>
       <p:sp>
         <p:nvSpPr>
-          <p:cNvPr id="23" name="Text 21"/>
+          <p:cNvPr id="26" name="Text 24"/>
           <p:cNvSpPr/>
           <p:nvPr/>
         </p:nvSpPr>
@@ -12383,7 +12561,7 @@
       </p:sp>
       <p:sp>
         <p:nvSpPr>
-          <p:cNvPr id="24" name="Shape 22"/>
+          <p:cNvPr id="27" name="Shape 25"/>
           <p:cNvSpPr/>
           <p:nvPr/>
         </p:nvSpPr>
@@ -12410,7 +12588,7 @@
       </p:sp>
       <p:sp>
         <p:nvSpPr>
-          <p:cNvPr id="25" name="Text 23"/>
+          <p:cNvPr id="28" name="Text 26"/>
           <p:cNvSpPr/>
           <p:nvPr/>
         </p:nvSpPr>
@@ -12449,7 +12627,7 @@
       </p:sp>
       <p:sp>
         <p:nvSpPr>
-          <p:cNvPr id="26" name="Shape 24"/>
+          <p:cNvPr id="29" name="Shape 27"/>
           <p:cNvSpPr/>
           <p:nvPr/>
         </p:nvSpPr>
@@ -12476,7 +12654,7 @@
       </p:sp>
       <p:sp>
         <p:nvSpPr>
-          <p:cNvPr id="27" name="Text 25"/>
+          <p:cNvPr id="30" name="Text 28"/>
           <p:cNvSpPr/>
           <p:nvPr/>
         </p:nvSpPr>
@@ -12515,7 +12693,7 @@
       </p:sp>
       <p:sp>
         <p:nvSpPr>
-          <p:cNvPr id="28" name="Shape 26"/>
+          <p:cNvPr id="31" name="Shape 29"/>
           <p:cNvSpPr/>
           <p:nvPr/>
         </p:nvSpPr>
@@ -12542,7 +12720,7 @@
       </p:sp>
       <p:sp>
         <p:nvSpPr>
-          <p:cNvPr id="29" name="Text 27"/>
+          <p:cNvPr id="32" name="Text 30"/>
           <p:cNvSpPr/>
           <p:nvPr/>
         </p:nvSpPr>
@@ -12865,7 +13043,7 @@
                 <a:ea typeface="Calibri" pitchFamily="34" charset="-122"/>
                 <a:cs typeface="Calibri" pitchFamily="34" charset="-120"/>
               </a:rPr>
-              <a:t>Word Labs  •  wordlabs.app  •  Root: 'heat' = warmth, high temperature</a:t>
+              <a:t>Word Labs  •  wordlabs.app  •  Root: 'heat' = warmth or high temperature</a:t>
             </a:r>
             <a:endParaRPr lang="en-US" sz="800" dirty="0"/>
           </a:p>
@@ -13004,7 +13182,7 @@
                 <a:ea typeface="Trebuchet MS" pitchFamily="34" charset="-122"/>
                 <a:cs typeface="Trebuchet MS" pitchFamily="34" charset="-120"/>
               </a:rPr>
-              <a:t>heater</a:t>
+              <a:t>reheated</a:t>
             </a:r>
             <a:endParaRPr lang="en-US" sz="2800" dirty="0"/>
           </a:p>
@@ -13084,7 +13262,7 @@
         </p:nvSpPr>
         <p:spPr>
           <a:xfrm>
-            <a:off x="2938272" y="2258568"/>
+            <a:off x="2221992" y="2258568"/>
             <a:ext cx="1828800" cy="292608"/>
           </a:xfrm>
           <a:prstGeom prst="rect">
@@ -13093,11 +13271,11 @@
             </a:avLst>
           </a:prstGeom>
           <a:solidFill>
-            <a:srgbClr val="CCFBF1"/>
+            <a:srgbClr val="DDD6FE"/>
           </a:solidFill>
           <a:ln w="19050">
             <a:solidFill>
-              <a:srgbClr val="0D9488"/>
+              <a:srgbClr val="7C3AED"/>
             </a:solidFill>
             <a:prstDash val="solid"/>
           </a:ln>
@@ -13118,7 +13296,7 @@
         </p:nvSpPr>
         <p:spPr>
           <a:xfrm>
-            <a:off x="2938272" y="2258568"/>
+            <a:off x="2221992" y="2258568"/>
             <a:ext cx="1828800" cy="292608"/>
           </a:xfrm>
           <a:prstGeom prst="rect">
@@ -13137,13 +13315,13 @@
             <a:r>
               <a:rPr lang="en-US" sz="1300" b="1" dirty="0">
                 <a:solidFill>
-                  <a:srgbClr val="0F766E"/>
+                  <a:srgbClr val="4C1D95"/>
                 </a:solidFill>
                 <a:latin typeface="Trebuchet MS" pitchFamily="34" charset="0"/>
                 <a:ea typeface="Trebuchet MS" pitchFamily="34" charset="-122"/>
                 <a:cs typeface="Trebuchet MS" pitchFamily="34" charset="-120"/>
               </a:rPr>
-              <a:t>heat</a:t>
+              <a:t>re</a:t>
             </a:r>
             <a:endParaRPr lang="en-US" sz="1300" dirty="0"/>
           </a:p>
@@ -13157,7 +13335,7 @@
         </p:nvSpPr>
         <p:spPr>
           <a:xfrm>
-            <a:off x="2938272" y="2569464"/>
+            <a:off x="2221992" y="2569464"/>
             <a:ext cx="1828800" cy="201168"/>
           </a:xfrm>
           <a:prstGeom prst="rect">
@@ -13182,7 +13360,7 @@
                 <a:ea typeface="Calibri" pitchFamily="34" charset="-122"/>
                 <a:cs typeface="Calibri" pitchFamily="34" charset="-120"/>
               </a:rPr>
-              <a:t>warmth, high temperature</a:t>
+              <a:t>again</a:t>
             </a:r>
             <a:endParaRPr lang="en-US" sz="850" dirty="0"/>
           </a:p>
@@ -13196,7 +13374,7 @@
         </p:nvSpPr>
         <p:spPr>
           <a:xfrm>
-            <a:off x="5803392" y="2258568"/>
+            <a:off x="4370832" y="2258568"/>
             <a:ext cx="1828800" cy="292608"/>
           </a:xfrm>
           <a:prstGeom prst="rect">
@@ -13205,11 +13383,11 @@
             </a:avLst>
           </a:prstGeom>
           <a:solidFill>
-            <a:srgbClr val="FCE7F3"/>
+            <a:srgbClr val="CCFBF1"/>
           </a:solidFill>
           <a:ln w="19050">
             <a:solidFill>
-              <a:srgbClr val="DB2777"/>
+              <a:srgbClr val="0D9488"/>
             </a:solidFill>
             <a:prstDash val="solid"/>
           </a:ln>
@@ -13230,7 +13408,7 @@
         </p:nvSpPr>
         <p:spPr>
           <a:xfrm>
-            <a:off x="5803392" y="2258568"/>
+            <a:off x="4370832" y="2258568"/>
             <a:ext cx="1828800" cy="292608"/>
           </a:xfrm>
           <a:prstGeom prst="rect">
@@ -13249,13 +13427,13 @@
             <a:r>
               <a:rPr lang="en-US" sz="1300" b="1" dirty="0">
                 <a:solidFill>
-                  <a:srgbClr val="9D174D"/>
+                  <a:srgbClr val="0F766E"/>
                 </a:solidFill>
                 <a:latin typeface="Trebuchet MS" pitchFamily="34" charset="0"/>
                 <a:ea typeface="Trebuchet MS" pitchFamily="34" charset="-122"/>
                 <a:cs typeface="Trebuchet MS" pitchFamily="34" charset="-120"/>
               </a:rPr>
-              <a:t>er</a:t>
+              <a:t>heat</a:t>
             </a:r>
             <a:endParaRPr lang="en-US" sz="1300" dirty="0"/>
           </a:p>
@@ -13269,7 +13447,7 @@
         </p:nvSpPr>
         <p:spPr>
           <a:xfrm>
-            <a:off x="5803392" y="2569464"/>
+            <a:off x="4370832" y="2569464"/>
             <a:ext cx="1828800" cy="201168"/>
           </a:xfrm>
           <a:prstGeom prst="rect">
@@ -13294,7 +13472,7 @@
                 <a:ea typeface="Calibri" pitchFamily="34" charset="-122"/>
                 <a:cs typeface="Calibri" pitchFamily="34" charset="-120"/>
               </a:rPr>
-              <a:t>a person or thing that does something</a:t>
+              <a:t>warmth or high temperature</a:t>
             </a:r>
             <a:endParaRPr lang="en-US" sz="850" dirty="0"/>
           </a:p>
@@ -13303,6 +13481,118 @@
       <p:sp>
         <p:nvSpPr>
           <p:cNvPr id="22" name="Shape 20"/>
+          <p:cNvSpPr/>
+          <p:nvPr/>
+        </p:nvSpPr>
+        <p:spPr>
+          <a:xfrm>
+            <a:off x="6519672" y="2258568"/>
+            <a:ext cx="1828800" cy="292608"/>
+          </a:xfrm>
+          <a:prstGeom prst="rect">
+            <a:avLst>
+              <a:gd name="adj" fmla="val 25000"/>
+            </a:avLst>
+          </a:prstGeom>
+          <a:solidFill>
+            <a:srgbClr val="FCE7F3"/>
+          </a:solidFill>
+          <a:ln w="19050">
+            <a:solidFill>
+              <a:srgbClr val="DB2777"/>
+            </a:solidFill>
+            <a:prstDash val="solid"/>
+          </a:ln>
+          <a:effectLst>
+            <a:outerShdw sx="100000" sy="100000" kx="0" ky="0" algn="bl" rotWithShape="0" blurRad="101600" dist="38100" dir="8100000">
+              <a:srgbClr val="000000">
+                <a:alpha val="12000"/>
+              </a:srgbClr>
+            </a:outerShdw>
+          </a:effectLst>
+        </p:spPr>
+      </p:sp>
+      <p:sp>
+        <p:nvSpPr>
+          <p:cNvPr id="23" name="Text 21"/>
+          <p:cNvSpPr/>
+          <p:nvPr/>
+        </p:nvSpPr>
+        <p:spPr>
+          <a:xfrm>
+            <a:off x="6519672" y="2258568"/>
+            <a:ext cx="1828800" cy="292608"/>
+          </a:xfrm>
+          <a:prstGeom prst="rect">
+            <a:avLst/>
+          </a:prstGeom>
+          <a:noFill/>
+          <a:ln/>
+        </p:spPr>
+        <p:txBody>
+          <a:bodyPr wrap="square" lIns="0" tIns="0" rIns="0" bIns="0" rtlCol="0" anchor="ctr"/>
+          <a:lstStyle/>
+          <a:p>
+            <a:pPr algn="ctr" indent="0" marL="0">
+              <a:buNone/>
+            </a:pPr>
+            <a:r>
+              <a:rPr lang="en-US" sz="1300" b="1" dirty="0">
+                <a:solidFill>
+                  <a:srgbClr val="9D174D"/>
+                </a:solidFill>
+                <a:latin typeface="Trebuchet MS" pitchFamily="34" charset="0"/>
+                <a:ea typeface="Trebuchet MS" pitchFamily="34" charset="-122"/>
+                <a:cs typeface="Trebuchet MS" pitchFamily="34" charset="-120"/>
+              </a:rPr>
+              <a:t>ed</a:t>
+            </a:r>
+            <a:endParaRPr lang="en-US" sz="1300" dirty="0"/>
+          </a:p>
+        </p:txBody>
+      </p:sp>
+      <p:sp>
+        <p:nvSpPr>
+          <p:cNvPr id="24" name="Text 22"/>
+          <p:cNvSpPr/>
+          <p:nvPr/>
+        </p:nvSpPr>
+        <p:spPr>
+          <a:xfrm>
+            <a:off x="6519672" y="2569464"/>
+            <a:ext cx="1828800" cy="201168"/>
+          </a:xfrm>
+          <a:prstGeom prst="rect">
+            <a:avLst/>
+          </a:prstGeom>
+          <a:noFill/>
+          <a:ln/>
+        </p:spPr>
+        <p:txBody>
+          <a:bodyPr wrap="square" lIns="0" tIns="0" rIns="0" bIns="0" rtlCol="0" anchor="t"/>
+          <a:lstStyle/>
+          <a:p>
+            <a:pPr algn="ctr" indent="0" marL="0">
+              <a:buNone/>
+            </a:pPr>
+            <a:r>
+              <a:rPr lang="en-US" sz="850" dirty="0">
+                <a:solidFill>
+                  <a:srgbClr val="475569"/>
+                </a:solidFill>
+                <a:latin typeface="Calibri" pitchFamily="34" charset="0"/>
+                <a:ea typeface="Calibri" pitchFamily="34" charset="-122"/>
+                <a:cs typeface="Calibri" pitchFamily="34" charset="-120"/>
+              </a:rPr>
+              <a:t>past tense</a:t>
+            </a:r>
+            <a:endParaRPr lang="en-US" sz="850" dirty="0"/>
+          </a:p>
+        </p:txBody>
+      </p:sp>
+      <p:sp>
+        <p:nvSpPr>
+          <p:cNvPr id="25" name="Shape 23"/>
           <p:cNvSpPr/>
           <p:nvPr/>
         </p:nvSpPr>
@@ -13329,7 +13619,7 @@
       </p:sp>
       <p:sp>
         <p:nvSpPr>
-          <p:cNvPr id="23" name="Text 21"/>
+          <p:cNvPr id="26" name="Text 24"/>
           <p:cNvSpPr/>
           <p:nvPr/>
         </p:nvSpPr>
@@ -13368,7 +13658,7 @@
       </p:sp>
       <p:sp>
         <p:nvSpPr>
-          <p:cNvPr id="24" name="Shape 22"/>
+          <p:cNvPr id="27" name="Shape 25"/>
           <p:cNvSpPr/>
           <p:nvPr/>
         </p:nvSpPr>
@@ -13395,13 +13685,13 @@
       </p:sp>
       <p:sp>
         <p:nvSpPr>
-          <p:cNvPr id="25" name="Shape 23"/>
-          <p:cNvSpPr/>
-          <p:nvPr/>
-        </p:nvSpPr>
-        <p:spPr>
-          <a:xfrm>
-            <a:off x="2999232" y="3364992"/>
+          <p:cNvPr id="28" name="Shape 26"/>
+          <p:cNvSpPr/>
+          <p:nvPr/>
+        </p:nvSpPr>
+        <p:spPr>
+          <a:xfrm>
+            <a:off x="2313432" y="3364992"/>
             <a:ext cx="1645920" cy="475488"/>
           </a:xfrm>
           <a:prstGeom prst="rect">
@@ -13422,13 +13712,13 @@
       </p:sp>
       <p:sp>
         <p:nvSpPr>
-          <p:cNvPr id="26" name="Text 24"/>
-          <p:cNvSpPr/>
-          <p:nvPr/>
-        </p:nvSpPr>
-        <p:spPr>
-          <a:xfrm>
-            <a:off x="2999232" y="3364992"/>
+          <p:cNvPr id="29" name="Text 27"/>
+          <p:cNvSpPr/>
+          <p:nvPr/>
+        </p:nvSpPr>
+        <p:spPr>
+          <a:xfrm>
+            <a:off x="2313432" y="3364992"/>
             <a:ext cx="1645920" cy="475488"/>
           </a:xfrm>
           <a:prstGeom prst="rect">
@@ -13453,7 +13743,7 @@
                 <a:ea typeface="Trebuchet MS" pitchFamily="34" charset="-122"/>
                 <a:cs typeface="Trebuchet MS" pitchFamily="34" charset="-120"/>
               </a:rPr>
-              <a:t>heat</a:t>
+              <a:t>re</a:t>
             </a:r>
             <a:endParaRPr lang="en-US" sz="1400" dirty="0"/>
           </a:p>
@@ -13461,14 +13751,14 @@
       </p:sp>
       <p:sp>
         <p:nvSpPr>
-          <p:cNvPr id="27" name="Text 25"/>
-          <p:cNvSpPr/>
-          <p:nvPr/>
-        </p:nvSpPr>
-        <p:spPr>
-          <a:xfrm>
-            <a:off x="4645152" y="3364992"/>
-            <a:ext cx="1097280" cy="475488"/>
+          <p:cNvPr id="30" name="Text 28"/>
+          <p:cNvSpPr/>
+          <p:nvPr/>
+        </p:nvSpPr>
+        <p:spPr>
+          <a:xfrm>
+            <a:off x="3959352" y="3364992"/>
+            <a:ext cx="411480" cy="475488"/>
           </a:xfrm>
           <a:prstGeom prst="rect">
             <a:avLst/>
@@ -13500,13 +13790,13 @@
       </p:sp>
       <p:sp>
         <p:nvSpPr>
-          <p:cNvPr id="28" name="Shape 26"/>
-          <p:cNvSpPr/>
-          <p:nvPr/>
-        </p:nvSpPr>
-        <p:spPr>
-          <a:xfrm>
-            <a:off x="5742432" y="3364992"/>
+          <p:cNvPr id="31" name="Shape 29"/>
+          <p:cNvSpPr/>
+          <p:nvPr/>
+        </p:nvSpPr>
+        <p:spPr>
+          <a:xfrm>
+            <a:off x="4370832" y="3364992"/>
             <a:ext cx="1645920" cy="475488"/>
           </a:xfrm>
           <a:prstGeom prst="rect">
@@ -13527,13 +13817,13 @@
       </p:sp>
       <p:sp>
         <p:nvSpPr>
-          <p:cNvPr id="29" name="Text 27"/>
-          <p:cNvSpPr/>
-          <p:nvPr/>
-        </p:nvSpPr>
-        <p:spPr>
-          <a:xfrm>
-            <a:off x="5742432" y="3364992"/>
+          <p:cNvPr id="32" name="Text 30"/>
+          <p:cNvSpPr/>
+          <p:nvPr/>
+        </p:nvSpPr>
+        <p:spPr>
+          <a:xfrm>
+            <a:off x="4370832" y="3364992"/>
             <a:ext cx="1645920" cy="475488"/>
           </a:xfrm>
           <a:prstGeom prst="rect">
@@ -13558,7 +13848,7 @@
                 <a:ea typeface="Trebuchet MS" pitchFamily="34" charset="-122"/>
                 <a:cs typeface="Trebuchet MS" pitchFamily="34" charset="-120"/>
               </a:rPr>
-              <a:t>er</a:t>
+              <a:t>heat</a:t>
             </a:r>
             <a:endParaRPr lang="en-US" sz="1400" dirty="0"/>
           </a:p>
@@ -13566,7 +13856,112 @@
       </p:sp>
       <p:sp>
         <p:nvSpPr>
-          <p:cNvPr id="30" name="Shape 28"/>
+          <p:cNvPr id="33" name="Text 31"/>
+          <p:cNvSpPr/>
+          <p:nvPr/>
+        </p:nvSpPr>
+        <p:spPr>
+          <a:xfrm>
+            <a:off x="6016752" y="3364992"/>
+            <a:ext cx="411480" cy="475488"/>
+          </a:xfrm>
+          <a:prstGeom prst="rect">
+            <a:avLst/>
+          </a:prstGeom>
+          <a:noFill/>
+          <a:ln/>
+        </p:spPr>
+        <p:txBody>
+          <a:bodyPr wrap="square" lIns="0" tIns="0" rIns="0" bIns="0" rtlCol="0" anchor="ctr"/>
+          <a:lstStyle/>
+          <a:p>
+            <a:pPr algn="ctr" indent="0" marL="0">
+              <a:buNone/>
+            </a:pPr>
+            <a:r>
+              <a:rPr lang="en-US" sz="1600" b="1" dirty="0">
+                <a:solidFill>
+                  <a:srgbClr val="0D9488"/>
+                </a:solidFill>
+                <a:latin typeface="Trebuchet MS" pitchFamily="34" charset="0"/>
+                <a:ea typeface="Trebuchet MS" pitchFamily="34" charset="-122"/>
+                <a:cs typeface="Trebuchet MS" pitchFamily="34" charset="-120"/>
+              </a:rPr>
+              <a:t>·</a:t>
+            </a:r>
+            <a:endParaRPr lang="en-US" sz="1600" dirty="0"/>
+          </a:p>
+        </p:txBody>
+      </p:sp>
+      <p:sp>
+        <p:nvSpPr>
+          <p:cNvPr id="34" name="Shape 32"/>
+          <p:cNvSpPr/>
+          <p:nvPr/>
+        </p:nvSpPr>
+        <p:spPr>
+          <a:xfrm>
+            <a:off x="6428232" y="3364992"/>
+            <a:ext cx="1645920" cy="475488"/>
+          </a:xfrm>
+          <a:prstGeom prst="rect">
+            <a:avLst>
+              <a:gd name="adj" fmla="val 9615"/>
+            </a:avLst>
+          </a:prstGeom>
+          <a:solidFill>
+            <a:srgbClr val="FFFFFF"/>
+          </a:solidFill>
+          <a:ln w="12700">
+            <a:solidFill>
+              <a:srgbClr val="0D9488"/>
+            </a:solidFill>
+            <a:prstDash val="solid"/>
+          </a:ln>
+        </p:spPr>
+      </p:sp>
+      <p:sp>
+        <p:nvSpPr>
+          <p:cNvPr id="35" name="Text 33"/>
+          <p:cNvSpPr/>
+          <p:nvPr/>
+        </p:nvSpPr>
+        <p:spPr>
+          <a:xfrm>
+            <a:off x="6428232" y="3364992"/>
+            <a:ext cx="1645920" cy="475488"/>
+          </a:xfrm>
+          <a:prstGeom prst="rect">
+            <a:avLst/>
+          </a:prstGeom>
+          <a:noFill/>
+          <a:ln/>
+        </p:spPr>
+        <p:txBody>
+          <a:bodyPr wrap="square" lIns="0" tIns="0" rIns="0" bIns="0" rtlCol="0" anchor="ctr"/>
+          <a:lstStyle/>
+          <a:p>
+            <a:pPr algn="ctr" indent="0" marL="0">
+              <a:buNone/>
+            </a:pPr>
+            <a:r>
+              <a:rPr lang="en-US" sz="1400" b="1" dirty="0">
+                <a:solidFill>
+                  <a:srgbClr val="0D9488"/>
+                </a:solidFill>
+                <a:latin typeface="Trebuchet MS" pitchFamily="34" charset="0"/>
+                <a:ea typeface="Trebuchet MS" pitchFamily="34" charset="-122"/>
+                <a:cs typeface="Trebuchet MS" pitchFamily="34" charset="-120"/>
+              </a:rPr>
+              <a:t>ed</a:t>
+            </a:r>
+            <a:endParaRPr lang="en-US" sz="1400" dirty="0"/>
+          </a:p>
+        </p:txBody>
+      </p:sp>
+      <p:sp>
+        <p:nvSpPr>
+          <p:cNvPr id="36" name="Shape 34"/>
           <p:cNvSpPr/>
           <p:nvPr/>
         </p:nvSpPr>
@@ -13593,7 +13988,7 @@
       </p:sp>
       <p:sp>
         <p:nvSpPr>
-          <p:cNvPr id="31" name="Text 29"/>
+          <p:cNvPr id="37" name="Text 35"/>
           <p:cNvSpPr/>
           <p:nvPr/>
         </p:nvSpPr>
@@ -13632,7 +14027,7 @@
       </p:sp>
       <p:sp>
         <p:nvSpPr>
-          <p:cNvPr id="32" name="Shape 30"/>
+          <p:cNvPr id="38" name="Shape 36"/>
           <p:cNvSpPr/>
           <p:nvPr/>
         </p:nvSpPr>
@@ -13659,7 +14054,7 @@
       </p:sp>
       <p:sp>
         <p:nvSpPr>
-          <p:cNvPr id="33" name="Text 31"/>
+          <p:cNvPr id="39" name="Text 37"/>
           <p:cNvSpPr/>
           <p:nvPr/>
         </p:nvSpPr>
@@ -13891,7 +14286,7 @@
                 <a:ea typeface="Calibri" pitchFamily="34" charset="-122"/>
                 <a:cs typeface="Calibri" pitchFamily="34" charset="-120"/>
               </a:rPr>
-              <a:t>Root 'heat' — warmth, high temperature</a:t>
+              <a:t>Root 'heat' — warmth or high temperature</a:t>
             </a:r>
             <a:endParaRPr lang="en-US" sz="1600" dirty="0"/>
           </a:p>
@@ -14247,7 +14642,7 @@
                 <a:ea typeface="Calibri" pitchFamily="34" charset="-122"/>
                 <a:cs typeface="Calibri" pitchFamily="34" charset="-120"/>
               </a:rPr>
-              <a:t>Word Labs  •  wordlabs.app  •  Root: 'heat' = warmth, high temperature</a:t>
+              <a:t>Word Labs  •  wordlabs.app  •  Root: 'heat' = warmth or high temperature</a:t>
             </a:r>
             <a:endParaRPr lang="en-US" sz="800" dirty="0"/>
           </a:p>
@@ -14386,7 +14781,7 @@
                 <a:ea typeface="Trebuchet MS" pitchFamily="34" charset="-122"/>
                 <a:cs typeface="Trebuchet MS" pitchFamily="34" charset="-120"/>
               </a:rPr>
-              <a:t>heater</a:t>
+              <a:t>reheated</a:t>
             </a:r>
             <a:endParaRPr lang="en-US" sz="2800" dirty="0"/>
           </a:p>
@@ -14466,7 +14861,7 @@
         </p:nvSpPr>
         <p:spPr>
           <a:xfrm>
-            <a:off x="2938272" y="2258568"/>
+            <a:off x="2221992" y="2258568"/>
             <a:ext cx="1828800" cy="292608"/>
           </a:xfrm>
           <a:prstGeom prst="rect">
@@ -14475,11 +14870,11 @@
             </a:avLst>
           </a:prstGeom>
           <a:solidFill>
-            <a:srgbClr val="CCFBF1"/>
+            <a:srgbClr val="DDD6FE"/>
           </a:solidFill>
           <a:ln w="19050">
             <a:solidFill>
-              <a:srgbClr val="0D9488"/>
+              <a:srgbClr val="7C3AED"/>
             </a:solidFill>
             <a:prstDash val="solid"/>
           </a:ln>
@@ -14500,7 +14895,7 @@
         </p:nvSpPr>
         <p:spPr>
           <a:xfrm>
-            <a:off x="2938272" y="2258568"/>
+            <a:off x="2221992" y="2258568"/>
             <a:ext cx="1828800" cy="292608"/>
           </a:xfrm>
           <a:prstGeom prst="rect">
@@ -14519,13 +14914,13 @@
             <a:r>
               <a:rPr lang="en-US" sz="1300" b="1" dirty="0">
                 <a:solidFill>
-                  <a:srgbClr val="0F766E"/>
+                  <a:srgbClr val="4C1D95"/>
                 </a:solidFill>
                 <a:latin typeface="Trebuchet MS" pitchFamily="34" charset="0"/>
                 <a:ea typeface="Trebuchet MS" pitchFamily="34" charset="-122"/>
                 <a:cs typeface="Trebuchet MS" pitchFamily="34" charset="-120"/>
               </a:rPr>
-              <a:t>heat</a:t>
+              <a:t>re</a:t>
             </a:r>
             <a:endParaRPr lang="en-US" sz="1300" dirty="0"/>
           </a:p>
@@ -14539,7 +14934,7 @@
         </p:nvSpPr>
         <p:spPr>
           <a:xfrm>
-            <a:off x="2938272" y="2569464"/>
+            <a:off x="2221992" y="2569464"/>
             <a:ext cx="1828800" cy="201168"/>
           </a:xfrm>
           <a:prstGeom prst="rect">
@@ -14564,7 +14959,7 @@
                 <a:ea typeface="Calibri" pitchFamily="34" charset="-122"/>
                 <a:cs typeface="Calibri" pitchFamily="34" charset="-120"/>
               </a:rPr>
-              <a:t>warmth, high temperature</a:t>
+              <a:t>again</a:t>
             </a:r>
             <a:endParaRPr lang="en-US" sz="850" dirty="0"/>
           </a:p>
@@ -14578,7 +14973,7 @@
         </p:nvSpPr>
         <p:spPr>
           <a:xfrm>
-            <a:off x="5803392" y="2258568"/>
+            <a:off x="4370832" y="2258568"/>
             <a:ext cx="1828800" cy="292608"/>
           </a:xfrm>
           <a:prstGeom prst="rect">
@@ -14587,11 +14982,11 @@
             </a:avLst>
           </a:prstGeom>
           <a:solidFill>
-            <a:srgbClr val="FCE7F3"/>
+            <a:srgbClr val="CCFBF1"/>
           </a:solidFill>
           <a:ln w="19050">
             <a:solidFill>
-              <a:srgbClr val="DB2777"/>
+              <a:srgbClr val="0D9488"/>
             </a:solidFill>
             <a:prstDash val="solid"/>
           </a:ln>
@@ -14612,7 +15007,7 @@
         </p:nvSpPr>
         <p:spPr>
           <a:xfrm>
-            <a:off x="5803392" y="2258568"/>
+            <a:off x="4370832" y="2258568"/>
             <a:ext cx="1828800" cy="292608"/>
           </a:xfrm>
           <a:prstGeom prst="rect">
@@ -14631,13 +15026,13 @@
             <a:r>
               <a:rPr lang="en-US" sz="1300" b="1" dirty="0">
                 <a:solidFill>
-                  <a:srgbClr val="9D174D"/>
+                  <a:srgbClr val="0F766E"/>
                 </a:solidFill>
                 <a:latin typeface="Trebuchet MS" pitchFamily="34" charset="0"/>
                 <a:ea typeface="Trebuchet MS" pitchFamily="34" charset="-122"/>
                 <a:cs typeface="Trebuchet MS" pitchFamily="34" charset="-120"/>
               </a:rPr>
-              <a:t>er</a:t>
+              <a:t>heat</a:t>
             </a:r>
             <a:endParaRPr lang="en-US" sz="1300" dirty="0"/>
           </a:p>
@@ -14651,7 +15046,7 @@
         </p:nvSpPr>
         <p:spPr>
           <a:xfrm>
-            <a:off x="5803392" y="2569464"/>
+            <a:off x="4370832" y="2569464"/>
             <a:ext cx="1828800" cy="201168"/>
           </a:xfrm>
           <a:prstGeom prst="rect">
@@ -14676,7 +15071,7 @@
                 <a:ea typeface="Calibri" pitchFamily="34" charset="-122"/>
                 <a:cs typeface="Calibri" pitchFamily="34" charset="-120"/>
               </a:rPr>
-              <a:t>a person or thing that does something</a:t>
+              <a:t>warmth or high temperature</a:t>
             </a:r>
             <a:endParaRPr lang="en-US" sz="850" dirty="0"/>
           </a:p>
@@ -14685,6 +15080,118 @@
       <p:sp>
         <p:nvSpPr>
           <p:cNvPr id="22" name="Shape 20"/>
+          <p:cNvSpPr/>
+          <p:nvPr/>
+        </p:nvSpPr>
+        <p:spPr>
+          <a:xfrm>
+            <a:off x="6519672" y="2258568"/>
+            <a:ext cx="1828800" cy="292608"/>
+          </a:xfrm>
+          <a:prstGeom prst="rect">
+            <a:avLst>
+              <a:gd name="adj" fmla="val 25000"/>
+            </a:avLst>
+          </a:prstGeom>
+          <a:solidFill>
+            <a:srgbClr val="FCE7F3"/>
+          </a:solidFill>
+          <a:ln w="19050">
+            <a:solidFill>
+              <a:srgbClr val="DB2777"/>
+            </a:solidFill>
+            <a:prstDash val="solid"/>
+          </a:ln>
+          <a:effectLst>
+            <a:outerShdw sx="100000" sy="100000" kx="0" ky="0" algn="bl" rotWithShape="0" blurRad="101600" dist="38100" dir="8100000">
+              <a:srgbClr val="000000">
+                <a:alpha val="12000"/>
+              </a:srgbClr>
+            </a:outerShdw>
+          </a:effectLst>
+        </p:spPr>
+      </p:sp>
+      <p:sp>
+        <p:nvSpPr>
+          <p:cNvPr id="23" name="Text 21"/>
+          <p:cNvSpPr/>
+          <p:nvPr/>
+        </p:nvSpPr>
+        <p:spPr>
+          <a:xfrm>
+            <a:off x="6519672" y="2258568"/>
+            <a:ext cx="1828800" cy="292608"/>
+          </a:xfrm>
+          <a:prstGeom prst="rect">
+            <a:avLst/>
+          </a:prstGeom>
+          <a:noFill/>
+          <a:ln/>
+        </p:spPr>
+        <p:txBody>
+          <a:bodyPr wrap="square" lIns="0" tIns="0" rIns="0" bIns="0" rtlCol="0" anchor="ctr"/>
+          <a:lstStyle/>
+          <a:p>
+            <a:pPr algn="ctr" indent="0" marL="0">
+              <a:buNone/>
+            </a:pPr>
+            <a:r>
+              <a:rPr lang="en-US" sz="1300" b="1" dirty="0">
+                <a:solidFill>
+                  <a:srgbClr val="9D174D"/>
+                </a:solidFill>
+                <a:latin typeface="Trebuchet MS" pitchFamily="34" charset="0"/>
+                <a:ea typeface="Trebuchet MS" pitchFamily="34" charset="-122"/>
+                <a:cs typeface="Trebuchet MS" pitchFamily="34" charset="-120"/>
+              </a:rPr>
+              <a:t>ed</a:t>
+            </a:r>
+            <a:endParaRPr lang="en-US" sz="1300" dirty="0"/>
+          </a:p>
+        </p:txBody>
+      </p:sp>
+      <p:sp>
+        <p:nvSpPr>
+          <p:cNvPr id="24" name="Text 22"/>
+          <p:cNvSpPr/>
+          <p:nvPr/>
+        </p:nvSpPr>
+        <p:spPr>
+          <a:xfrm>
+            <a:off x="6519672" y="2569464"/>
+            <a:ext cx="1828800" cy="201168"/>
+          </a:xfrm>
+          <a:prstGeom prst="rect">
+            <a:avLst/>
+          </a:prstGeom>
+          <a:noFill/>
+          <a:ln/>
+        </p:spPr>
+        <p:txBody>
+          <a:bodyPr wrap="square" lIns="0" tIns="0" rIns="0" bIns="0" rtlCol="0" anchor="t"/>
+          <a:lstStyle/>
+          <a:p>
+            <a:pPr algn="ctr" indent="0" marL="0">
+              <a:buNone/>
+            </a:pPr>
+            <a:r>
+              <a:rPr lang="en-US" sz="850" dirty="0">
+                <a:solidFill>
+                  <a:srgbClr val="475569"/>
+                </a:solidFill>
+                <a:latin typeface="Calibri" pitchFamily="34" charset="0"/>
+                <a:ea typeface="Calibri" pitchFamily="34" charset="-122"/>
+                <a:cs typeface="Calibri" pitchFamily="34" charset="-120"/>
+              </a:rPr>
+              <a:t>past tense</a:t>
+            </a:r>
+            <a:endParaRPr lang="en-US" sz="850" dirty="0"/>
+          </a:p>
+        </p:txBody>
+      </p:sp>
+      <p:sp>
+        <p:nvSpPr>
+          <p:cNvPr id="25" name="Shape 23"/>
           <p:cNvSpPr/>
           <p:nvPr/>
         </p:nvSpPr>
@@ -14711,7 +15218,7 @@
       </p:sp>
       <p:sp>
         <p:nvSpPr>
-          <p:cNvPr id="23" name="Text 21"/>
+          <p:cNvPr id="26" name="Text 24"/>
           <p:cNvSpPr/>
           <p:nvPr/>
         </p:nvSpPr>
@@ -14750,7 +15257,7 @@
       </p:sp>
       <p:sp>
         <p:nvSpPr>
-          <p:cNvPr id="24" name="Shape 22"/>
+          <p:cNvPr id="27" name="Shape 25"/>
           <p:cNvSpPr/>
           <p:nvPr/>
         </p:nvSpPr>
@@ -14777,13 +15284,13 @@
       </p:sp>
       <p:sp>
         <p:nvSpPr>
-          <p:cNvPr id="25" name="Shape 23"/>
-          <p:cNvSpPr/>
-          <p:nvPr/>
-        </p:nvSpPr>
-        <p:spPr>
-          <a:xfrm>
-            <a:off x="2999232" y="3364992"/>
+          <p:cNvPr id="28" name="Shape 26"/>
+          <p:cNvSpPr/>
+          <p:nvPr/>
+        </p:nvSpPr>
+        <p:spPr>
+          <a:xfrm>
+            <a:off x="2313432" y="3364992"/>
             <a:ext cx="1645920" cy="475488"/>
           </a:xfrm>
           <a:prstGeom prst="rect">
@@ -14804,13 +15311,13 @@
       </p:sp>
       <p:sp>
         <p:nvSpPr>
-          <p:cNvPr id="26" name="Text 24"/>
-          <p:cNvSpPr/>
-          <p:nvPr/>
-        </p:nvSpPr>
-        <p:spPr>
-          <a:xfrm>
-            <a:off x="2999232" y="3364992"/>
+          <p:cNvPr id="29" name="Text 27"/>
+          <p:cNvSpPr/>
+          <p:nvPr/>
+        </p:nvSpPr>
+        <p:spPr>
+          <a:xfrm>
+            <a:off x="2313432" y="3364992"/>
             <a:ext cx="1645920" cy="475488"/>
           </a:xfrm>
           <a:prstGeom prst="rect">
@@ -14835,7 +15342,7 @@
                 <a:ea typeface="Trebuchet MS" pitchFamily="34" charset="-122"/>
                 <a:cs typeface="Trebuchet MS" pitchFamily="34" charset="-120"/>
               </a:rPr>
-              <a:t>heat</a:t>
+              <a:t>re</a:t>
             </a:r>
             <a:endParaRPr lang="en-US" sz="1400" dirty="0"/>
           </a:p>
@@ -14843,14 +15350,14 @@
       </p:sp>
       <p:sp>
         <p:nvSpPr>
-          <p:cNvPr id="27" name="Text 25"/>
-          <p:cNvSpPr/>
-          <p:nvPr/>
-        </p:nvSpPr>
-        <p:spPr>
-          <a:xfrm>
-            <a:off x="4645152" y="3364992"/>
-            <a:ext cx="1097280" cy="475488"/>
+          <p:cNvPr id="30" name="Text 28"/>
+          <p:cNvSpPr/>
+          <p:nvPr/>
+        </p:nvSpPr>
+        <p:spPr>
+          <a:xfrm>
+            <a:off x="3959352" y="3364992"/>
+            <a:ext cx="411480" cy="475488"/>
           </a:xfrm>
           <a:prstGeom prst="rect">
             <a:avLst/>
@@ -14882,13 +15389,13 @@
       </p:sp>
       <p:sp>
         <p:nvSpPr>
-          <p:cNvPr id="28" name="Shape 26"/>
-          <p:cNvSpPr/>
-          <p:nvPr/>
-        </p:nvSpPr>
-        <p:spPr>
-          <a:xfrm>
-            <a:off x="5742432" y="3364992"/>
+          <p:cNvPr id="31" name="Shape 29"/>
+          <p:cNvSpPr/>
+          <p:nvPr/>
+        </p:nvSpPr>
+        <p:spPr>
+          <a:xfrm>
+            <a:off x="4370832" y="3364992"/>
             <a:ext cx="1645920" cy="475488"/>
           </a:xfrm>
           <a:prstGeom prst="rect">
@@ -14909,13 +15416,13 @@
       </p:sp>
       <p:sp>
         <p:nvSpPr>
-          <p:cNvPr id="29" name="Text 27"/>
-          <p:cNvSpPr/>
-          <p:nvPr/>
-        </p:nvSpPr>
-        <p:spPr>
-          <a:xfrm>
-            <a:off x="5742432" y="3364992"/>
+          <p:cNvPr id="32" name="Text 30"/>
+          <p:cNvSpPr/>
+          <p:nvPr/>
+        </p:nvSpPr>
+        <p:spPr>
+          <a:xfrm>
+            <a:off x="4370832" y="3364992"/>
             <a:ext cx="1645920" cy="475488"/>
           </a:xfrm>
           <a:prstGeom prst="rect">
@@ -14940,7 +15447,7 @@
                 <a:ea typeface="Trebuchet MS" pitchFamily="34" charset="-122"/>
                 <a:cs typeface="Trebuchet MS" pitchFamily="34" charset="-120"/>
               </a:rPr>
-              <a:t>er</a:t>
+              <a:t>heat</a:t>
             </a:r>
             <a:endParaRPr lang="en-US" sz="1400" dirty="0"/>
           </a:p>
@@ -14948,7 +15455,112 @@
       </p:sp>
       <p:sp>
         <p:nvSpPr>
-          <p:cNvPr id="30" name="Shape 28"/>
+          <p:cNvPr id="33" name="Text 31"/>
+          <p:cNvSpPr/>
+          <p:nvPr/>
+        </p:nvSpPr>
+        <p:spPr>
+          <a:xfrm>
+            <a:off x="6016752" y="3364992"/>
+            <a:ext cx="411480" cy="475488"/>
+          </a:xfrm>
+          <a:prstGeom prst="rect">
+            <a:avLst/>
+          </a:prstGeom>
+          <a:noFill/>
+          <a:ln/>
+        </p:spPr>
+        <p:txBody>
+          <a:bodyPr wrap="square" lIns="0" tIns="0" rIns="0" bIns="0" rtlCol="0" anchor="ctr"/>
+          <a:lstStyle/>
+          <a:p>
+            <a:pPr algn="ctr" indent="0" marL="0">
+              <a:buNone/>
+            </a:pPr>
+            <a:r>
+              <a:rPr lang="en-US" sz="1600" b="1" dirty="0">
+                <a:solidFill>
+                  <a:srgbClr val="0D9488"/>
+                </a:solidFill>
+                <a:latin typeface="Trebuchet MS" pitchFamily="34" charset="0"/>
+                <a:ea typeface="Trebuchet MS" pitchFamily="34" charset="-122"/>
+                <a:cs typeface="Trebuchet MS" pitchFamily="34" charset="-120"/>
+              </a:rPr>
+              <a:t>·</a:t>
+            </a:r>
+            <a:endParaRPr lang="en-US" sz="1600" dirty="0"/>
+          </a:p>
+        </p:txBody>
+      </p:sp>
+      <p:sp>
+        <p:nvSpPr>
+          <p:cNvPr id="34" name="Shape 32"/>
+          <p:cNvSpPr/>
+          <p:nvPr/>
+        </p:nvSpPr>
+        <p:spPr>
+          <a:xfrm>
+            <a:off x="6428232" y="3364992"/>
+            <a:ext cx="1645920" cy="475488"/>
+          </a:xfrm>
+          <a:prstGeom prst="rect">
+            <a:avLst>
+              <a:gd name="adj" fmla="val 9615"/>
+            </a:avLst>
+          </a:prstGeom>
+          <a:solidFill>
+            <a:srgbClr val="FFFFFF"/>
+          </a:solidFill>
+          <a:ln w="12700">
+            <a:solidFill>
+              <a:srgbClr val="0D9488"/>
+            </a:solidFill>
+            <a:prstDash val="solid"/>
+          </a:ln>
+        </p:spPr>
+      </p:sp>
+      <p:sp>
+        <p:nvSpPr>
+          <p:cNvPr id="35" name="Text 33"/>
+          <p:cNvSpPr/>
+          <p:nvPr/>
+        </p:nvSpPr>
+        <p:spPr>
+          <a:xfrm>
+            <a:off x="6428232" y="3364992"/>
+            <a:ext cx="1645920" cy="475488"/>
+          </a:xfrm>
+          <a:prstGeom prst="rect">
+            <a:avLst/>
+          </a:prstGeom>
+          <a:noFill/>
+          <a:ln/>
+        </p:spPr>
+        <p:txBody>
+          <a:bodyPr wrap="square" lIns="0" tIns="0" rIns="0" bIns="0" rtlCol="0" anchor="ctr"/>
+          <a:lstStyle/>
+          <a:p>
+            <a:pPr algn="ctr" indent="0" marL="0">
+              <a:buNone/>
+            </a:pPr>
+            <a:r>
+              <a:rPr lang="en-US" sz="1400" b="1" dirty="0">
+                <a:solidFill>
+                  <a:srgbClr val="0D9488"/>
+                </a:solidFill>
+                <a:latin typeface="Trebuchet MS" pitchFamily="34" charset="0"/>
+                <a:ea typeface="Trebuchet MS" pitchFamily="34" charset="-122"/>
+                <a:cs typeface="Trebuchet MS" pitchFamily="34" charset="-120"/>
+              </a:rPr>
+              <a:t>ed</a:t>
+            </a:r>
+            <a:endParaRPr lang="en-US" sz="1400" dirty="0"/>
+          </a:p>
+        </p:txBody>
+      </p:sp>
+      <p:sp>
+        <p:nvSpPr>
+          <p:cNvPr id="36" name="Shape 34"/>
           <p:cNvSpPr/>
           <p:nvPr/>
         </p:nvSpPr>
@@ -14975,7 +15587,7 @@
       </p:sp>
       <p:sp>
         <p:nvSpPr>
-          <p:cNvPr id="31" name="Text 29"/>
+          <p:cNvPr id="37" name="Text 35"/>
           <p:cNvSpPr/>
           <p:nvPr/>
         </p:nvSpPr>
@@ -15014,7 +15626,7 @@
       </p:sp>
       <p:sp>
         <p:nvSpPr>
-          <p:cNvPr id="32" name="Shape 30"/>
+          <p:cNvPr id="38" name="Shape 36"/>
           <p:cNvSpPr/>
           <p:nvPr/>
         </p:nvSpPr>
@@ -15041,13 +15653,13 @@
       </p:sp>
       <p:sp>
         <p:nvSpPr>
-          <p:cNvPr id="33" name="Shape 31"/>
-          <p:cNvSpPr/>
-          <p:nvPr/>
-        </p:nvSpPr>
-        <p:spPr>
-          <a:xfrm>
-            <a:off x="2670048" y="4169664"/>
+          <p:cNvPr id="39" name="Shape 37"/>
+          <p:cNvSpPr/>
+          <p:nvPr/>
+        </p:nvSpPr>
+        <p:spPr>
+          <a:xfrm>
+            <a:off x="2254649" y="4169664"/>
             <a:ext cx="685800" cy="475488"/>
           </a:xfrm>
           <a:prstGeom prst="rect">
@@ -15068,13 +15680,13 @@
       </p:sp>
       <p:sp>
         <p:nvSpPr>
-          <p:cNvPr id="34" name="Text 32"/>
-          <p:cNvSpPr/>
-          <p:nvPr/>
-        </p:nvSpPr>
-        <p:spPr>
-          <a:xfrm>
-            <a:off x="2670048" y="4169664"/>
+          <p:cNvPr id="40" name="Text 38"/>
+          <p:cNvSpPr/>
+          <p:nvPr/>
+        </p:nvSpPr>
+        <p:spPr>
+          <a:xfrm>
+            <a:off x="2254649" y="4169664"/>
             <a:ext cx="685800" cy="475488"/>
           </a:xfrm>
           <a:prstGeom prst="rect">
@@ -15099,7 +15711,7 @@
                 <a:ea typeface="Trebuchet MS" pitchFamily="34" charset="-122"/>
                 <a:cs typeface="Trebuchet MS" pitchFamily="34" charset="-120"/>
               </a:rPr>
-              <a:t>h</a:t>
+              <a:t>r</a:t>
             </a:r>
             <a:endParaRPr lang="en-US" sz="900" dirty="0"/>
           </a:p>
@@ -15107,13 +15719,13 @@
       </p:sp>
       <p:sp>
         <p:nvSpPr>
-          <p:cNvPr id="35" name="Shape 33"/>
-          <p:cNvSpPr/>
-          <p:nvPr/>
-        </p:nvSpPr>
-        <p:spPr>
-          <a:xfrm>
-            <a:off x="4123944" y="4169664"/>
+          <p:cNvPr id="41" name="Shape 39"/>
+          <p:cNvSpPr/>
+          <p:nvPr/>
+        </p:nvSpPr>
+        <p:spPr>
+          <a:xfrm>
+            <a:off x="3293146" y="4169664"/>
             <a:ext cx="685800" cy="475488"/>
           </a:xfrm>
           <a:prstGeom prst="rect">
@@ -15134,13 +15746,13 @@
       </p:sp>
       <p:sp>
         <p:nvSpPr>
-          <p:cNvPr id="36" name="Text 34"/>
-          <p:cNvSpPr/>
-          <p:nvPr/>
-        </p:nvSpPr>
-        <p:spPr>
-          <a:xfrm>
-            <a:off x="4123944" y="4169664"/>
+          <p:cNvPr id="42" name="Text 40"/>
+          <p:cNvSpPr/>
+          <p:nvPr/>
+        </p:nvSpPr>
+        <p:spPr>
+          <a:xfrm>
+            <a:off x="3293146" y="4169664"/>
             <a:ext cx="685800" cy="475488"/>
           </a:xfrm>
           <a:prstGeom prst="rect">
@@ -15165,7 +15777,7 @@
                 <a:ea typeface="Trebuchet MS" pitchFamily="34" charset="-122"/>
                 <a:cs typeface="Trebuchet MS" pitchFamily="34" charset="-120"/>
               </a:rPr>
-              <a:t>ea</a:t>
+              <a:t>e</a:t>
             </a:r>
             <a:endParaRPr lang="en-US" sz="900" dirty="0"/>
           </a:p>
@@ -15173,13 +15785,13 @@
       </p:sp>
       <p:sp>
         <p:nvSpPr>
-          <p:cNvPr id="37" name="Shape 35"/>
-          <p:cNvSpPr/>
-          <p:nvPr/>
-        </p:nvSpPr>
-        <p:spPr>
-          <a:xfrm>
-            <a:off x="5577840" y="4169664"/>
+          <p:cNvPr id="43" name="Shape 41"/>
+          <p:cNvSpPr/>
+          <p:nvPr/>
+        </p:nvSpPr>
+        <p:spPr>
+          <a:xfrm>
+            <a:off x="4331643" y="4169664"/>
             <a:ext cx="685800" cy="475488"/>
           </a:xfrm>
           <a:prstGeom prst="rect">
@@ -15200,13 +15812,13 @@
       </p:sp>
       <p:sp>
         <p:nvSpPr>
-          <p:cNvPr id="38" name="Text 36"/>
-          <p:cNvSpPr/>
-          <p:nvPr/>
-        </p:nvSpPr>
-        <p:spPr>
-          <a:xfrm>
-            <a:off x="5577840" y="4169664"/>
+          <p:cNvPr id="44" name="Text 42"/>
+          <p:cNvSpPr/>
+          <p:nvPr/>
+        </p:nvSpPr>
+        <p:spPr>
+          <a:xfrm>
+            <a:off x="4331643" y="4169664"/>
             <a:ext cx="685800" cy="475488"/>
           </a:xfrm>
           <a:prstGeom prst="rect">
@@ -15231,7 +15843,7 @@
                 <a:ea typeface="Trebuchet MS" pitchFamily="34" charset="-122"/>
                 <a:cs typeface="Trebuchet MS" pitchFamily="34" charset="-120"/>
               </a:rPr>
-              <a:t>t</a:t>
+              <a:t>h</a:t>
             </a:r>
             <a:endParaRPr lang="en-US" sz="900" dirty="0"/>
           </a:p>
@@ -15239,13 +15851,13 @@
       </p:sp>
       <p:sp>
         <p:nvSpPr>
-          <p:cNvPr id="39" name="Shape 37"/>
-          <p:cNvSpPr/>
-          <p:nvPr/>
-        </p:nvSpPr>
-        <p:spPr>
-          <a:xfrm>
-            <a:off x="7031736" y="4169664"/>
+          <p:cNvPr id="45" name="Shape 43"/>
+          <p:cNvSpPr/>
+          <p:nvPr/>
+        </p:nvSpPr>
+        <p:spPr>
+          <a:xfrm>
+            <a:off x="5370141" y="4169664"/>
             <a:ext cx="685800" cy="475488"/>
           </a:xfrm>
           <a:prstGeom prst="rect">
@@ -15266,13 +15878,13 @@
       </p:sp>
       <p:sp>
         <p:nvSpPr>
-          <p:cNvPr id="40" name="Text 38"/>
-          <p:cNvSpPr/>
-          <p:nvPr/>
-        </p:nvSpPr>
-        <p:spPr>
-          <a:xfrm>
-            <a:off x="7031736" y="4169664"/>
+          <p:cNvPr id="46" name="Text 44"/>
+          <p:cNvSpPr/>
+          <p:nvPr/>
+        </p:nvSpPr>
+        <p:spPr>
+          <a:xfrm>
+            <a:off x="5370141" y="4169664"/>
             <a:ext cx="685800" cy="475488"/>
           </a:xfrm>
           <a:prstGeom prst="rect">
@@ -15297,7 +15909,139 @@
                 <a:ea typeface="Trebuchet MS" pitchFamily="34" charset="-122"/>
                 <a:cs typeface="Trebuchet MS" pitchFamily="34" charset="-120"/>
               </a:rPr>
-              <a:t>er</a:t>
+              <a:t>ea</a:t>
+            </a:r>
+            <a:endParaRPr lang="en-US" sz="900" dirty="0"/>
+          </a:p>
+        </p:txBody>
+      </p:sp>
+      <p:sp>
+        <p:nvSpPr>
+          <p:cNvPr id="47" name="Shape 45"/>
+          <p:cNvSpPr/>
+          <p:nvPr/>
+        </p:nvSpPr>
+        <p:spPr>
+          <a:xfrm>
+            <a:off x="6408638" y="4169664"/>
+            <a:ext cx="685800" cy="475488"/>
+          </a:xfrm>
+          <a:prstGeom prst="rect">
+            <a:avLst>
+              <a:gd name="adj" fmla="val 7692"/>
+            </a:avLst>
+          </a:prstGeom>
+          <a:solidFill>
+            <a:srgbClr val="FFFFFF"/>
+          </a:solidFill>
+          <a:ln w="12700">
+            <a:solidFill>
+              <a:srgbClr val="DB2777"/>
+            </a:solidFill>
+            <a:prstDash val="solid"/>
+          </a:ln>
+        </p:spPr>
+      </p:sp>
+      <p:sp>
+        <p:nvSpPr>
+          <p:cNvPr id="48" name="Text 46"/>
+          <p:cNvSpPr/>
+          <p:nvPr/>
+        </p:nvSpPr>
+        <p:spPr>
+          <a:xfrm>
+            <a:off x="6408638" y="4169664"/>
+            <a:ext cx="685800" cy="475488"/>
+          </a:xfrm>
+          <a:prstGeom prst="rect">
+            <a:avLst/>
+          </a:prstGeom>
+          <a:noFill/>
+          <a:ln/>
+        </p:spPr>
+        <p:txBody>
+          <a:bodyPr wrap="square" lIns="0" tIns="0" rIns="0" bIns="0" rtlCol="0" anchor="ctr"/>
+          <a:lstStyle/>
+          <a:p>
+            <a:pPr algn="ctr" indent="0" marL="0">
+              <a:buNone/>
+            </a:pPr>
+            <a:r>
+              <a:rPr lang="en-US" sz="900" b="1" dirty="0">
+                <a:solidFill>
+                  <a:srgbClr val="9D174D"/>
+                </a:solidFill>
+                <a:latin typeface="Trebuchet MS" pitchFamily="34" charset="0"/>
+                <a:ea typeface="Trebuchet MS" pitchFamily="34" charset="-122"/>
+                <a:cs typeface="Trebuchet MS" pitchFamily="34" charset="-120"/>
+              </a:rPr>
+              <a:t>t</a:t>
+            </a:r>
+            <a:endParaRPr lang="en-US" sz="900" dirty="0"/>
+          </a:p>
+        </p:txBody>
+      </p:sp>
+      <p:sp>
+        <p:nvSpPr>
+          <p:cNvPr id="49" name="Shape 47"/>
+          <p:cNvSpPr/>
+          <p:nvPr/>
+        </p:nvSpPr>
+        <p:spPr>
+          <a:xfrm>
+            <a:off x="7447135" y="4169664"/>
+            <a:ext cx="685800" cy="475488"/>
+          </a:xfrm>
+          <a:prstGeom prst="rect">
+            <a:avLst>
+              <a:gd name="adj" fmla="val 7692"/>
+            </a:avLst>
+          </a:prstGeom>
+          <a:solidFill>
+            <a:srgbClr val="FFFFFF"/>
+          </a:solidFill>
+          <a:ln w="12700">
+            <a:solidFill>
+              <a:srgbClr val="DB2777"/>
+            </a:solidFill>
+            <a:prstDash val="solid"/>
+          </a:ln>
+        </p:spPr>
+      </p:sp>
+      <p:sp>
+        <p:nvSpPr>
+          <p:cNvPr id="50" name="Text 48"/>
+          <p:cNvSpPr/>
+          <p:nvPr/>
+        </p:nvSpPr>
+        <p:spPr>
+          <a:xfrm>
+            <a:off x="7447135" y="4169664"/>
+            <a:ext cx="685800" cy="475488"/>
+          </a:xfrm>
+          <a:prstGeom prst="rect">
+            <a:avLst/>
+          </a:prstGeom>
+          <a:noFill/>
+          <a:ln/>
+        </p:spPr>
+        <p:txBody>
+          <a:bodyPr wrap="square" lIns="0" tIns="0" rIns="0" bIns="0" rtlCol="0" anchor="ctr"/>
+          <a:lstStyle/>
+          <a:p>
+            <a:pPr algn="ctr" indent="0" marL="0">
+              <a:buNone/>
+            </a:pPr>
+            <a:r>
+              <a:rPr lang="en-US" sz="900" b="1" dirty="0">
+                <a:solidFill>
+                  <a:srgbClr val="9D174D"/>
+                </a:solidFill>
+                <a:latin typeface="Trebuchet MS" pitchFamily="34" charset="0"/>
+                <a:ea typeface="Trebuchet MS" pitchFamily="34" charset="-122"/>
+                <a:cs typeface="Trebuchet MS" pitchFamily="34" charset="-120"/>
+              </a:rPr>
+              <a:t>ed</a:t>
             </a:r>
             <a:endParaRPr lang="en-US" sz="900" dirty="0"/>
           </a:p>
@@ -15871,7 +16615,7 @@
                 <a:ea typeface="Calibri" pitchFamily="34" charset="-122"/>
                 <a:cs typeface="Calibri" pitchFamily="34" charset="-120"/>
               </a:rPr>
-              <a:t>Word Labs  •  wordlabs.app  •  Root: 'heat' = warmth, high temperature</a:t>
+              <a:t>Word Labs  •  wordlabs.app  •  Root: 'heat' = warmth or high temperature</a:t>
             </a:r>
             <a:endParaRPr lang="en-US" sz="800" dirty="0"/>
           </a:p>
@@ -16511,7 +17255,7 @@
                 <a:ea typeface="Calibri" pitchFamily="34" charset="-122"/>
                 <a:cs typeface="Calibri" pitchFamily="34" charset="-120"/>
               </a:rPr>
-              <a:t>Word Labs  •  wordlabs.app  •  Root: 'heat' = warmth, high temperature</a:t>
+              <a:t>Word Labs  •  wordlabs.app  •  Root: 'heat' = warmth or high temperature</a:t>
             </a:r>
             <a:endParaRPr lang="en-US" sz="800" dirty="0"/>
           </a:p>
@@ -16654,7 +17398,7 @@
                 <a:ea typeface="Calibri" pitchFamily="34" charset="-122"/>
                 <a:cs typeface="Calibri" pitchFamily="34" charset="-120"/>
               </a:rPr>
-              <a:t>, we used a fan instead of </a:t>
+              <a:t>, the </a:t>
             </a:r>
             <a:pPr algn="l" indent="0" marL="0">
               <a:buNone/>
@@ -16671,7 +17415,7 @@
                 <a:ea typeface="Calibri" pitchFamily="34" charset="-122"/>
                 <a:cs typeface="Calibri" pitchFamily="34" charset="-120"/>
               </a:rPr>
-              <a:t>preheating</a:t>
+              <a:t>overheated</a:t>
             </a:r>
             <a:pPr algn="l" indent="0" marL="0">
               <a:buNone/>
@@ -16685,7 +17429,7 @@
                 <a:ea typeface="Calibri" pitchFamily="34" charset="-122"/>
                 <a:cs typeface="Calibri" pitchFamily="34" charset="-120"/>
               </a:rPr>
-              <a:t> the room, because the old </a:t>
+              <a:t> swimmer drank lots of water, because her coach was worried about </a:t>
             </a:r>
             <a:pPr algn="l" indent="0" marL="0">
               <a:buNone/>
@@ -16702,7 +17446,7 @@
                 <a:ea typeface="Calibri" pitchFamily="34" charset="-122"/>
                 <a:cs typeface="Calibri" pitchFamily="34" charset="-120"/>
               </a:rPr>
-              <a:t>heater</a:t>
+              <a:t>heatstroke</a:t>
             </a:r>
             <a:pPr algn="l" indent="0" marL="0">
               <a:buNone/>
@@ -16716,7 +17460,7 @@
                 <a:ea typeface="Calibri" pitchFamily="34" charset="-122"/>
                 <a:cs typeface="Calibri" pitchFamily="34" charset="-120"/>
               </a:rPr>
-              <a:t> was broken.</a:t>
+              <a:t>.</a:t>
             </a:r>
             <a:endParaRPr lang="en-US" sz="1800" dirty="0"/>
           </a:p>
@@ -16999,7 +17743,7 @@
                 <a:ea typeface="Trebuchet MS" pitchFamily="34" charset="-122"/>
                 <a:cs typeface="Trebuchet MS" pitchFamily="34" charset="-120"/>
               </a:rPr>
-              <a:t>preheating</a:t>
+              <a:t>overheated</a:t>
             </a:r>
             <a:endParaRPr lang="en-US" sz="1400" dirty="0"/>
           </a:p>
@@ -17127,7 +17871,7 @@
                 <a:ea typeface="Trebuchet MS" pitchFamily="34" charset="-122"/>
                 <a:cs typeface="Trebuchet MS" pitchFamily="34" charset="-120"/>
               </a:rPr>
-              <a:t>heater</a:t>
+              <a:t>heatstroke</a:t>
             </a:r>
             <a:endParaRPr lang="en-US" sz="1400" dirty="0"/>
           </a:p>
@@ -17458,7 +18202,7 @@
                 <a:ea typeface="Calibri" pitchFamily="34" charset="-122"/>
                 <a:cs typeface="Calibri" pitchFamily="34" charset="-120"/>
               </a:rPr>
-              <a:t>Word Labs  •  wordlabs.app  •  Root: 'heat' = warmth, high temperature</a:t>
+              <a:t>Word Labs  •  wordlabs.app  •  Root: 'heat' = warmth or high temperature</a:t>
             </a:r>
             <a:endParaRPr lang="en-US" sz="800" dirty="0"/>
           </a:p>
@@ -18285,7 +19029,7 @@
                 <a:ea typeface="Calibri" pitchFamily="34" charset="-122"/>
                 <a:cs typeface="Calibri" pitchFamily="34" charset="-120"/>
               </a:rPr>
-              <a:t>Word Labs  •  wordlabs.app  •  Root: 'heat' = warmth, high temperature</a:t>
+              <a:t>Word Labs  •  wordlabs.app  •  Root: 'heat' = warmth or high temperature</a:t>
             </a:r>
             <a:endParaRPr lang="en-US" sz="800" dirty="0"/>
           </a:p>
@@ -18602,7 +19346,7 @@
                 <a:ea typeface="Calibri" pitchFamily="34" charset="-122"/>
                 <a:cs typeface="Calibri" pitchFamily="34" charset="-120"/>
               </a:rPr>
-              <a:t>warmth, high temperature</a:t>
+              <a:t>warmth or high temperature</a:t>
             </a:r>
             <a:endParaRPr lang="en-US" sz="850" dirty="0"/>
           </a:p>
@@ -18714,7 +19458,7 @@
                 <a:ea typeface="Calibri" pitchFamily="34" charset="-122"/>
                 <a:cs typeface="Calibri" pitchFamily="34" charset="-120"/>
               </a:rPr>
-              <a:t>a surge or stretch of something</a:t>
+              <a:t>a moving swell or surge</a:t>
             </a:r>
             <a:endParaRPr lang="en-US" sz="850" dirty="0"/>
           </a:p>
@@ -19270,7 +20014,7 @@
                 <a:ea typeface="Calibri" pitchFamily="34" charset="-122"/>
                 <a:cs typeface="Calibri" pitchFamily="34" charset="-120"/>
               </a:rPr>
-              <a:t>Word Labs  •  wordlabs.app  •  Root: 'heat' = warmth, high temperature</a:t>
+              <a:t>Word Labs  •  wordlabs.app  •  Root: 'heat' = warmth or high temperature</a:t>
             </a:r>
             <a:endParaRPr lang="en-US" sz="800" dirty="0"/>
           </a:p>
@@ -19587,7 +20331,7 @@
                 <a:ea typeface="Calibri" pitchFamily="34" charset="-122"/>
                 <a:cs typeface="Calibri" pitchFamily="34" charset="-120"/>
               </a:rPr>
-              <a:t>warmth, high temperature</a:t>
+              <a:t>warmth or high temperature</a:t>
             </a:r>
             <a:endParaRPr lang="en-US" sz="850" dirty="0"/>
           </a:p>
@@ -19699,7 +20443,7 @@
                 <a:ea typeface="Calibri" pitchFamily="34" charset="-122"/>
                 <a:cs typeface="Calibri" pitchFamily="34" charset="-120"/>
               </a:rPr>
-              <a:t>a surge or stretch of something</a:t>
+              <a:t>a moving swell or surge</a:t>
             </a:r>
             <a:endParaRPr lang="en-US" sz="850" dirty="0"/>
           </a:p>
@@ -20387,7 +21131,7 @@
                 <a:ea typeface="Calibri" pitchFamily="34" charset="-122"/>
                 <a:cs typeface="Calibri" pitchFamily="34" charset="-120"/>
               </a:rPr>
-              <a:t>Word Labs  •  wordlabs.app  •  Root: 'heat' = warmth, high temperature</a:t>
+              <a:t>Word Labs  •  wordlabs.app  •  Root: 'heat' = warmth or high temperature</a:t>
             </a:r>
             <a:endParaRPr lang="en-US" sz="800" dirty="0"/>
           </a:p>
@@ -20704,7 +21448,7 @@
                 <a:ea typeface="Calibri" pitchFamily="34" charset="-122"/>
                 <a:cs typeface="Calibri" pitchFamily="34" charset="-120"/>
               </a:rPr>
-              <a:t>warmth, high temperature</a:t>
+              <a:t>warmth or high temperature</a:t>
             </a:r>
             <a:endParaRPr lang="en-US" sz="850" dirty="0"/>
           </a:p>
@@ -20816,7 +21560,7 @@
                 <a:ea typeface="Calibri" pitchFamily="34" charset="-122"/>
                 <a:cs typeface="Calibri" pitchFamily="34" charset="-120"/>
               </a:rPr>
-              <a:t>a surge or stretch of something</a:t>
+              <a:t>a moving swell or surge</a:t>
             </a:r>
             <a:endParaRPr lang="en-US" sz="850" dirty="0"/>
           </a:p>
@@ -21861,7 +22605,7 @@
                 <a:ea typeface="Calibri" pitchFamily="34" charset="-122"/>
                 <a:cs typeface="Calibri" pitchFamily="34" charset="-120"/>
               </a:rPr>
-              <a:t>Word Labs  •  wordlabs.app  •  Root: 'heat' = warmth, high temperature</a:t>
+              <a:t>Word Labs  •  wordlabs.app  •  Root: 'heat' = warmth or high temperature</a:t>
             </a:r>
             <a:endParaRPr lang="en-US" sz="800" dirty="0"/>
           </a:p>
@@ -22000,7 +22744,7 @@
                 <a:ea typeface="Trebuchet MS" pitchFamily="34" charset="-122"/>
                 <a:cs typeface="Trebuchet MS" pitchFamily="34" charset="-120"/>
               </a:rPr>
-              <a:t>preheating</a:t>
+              <a:t>overheated</a:t>
             </a:r>
             <a:endParaRPr lang="en-US" sz="2800" dirty="0"/>
           </a:p>
@@ -22688,7 +23432,7 @@
                 <a:ea typeface="Calibri" pitchFamily="34" charset="-122"/>
                 <a:cs typeface="Calibri" pitchFamily="34" charset="-120"/>
               </a:rPr>
-              <a:t>Word Labs  •  wordlabs.app  •  Root: 'heat' = warmth, high temperature</a:t>
+              <a:t>Word Labs  •  wordlabs.app  •  Root: 'heat' = warmth or high temperature</a:t>
             </a:r>
             <a:endParaRPr lang="en-US" sz="800" dirty="0"/>
           </a:p>
@@ -22827,7 +23571,7 @@
                 <a:ea typeface="Trebuchet MS" pitchFamily="34" charset="-122"/>
                 <a:cs typeface="Trebuchet MS" pitchFamily="34" charset="-120"/>
               </a:rPr>
-              <a:t>preheating</a:t>
+              <a:t>overheated</a:t>
             </a:r>
             <a:endParaRPr lang="en-US" sz="2800" dirty="0"/>
           </a:p>
@@ -22966,7 +23710,7 @@
                 <a:ea typeface="Trebuchet MS" pitchFamily="34" charset="-122"/>
                 <a:cs typeface="Trebuchet MS" pitchFamily="34" charset="-120"/>
               </a:rPr>
-              <a:t>pre</a:t>
+              <a:t>over</a:t>
             </a:r>
             <a:endParaRPr lang="en-US" sz="1300" dirty="0"/>
           </a:p>
@@ -23005,7 +23749,7 @@
                 <a:ea typeface="Calibri" pitchFamily="34" charset="-122"/>
                 <a:cs typeface="Calibri" pitchFamily="34" charset="-120"/>
               </a:rPr>
-              <a:t>before</a:t>
+              <a:t>too much or above</a:t>
             </a:r>
             <a:endParaRPr lang="en-US" sz="850" dirty="0"/>
           </a:p>
@@ -23117,7 +23861,7 @@
                 <a:ea typeface="Calibri" pitchFamily="34" charset="-122"/>
                 <a:cs typeface="Calibri" pitchFamily="34" charset="-120"/>
               </a:rPr>
-              <a:t>warmth, high temperature</a:t>
+              <a:t>warmth or high temperature</a:t>
             </a:r>
             <a:endParaRPr lang="en-US" sz="850" dirty="0"/>
           </a:p>
@@ -23190,7 +23934,7 @@
                 <a:ea typeface="Trebuchet MS" pitchFamily="34" charset="-122"/>
                 <a:cs typeface="Trebuchet MS" pitchFamily="34" charset="-120"/>
               </a:rPr>
-              <a:t>ing</a:t>
+              <a:t>ed</a:t>
             </a:r>
             <a:endParaRPr lang="en-US" sz="1300" dirty="0"/>
           </a:p>
@@ -23229,7 +23973,7 @@
                 <a:ea typeface="Calibri" pitchFamily="34" charset="-122"/>
                 <a:cs typeface="Calibri" pitchFamily="34" charset="-120"/>
               </a:rPr>
-              <a:t>ongoing action</a:t>
+              <a:t>past tense</a:t>
             </a:r>
             <a:endParaRPr lang="en-US" sz="850" dirty="0"/>
           </a:p>
@@ -23785,7 +24529,7 @@
                 <a:ea typeface="Calibri" pitchFamily="34" charset="-122"/>
                 <a:cs typeface="Calibri" pitchFamily="34" charset="-120"/>
               </a:rPr>
-              <a:t>Word Labs  •  wordlabs.app  •  Root: 'heat' = warmth, high temperature</a:t>
+              <a:t>Word Labs  •  wordlabs.app  •  Root: 'heat' = warmth or high temperature</a:t>
             </a:r>
             <a:endParaRPr lang="en-US" sz="800" dirty="0"/>
           </a:p>
@@ -23858,7 +24602,7 @@
                 <a:ea typeface="Trebuchet MS" pitchFamily="34" charset="-122"/>
                 <a:cs typeface="Trebuchet MS" pitchFamily="34" charset="-120"/>
               </a:rPr>
-              <a:t>We are learning that the root 'heat' means 'warmth, high temperature'.</a:t>
+              <a:t>We are learning that the root 'heat' means 'warmth or high temperature'.</a:t>
             </a:r>
             <a:endParaRPr lang="en-US" sz="2000" dirty="0"/>
           </a:p>
@@ -24504,7 +25248,7 @@
                 <a:ea typeface="Calibri" pitchFamily="34" charset="-122"/>
                 <a:cs typeface="Calibri" pitchFamily="34" charset="-120"/>
               </a:rPr>
-              <a:t>Word Labs  •  wordlabs.app  •  Root: 'heat' = warmth, high temperature</a:t>
+              <a:t>Word Labs  •  wordlabs.app  •  Root: 'heat' = warmth or high temperature</a:t>
             </a:r>
             <a:endParaRPr lang="en-US" sz="800" dirty="0"/>
           </a:p>
@@ -24643,7 +25387,7 @@
                 <a:ea typeface="Trebuchet MS" pitchFamily="34" charset="-122"/>
                 <a:cs typeface="Trebuchet MS" pitchFamily="34" charset="-120"/>
               </a:rPr>
-              <a:t>preheating</a:t>
+              <a:t>overheated</a:t>
             </a:r>
             <a:endParaRPr lang="en-US" sz="2800" dirty="0"/>
           </a:p>
@@ -24782,7 +25526,7 @@
                 <a:ea typeface="Trebuchet MS" pitchFamily="34" charset="-122"/>
                 <a:cs typeface="Trebuchet MS" pitchFamily="34" charset="-120"/>
               </a:rPr>
-              <a:t>pre</a:t>
+              <a:t>over</a:t>
             </a:r>
             <a:endParaRPr lang="en-US" sz="1300" dirty="0"/>
           </a:p>
@@ -24821,7 +25565,7 @@
                 <a:ea typeface="Calibri" pitchFamily="34" charset="-122"/>
                 <a:cs typeface="Calibri" pitchFamily="34" charset="-120"/>
               </a:rPr>
-              <a:t>before</a:t>
+              <a:t>too much or above</a:t>
             </a:r>
             <a:endParaRPr lang="en-US" sz="850" dirty="0"/>
           </a:p>
@@ -24933,7 +25677,7 @@
                 <a:ea typeface="Calibri" pitchFamily="34" charset="-122"/>
                 <a:cs typeface="Calibri" pitchFamily="34" charset="-120"/>
               </a:rPr>
-              <a:t>warmth, high temperature</a:t>
+              <a:t>warmth or high temperature</a:t>
             </a:r>
             <a:endParaRPr lang="en-US" sz="850" dirty="0"/>
           </a:p>
@@ -25006,7 +25750,7 @@
                 <a:ea typeface="Trebuchet MS" pitchFamily="34" charset="-122"/>
                 <a:cs typeface="Trebuchet MS" pitchFamily="34" charset="-120"/>
               </a:rPr>
-              <a:t>ing</a:t>
+              <a:t>ed</a:t>
             </a:r>
             <a:endParaRPr lang="en-US" sz="1300" dirty="0"/>
           </a:p>
@@ -25045,7 +25789,7 @@
                 <a:ea typeface="Calibri" pitchFamily="34" charset="-122"/>
                 <a:cs typeface="Calibri" pitchFamily="34" charset="-120"/>
               </a:rPr>
-              <a:t>ongoing action</a:t>
+              <a:t>past tense</a:t>
             </a:r>
             <a:endParaRPr lang="en-US" sz="850" dirty="0"/>
           </a:p>
@@ -25152,8 +25896,8 @@
         </p:nvSpPr>
         <p:spPr>
           <a:xfrm>
-            <a:off x="2313432" y="3364992"/>
-            <a:ext cx="1645920" cy="475488"/>
+            <a:off x="1975104" y="3364992"/>
+            <a:ext cx="1554480" cy="475488"/>
           </a:xfrm>
           <a:prstGeom prst="rect">
             <a:avLst>
@@ -25179,8 +25923,8 @@
         </p:nvSpPr>
         <p:spPr>
           <a:xfrm>
-            <a:off x="2313432" y="3364992"/>
-            <a:ext cx="1645920" cy="475488"/>
+            <a:off x="1975104" y="3364992"/>
+            <a:ext cx="1554480" cy="475488"/>
           </a:xfrm>
           <a:prstGeom prst="rect">
             <a:avLst/>
@@ -25204,7 +25948,7 @@
                 <a:ea typeface="Trebuchet MS" pitchFamily="34" charset="-122"/>
                 <a:cs typeface="Trebuchet MS" pitchFamily="34" charset="-120"/>
               </a:rPr>
-              <a:t>pre</a:t>
+              <a:t>o</a:t>
             </a:r>
             <a:endParaRPr lang="en-US" sz="1400" dirty="0"/>
           </a:p>
@@ -25218,8 +25962,8 @@
         </p:nvSpPr>
         <p:spPr>
           <a:xfrm>
-            <a:off x="3959352" y="3364992"/>
-            <a:ext cx="411480" cy="475488"/>
+            <a:off x="3529584" y="3364992"/>
+            <a:ext cx="73152" cy="475488"/>
           </a:xfrm>
           <a:prstGeom prst="rect">
             <a:avLst/>
@@ -25257,8 +26001,8 @@
         </p:nvSpPr>
         <p:spPr>
           <a:xfrm>
-            <a:off x="4370832" y="3364992"/>
-            <a:ext cx="1645920" cy="475488"/>
+            <a:off x="3602736" y="3364992"/>
+            <a:ext cx="1554480" cy="475488"/>
           </a:xfrm>
           <a:prstGeom prst="rect">
             <a:avLst>
@@ -25284,8 +26028,8 @@
         </p:nvSpPr>
         <p:spPr>
           <a:xfrm>
-            <a:off x="4370832" y="3364992"/>
-            <a:ext cx="1645920" cy="475488"/>
+            <a:off x="3602736" y="3364992"/>
+            <a:ext cx="1554480" cy="475488"/>
           </a:xfrm>
           <a:prstGeom prst="rect">
             <a:avLst/>
@@ -25309,7 +26053,7 @@
                 <a:ea typeface="Trebuchet MS" pitchFamily="34" charset="-122"/>
                 <a:cs typeface="Trebuchet MS" pitchFamily="34" charset="-120"/>
               </a:rPr>
-              <a:t>heat</a:t>
+              <a:t>ver</a:t>
             </a:r>
             <a:endParaRPr lang="en-US" sz="1400" dirty="0"/>
           </a:p>
@@ -25323,8 +26067,8 @@
         </p:nvSpPr>
         <p:spPr>
           <a:xfrm>
-            <a:off x="6016752" y="3364992"/>
-            <a:ext cx="411480" cy="475488"/>
+            <a:off x="5157216" y="3364992"/>
+            <a:ext cx="73152" cy="475488"/>
           </a:xfrm>
           <a:prstGeom prst="rect">
             <a:avLst/>
@@ -25362,8 +26106,8 @@
         </p:nvSpPr>
         <p:spPr>
           <a:xfrm>
-            <a:off x="6428232" y="3364992"/>
-            <a:ext cx="1645920" cy="475488"/>
+            <a:off x="5230368" y="3364992"/>
+            <a:ext cx="1554480" cy="475488"/>
           </a:xfrm>
           <a:prstGeom prst="rect">
             <a:avLst>
@@ -25389,8 +26133,8 @@
         </p:nvSpPr>
         <p:spPr>
           <a:xfrm>
-            <a:off x="6428232" y="3364992"/>
-            <a:ext cx="1645920" cy="475488"/>
+            <a:off x="5230368" y="3364992"/>
+            <a:ext cx="1554480" cy="475488"/>
           </a:xfrm>
           <a:prstGeom prst="rect">
             <a:avLst/>
@@ -25414,7 +26158,7 @@
                 <a:ea typeface="Trebuchet MS" pitchFamily="34" charset="-122"/>
                 <a:cs typeface="Trebuchet MS" pitchFamily="34" charset="-120"/>
               </a:rPr>
-              <a:t>ing</a:t>
+              <a:t>heat</a:t>
             </a:r>
             <a:endParaRPr lang="en-US" sz="1400" dirty="0"/>
           </a:p>
@@ -25422,7 +26166,112 @@
       </p:sp>
       <p:sp>
         <p:nvSpPr>
-          <p:cNvPr id="36" name="Shape 34"/>
+          <p:cNvPr id="36" name="Text 34"/>
+          <p:cNvSpPr/>
+          <p:nvPr/>
+        </p:nvSpPr>
+        <p:spPr>
+          <a:xfrm>
+            <a:off x="6784848" y="3364992"/>
+            <a:ext cx="73152" cy="475488"/>
+          </a:xfrm>
+          <a:prstGeom prst="rect">
+            <a:avLst/>
+          </a:prstGeom>
+          <a:noFill/>
+          <a:ln/>
+        </p:spPr>
+        <p:txBody>
+          <a:bodyPr wrap="square" lIns="0" tIns="0" rIns="0" bIns="0" rtlCol="0" anchor="ctr"/>
+          <a:lstStyle/>
+          <a:p>
+            <a:pPr algn="ctr" indent="0" marL="0">
+              <a:buNone/>
+            </a:pPr>
+            <a:r>
+              <a:rPr lang="en-US" sz="1600" b="1" dirty="0">
+                <a:solidFill>
+                  <a:srgbClr val="0D9488"/>
+                </a:solidFill>
+                <a:latin typeface="Trebuchet MS" pitchFamily="34" charset="0"/>
+                <a:ea typeface="Trebuchet MS" pitchFamily="34" charset="-122"/>
+                <a:cs typeface="Trebuchet MS" pitchFamily="34" charset="-120"/>
+              </a:rPr>
+              <a:t>·</a:t>
+            </a:r>
+            <a:endParaRPr lang="en-US" sz="1600" dirty="0"/>
+          </a:p>
+        </p:txBody>
+      </p:sp>
+      <p:sp>
+        <p:nvSpPr>
+          <p:cNvPr id="37" name="Shape 35"/>
+          <p:cNvSpPr/>
+          <p:nvPr/>
+        </p:nvSpPr>
+        <p:spPr>
+          <a:xfrm>
+            <a:off x="6858000" y="3364992"/>
+            <a:ext cx="1554480" cy="475488"/>
+          </a:xfrm>
+          <a:prstGeom prst="rect">
+            <a:avLst>
+              <a:gd name="adj" fmla="val 9615"/>
+            </a:avLst>
+          </a:prstGeom>
+          <a:solidFill>
+            <a:srgbClr val="FFFFFF"/>
+          </a:solidFill>
+          <a:ln w="12700">
+            <a:solidFill>
+              <a:srgbClr val="0D9488"/>
+            </a:solidFill>
+            <a:prstDash val="solid"/>
+          </a:ln>
+        </p:spPr>
+      </p:sp>
+      <p:sp>
+        <p:nvSpPr>
+          <p:cNvPr id="38" name="Text 36"/>
+          <p:cNvSpPr/>
+          <p:nvPr/>
+        </p:nvSpPr>
+        <p:spPr>
+          <a:xfrm>
+            <a:off x="6858000" y="3364992"/>
+            <a:ext cx="1554480" cy="475488"/>
+          </a:xfrm>
+          <a:prstGeom prst="rect">
+            <a:avLst/>
+          </a:prstGeom>
+          <a:noFill/>
+          <a:ln/>
+        </p:spPr>
+        <p:txBody>
+          <a:bodyPr wrap="square" lIns="0" tIns="0" rIns="0" bIns="0" rtlCol="0" anchor="ctr"/>
+          <a:lstStyle/>
+          <a:p>
+            <a:pPr algn="ctr" indent="0" marL="0">
+              <a:buNone/>
+            </a:pPr>
+            <a:r>
+              <a:rPr lang="en-US" sz="1400" b="1" dirty="0">
+                <a:solidFill>
+                  <a:srgbClr val="0D9488"/>
+                </a:solidFill>
+                <a:latin typeface="Trebuchet MS" pitchFamily="34" charset="0"/>
+                <a:ea typeface="Trebuchet MS" pitchFamily="34" charset="-122"/>
+                <a:cs typeface="Trebuchet MS" pitchFamily="34" charset="-120"/>
+              </a:rPr>
+              <a:t>ed</a:t>
+            </a:r>
+            <a:endParaRPr lang="en-US" sz="1400" dirty="0"/>
+          </a:p>
+        </p:txBody>
+      </p:sp>
+      <p:sp>
+        <p:nvSpPr>
+          <p:cNvPr id="39" name="Shape 37"/>
           <p:cNvSpPr/>
           <p:nvPr/>
         </p:nvSpPr>
@@ -25449,7 +26298,7 @@
       </p:sp>
       <p:sp>
         <p:nvSpPr>
-          <p:cNvPr id="37" name="Text 35"/>
+          <p:cNvPr id="40" name="Text 38"/>
           <p:cNvSpPr/>
           <p:nvPr/>
         </p:nvSpPr>
@@ -25488,7 +26337,7 @@
       </p:sp>
       <p:sp>
         <p:nvSpPr>
-          <p:cNvPr id="38" name="Shape 36"/>
+          <p:cNvPr id="41" name="Shape 39"/>
           <p:cNvSpPr/>
           <p:nvPr/>
         </p:nvSpPr>
@@ -25515,7 +26364,7 @@
       </p:sp>
       <p:sp>
         <p:nvSpPr>
-          <p:cNvPr id="39" name="Text 37"/>
+          <p:cNvPr id="42" name="Text 40"/>
           <p:cNvSpPr/>
           <p:nvPr/>
         </p:nvSpPr>
@@ -25838,7 +26687,7 @@
                 <a:ea typeface="Calibri" pitchFamily="34" charset="-122"/>
                 <a:cs typeface="Calibri" pitchFamily="34" charset="-120"/>
               </a:rPr>
-              <a:t>Word Labs  •  wordlabs.app  •  Root: 'heat' = warmth, high temperature</a:t>
+              <a:t>Word Labs  •  wordlabs.app  •  Root: 'heat' = warmth or high temperature</a:t>
             </a:r>
             <a:endParaRPr lang="en-US" sz="800" dirty="0"/>
           </a:p>
@@ -25977,7 +26826,7 @@
                 <a:ea typeface="Trebuchet MS" pitchFamily="34" charset="-122"/>
                 <a:cs typeface="Trebuchet MS" pitchFamily="34" charset="-120"/>
               </a:rPr>
-              <a:t>preheating</a:t>
+              <a:t>overheated</a:t>
             </a:r>
             <a:endParaRPr lang="en-US" sz="2800" dirty="0"/>
           </a:p>
@@ -26116,7 +26965,7 @@
                 <a:ea typeface="Trebuchet MS" pitchFamily="34" charset="-122"/>
                 <a:cs typeface="Trebuchet MS" pitchFamily="34" charset="-120"/>
               </a:rPr>
-              <a:t>pre</a:t>
+              <a:t>over</a:t>
             </a:r>
             <a:endParaRPr lang="en-US" sz="1300" dirty="0"/>
           </a:p>
@@ -26155,7 +27004,7 @@
                 <a:ea typeface="Calibri" pitchFamily="34" charset="-122"/>
                 <a:cs typeface="Calibri" pitchFamily="34" charset="-120"/>
               </a:rPr>
-              <a:t>before</a:t>
+              <a:t>too much or above</a:t>
             </a:r>
             <a:endParaRPr lang="en-US" sz="850" dirty="0"/>
           </a:p>
@@ -26267,7 +27116,7 @@
                 <a:ea typeface="Calibri" pitchFamily="34" charset="-122"/>
                 <a:cs typeface="Calibri" pitchFamily="34" charset="-120"/>
               </a:rPr>
-              <a:t>warmth, high temperature</a:t>
+              <a:t>warmth or high temperature</a:t>
             </a:r>
             <a:endParaRPr lang="en-US" sz="850" dirty="0"/>
           </a:p>
@@ -26340,7 +27189,7 @@
                 <a:ea typeface="Trebuchet MS" pitchFamily="34" charset="-122"/>
                 <a:cs typeface="Trebuchet MS" pitchFamily="34" charset="-120"/>
               </a:rPr>
-              <a:t>ing</a:t>
+              <a:t>ed</a:t>
             </a:r>
             <a:endParaRPr lang="en-US" sz="1300" dirty="0"/>
           </a:p>
@@ -26379,7 +27228,7 @@
                 <a:ea typeface="Calibri" pitchFamily="34" charset="-122"/>
                 <a:cs typeface="Calibri" pitchFamily="34" charset="-120"/>
               </a:rPr>
-              <a:t>ongoing action</a:t>
+              <a:t>past tense</a:t>
             </a:r>
             <a:endParaRPr lang="en-US" sz="850" dirty="0"/>
           </a:p>
@@ -26486,8 +27335,8 @@
         </p:nvSpPr>
         <p:spPr>
           <a:xfrm>
-            <a:off x="2313432" y="3364992"/>
-            <a:ext cx="1645920" cy="475488"/>
+            <a:off x="1975104" y="3364992"/>
+            <a:ext cx="1554480" cy="475488"/>
           </a:xfrm>
           <a:prstGeom prst="rect">
             <a:avLst>
@@ -26513,8 +27362,8 @@
         </p:nvSpPr>
         <p:spPr>
           <a:xfrm>
-            <a:off x="2313432" y="3364992"/>
-            <a:ext cx="1645920" cy="475488"/>
+            <a:off x="1975104" y="3364992"/>
+            <a:ext cx="1554480" cy="475488"/>
           </a:xfrm>
           <a:prstGeom prst="rect">
             <a:avLst/>
@@ -26538,7 +27387,7 @@
                 <a:ea typeface="Trebuchet MS" pitchFamily="34" charset="-122"/>
                 <a:cs typeface="Trebuchet MS" pitchFamily="34" charset="-120"/>
               </a:rPr>
-              <a:t>pre</a:t>
+              <a:t>o</a:t>
             </a:r>
             <a:endParaRPr lang="en-US" sz="1400" dirty="0"/>
           </a:p>
@@ -26552,8 +27401,8 @@
         </p:nvSpPr>
         <p:spPr>
           <a:xfrm>
-            <a:off x="3959352" y="3364992"/>
-            <a:ext cx="411480" cy="475488"/>
+            <a:off x="3529584" y="3364992"/>
+            <a:ext cx="73152" cy="475488"/>
           </a:xfrm>
           <a:prstGeom prst="rect">
             <a:avLst/>
@@ -26591,8 +27440,8 @@
         </p:nvSpPr>
         <p:spPr>
           <a:xfrm>
-            <a:off x="4370832" y="3364992"/>
-            <a:ext cx="1645920" cy="475488"/>
+            <a:off x="3602736" y="3364992"/>
+            <a:ext cx="1554480" cy="475488"/>
           </a:xfrm>
           <a:prstGeom prst="rect">
             <a:avLst>
@@ -26618,8 +27467,8 @@
         </p:nvSpPr>
         <p:spPr>
           <a:xfrm>
-            <a:off x="4370832" y="3364992"/>
-            <a:ext cx="1645920" cy="475488"/>
+            <a:off x="3602736" y="3364992"/>
+            <a:ext cx="1554480" cy="475488"/>
           </a:xfrm>
           <a:prstGeom prst="rect">
             <a:avLst/>
@@ -26643,7 +27492,7 @@
                 <a:ea typeface="Trebuchet MS" pitchFamily="34" charset="-122"/>
                 <a:cs typeface="Trebuchet MS" pitchFamily="34" charset="-120"/>
               </a:rPr>
-              <a:t>heat</a:t>
+              <a:t>ver</a:t>
             </a:r>
             <a:endParaRPr lang="en-US" sz="1400" dirty="0"/>
           </a:p>
@@ -26657,8 +27506,8 @@
         </p:nvSpPr>
         <p:spPr>
           <a:xfrm>
-            <a:off x="6016752" y="3364992"/>
-            <a:ext cx="411480" cy="475488"/>
+            <a:off x="5157216" y="3364992"/>
+            <a:ext cx="73152" cy="475488"/>
           </a:xfrm>
           <a:prstGeom prst="rect">
             <a:avLst/>
@@ -26696,8 +27545,8 @@
         </p:nvSpPr>
         <p:spPr>
           <a:xfrm>
-            <a:off x="6428232" y="3364992"/>
-            <a:ext cx="1645920" cy="475488"/>
+            <a:off x="5230368" y="3364992"/>
+            <a:ext cx="1554480" cy="475488"/>
           </a:xfrm>
           <a:prstGeom prst="rect">
             <a:avLst>
@@ -26723,8 +27572,8 @@
         </p:nvSpPr>
         <p:spPr>
           <a:xfrm>
-            <a:off x="6428232" y="3364992"/>
-            <a:ext cx="1645920" cy="475488"/>
+            <a:off x="5230368" y="3364992"/>
+            <a:ext cx="1554480" cy="475488"/>
           </a:xfrm>
           <a:prstGeom prst="rect">
             <a:avLst/>
@@ -26748,7 +27597,7 @@
                 <a:ea typeface="Trebuchet MS" pitchFamily="34" charset="-122"/>
                 <a:cs typeface="Trebuchet MS" pitchFamily="34" charset="-120"/>
               </a:rPr>
-              <a:t>ing</a:t>
+              <a:t>heat</a:t>
             </a:r>
             <a:endParaRPr lang="en-US" sz="1400" dirty="0"/>
           </a:p>
@@ -26756,7 +27605,112 @@
       </p:sp>
       <p:sp>
         <p:nvSpPr>
-          <p:cNvPr id="36" name="Shape 34"/>
+          <p:cNvPr id="36" name="Text 34"/>
+          <p:cNvSpPr/>
+          <p:nvPr/>
+        </p:nvSpPr>
+        <p:spPr>
+          <a:xfrm>
+            <a:off x="6784848" y="3364992"/>
+            <a:ext cx="73152" cy="475488"/>
+          </a:xfrm>
+          <a:prstGeom prst="rect">
+            <a:avLst/>
+          </a:prstGeom>
+          <a:noFill/>
+          <a:ln/>
+        </p:spPr>
+        <p:txBody>
+          <a:bodyPr wrap="square" lIns="0" tIns="0" rIns="0" bIns="0" rtlCol="0" anchor="ctr"/>
+          <a:lstStyle/>
+          <a:p>
+            <a:pPr algn="ctr" indent="0" marL="0">
+              <a:buNone/>
+            </a:pPr>
+            <a:r>
+              <a:rPr lang="en-US" sz="1600" b="1" dirty="0">
+                <a:solidFill>
+                  <a:srgbClr val="0D9488"/>
+                </a:solidFill>
+                <a:latin typeface="Trebuchet MS" pitchFamily="34" charset="0"/>
+                <a:ea typeface="Trebuchet MS" pitchFamily="34" charset="-122"/>
+                <a:cs typeface="Trebuchet MS" pitchFamily="34" charset="-120"/>
+              </a:rPr>
+              <a:t>·</a:t>
+            </a:r>
+            <a:endParaRPr lang="en-US" sz="1600" dirty="0"/>
+          </a:p>
+        </p:txBody>
+      </p:sp>
+      <p:sp>
+        <p:nvSpPr>
+          <p:cNvPr id="37" name="Shape 35"/>
+          <p:cNvSpPr/>
+          <p:nvPr/>
+        </p:nvSpPr>
+        <p:spPr>
+          <a:xfrm>
+            <a:off x="6858000" y="3364992"/>
+            <a:ext cx="1554480" cy="475488"/>
+          </a:xfrm>
+          <a:prstGeom prst="rect">
+            <a:avLst>
+              <a:gd name="adj" fmla="val 9615"/>
+            </a:avLst>
+          </a:prstGeom>
+          <a:solidFill>
+            <a:srgbClr val="FFFFFF"/>
+          </a:solidFill>
+          <a:ln w="12700">
+            <a:solidFill>
+              <a:srgbClr val="0D9488"/>
+            </a:solidFill>
+            <a:prstDash val="solid"/>
+          </a:ln>
+        </p:spPr>
+      </p:sp>
+      <p:sp>
+        <p:nvSpPr>
+          <p:cNvPr id="38" name="Text 36"/>
+          <p:cNvSpPr/>
+          <p:nvPr/>
+        </p:nvSpPr>
+        <p:spPr>
+          <a:xfrm>
+            <a:off x="6858000" y="3364992"/>
+            <a:ext cx="1554480" cy="475488"/>
+          </a:xfrm>
+          <a:prstGeom prst="rect">
+            <a:avLst/>
+          </a:prstGeom>
+          <a:noFill/>
+          <a:ln/>
+        </p:spPr>
+        <p:txBody>
+          <a:bodyPr wrap="square" lIns="0" tIns="0" rIns="0" bIns="0" rtlCol="0" anchor="ctr"/>
+          <a:lstStyle/>
+          <a:p>
+            <a:pPr algn="ctr" indent="0" marL="0">
+              <a:buNone/>
+            </a:pPr>
+            <a:r>
+              <a:rPr lang="en-US" sz="1400" b="1" dirty="0">
+                <a:solidFill>
+                  <a:srgbClr val="0D9488"/>
+                </a:solidFill>
+                <a:latin typeface="Trebuchet MS" pitchFamily="34" charset="0"/>
+                <a:ea typeface="Trebuchet MS" pitchFamily="34" charset="-122"/>
+                <a:cs typeface="Trebuchet MS" pitchFamily="34" charset="-120"/>
+              </a:rPr>
+              <a:t>ed</a:t>
+            </a:r>
+            <a:endParaRPr lang="en-US" sz="1400" dirty="0"/>
+          </a:p>
+        </p:txBody>
+      </p:sp>
+      <p:sp>
+        <p:nvSpPr>
+          <p:cNvPr id="39" name="Shape 37"/>
           <p:cNvSpPr/>
           <p:nvPr/>
         </p:nvSpPr>
@@ -26783,7 +27737,7 @@
       </p:sp>
       <p:sp>
         <p:nvSpPr>
-          <p:cNvPr id="37" name="Text 35"/>
+          <p:cNvPr id="40" name="Text 38"/>
           <p:cNvSpPr/>
           <p:nvPr/>
         </p:nvSpPr>
@@ -26822,7 +27776,7 @@
       </p:sp>
       <p:sp>
         <p:nvSpPr>
-          <p:cNvPr id="38" name="Shape 36"/>
+          <p:cNvPr id="41" name="Shape 39"/>
           <p:cNvSpPr/>
           <p:nvPr/>
         </p:nvSpPr>
@@ -26849,7 +27803,7 @@
       </p:sp>
       <p:sp>
         <p:nvSpPr>
-          <p:cNvPr id="39" name="Shape 37"/>
+          <p:cNvPr id="42" name="Shape 40"/>
           <p:cNvSpPr/>
           <p:nvPr/>
         </p:nvSpPr>
@@ -26876,7 +27830,7 @@
       </p:sp>
       <p:sp>
         <p:nvSpPr>
-          <p:cNvPr id="40" name="Text 38"/>
+          <p:cNvPr id="43" name="Text 41"/>
           <p:cNvSpPr/>
           <p:nvPr/>
         </p:nvSpPr>
@@ -26907,7 +27861,7 @@
                 <a:ea typeface="Trebuchet MS" pitchFamily="34" charset="-122"/>
                 <a:cs typeface="Trebuchet MS" pitchFamily="34" charset="-120"/>
               </a:rPr>
-              <a:t>p</a:t>
+              <a:t>o</a:t>
             </a:r>
             <a:endParaRPr lang="en-US" sz="900" dirty="0"/>
           </a:p>
@@ -26915,7 +27869,7 @@
       </p:sp>
       <p:sp>
         <p:nvSpPr>
-          <p:cNvPr id="41" name="Shape 39"/>
+          <p:cNvPr id="44" name="Shape 42"/>
           <p:cNvSpPr/>
           <p:nvPr/>
         </p:nvSpPr>
@@ -26942,7 +27896,7 @@
       </p:sp>
       <p:sp>
         <p:nvSpPr>
-          <p:cNvPr id="42" name="Text 40"/>
+          <p:cNvPr id="45" name="Text 43"/>
           <p:cNvSpPr/>
           <p:nvPr/>
         </p:nvSpPr>
@@ -26973,7 +27927,7 @@
                 <a:ea typeface="Trebuchet MS" pitchFamily="34" charset="-122"/>
                 <a:cs typeface="Trebuchet MS" pitchFamily="34" charset="-120"/>
               </a:rPr>
-              <a:t>r</a:t>
+              <a:t>v</a:t>
             </a:r>
             <a:endParaRPr lang="en-US" sz="900" dirty="0"/>
           </a:p>
@@ -26981,7 +27935,7 @@
       </p:sp>
       <p:sp>
         <p:nvSpPr>
-          <p:cNvPr id="43" name="Shape 41"/>
+          <p:cNvPr id="46" name="Shape 44"/>
           <p:cNvSpPr/>
           <p:nvPr/>
         </p:nvSpPr>
@@ -27008,7 +27962,7 @@
       </p:sp>
       <p:sp>
         <p:nvSpPr>
-          <p:cNvPr id="44" name="Text 42"/>
+          <p:cNvPr id="47" name="Text 45"/>
           <p:cNvSpPr/>
           <p:nvPr/>
         </p:nvSpPr>
@@ -27039,7 +27993,7 @@
                 <a:ea typeface="Trebuchet MS" pitchFamily="34" charset="-122"/>
                 <a:cs typeface="Trebuchet MS" pitchFamily="34" charset="-120"/>
               </a:rPr>
-              <a:t>e</a:t>
+              <a:t>er</a:t>
             </a:r>
             <a:endParaRPr lang="en-US" sz="900" dirty="0"/>
           </a:p>
@@ -27047,7 +28001,7 @@
       </p:sp>
       <p:sp>
         <p:nvSpPr>
-          <p:cNvPr id="45" name="Shape 43"/>
+          <p:cNvPr id="48" name="Shape 46"/>
           <p:cNvSpPr/>
           <p:nvPr/>
         </p:nvSpPr>
@@ -27074,7 +28028,7 @@
       </p:sp>
       <p:sp>
         <p:nvSpPr>
-          <p:cNvPr id="46" name="Text 44"/>
+          <p:cNvPr id="49" name="Text 47"/>
           <p:cNvSpPr/>
           <p:nvPr/>
         </p:nvSpPr>
@@ -27113,7 +28067,7 @@
       </p:sp>
       <p:sp>
         <p:nvSpPr>
-          <p:cNvPr id="47" name="Shape 45"/>
+          <p:cNvPr id="50" name="Shape 48"/>
           <p:cNvSpPr/>
           <p:nvPr/>
         </p:nvSpPr>
@@ -27140,7 +28094,7 @@
       </p:sp>
       <p:sp>
         <p:nvSpPr>
-          <p:cNvPr id="48" name="Text 46"/>
+          <p:cNvPr id="51" name="Text 49"/>
           <p:cNvSpPr/>
           <p:nvPr/>
         </p:nvSpPr>
@@ -27179,7 +28133,7 @@
       </p:sp>
       <p:sp>
         <p:nvSpPr>
-          <p:cNvPr id="49" name="Shape 47"/>
+          <p:cNvPr id="52" name="Shape 50"/>
           <p:cNvSpPr/>
           <p:nvPr/>
         </p:nvSpPr>
@@ -27206,7 +28160,7 @@
       </p:sp>
       <p:sp>
         <p:nvSpPr>
-          <p:cNvPr id="50" name="Text 48"/>
+          <p:cNvPr id="53" name="Text 51"/>
           <p:cNvSpPr/>
           <p:nvPr/>
         </p:nvSpPr>
@@ -27245,7 +28199,7 @@
       </p:sp>
       <p:sp>
         <p:nvSpPr>
-          <p:cNvPr id="51" name="Shape 49"/>
+          <p:cNvPr id="54" name="Shape 52"/>
           <p:cNvSpPr/>
           <p:nvPr/>
         </p:nvSpPr>
@@ -27272,7 +28226,7 @@
       </p:sp>
       <p:sp>
         <p:nvSpPr>
-          <p:cNvPr id="52" name="Text 50"/>
+          <p:cNvPr id="55" name="Text 53"/>
           <p:cNvSpPr/>
           <p:nvPr/>
         </p:nvSpPr>
@@ -27303,7 +28257,7 @@
                 <a:ea typeface="Trebuchet MS" pitchFamily="34" charset="-122"/>
                 <a:cs typeface="Trebuchet MS" pitchFamily="34" charset="-120"/>
               </a:rPr>
-              <a:t>ing</a:t>
+              <a:t>ed</a:t>
             </a:r>
             <a:endParaRPr lang="en-US" sz="900" dirty="0"/>
           </a:p>
@@ -27595,7 +28549,7 @@
                 <a:ea typeface="Calibri" pitchFamily="34" charset="-122"/>
                 <a:cs typeface="Calibri" pitchFamily="34" charset="-120"/>
               </a:rPr>
-              <a:t>Word Labs  •  wordlabs.app  •  Root: 'heat' = warmth, high temperature</a:t>
+              <a:t>Word Labs  •  wordlabs.app  •  Root: 'heat' = warmth or high temperature</a:t>
             </a:r>
             <a:endParaRPr lang="en-US" sz="800" dirty="0"/>
           </a:p>
@@ -27734,7 +28688,7 @@
                 <a:ea typeface="Trebuchet MS" pitchFamily="34" charset="-122"/>
                 <a:cs typeface="Trebuchet MS" pitchFamily="34" charset="-120"/>
               </a:rPr>
-              <a:t>heater</a:t>
+              <a:t>heatstroke</a:t>
             </a:r>
             <a:endParaRPr lang="en-US" sz="2800" dirty="0"/>
           </a:p>
@@ -28422,7 +29376,7 @@
                 <a:ea typeface="Calibri" pitchFamily="34" charset="-122"/>
                 <a:cs typeface="Calibri" pitchFamily="34" charset="-120"/>
               </a:rPr>
-              <a:t>Word Labs  •  wordlabs.app  •  Root: 'heat' = warmth, high temperature</a:t>
+              <a:t>Word Labs  •  wordlabs.app  •  Root: 'heat' = warmth or high temperature</a:t>
             </a:r>
             <a:endParaRPr lang="en-US" sz="800" dirty="0"/>
           </a:p>
@@ -28561,7 +29515,7 @@
                 <a:ea typeface="Trebuchet MS" pitchFamily="34" charset="-122"/>
                 <a:cs typeface="Trebuchet MS" pitchFamily="34" charset="-120"/>
               </a:rPr>
-              <a:t>heater</a:t>
+              <a:t>heatstroke</a:t>
             </a:r>
             <a:endParaRPr lang="en-US" sz="2800" dirty="0"/>
           </a:p>
@@ -28739,7 +29693,7 @@
                 <a:ea typeface="Calibri" pitchFamily="34" charset="-122"/>
                 <a:cs typeface="Calibri" pitchFamily="34" charset="-120"/>
               </a:rPr>
-              <a:t>warmth, high temperature</a:t>
+              <a:t>warmth or high temperature</a:t>
             </a:r>
             <a:endParaRPr lang="en-US" sz="850" dirty="0"/>
           </a:p>
@@ -28812,7 +29766,7 @@
                 <a:ea typeface="Trebuchet MS" pitchFamily="34" charset="-122"/>
                 <a:cs typeface="Trebuchet MS" pitchFamily="34" charset="-120"/>
               </a:rPr>
-              <a:t>er</a:t>
+              <a:t>stroke</a:t>
             </a:r>
             <a:endParaRPr lang="en-US" sz="1300" dirty="0"/>
           </a:p>
@@ -28851,7 +29805,7 @@
                 <a:ea typeface="Calibri" pitchFamily="34" charset="-122"/>
                 <a:cs typeface="Calibri" pitchFamily="34" charset="-120"/>
               </a:rPr>
-              <a:t>a person or thing that does something</a:t>
+              <a:t>a sudden blow or attack</a:t>
             </a:r>
             <a:endParaRPr lang="en-US" sz="850" dirty="0"/>
           </a:p>
@@ -29407,7 +30361,7 @@
                 <a:ea typeface="Calibri" pitchFamily="34" charset="-122"/>
                 <a:cs typeface="Calibri" pitchFamily="34" charset="-120"/>
               </a:rPr>
-              <a:t>Word Labs  •  wordlabs.app  •  Root: 'heat' = warmth, high temperature</a:t>
+              <a:t>Word Labs  •  wordlabs.app  •  Root: 'heat' = warmth or high temperature</a:t>
             </a:r>
             <a:endParaRPr lang="en-US" sz="800" dirty="0"/>
           </a:p>
@@ -29546,7 +30500,7 @@
                 <a:ea typeface="Trebuchet MS" pitchFamily="34" charset="-122"/>
                 <a:cs typeface="Trebuchet MS" pitchFamily="34" charset="-120"/>
               </a:rPr>
-              <a:t>heater</a:t>
+              <a:t>heatstroke</a:t>
             </a:r>
             <a:endParaRPr lang="en-US" sz="2800" dirty="0"/>
           </a:p>
@@ -29724,7 +30678,7 @@
                 <a:ea typeface="Calibri" pitchFamily="34" charset="-122"/>
                 <a:cs typeface="Calibri" pitchFamily="34" charset="-120"/>
               </a:rPr>
-              <a:t>warmth, high temperature</a:t>
+              <a:t>warmth or high temperature</a:t>
             </a:r>
             <a:endParaRPr lang="en-US" sz="850" dirty="0"/>
           </a:p>
@@ -29797,7 +30751,7 @@
                 <a:ea typeface="Trebuchet MS" pitchFamily="34" charset="-122"/>
                 <a:cs typeface="Trebuchet MS" pitchFamily="34" charset="-120"/>
               </a:rPr>
-              <a:t>er</a:t>
+              <a:t>stroke</a:t>
             </a:r>
             <a:endParaRPr lang="en-US" sz="1300" dirty="0"/>
           </a:p>
@@ -29836,7 +30790,7 @@
                 <a:ea typeface="Calibri" pitchFamily="34" charset="-122"/>
                 <a:cs typeface="Calibri" pitchFamily="34" charset="-120"/>
               </a:rPr>
-              <a:t>a person or thing that does something</a:t>
+              <a:t>a sudden blow or attack</a:t>
             </a:r>
             <a:endParaRPr lang="en-US" sz="850" dirty="0"/>
           </a:p>
@@ -30100,7 +31054,7 @@
                 <a:ea typeface="Trebuchet MS" pitchFamily="34" charset="-122"/>
                 <a:cs typeface="Trebuchet MS" pitchFamily="34" charset="-120"/>
               </a:rPr>
-              <a:t>er</a:t>
+              <a:t>stroke</a:t>
             </a:r>
             <a:endParaRPr lang="en-US" sz="1400" dirty="0"/>
           </a:p>
@@ -30524,7 +31478,7 @@
                 <a:ea typeface="Calibri" pitchFamily="34" charset="-122"/>
                 <a:cs typeface="Calibri" pitchFamily="34" charset="-120"/>
               </a:rPr>
-              <a:t>Word Labs  •  wordlabs.app  •  Root: 'heat' = warmth, high temperature</a:t>
+              <a:t>Word Labs  •  wordlabs.app  •  Root: 'heat' = warmth or high temperature</a:t>
             </a:r>
             <a:endParaRPr lang="en-US" sz="800" dirty="0"/>
           </a:p>
@@ -30663,7 +31617,7 @@
                 <a:ea typeface="Trebuchet MS" pitchFamily="34" charset="-122"/>
                 <a:cs typeface="Trebuchet MS" pitchFamily="34" charset="-120"/>
               </a:rPr>
-              <a:t>heater</a:t>
+              <a:t>heatstroke</a:t>
             </a:r>
             <a:endParaRPr lang="en-US" sz="2800" dirty="0"/>
           </a:p>
@@ -30841,7 +31795,7 @@
                 <a:ea typeface="Calibri" pitchFamily="34" charset="-122"/>
                 <a:cs typeface="Calibri" pitchFamily="34" charset="-120"/>
               </a:rPr>
-              <a:t>warmth, high temperature</a:t>
+              <a:t>warmth or high temperature</a:t>
             </a:r>
             <a:endParaRPr lang="en-US" sz="850" dirty="0"/>
           </a:p>
@@ -30914,7 +31868,7 @@
                 <a:ea typeface="Trebuchet MS" pitchFamily="34" charset="-122"/>
                 <a:cs typeface="Trebuchet MS" pitchFamily="34" charset="-120"/>
               </a:rPr>
-              <a:t>er</a:t>
+              <a:t>stroke</a:t>
             </a:r>
             <a:endParaRPr lang="en-US" sz="1300" dirty="0"/>
           </a:p>
@@ -30953,7 +31907,7 @@
                 <a:ea typeface="Calibri" pitchFamily="34" charset="-122"/>
                 <a:cs typeface="Calibri" pitchFamily="34" charset="-120"/>
               </a:rPr>
-              <a:t>a person or thing that does something</a:t>
+              <a:t>a sudden blow or attack</a:t>
             </a:r>
             <a:endParaRPr lang="en-US" sz="850" dirty="0"/>
           </a:p>
@@ -31217,7 +32171,7 @@
                 <a:ea typeface="Trebuchet MS" pitchFamily="34" charset="-122"/>
                 <a:cs typeface="Trebuchet MS" pitchFamily="34" charset="-120"/>
               </a:rPr>
-              <a:t>er</a:t>
+              <a:t>stroke</a:t>
             </a:r>
             <a:endParaRPr lang="en-US" sz="1400" dirty="0"/>
           </a:p>
@@ -31324,7 +32278,7 @@
         </p:nvSpPr>
         <p:spPr>
           <a:xfrm>
-            <a:off x="2670048" y="4169664"/>
+            <a:off x="2023872" y="4169664"/>
             <a:ext cx="685800" cy="475488"/>
           </a:xfrm>
           <a:prstGeom prst="rect">
@@ -31351,7 +32305,7 @@
         </p:nvSpPr>
         <p:spPr>
           <a:xfrm>
-            <a:off x="2670048" y="4169664"/>
+            <a:off x="2023872" y="4169664"/>
             <a:ext cx="685800" cy="475488"/>
           </a:xfrm>
           <a:prstGeom prst="rect">
@@ -31390,7 +32344,7 @@
         </p:nvSpPr>
         <p:spPr>
           <a:xfrm>
-            <a:off x="4123944" y="4169664"/>
+            <a:off x="2831592" y="4169664"/>
             <a:ext cx="685800" cy="475488"/>
           </a:xfrm>
           <a:prstGeom prst="rect">
@@ -31417,7 +32371,7 @@
         </p:nvSpPr>
         <p:spPr>
           <a:xfrm>
-            <a:off x="4123944" y="4169664"/>
+            <a:off x="2831592" y="4169664"/>
             <a:ext cx="685800" cy="475488"/>
           </a:xfrm>
           <a:prstGeom prst="rect">
@@ -31456,7 +32410,7 @@
         </p:nvSpPr>
         <p:spPr>
           <a:xfrm>
-            <a:off x="5577840" y="4169664"/>
+            <a:off x="3639312" y="4169664"/>
             <a:ext cx="685800" cy="475488"/>
           </a:xfrm>
           <a:prstGeom prst="rect">
@@ -31483,7 +32437,7 @@
         </p:nvSpPr>
         <p:spPr>
           <a:xfrm>
-            <a:off x="5577840" y="4169664"/>
+            <a:off x="3639312" y="4169664"/>
             <a:ext cx="685800" cy="475488"/>
           </a:xfrm>
           <a:prstGeom prst="rect">
@@ -31522,7 +32476,7 @@
         </p:nvSpPr>
         <p:spPr>
           <a:xfrm>
-            <a:off x="7031736" y="4169664"/>
+            <a:off x="4447032" y="4169664"/>
             <a:ext cx="685800" cy="475488"/>
           </a:xfrm>
           <a:prstGeom prst="rect">
@@ -31549,7 +32503,7 @@
         </p:nvSpPr>
         <p:spPr>
           <a:xfrm>
-            <a:off x="7031736" y="4169664"/>
+            <a:off x="4447032" y="4169664"/>
             <a:ext cx="685800" cy="475488"/>
           </a:xfrm>
           <a:prstGeom prst="rect">
@@ -31574,7 +32528,271 @@
                 <a:ea typeface="Trebuchet MS" pitchFamily="34" charset="-122"/>
                 <a:cs typeface="Trebuchet MS" pitchFamily="34" charset="-120"/>
               </a:rPr>
-              <a:t>er</a:t>
+              <a:t>s</a:t>
+            </a:r>
+            <a:endParaRPr lang="en-US" sz="900" dirty="0"/>
+          </a:p>
+        </p:txBody>
+      </p:sp>
+      <p:sp>
+        <p:nvSpPr>
+          <p:cNvPr id="41" name="Shape 39"/>
+          <p:cNvSpPr/>
+          <p:nvPr/>
+        </p:nvSpPr>
+        <p:spPr>
+          <a:xfrm>
+            <a:off x="5254752" y="4169664"/>
+            <a:ext cx="685800" cy="475488"/>
+          </a:xfrm>
+          <a:prstGeom prst="rect">
+            <a:avLst>
+              <a:gd name="adj" fmla="val 7692"/>
+            </a:avLst>
+          </a:prstGeom>
+          <a:solidFill>
+            <a:srgbClr val="FFFFFF"/>
+          </a:solidFill>
+          <a:ln w="12700">
+            <a:solidFill>
+              <a:srgbClr val="DB2777"/>
+            </a:solidFill>
+            <a:prstDash val="solid"/>
+          </a:ln>
+        </p:spPr>
+      </p:sp>
+      <p:sp>
+        <p:nvSpPr>
+          <p:cNvPr id="42" name="Text 40"/>
+          <p:cNvSpPr/>
+          <p:nvPr/>
+        </p:nvSpPr>
+        <p:spPr>
+          <a:xfrm>
+            <a:off x="5254752" y="4169664"/>
+            <a:ext cx="685800" cy="475488"/>
+          </a:xfrm>
+          <a:prstGeom prst="rect">
+            <a:avLst/>
+          </a:prstGeom>
+          <a:noFill/>
+          <a:ln/>
+        </p:spPr>
+        <p:txBody>
+          <a:bodyPr wrap="square" lIns="0" tIns="0" rIns="0" bIns="0" rtlCol="0" anchor="ctr"/>
+          <a:lstStyle/>
+          <a:p>
+            <a:pPr algn="ctr" indent="0" marL="0">
+              <a:buNone/>
+            </a:pPr>
+            <a:r>
+              <a:rPr lang="en-US" sz="900" b="1" dirty="0">
+                <a:solidFill>
+                  <a:srgbClr val="9D174D"/>
+                </a:solidFill>
+                <a:latin typeface="Trebuchet MS" pitchFamily="34" charset="0"/>
+                <a:ea typeface="Trebuchet MS" pitchFamily="34" charset="-122"/>
+                <a:cs typeface="Trebuchet MS" pitchFamily="34" charset="-120"/>
+              </a:rPr>
+              <a:t>t</a:t>
+            </a:r>
+            <a:endParaRPr lang="en-US" sz="900" dirty="0"/>
+          </a:p>
+        </p:txBody>
+      </p:sp>
+      <p:sp>
+        <p:nvSpPr>
+          <p:cNvPr id="43" name="Shape 41"/>
+          <p:cNvSpPr/>
+          <p:nvPr/>
+        </p:nvSpPr>
+        <p:spPr>
+          <a:xfrm>
+            <a:off x="6062472" y="4169664"/>
+            <a:ext cx="685800" cy="475488"/>
+          </a:xfrm>
+          <a:prstGeom prst="rect">
+            <a:avLst>
+              <a:gd name="adj" fmla="val 7692"/>
+            </a:avLst>
+          </a:prstGeom>
+          <a:solidFill>
+            <a:srgbClr val="FFFFFF"/>
+          </a:solidFill>
+          <a:ln w="12700">
+            <a:solidFill>
+              <a:srgbClr val="DB2777"/>
+            </a:solidFill>
+            <a:prstDash val="solid"/>
+          </a:ln>
+        </p:spPr>
+      </p:sp>
+      <p:sp>
+        <p:nvSpPr>
+          <p:cNvPr id="44" name="Text 42"/>
+          <p:cNvSpPr/>
+          <p:nvPr/>
+        </p:nvSpPr>
+        <p:spPr>
+          <a:xfrm>
+            <a:off x="6062472" y="4169664"/>
+            <a:ext cx="685800" cy="475488"/>
+          </a:xfrm>
+          <a:prstGeom prst="rect">
+            <a:avLst/>
+          </a:prstGeom>
+          <a:noFill/>
+          <a:ln/>
+        </p:spPr>
+        <p:txBody>
+          <a:bodyPr wrap="square" lIns="0" tIns="0" rIns="0" bIns="0" rtlCol="0" anchor="ctr"/>
+          <a:lstStyle/>
+          <a:p>
+            <a:pPr algn="ctr" indent="0" marL="0">
+              <a:buNone/>
+            </a:pPr>
+            <a:r>
+              <a:rPr lang="en-US" sz="900" b="1" dirty="0">
+                <a:solidFill>
+                  <a:srgbClr val="9D174D"/>
+                </a:solidFill>
+                <a:latin typeface="Trebuchet MS" pitchFamily="34" charset="0"/>
+                <a:ea typeface="Trebuchet MS" pitchFamily="34" charset="-122"/>
+                <a:cs typeface="Trebuchet MS" pitchFamily="34" charset="-120"/>
+              </a:rPr>
+              <a:t>r</a:t>
+            </a:r>
+            <a:endParaRPr lang="en-US" sz="900" dirty="0"/>
+          </a:p>
+        </p:txBody>
+      </p:sp>
+      <p:sp>
+        <p:nvSpPr>
+          <p:cNvPr id="45" name="Shape 43"/>
+          <p:cNvSpPr/>
+          <p:nvPr/>
+        </p:nvSpPr>
+        <p:spPr>
+          <a:xfrm>
+            <a:off x="6870192" y="4169664"/>
+            <a:ext cx="685800" cy="475488"/>
+          </a:xfrm>
+          <a:prstGeom prst="rect">
+            <a:avLst>
+              <a:gd name="adj" fmla="val 7692"/>
+            </a:avLst>
+          </a:prstGeom>
+          <a:solidFill>
+            <a:srgbClr val="FFFFFF"/>
+          </a:solidFill>
+          <a:ln w="12700">
+            <a:solidFill>
+              <a:srgbClr val="DB2777"/>
+            </a:solidFill>
+            <a:prstDash val="solid"/>
+          </a:ln>
+        </p:spPr>
+      </p:sp>
+      <p:sp>
+        <p:nvSpPr>
+          <p:cNvPr id="46" name="Text 44"/>
+          <p:cNvSpPr/>
+          <p:nvPr/>
+        </p:nvSpPr>
+        <p:spPr>
+          <a:xfrm>
+            <a:off x="6870192" y="4169664"/>
+            <a:ext cx="685800" cy="475488"/>
+          </a:xfrm>
+          <a:prstGeom prst="rect">
+            <a:avLst/>
+          </a:prstGeom>
+          <a:noFill/>
+          <a:ln/>
+        </p:spPr>
+        <p:txBody>
+          <a:bodyPr wrap="square" lIns="0" tIns="0" rIns="0" bIns="0" rtlCol="0" anchor="ctr"/>
+          <a:lstStyle/>
+          <a:p>
+            <a:pPr algn="ctr" indent="0" marL="0">
+              <a:buNone/>
+            </a:pPr>
+            <a:r>
+              <a:rPr lang="en-US" sz="900" b="1" dirty="0">
+                <a:solidFill>
+                  <a:srgbClr val="9D174D"/>
+                </a:solidFill>
+                <a:latin typeface="Trebuchet MS" pitchFamily="34" charset="0"/>
+                <a:ea typeface="Trebuchet MS" pitchFamily="34" charset="-122"/>
+                <a:cs typeface="Trebuchet MS" pitchFamily="34" charset="-120"/>
+              </a:rPr>
+              <a:t>o</a:t>
+            </a:r>
+            <a:endParaRPr lang="en-US" sz="900" dirty="0"/>
+          </a:p>
+        </p:txBody>
+      </p:sp>
+      <p:sp>
+        <p:nvSpPr>
+          <p:cNvPr id="47" name="Shape 45"/>
+          <p:cNvSpPr/>
+          <p:nvPr/>
+        </p:nvSpPr>
+        <p:spPr>
+          <a:xfrm>
+            <a:off x="7677912" y="4169664"/>
+            <a:ext cx="685800" cy="475488"/>
+          </a:xfrm>
+          <a:prstGeom prst="rect">
+            <a:avLst>
+              <a:gd name="adj" fmla="val 7692"/>
+            </a:avLst>
+          </a:prstGeom>
+          <a:solidFill>
+            <a:srgbClr val="FFFFFF"/>
+          </a:solidFill>
+          <a:ln w="12700">
+            <a:solidFill>
+              <a:srgbClr val="DB2777"/>
+            </a:solidFill>
+            <a:prstDash val="solid"/>
+          </a:ln>
+        </p:spPr>
+      </p:sp>
+      <p:sp>
+        <p:nvSpPr>
+          <p:cNvPr id="48" name="Text 46"/>
+          <p:cNvSpPr/>
+          <p:nvPr/>
+        </p:nvSpPr>
+        <p:spPr>
+          <a:xfrm>
+            <a:off x="7677912" y="4169664"/>
+            <a:ext cx="685800" cy="475488"/>
+          </a:xfrm>
+          <a:prstGeom prst="rect">
+            <a:avLst/>
+          </a:prstGeom>
+          <a:noFill/>
+          <a:ln/>
+        </p:spPr>
+        <p:txBody>
+          <a:bodyPr wrap="square" lIns="0" tIns="0" rIns="0" bIns="0" rtlCol="0" anchor="ctr"/>
+          <a:lstStyle/>
+          <a:p>
+            <a:pPr algn="ctr" indent="0" marL="0">
+              <a:buNone/>
+            </a:pPr>
+            <a:r>
+              <a:rPr lang="en-US" sz="900" b="1" dirty="0">
+                <a:solidFill>
+                  <a:srgbClr val="9D174D"/>
+                </a:solidFill>
+                <a:latin typeface="Trebuchet MS" pitchFamily="34" charset="0"/>
+                <a:ea typeface="Trebuchet MS" pitchFamily="34" charset="-122"/>
+                <a:cs typeface="Trebuchet MS" pitchFamily="34" charset="-120"/>
+              </a:rPr>
+              <a:t>ke</a:t>
             </a:r>
             <a:endParaRPr lang="en-US" sz="900" dirty="0"/>
           </a:p>
@@ -31866,7 +33084,7 @@
                 <a:ea typeface="Calibri" pitchFamily="34" charset="-122"/>
                 <a:cs typeface="Calibri" pitchFamily="34" charset="-120"/>
               </a:rPr>
-              <a:t>Word Labs  •  wordlabs.app  •  Root: 'heat' = warmth, high temperature</a:t>
+              <a:t>Word Labs  •  wordlabs.app  •  Root: 'heat' = warmth or high temperature</a:t>
             </a:r>
             <a:endParaRPr lang="en-US" sz="800" dirty="0"/>
           </a:p>
@@ -33035,7 +34253,7 @@
                 <a:ea typeface="Calibri" pitchFamily="34" charset="-122"/>
                 <a:cs typeface="Calibri" pitchFamily="34" charset="-120"/>
               </a:rPr>
-              <a:t>Word Labs  •  wordlabs.app  •  Root: 'heat' = warmth, high temperature</a:t>
+              <a:t>Word Labs  •  wordlabs.app  •  Root: 'heat' = warmth or high temperature</a:t>
             </a:r>
             <a:endParaRPr lang="en-US" sz="800" dirty="0"/>
           </a:p>
@@ -33528,7 +34746,7 @@
                 <a:ea typeface="Trebuchet MS" pitchFamily="34" charset="-122"/>
                 <a:cs typeface="Trebuchet MS" pitchFamily="34" charset="-120"/>
               </a:rPr>
-              <a:t>re-</a:t>
+              <a:t>pre-</a:t>
             </a:r>
             <a:endParaRPr lang="en-US" sz="1300" dirty="0"/>
           </a:p>
@@ -33617,7 +34835,7 @@
                 <a:ea typeface="Trebuchet MS" pitchFamily="34" charset="-122"/>
                 <a:cs typeface="Trebuchet MS" pitchFamily="34" charset="-120"/>
               </a:rPr>
-              <a:t>-ing</a:t>
+              <a:t>-er</a:t>
             </a:r>
             <a:endParaRPr lang="en-US" sz="1300" dirty="0"/>
           </a:p>
@@ -33681,7 +34899,7 @@
                 <a:ea typeface="Trebuchet MS" pitchFamily="34" charset="-122"/>
                 <a:cs typeface="Trebuchet MS" pitchFamily="34" charset="-120"/>
               </a:rPr>
-              <a:t>pre-</a:t>
+              <a:t>re-</a:t>
             </a:r>
             <a:endParaRPr lang="en-US" sz="1300" dirty="0"/>
           </a:p>
@@ -33770,7 +34988,7 @@
                 <a:ea typeface="Trebuchet MS" pitchFamily="34" charset="-122"/>
                 <a:cs typeface="Trebuchet MS" pitchFamily="34" charset="-120"/>
               </a:rPr>
-              <a:t>-er</a:t>
+              <a:t>-ing</a:t>
             </a:r>
             <a:endParaRPr lang="en-US" sz="1300" dirty="0"/>
           </a:p>
@@ -34247,7 +35465,7 @@
                 <a:ea typeface="Trebuchet MS" pitchFamily="34" charset="-122"/>
                 <a:cs typeface="Trebuchet MS" pitchFamily="34" charset="-120"/>
               </a:rPr>
-              <a:t>heating</a:t>
+              <a:t>heater</a:t>
             </a:r>
             <a:endParaRPr lang="en-US" sz="1200" dirty="0"/>
           </a:p>
@@ -34313,7 +35531,7 @@
                 <a:ea typeface="Trebuchet MS" pitchFamily="34" charset="-122"/>
                 <a:cs typeface="Trebuchet MS" pitchFamily="34" charset="-120"/>
               </a:rPr>
-              <a:t>heater</a:t>
+              <a:t>heating</a:t>
             </a:r>
             <a:endParaRPr lang="en-US" sz="1200" dirty="0"/>
           </a:p>
@@ -34379,7 +35597,7 @@
                 <a:ea typeface="Trebuchet MS" pitchFamily="34" charset="-122"/>
                 <a:cs typeface="Trebuchet MS" pitchFamily="34" charset="-120"/>
               </a:rPr>
-              <a:t>overheat</a:t>
+              <a:t>overheated</a:t>
             </a:r>
             <a:endParaRPr lang="en-US" sz="1200" dirty="0"/>
           </a:p>
@@ -34445,7 +35663,7 @@
                 <a:ea typeface="Trebuchet MS" pitchFamily="34" charset="-122"/>
                 <a:cs typeface="Trebuchet MS" pitchFamily="34" charset="-120"/>
               </a:rPr>
-              <a:t>reheat</a:t>
+              <a:t>reheated</a:t>
             </a:r>
             <a:endParaRPr lang="en-US" sz="1200" dirty="0"/>
           </a:p>
@@ -34511,7 +35729,7 @@
                 <a:ea typeface="Trebuchet MS" pitchFamily="34" charset="-122"/>
                 <a:cs typeface="Trebuchet MS" pitchFamily="34" charset="-120"/>
               </a:rPr>
-              <a:t>heatwave</a:t>
+              <a:t>preheat</a:t>
             </a:r>
             <a:endParaRPr lang="en-US" sz="1200" dirty="0"/>
           </a:p>
@@ -34577,7 +35795,7 @@
                 <a:ea typeface="Trebuchet MS" pitchFamily="34" charset="-122"/>
                 <a:cs typeface="Trebuchet MS" pitchFamily="34" charset="-120"/>
               </a:rPr>
-              <a:t>heatstroke</a:t>
+              <a:t>heatwave</a:t>
             </a:r>
             <a:endParaRPr lang="en-US" sz="1200" dirty="0"/>
           </a:p>
@@ -34643,7 +35861,7 @@
                 <a:ea typeface="Trebuchet MS" pitchFamily="34" charset="-122"/>
                 <a:cs typeface="Trebuchet MS" pitchFamily="34" charset="-120"/>
               </a:rPr>
-              <a:t>preheat</a:t>
+              <a:t>heatstroke</a:t>
             </a:r>
             <a:endParaRPr lang="en-US" sz="1200" dirty="0"/>
           </a:p>
@@ -34935,7 +36153,7 @@
                 <a:ea typeface="Calibri" pitchFamily="34" charset="-122"/>
                 <a:cs typeface="Calibri" pitchFamily="34" charset="-120"/>
               </a:rPr>
-              <a:t>Word Labs  •  wordlabs.app  •  Root: 'heat' = warmth, high temperature</a:t>
+              <a:t>Word Labs  •  wordlabs.app  •  Root: 'heat' = warmth or high temperature</a:t>
             </a:r>
             <a:endParaRPr lang="en-US" sz="800" dirty="0"/>
           </a:p>
@@ -35099,7 +36317,7 @@
                 <a:ea typeface="Calibri" pitchFamily="34" charset="-122"/>
                 <a:cs typeface="Calibri" pitchFamily="34" charset="-120"/>
               </a:rPr>
-              <a:t>The core part of a word carrying its basic meaning. For example, 'heat' means 'warmth, high temperature'.</a:t>
+              <a:t>The core part of a word carrying its basic meaning. For example, 'heat' means 'warmth or high temperature'.</a:t>
             </a:r>
             <a:endParaRPr lang="en-US" sz="1350" dirty="0"/>
           </a:p>
@@ -35719,7 +36937,7 @@
                 <a:ea typeface="Calibri" pitchFamily="34" charset="-122"/>
                 <a:cs typeface="Calibri" pitchFamily="34" charset="-120"/>
               </a:rPr>
-              <a:t>Word Labs  •  wordlabs.app  •  Root: 'heat' = warmth, high temperature</a:t>
+              <a:t>Word Labs  •  wordlabs.app  •  Root: 'heat' = warmth or high temperature</a:t>
             </a:r>
             <a:endParaRPr lang="en-US" sz="800" dirty="0"/>
           </a:p>
@@ -35831,7 +37049,7 @@
                 <a:ea typeface="Calibri" pitchFamily="34" charset="-122"/>
                 <a:cs typeface="Calibri" pitchFamily="34" charset="-120"/>
               </a:rPr>
-              <a:t>1.  The word 'reheat' means to make something hot again.</a:t>
+              <a:t>1.  The prefix 're' in 'reheated' means before.</a:t>
             </a:r>
             <a:endParaRPr lang="en-US" sz="1300" dirty="0"/>
           </a:p>
@@ -35854,11 +37072,11 @@
             </a:avLst>
           </a:prstGeom>
           <a:solidFill>
-            <a:srgbClr val="DCFCE7"/>
-          </a:solidFill>
-          <a:ln w="12700">
-            <a:solidFill>
-              <a:srgbClr val="16A34A"/>
+            <a:srgbClr val="FEE2E2"/>
+          </a:solidFill>
+          <a:ln w="12700">
+            <a:solidFill>
+              <a:srgbClr val="DC2626"/>
             </a:solidFill>
             <a:prstDash val="solid"/>
           </a:ln>
@@ -35891,13 +37109,13 @@
             <a:r>
               <a:rPr lang="en-US" sz="1100" b="1" dirty="0">
                 <a:solidFill>
-                  <a:srgbClr val="16A34A"/>
+                  <a:srgbClr val="DC2626"/>
                 </a:solidFill>
                 <a:latin typeface="Trebuchet MS" pitchFamily="34" charset="0"/>
                 <a:ea typeface="Trebuchet MS" pitchFamily="34" charset="-122"/>
                 <a:cs typeface="Trebuchet MS" pitchFamily="34" charset="-120"/>
               </a:rPr>
-              <a:t>TRUE</a:t>
+              <a:t>FALSE</a:t>
             </a:r>
             <a:endParaRPr lang="en-US" sz="1100" dirty="0"/>
           </a:p>
@@ -35970,7 +37188,7 @@
                 <a:ea typeface="Calibri" pitchFamily="34" charset="-122"/>
                 <a:cs typeface="Calibri" pitchFamily="34" charset="-120"/>
               </a:rPr>
-              <a:t>2.  The word 'heater' means a type of cold weather.</a:t>
+              <a:t>2.  A heatwave is a type of ocean wave caused by warm water.</a:t>
             </a:r>
             <a:endParaRPr lang="en-US" sz="1300" dirty="0"/>
           </a:p>
@@ -36109,7 +37327,7 @@
                 <a:ea typeface="Calibri" pitchFamily="34" charset="-122"/>
                 <a:cs typeface="Calibri" pitchFamily="34" charset="-120"/>
               </a:rPr>
-              <a:t>3.  A heatwave is a long period of very hot weather.</a:t>
+              <a:t>3.  The root 'heat' can be found in the word 'overheated'.</a:t>
             </a:r>
             <a:endParaRPr lang="en-US" sz="1300" dirty="0"/>
           </a:p>
@@ -36248,7 +37466,7 @@
                 <a:ea typeface="Calibri" pitchFamily="34" charset="-122"/>
                 <a:cs typeface="Calibri" pitchFamily="34" charset="-120"/>
               </a:rPr>
-              <a:t>4.  Heatstroke is a serious condition caused by the body overheating.</a:t>
+              <a:t>4.  Heatstroke is a condition that can happen in very hot weather.</a:t>
             </a:r>
             <a:endParaRPr lang="en-US" sz="1300" dirty="0"/>
           </a:p>
@@ -36387,7 +37605,7 @@
                 <a:ea typeface="Calibri" pitchFamily="34" charset="-122"/>
                 <a:cs typeface="Calibri" pitchFamily="34" charset="-120"/>
               </a:rPr>
-              <a:t>5.  The prefix 'pre' in 'preheat' means after.</a:t>
+              <a:t>5.  The word 'preheat' means to heat something before use.</a:t>
             </a:r>
             <a:endParaRPr lang="en-US" sz="1300" dirty="0"/>
           </a:p>
@@ -36410,11 +37628,11 @@
             </a:avLst>
           </a:prstGeom>
           <a:solidFill>
-            <a:srgbClr val="FEE2E2"/>
-          </a:solidFill>
-          <a:ln w="12700">
-            <a:solidFill>
-              <a:srgbClr val="DC2626"/>
+            <a:srgbClr val="DCFCE7"/>
+          </a:solidFill>
+          <a:ln w="12700">
+            <a:solidFill>
+              <a:srgbClr val="16A34A"/>
             </a:solidFill>
             <a:prstDash val="solid"/>
           </a:ln>
@@ -36447,13 +37665,13 @@
             <a:r>
               <a:rPr lang="en-US" sz="1100" b="1" dirty="0">
                 <a:solidFill>
-                  <a:srgbClr val="DC2626"/>
+                  <a:srgbClr val="16A34A"/>
                 </a:solidFill>
                 <a:latin typeface="Trebuchet MS" pitchFamily="34" charset="0"/>
                 <a:ea typeface="Trebuchet MS" pitchFamily="34" charset="-122"/>
                 <a:cs typeface="Trebuchet MS" pitchFamily="34" charset="-120"/>
               </a:rPr>
-              <a:t>FALSE</a:t>
+              <a:t>TRUE</a:t>
             </a:r>
             <a:endParaRPr lang="en-US" sz="1100" dirty="0"/>
           </a:p>
@@ -36745,7 +37963,7 @@
                 <a:ea typeface="Calibri" pitchFamily="34" charset="-122"/>
                 <a:cs typeface="Calibri" pitchFamily="34" charset="-120"/>
               </a:rPr>
-              <a:t>Word Labs  •  wordlabs.app  •  Root: 'heat' = warmth, high temperature</a:t>
+              <a:t>Word Labs  •  wordlabs.app  •  Root: 'heat' = warmth or high temperature</a:t>
             </a:r>
             <a:endParaRPr lang="en-US" sz="800" dirty="0"/>
           </a:p>
@@ -36882,7 +38100,7 @@
                 <a:ea typeface="Trebuchet MS" pitchFamily="34" charset="-122"/>
                 <a:cs typeface="Trebuchet MS" pitchFamily="34" charset="-120"/>
               </a:rPr>
-              <a:t>warmth, high temperature</a:t>
+              <a:t>warmth or high temperature</a:t>
             </a:r>
             <a:endParaRPr lang="en-US" sz="2000" dirty="0"/>
           </a:p>
@@ -37092,7 +38310,7 @@
                 <a:ea typeface="Trebuchet MS" pitchFamily="34" charset="-122"/>
                 <a:cs typeface="Trebuchet MS" pitchFamily="34" charset="-120"/>
               </a:rPr>
-              <a:t>heating</a:t>
+              <a:t>heater</a:t>
             </a:r>
             <a:endParaRPr lang="en-US" sz="1300" dirty="0"/>
           </a:p>
@@ -37158,7 +38376,7 @@
                 <a:ea typeface="Trebuchet MS" pitchFamily="34" charset="-122"/>
                 <a:cs typeface="Trebuchet MS" pitchFamily="34" charset="-120"/>
               </a:rPr>
-              <a:t>heater</a:t>
+              <a:t>heating</a:t>
             </a:r>
             <a:endParaRPr lang="en-US" sz="1300" dirty="0"/>
           </a:p>
@@ -37224,7 +38442,7 @@
                 <a:ea typeface="Trebuchet MS" pitchFamily="34" charset="-122"/>
                 <a:cs typeface="Trebuchet MS" pitchFamily="34" charset="-120"/>
               </a:rPr>
-              <a:t>overheat</a:t>
+              <a:t>overheated</a:t>
             </a:r>
             <a:endParaRPr lang="en-US" sz="1300" dirty="0"/>
           </a:p>
@@ -37290,7 +38508,7 @@
                 <a:ea typeface="Trebuchet MS" pitchFamily="34" charset="-122"/>
                 <a:cs typeface="Trebuchet MS" pitchFamily="34" charset="-120"/>
               </a:rPr>
-              <a:t>reheat</a:t>
+              <a:t>reheated</a:t>
             </a:r>
             <a:endParaRPr lang="en-US" sz="1300" dirty="0"/>
           </a:p>
@@ -37356,7 +38574,7 @@
                 <a:ea typeface="Trebuchet MS" pitchFamily="34" charset="-122"/>
                 <a:cs typeface="Trebuchet MS" pitchFamily="34" charset="-120"/>
               </a:rPr>
-              <a:t>heatwave</a:t>
+              <a:t>preheat</a:t>
             </a:r>
             <a:endParaRPr lang="en-US" sz="1300" dirty="0"/>
           </a:p>
@@ -37422,7 +38640,7 @@
                 <a:ea typeface="Trebuchet MS" pitchFamily="34" charset="-122"/>
                 <a:cs typeface="Trebuchet MS" pitchFamily="34" charset="-120"/>
               </a:rPr>
-              <a:t>heatstroke</a:t>
+              <a:t>heatwave</a:t>
             </a:r>
             <a:endParaRPr lang="en-US" sz="1300" dirty="0"/>
           </a:p>
@@ -37714,7 +38932,7 @@
                 <a:ea typeface="Calibri" pitchFamily="34" charset="-122"/>
                 <a:cs typeface="Calibri" pitchFamily="34" charset="-120"/>
               </a:rPr>
-              <a:t>Word Labs  •  wordlabs.app  •  Root: 'heat' = warmth, high temperature</a:t>
+              <a:t>Word Labs  •  wordlabs.app  •  Root: 'heat' = warmth or high temperature</a:t>
             </a:r>
             <a:endParaRPr lang="en-US" sz="800" dirty="0"/>
           </a:p>
@@ -38207,7 +39425,7 @@
                 <a:ea typeface="Trebuchet MS" pitchFamily="34" charset="-122"/>
                 <a:cs typeface="Trebuchet MS" pitchFamily="34" charset="-120"/>
               </a:rPr>
-              <a:t>re-</a:t>
+              <a:t>pre-</a:t>
             </a:r>
             <a:endParaRPr lang="en-US" sz="1300" dirty="0"/>
           </a:p>
@@ -38296,7 +39514,7 @@
                 <a:ea typeface="Trebuchet MS" pitchFamily="34" charset="-122"/>
                 <a:cs typeface="Trebuchet MS" pitchFamily="34" charset="-120"/>
               </a:rPr>
-              <a:t>-ing</a:t>
+              <a:t>-er</a:t>
             </a:r>
             <a:endParaRPr lang="en-US" sz="1300" dirty="0"/>
           </a:p>
@@ -38360,7 +39578,7 @@
                 <a:ea typeface="Trebuchet MS" pitchFamily="34" charset="-122"/>
                 <a:cs typeface="Trebuchet MS" pitchFamily="34" charset="-120"/>
               </a:rPr>
-              <a:t>pre-</a:t>
+              <a:t>re-</a:t>
             </a:r>
             <a:endParaRPr lang="en-US" sz="1300" dirty="0"/>
           </a:p>
@@ -38449,7 +39667,7 @@
                 <a:ea typeface="Trebuchet MS" pitchFamily="34" charset="-122"/>
                 <a:cs typeface="Trebuchet MS" pitchFamily="34" charset="-120"/>
               </a:rPr>
-              <a:t>-er</a:t>
+              <a:t>-ing</a:t>
             </a:r>
             <a:endParaRPr lang="en-US" sz="1300" dirty="0"/>
           </a:p>
@@ -39488,7 +40706,7 @@
                 <a:ea typeface="Calibri" pitchFamily="34" charset="-122"/>
                 <a:cs typeface="Calibri" pitchFamily="34" charset="-120"/>
               </a:rPr>
-              <a:t>Word Labs  •  wordlabs.app  •  Root: 'heat' = warmth, high temperature</a:t>
+              <a:t>Word Labs  •  wordlabs.app  •  Root: 'heat' = warmth or high temperature</a:t>
             </a:r>
             <a:endParaRPr lang="en-US" sz="800" dirty="0"/>
           </a:p>
@@ -39666,7 +40884,7 @@
                 <a:ea typeface="Calibri" pitchFamily="34" charset="-122"/>
                 <a:cs typeface="Calibri" pitchFamily="34" charset="-120"/>
               </a:rPr>
-              <a:t>To make something hot again, like reheating leftovers in the microwave.</a:t>
+              <a:t>When food or liquid has been warmed up again after going cold.</a:t>
             </a:r>
             <a:endParaRPr lang="en-US" sz="1200" dirty="0"/>
           </a:p>
@@ -39739,7 +40957,7 @@
                 <a:ea typeface="Trebuchet MS" pitchFamily="34" charset="-122"/>
                 <a:cs typeface="Trebuchet MS" pitchFamily="34" charset="-120"/>
               </a:rPr>
-              <a:t>heating</a:t>
+              <a:t>heater</a:t>
             </a:r>
             <a:endParaRPr lang="en-US" sz="1200" dirty="0"/>
           </a:p>
@@ -39805,7 +41023,7 @@
                 <a:ea typeface="Calibri" pitchFamily="34" charset="-122"/>
                 <a:cs typeface="Calibri" pitchFamily="34" charset="-120"/>
               </a:rPr>
-              <a:t>A machine or device that makes a room or space warm.</a:t>
+              <a:t>The process of making something warm, like the heating system in a building.</a:t>
             </a:r>
             <a:endParaRPr lang="en-US" sz="1200" dirty="0"/>
           </a:p>
@@ -39878,7 +41096,7 @@
                 <a:ea typeface="Trebuchet MS" pitchFamily="34" charset="-122"/>
                 <a:cs typeface="Trebuchet MS" pitchFamily="34" charset="-120"/>
               </a:rPr>
-              <a:t>heater</a:t>
+              <a:t>heating</a:t>
             </a:r>
             <a:endParaRPr lang="en-US" sz="1200" dirty="0"/>
           </a:p>
@@ -39944,7 +41162,7 @@
                 <a:ea typeface="Calibri" pitchFamily="34" charset="-122"/>
                 <a:cs typeface="Calibri" pitchFamily="34" charset="-120"/>
               </a:rPr>
-              <a:t>A long stretch of very hot weather, usually lasting several days.</a:t>
+              <a:t>To heat something like an oven before you start cooking.</a:t>
             </a:r>
             <a:endParaRPr lang="en-US" sz="1200" dirty="0"/>
           </a:p>
@@ -40017,7 +41235,7 @@
                 <a:ea typeface="Trebuchet MS" pitchFamily="34" charset="-122"/>
                 <a:cs typeface="Trebuchet MS" pitchFamily="34" charset="-120"/>
               </a:rPr>
-              <a:t>overheat</a:t>
+              <a:t>overheated</a:t>
             </a:r>
             <a:endParaRPr lang="en-US" sz="1200" dirty="0"/>
           </a:p>
@@ -40083,7 +41301,7 @@
                 <a:ea typeface="Calibri" pitchFamily="34" charset="-122"/>
                 <a:cs typeface="Calibri" pitchFamily="34" charset="-120"/>
               </a:rPr>
-              <a:t>To become too hot, like when a car engine gets too hot and stops working.</a:t>
+              <a:t>When something has become too hot, like a car engine that gets too warm.</a:t>
             </a:r>
             <a:endParaRPr lang="en-US" sz="1200" dirty="0"/>
           </a:p>
@@ -40156,7 +41374,7 @@
                 <a:ea typeface="Trebuchet MS" pitchFamily="34" charset="-122"/>
                 <a:cs typeface="Trebuchet MS" pitchFamily="34" charset="-120"/>
               </a:rPr>
-              <a:t>reheat</a:t>
+              <a:t>reheated</a:t>
             </a:r>
             <a:endParaRPr lang="en-US" sz="1200" dirty="0"/>
           </a:p>
@@ -40222,7 +41440,7 @@
                 <a:ea typeface="Calibri" pitchFamily="34" charset="-122"/>
                 <a:cs typeface="Calibri" pitchFamily="34" charset="-120"/>
               </a:rPr>
-              <a:t>Made warm or hot, or used to describe an angry argument.</a:t>
+              <a:t>Made warm or hot, or used to describe an argument that became very intense.</a:t>
             </a:r>
             <a:endParaRPr lang="en-US" sz="1200" dirty="0"/>
           </a:p>
@@ -40295,7 +41513,7 @@
                 <a:ea typeface="Trebuchet MS" pitchFamily="34" charset="-122"/>
                 <a:cs typeface="Trebuchet MS" pitchFamily="34" charset="-120"/>
               </a:rPr>
-              <a:t>heatwave</a:t>
+              <a:t>preheat</a:t>
             </a:r>
             <a:endParaRPr lang="en-US" sz="1200" dirty="0"/>
           </a:p>
@@ -40361,7 +41579,7 @@
                 <a:ea typeface="Calibri" pitchFamily="34" charset="-122"/>
                 <a:cs typeface="Calibri" pitchFamily="34" charset="-120"/>
               </a:rPr>
-              <a:t>A serious illness caused by your body getting too hot in the sun.</a:t>
+              <a:t>A long stretch of unusually hot weather that can last for days or weeks.</a:t>
             </a:r>
             <a:endParaRPr lang="en-US" sz="1200" dirty="0"/>
           </a:p>
@@ -40434,7 +41652,7 @@
                 <a:ea typeface="Trebuchet MS" pitchFamily="34" charset="-122"/>
                 <a:cs typeface="Trebuchet MS" pitchFamily="34" charset="-120"/>
               </a:rPr>
-              <a:t>heatstroke</a:t>
+              <a:t>heatwave</a:t>
             </a:r>
             <a:endParaRPr lang="en-US" sz="1200" dirty="0"/>
           </a:p>
@@ -40500,7 +41718,7 @@
                 <a:ea typeface="Calibri" pitchFamily="34" charset="-122"/>
                 <a:cs typeface="Calibri" pitchFamily="34" charset="-120"/>
               </a:rPr>
-              <a:t>The process of making something warm, like a heater in your home.</a:t>
+              <a:t>A machine or device used to make a room or water warm.</a:t>
             </a:r>
             <a:endParaRPr lang="en-US" sz="1200" dirty="0"/>
           </a:p>
@@ -40792,7 +42010,7 @@
                 <a:ea typeface="Calibri" pitchFamily="34" charset="-122"/>
                 <a:cs typeface="Calibri" pitchFamily="34" charset="-120"/>
               </a:rPr>
-              <a:t>Word Labs  •  wordlabs.app  •  Root: 'heat' = warmth, high temperature</a:t>
+              <a:t>Word Labs  •  wordlabs.app  •  Root: 'heat' = warmth or high temperature</a:t>
             </a:r>
             <a:endParaRPr lang="en-US" sz="800" dirty="0"/>
           </a:p>
@@ -40995,7 +42213,7 @@
                 <a:ea typeface="Calibri" pitchFamily="34" charset="-122"/>
                 <a:cs typeface="Calibri" pitchFamily="34" charset="-120"/>
               </a:rPr>
-              <a:t>Remember to preheat the oven to 180 degrees before you put the cake batter in.</a:t>
+              <a:t>Remember to preheat the oven to 180 degrees before you put the cake inside.</a:t>
             </a:r>
             <a:endParaRPr lang="en-US" sz="1500" dirty="0"/>
           </a:p>
@@ -41159,7 +42377,7 @@
                 <a:ea typeface="Calibri" pitchFamily="34" charset="-122"/>
                 <a:cs typeface="Calibri" pitchFamily="34" charset="-120"/>
               </a:rPr>
-              <a:t>The mechanic warned us that the car engine might overheat on a long drive in summer.</a:t>
+              <a:t>After playing sport in the sun all afternoon, the coach warned the students about the dangers of heatstroke.</a:t>
             </a:r>
             <a:endParaRPr lang="en-US" sz="1500" dirty="0"/>
           </a:p>
@@ -41323,7 +42541,7 @@
                 <a:ea typeface="Calibri" pitchFamily="34" charset="-122"/>
                 <a:cs typeface="Calibri" pitchFamily="34" charset="-120"/>
               </a:rPr>
-              <a:t>During the heatwave, our teacher let us sit in the shade and drink plenty of water.</a:t>
+              <a:t>The mechanic said the car had overheated because it did not have enough water in the engine.</a:t>
             </a:r>
             <a:endParaRPr lang="en-US" sz="1500" dirty="0"/>
           </a:p>

--- a/output/wordlabs-heat-3day.pptx
+++ b/output/wordlabs-heat-3day.pptx
@@ -4240,7 +4240,7 @@
                 <a:ea typeface="Calibri" pitchFamily="34" charset="-122"/>
                 <a:cs typeface="Calibri" pitchFamily="34" charset="-120"/>
               </a:rPr>
-              <a:t>"warmth or high temperature"</a:t>
+              <a:t>"warmth; to make warm"</a:t>
             </a:r>
             <a:endParaRPr lang="en-US" sz="2200" dirty="0"/>
           </a:p>
@@ -4279,7 +4279,7 @@
                 <a:ea typeface="Calibri" pitchFamily="34" charset="-122"/>
                 <a:cs typeface="Calibri" pitchFamily="34" charset="-120"/>
               </a:rPr>
-              <a:t>Origin: Latin: calor</a:t>
+              <a:t>Origin: Anglo-Saxon (Old English) root</a:t>
             </a:r>
             <a:endParaRPr lang="en-US" sz="1300" dirty="0"/>
           </a:p>
@@ -5288,7 +5288,7 @@
                 <a:ea typeface="Calibri" pitchFamily="34" charset="-122"/>
                 <a:cs typeface="Calibri" pitchFamily="34" charset="-120"/>
               </a:rPr>
-              <a:t>Word Labs  •  wordlabs.app  •  Root: 'heat' = warmth or high temperature</a:t>
+              <a:t>Word Labs  •  wordlabs.app  •  Root: 'heat' = warmth; to make warm</a:t>
             </a:r>
             <a:endParaRPr lang="en-US" sz="800" dirty="0"/>
           </a:p>
@@ -5622,7 +5622,7 @@
                 <a:ea typeface="Trebuchet MS" pitchFamily="34" charset="-122"/>
                 <a:cs typeface="Trebuchet MS" pitchFamily="34" charset="-120"/>
               </a:rPr>
-              <a:t>1</a:t>
+              <a:t>0</a:t>
             </a:r>
             <a:pPr algn="ctr" indent="0" marL="0">
               <a:buNone/>
@@ -5928,7 +5928,7 @@
                 <a:ea typeface="Calibri" pitchFamily="34" charset="-122"/>
                 <a:cs typeface="Calibri" pitchFamily="34" charset="-120"/>
               </a:rPr>
-              <a:t>Word Labs  •  wordlabs.app  •  Root: 'heat' = warmth or high temperature</a:t>
+              <a:t>Word Labs  •  wordlabs.app  •  Root: 'heat' = warmth; to make warm</a:t>
             </a:r>
             <a:endParaRPr lang="en-US" sz="800" dirty="0"/>
           </a:p>
@@ -6032,20 +6032,6 @@
               <a:buNone/>
             </a:pPr>
             <a:r>
-              <a:rPr lang="en-US" sz="1800" dirty="0">
-                <a:solidFill>
-                  <a:srgbClr val="0F172A"/>
-                </a:solidFill>
-                <a:latin typeface="Calibri" pitchFamily="34" charset="0"/>
-                <a:ea typeface="Calibri" pitchFamily="34" charset="-122"/>
-                <a:cs typeface="Calibri" pitchFamily="34" charset="-120"/>
-              </a:rPr>
-              <a:t>Make sure you </a:t>
-            </a:r>
-            <a:pPr algn="l" indent="0" marL="0">
-              <a:buNone/>
-            </a:pPr>
-            <a:r>
               <a:rPr lang="en-US" sz="1800" b="1" dirty="0">
                 <a:solidFill>
                   <a:srgbClr val="0D9488"/>
@@ -6057,7 +6043,7 @@
                 <a:ea typeface="Calibri" pitchFamily="34" charset="-122"/>
                 <a:cs typeface="Calibri" pitchFamily="34" charset="-120"/>
               </a:rPr>
-              <a:t>preheat</a:t>
+              <a:t>Reheating</a:t>
             </a:r>
             <a:pPr algn="l" indent="0" marL="0">
               <a:buNone/>
@@ -6071,7 +6057,7 @@
                 <a:ea typeface="Calibri" pitchFamily="34" charset="-122"/>
                 <a:cs typeface="Calibri" pitchFamily="34" charset="-120"/>
               </a:rPr>
-              <a:t> the oven, because </a:t>
+              <a:t> leftovers is a great way to avoid wasting food. </a:t>
             </a:r>
             <a:pPr algn="l" indent="0" marL="0">
               <a:buNone/>
@@ -6088,7 +6074,7 @@
                 <a:ea typeface="Calibri" pitchFamily="34" charset="-122"/>
                 <a:cs typeface="Calibri" pitchFamily="34" charset="-120"/>
               </a:rPr>
-              <a:t>reheated</a:t>
+              <a:t>Preheating</a:t>
             </a:r>
             <a:pPr algn="l" indent="0" marL="0">
               <a:buNone/>
@@ -6102,7 +6088,7 @@
                 <a:ea typeface="Calibri" pitchFamily="34" charset="-122"/>
                 <a:cs typeface="Calibri" pitchFamily="34" charset="-120"/>
               </a:rPr>
-              <a:t> pizza always tastes better when it is properly warmed through.</a:t>
+              <a:t> the oven usually takes about ten minutes.</a:t>
             </a:r>
             <a:endParaRPr lang="en-US" sz="1800" dirty="0"/>
           </a:p>
@@ -6257,7 +6243,7 @@
                 <a:ea typeface="Trebuchet MS" pitchFamily="34" charset="-122"/>
                 <a:cs typeface="Trebuchet MS" pitchFamily="34" charset="-120"/>
               </a:rPr>
-              <a:t>preheat</a:t>
+              <a:t>reheating</a:t>
             </a:r>
             <a:endParaRPr lang="en-US" sz="1400" dirty="0"/>
           </a:p>
@@ -6385,7 +6371,7 @@
                 <a:ea typeface="Trebuchet MS" pitchFamily="34" charset="-122"/>
                 <a:cs typeface="Trebuchet MS" pitchFamily="34" charset="-120"/>
               </a:rPr>
-              <a:t>reheated</a:t>
+              <a:t>preheating</a:t>
             </a:r>
             <a:endParaRPr lang="en-US" sz="1400" dirty="0"/>
           </a:p>
@@ -6716,7 +6702,7 @@
                 <a:ea typeface="Calibri" pitchFamily="34" charset="-122"/>
                 <a:cs typeface="Calibri" pitchFamily="34" charset="-120"/>
               </a:rPr>
-              <a:t>Word Labs  •  wordlabs.app  •  Root: 'heat' = warmth or high temperature</a:t>
+              <a:t>Word Labs  •  wordlabs.app  •  Root: 'heat' = warmth; to make warm</a:t>
             </a:r>
             <a:endParaRPr lang="en-US" sz="800" dirty="0"/>
           </a:p>
@@ -6855,7 +6841,7 @@
                 <a:ea typeface="Trebuchet MS" pitchFamily="34" charset="-122"/>
                 <a:cs typeface="Trebuchet MS" pitchFamily="34" charset="-120"/>
               </a:rPr>
-              <a:t>preheat</a:t>
+              <a:t>reheating</a:t>
             </a:r>
             <a:endParaRPr lang="en-US" sz="2800" dirty="0"/>
           </a:p>
@@ -7543,7 +7529,7 @@
                 <a:ea typeface="Calibri" pitchFamily="34" charset="-122"/>
                 <a:cs typeface="Calibri" pitchFamily="34" charset="-120"/>
               </a:rPr>
-              <a:t>Word Labs  •  wordlabs.app  •  Root: 'heat' = warmth or high temperature</a:t>
+              <a:t>Word Labs  •  wordlabs.app  •  Root: 'heat' = warmth; to make warm</a:t>
             </a:r>
             <a:endParaRPr lang="en-US" sz="800" dirty="0"/>
           </a:p>
@@ -7682,7 +7668,7 @@
                 <a:ea typeface="Trebuchet MS" pitchFamily="34" charset="-122"/>
                 <a:cs typeface="Trebuchet MS" pitchFamily="34" charset="-120"/>
               </a:rPr>
-              <a:t>preheat</a:t>
+              <a:t>reheating</a:t>
             </a:r>
             <a:endParaRPr lang="en-US" sz="2800" dirty="0"/>
           </a:p>
@@ -7762,7 +7748,7 @@
         </p:nvSpPr>
         <p:spPr>
           <a:xfrm>
-            <a:off x="2938272" y="2258568"/>
+            <a:off x="2221992" y="2258568"/>
             <a:ext cx="1828800" cy="292608"/>
           </a:xfrm>
           <a:prstGeom prst="rect">
@@ -7796,7 +7782,7 @@
         </p:nvSpPr>
         <p:spPr>
           <a:xfrm>
-            <a:off x="2938272" y="2258568"/>
+            <a:off x="2221992" y="2258568"/>
             <a:ext cx="1828800" cy="292608"/>
           </a:xfrm>
           <a:prstGeom prst="rect">
@@ -7821,7 +7807,7 @@
                 <a:ea typeface="Trebuchet MS" pitchFamily="34" charset="-122"/>
                 <a:cs typeface="Trebuchet MS" pitchFamily="34" charset="-120"/>
               </a:rPr>
-              <a:t>pre</a:t>
+              <a:t>re</a:t>
             </a:r>
             <a:endParaRPr lang="en-US" sz="1300" dirty="0"/>
           </a:p>
@@ -7835,7 +7821,7 @@
         </p:nvSpPr>
         <p:spPr>
           <a:xfrm>
-            <a:off x="2938272" y="2569464"/>
+            <a:off x="2221992" y="2569464"/>
             <a:ext cx="1828800" cy="201168"/>
           </a:xfrm>
           <a:prstGeom prst="rect">
@@ -7860,7 +7846,7 @@
                 <a:ea typeface="Calibri" pitchFamily="34" charset="-122"/>
                 <a:cs typeface="Calibri" pitchFamily="34" charset="-120"/>
               </a:rPr>
-              <a:t>before</a:t>
+              <a:t>again</a:t>
             </a:r>
             <a:endParaRPr lang="en-US" sz="850" dirty="0"/>
           </a:p>
@@ -7874,7 +7860,7 @@
         </p:nvSpPr>
         <p:spPr>
           <a:xfrm>
-            <a:off x="5803392" y="2258568"/>
+            <a:off x="4370832" y="2258568"/>
             <a:ext cx="1828800" cy="292608"/>
           </a:xfrm>
           <a:prstGeom prst="rect">
@@ -7908,7 +7894,7 @@
         </p:nvSpPr>
         <p:spPr>
           <a:xfrm>
-            <a:off x="5803392" y="2258568"/>
+            <a:off x="4370832" y="2258568"/>
             <a:ext cx="1828800" cy="292608"/>
           </a:xfrm>
           <a:prstGeom prst="rect">
@@ -7947,7 +7933,7 @@
         </p:nvSpPr>
         <p:spPr>
           <a:xfrm>
-            <a:off x="5803392" y="2569464"/>
+            <a:off x="4370832" y="2569464"/>
             <a:ext cx="1828800" cy="201168"/>
           </a:xfrm>
           <a:prstGeom prst="rect">
@@ -7972,7 +7958,7 @@
                 <a:ea typeface="Calibri" pitchFamily="34" charset="-122"/>
                 <a:cs typeface="Calibri" pitchFamily="34" charset="-120"/>
               </a:rPr>
-              <a:t>warmth or high temperature</a:t>
+              <a:t>warmth; to make warm</a:t>
             </a:r>
             <a:endParaRPr lang="en-US" sz="850" dirty="0"/>
           </a:p>
@@ -7981,6 +7967,118 @@
       <p:sp>
         <p:nvSpPr>
           <p:cNvPr id="22" name="Shape 20"/>
+          <p:cNvSpPr/>
+          <p:nvPr/>
+        </p:nvSpPr>
+        <p:spPr>
+          <a:xfrm>
+            <a:off x="6519672" y="2258568"/>
+            <a:ext cx="1828800" cy="292608"/>
+          </a:xfrm>
+          <a:prstGeom prst="rect">
+            <a:avLst>
+              <a:gd name="adj" fmla="val 25000"/>
+            </a:avLst>
+          </a:prstGeom>
+          <a:solidFill>
+            <a:srgbClr val="FCE7F3"/>
+          </a:solidFill>
+          <a:ln w="19050">
+            <a:solidFill>
+              <a:srgbClr val="DB2777"/>
+            </a:solidFill>
+            <a:prstDash val="solid"/>
+          </a:ln>
+          <a:effectLst>
+            <a:outerShdw sx="100000" sy="100000" kx="0" ky="0" algn="bl" rotWithShape="0" blurRad="101600" dist="38100" dir="8100000">
+              <a:srgbClr val="000000">
+                <a:alpha val="12000"/>
+              </a:srgbClr>
+            </a:outerShdw>
+          </a:effectLst>
+        </p:spPr>
+      </p:sp>
+      <p:sp>
+        <p:nvSpPr>
+          <p:cNvPr id="23" name="Text 21"/>
+          <p:cNvSpPr/>
+          <p:nvPr/>
+        </p:nvSpPr>
+        <p:spPr>
+          <a:xfrm>
+            <a:off x="6519672" y="2258568"/>
+            <a:ext cx="1828800" cy="292608"/>
+          </a:xfrm>
+          <a:prstGeom prst="rect">
+            <a:avLst/>
+          </a:prstGeom>
+          <a:noFill/>
+          <a:ln/>
+        </p:spPr>
+        <p:txBody>
+          <a:bodyPr wrap="square" lIns="0" tIns="0" rIns="0" bIns="0" rtlCol="0" anchor="ctr"/>
+          <a:lstStyle/>
+          <a:p>
+            <a:pPr algn="ctr" indent="0" marL="0">
+              <a:buNone/>
+            </a:pPr>
+            <a:r>
+              <a:rPr lang="en-US" sz="1300" b="1" dirty="0">
+                <a:solidFill>
+                  <a:srgbClr val="9D174D"/>
+                </a:solidFill>
+                <a:latin typeface="Trebuchet MS" pitchFamily="34" charset="0"/>
+                <a:ea typeface="Trebuchet MS" pitchFamily="34" charset="-122"/>
+                <a:cs typeface="Trebuchet MS" pitchFamily="34" charset="-120"/>
+              </a:rPr>
+              <a:t>ing</a:t>
+            </a:r>
+            <a:endParaRPr lang="en-US" sz="1300" dirty="0"/>
+          </a:p>
+        </p:txBody>
+      </p:sp>
+      <p:sp>
+        <p:nvSpPr>
+          <p:cNvPr id="24" name="Text 22"/>
+          <p:cNvSpPr/>
+          <p:nvPr/>
+        </p:nvSpPr>
+        <p:spPr>
+          <a:xfrm>
+            <a:off x="6519672" y="2569464"/>
+            <a:ext cx="1828800" cy="201168"/>
+          </a:xfrm>
+          <a:prstGeom prst="rect">
+            <a:avLst/>
+          </a:prstGeom>
+          <a:noFill/>
+          <a:ln/>
+        </p:spPr>
+        <p:txBody>
+          <a:bodyPr wrap="square" lIns="0" tIns="0" rIns="0" bIns="0" rtlCol="0" anchor="t"/>
+          <a:lstStyle/>
+          <a:p>
+            <a:pPr algn="ctr" indent="0" marL="0">
+              <a:buNone/>
+            </a:pPr>
+            <a:r>
+              <a:rPr lang="en-US" sz="850" dirty="0">
+                <a:solidFill>
+                  <a:srgbClr val="475569"/>
+                </a:solidFill>
+                <a:latin typeface="Calibri" pitchFamily="34" charset="0"/>
+                <a:ea typeface="Calibri" pitchFamily="34" charset="-122"/>
+                <a:cs typeface="Calibri" pitchFamily="34" charset="-120"/>
+              </a:rPr>
+              <a:t>happening now</a:t>
+            </a:r>
+            <a:endParaRPr lang="en-US" sz="850" dirty="0"/>
+          </a:p>
+        </p:txBody>
+      </p:sp>
+      <p:sp>
+        <p:nvSpPr>
+          <p:cNvPr id="25" name="Shape 23"/>
           <p:cNvSpPr/>
           <p:nvPr/>
         </p:nvSpPr>
@@ -8007,7 +8105,7 @@
       </p:sp>
       <p:sp>
         <p:nvSpPr>
-          <p:cNvPr id="23" name="Text 21"/>
+          <p:cNvPr id="26" name="Text 24"/>
           <p:cNvSpPr/>
           <p:nvPr/>
         </p:nvSpPr>
@@ -8046,7 +8144,7 @@
       </p:sp>
       <p:sp>
         <p:nvSpPr>
-          <p:cNvPr id="24" name="Shape 22"/>
+          <p:cNvPr id="27" name="Shape 25"/>
           <p:cNvSpPr/>
           <p:nvPr/>
         </p:nvSpPr>
@@ -8073,7 +8171,7 @@
       </p:sp>
       <p:sp>
         <p:nvSpPr>
-          <p:cNvPr id="25" name="Text 23"/>
+          <p:cNvPr id="28" name="Text 26"/>
           <p:cNvSpPr/>
           <p:nvPr/>
         </p:nvSpPr>
@@ -8112,7 +8210,7 @@
       </p:sp>
       <p:sp>
         <p:nvSpPr>
-          <p:cNvPr id="26" name="Shape 24"/>
+          <p:cNvPr id="29" name="Shape 27"/>
           <p:cNvSpPr/>
           <p:nvPr/>
         </p:nvSpPr>
@@ -8139,7 +8237,7 @@
       </p:sp>
       <p:sp>
         <p:nvSpPr>
-          <p:cNvPr id="27" name="Text 25"/>
+          <p:cNvPr id="30" name="Text 28"/>
           <p:cNvSpPr/>
           <p:nvPr/>
         </p:nvSpPr>
@@ -8178,7 +8276,7 @@
       </p:sp>
       <p:sp>
         <p:nvSpPr>
-          <p:cNvPr id="28" name="Shape 26"/>
+          <p:cNvPr id="31" name="Shape 29"/>
           <p:cNvSpPr/>
           <p:nvPr/>
         </p:nvSpPr>
@@ -8205,7 +8303,7 @@
       </p:sp>
       <p:sp>
         <p:nvSpPr>
-          <p:cNvPr id="29" name="Text 27"/>
+          <p:cNvPr id="32" name="Text 30"/>
           <p:cNvSpPr/>
           <p:nvPr/>
         </p:nvSpPr>
@@ -8528,7 +8626,7 @@
                 <a:ea typeface="Calibri" pitchFamily="34" charset="-122"/>
                 <a:cs typeface="Calibri" pitchFamily="34" charset="-120"/>
               </a:rPr>
-              <a:t>Word Labs  •  wordlabs.app  •  Root: 'heat' = warmth or high temperature</a:t>
+              <a:t>Word Labs  •  wordlabs.app  •  Root: 'heat' = warmth; to make warm</a:t>
             </a:r>
             <a:endParaRPr lang="en-US" sz="800" dirty="0"/>
           </a:p>
@@ -8667,7 +8765,7 @@
                 <a:ea typeface="Trebuchet MS" pitchFamily="34" charset="-122"/>
                 <a:cs typeface="Trebuchet MS" pitchFamily="34" charset="-120"/>
               </a:rPr>
-              <a:t>preheat</a:t>
+              <a:t>reheating</a:t>
             </a:r>
             <a:endParaRPr lang="en-US" sz="2800" dirty="0"/>
           </a:p>
@@ -8747,7 +8845,7 @@
         </p:nvSpPr>
         <p:spPr>
           <a:xfrm>
-            <a:off x="2938272" y="2258568"/>
+            <a:off x="2221992" y="2258568"/>
             <a:ext cx="1828800" cy="292608"/>
           </a:xfrm>
           <a:prstGeom prst="rect">
@@ -8781,7 +8879,7 @@
         </p:nvSpPr>
         <p:spPr>
           <a:xfrm>
-            <a:off x="2938272" y="2258568"/>
+            <a:off x="2221992" y="2258568"/>
             <a:ext cx="1828800" cy="292608"/>
           </a:xfrm>
           <a:prstGeom prst="rect">
@@ -8806,7 +8904,7 @@
                 <a:ea typeface="Trebuchet MS" pitchFamily="34" charset="-122"/>
                 <a:cs typeface="Trebuchet MS" pitchFamily="34" charset="-120"/>
               </a:rPr>
-              <a:t>pre</a:t>
+              <a:t>re</a:t>
             </a:r>
             <a:endParaRPr lang="en-US" sz="1300" dirty="0"/>
           </a:p>
@@ -8820,7 +8918,7 @@
         </p:nvSpPr>
         <p:spPr>
           <a:xfrm>
-            <a:off x="2938272" y="2569464"/>
+            <a:off x="2221992" y="2569464"/>
             <a:ext cx="1828800" cy="201168"/>
           </a:xfrm>
           <a:prstGeom prst="rect">
@@ -8845,7 +8943,7 @@
                 <a:ea typeface="Calibri" pitchFamily="34" charset="-122"/>
                 <a:cs typeface="Calibri" pitchFamily="34" charset="-120"/>
               </a:rPr>
-              <a:t>before</a:t>
+              <a:t>again</a:t>
             </a:r>
             <a:endParaRPr lang="en-US" sz="850" dirty="0"/>
           </a:p>
@@ -8859,7 +8957,7 @@
         </p:nvSpPr>
         <p:spPr>
           <a:xfrm>
-            <a:off x="5803392" y="2258568"/>
+            <a:off x="4370832" y="2258568"/>
             <a:ext cx="1828800" cy="292608"/>
           </a:xfrm>
           <a:prstGeom prst="rect">
@@ -8893,7 +8991,7 @@
         </p:nvSpPr>
         <p:spPr>
           <a:xfrm>
-            <a:off x="5803392" y="2258568"/>
+            <a:off x="4370832" y="2258568"/>
             <a:ext cx="1828800" cy="292608"/>
           </a:xfrm>
           <a:prstGeom prst="rect">
@@ -8932,7 +9030,7 @@
         </p:nvSpPr>
         <p:spPr>
           <a:xfrm>
-            <a:off x="5803392" y="2569464"/>
+            <a:off x="4370832" y="2569464"/>
             <a:ext cx="1828800" cy="201168"/>
           </a:xfrm>
           <a:prstGeom prst="rect">
@@ -8957,7 +9055,7 @@
                 <a:ea typeface="Calibri" pitchFamily="34" charset="-122"/>
                 <a:cs typeface="Calibri" pitchFamily="34" charset="-120"/>
               </a:rPr>
-              <a:t>warmth or high temperature</a:t>
+              <a:t>warmth; to make warm</a:t>
             </a:r>
             <a:endParaRPr lang="en-US" sz="850" dirty="0"/>
           </a:p>
@@ -8966,6 +9064,118 @@
       <p:sp>
         <p:nvSpPr>
           <p:cNvPr id="22" name="Shape 20"/>
+          <p:cNvSpPr/>
+          <p:nvPr/>
+        </p:nvSpPr>
+        <p:spPr>
+          <a:xfrm>
+            <a:off x="6519672" y="2258568"/>
+            <a:ext cx="1828800" cy="292608"/>
+          </a:xfrm>
+          <a:prstGeom prst="rect">
+            <a:avLst>
+              <a:gd name="adj" fmla="val 25000"/>
+            </a:avLst>
+          </a:prstGeom>
+          <a:solidFill>
+            <a:srgbClr val="FCE7F3"/>
+          </a:solidFill>
+          <a:ln w="19050">
+            <a:solidFill>
+              <a:srgbClr val="DB2777"/>
+            </a:solidFill>
+            <a:prstDash val="solid"/>
+          </a:ln>
+          <a:effectLst>
+            <a:outerShdw sx="100000" sy="100000" kx="0" ky="0" algn="bl" rotWithShape="0" blurRad="101600" dist="38100" dir="8100000">
+              <a:srgbClr val="000000">
+                <a:alpha val="12000"/>
+              </a:srgbClr>
+            </a:outerShdw>
+          </a:effectLst>
+        </p:spPr>
+      </p:sp>
+      <p:sp>
+        <p:nvSpPr>
+          <p:cNvPr id="23" name="Text 21"/>
+          <p:cNvSpPr/>
+          <p:nvPr/>
+        </p:nvSpPr>
+        <p:spPr>
+          <a:xfrm>
+            <a:off x="6519672" y="2258568"/>
+            <a:ext cx="1828800" cy="292608"/>
+          </a:xfrm>
+          <a:prstGeom prst="rect">
+            <a:avLst/>
+          </a:prstGeom>
+          <a:noFill/>
+          <a:ln/>
+        </p:spPr>
+        <p:txBody>
+          <a:bodyPr wrap="square" lIns="0" tIns="0" rIns="0" bIns="0" rtlCol="0" anchor="ctr"/>
+          <a:lstStyle/>
+          <a:p>
+            <a:pPr algn="ctr" indent="0" marL="0">
+              <a:buNone/>
+            </a:pPr>
+            <a:r>
+              <a:rPr lang="en-US" sz="1300" b="1" dirty="0">
+                <a:solidFill>
+                  <a:srgbClr val="9D174D"/>
+                </a:solidFill>
+                <a:latin typeface="Trebuchet MS" pitchFamily="34" charset="0"/>
+                <a:ea typeface="Trebuchet MS" pitchFamily="34" charset="-122"/>
+                <a:cs typeface="Trebuchet MS" pitchFamily="34" charset="-120"/>
+              </a:rPr>
+              <a:t>ing</a:t>
+            </a:r>
+            <a:endParaRPr lang="en-US" sz="1300" dirty="0"/>
+          </a:p>
+        </p:txBody>
+      </p:sp>
+      <p:sp>
+        <p:nvSpPr>
+          <p:cNvPr id="24" name="Text 22"/>
+          <p:cNvSpPr/>
+          <p:nvPr/>
+        </p:nvSpPr>
+        <p:spPr>
+          <a:xfrm>
+            <a:off x="6519672" y="2569464"/>
+            <a:ext cx="1828800" cy="201168"/>
+          </a:xfrm>
+          <a:prstGeom prst="rect">
+            <a:avLst/>
+          </a:prstGeom>
+          <a:noFill/>
+          <a:ln/>
+        </p:spPr>
+        <p:txBody>
+          <a:bodyPr wrap="square" lIns="0" tIns="0" rIns="0" bIns="0" rtlCol="0" anchor="t"/>
+          <a:lstStyle/>
+          <a:p>
+            <a:pPr algn="ctr" indent="0" marL="0">
+              <a:buNone/>
+            </a:pPr>
+            <a:r>
+              <a:rPr lang="en-US" sz="850" dirty="0">
+                <a:solidFill>
+                  <a:srgbClr val="475569"/>
+                </a:solidFill>
+                <a:latin typeface="Calibri" pitchFamily="34" charset="0"/>
+                <a:ea typeface="Calibri" pitchFamily="34" charset="-122"/>
+                <a:cs typeface="Calibri" pitchFamily="34" charset="-120"/>
+              </a:rPr>
+              <a:t>happening now</a:t>
+            </a:r>
+            <a:endParaRPr lang="en-US" sz="850" dirty="0"/>
+          </a:p>
+        </p:txBody>
+      </p:sp>
+      <p:sp>
+        <p:nvSpPr>
+          <p:cNvPr id="25" name="Shape 23"/>
           <p:cNvSpPr/>
           <p:nvPr/>
         </p:nvSpPr>
@@ -8992,7 +9202,7 @@
       </p:sp>
       <p:sp>
         <p:nvSpPr>
-          <p:cNvPr id="23" name="Text 21"/>
+          <p:cNvPr id="26" name="Text 24"/>
           <p:cNvSpPr/>
           <p:nvPr/>
         </p:nvSpPr>
@@ -9031,7 +9241,7 @@
       </p:sp>
       <p:sp>
         <p:nvSpPr>
-          <p:cNvPr id="24" name="Shape 22"/>
+          <p:cNvPr id="27" name="Shape 25"/>
           <p:cNvSpPr/>
           <p:nvPr/>
         </p:nvSpPr>
@@ -9058,13 +9268,13 @@
       </p:sp>
       <p:sp>
         <p:nvSpPr>
-          <p:cNvPr id="25" name="Shape 23"/>
-          <p:cNvSpPr/>
-          <p:nvPr/>
-        </p:nvSpPr>
-        <p:spPr>
-          <a:xfrm>
-            <a:off x="2999232" y="3364992"/>
+          <p:cNvPr id="28" name="Shape 26"/>
+          <p:cNvSpPr/>
+          <p:nvPr/>
+        </p:nvSpPr>
+        <p:spPr>
+          <a:xfrm>
+            <a:off x="2313432" y="3364992"/>
             <a:ext cx="1645920" cy="475488"/>
           </a:xfrm>
           <a:prstGeom prst="rect">
@@ -9085,13 +9295,13 @@
       </p:sp>
       <p:sp>
         <p:nvSpPr>
-          <p:cNvPr id="26" name="Text 24"/>
-          <p:cNvSpPr/>
-          <p:nvPr/>
-        </p:nvSpPr>
-        <p:spPr>
-          <a:xfrm>
-            <a:off x="2999232" y="3364992"/>
+          <p:cNvPr id="29" name="Text 27"/>
+          <p:cNvSpPr/>
+          <p:nvPr/>
+        </p:nvSpPr>
+        <p:spPr>
+          <a:xfrm>
+            <a:off x="2313432" y="3364992"/>
             <a:ext cx="1645920" cy="475488"/>
           </a:xfrm>
           <a:prstGeom prst="rect">
@@ -9116,7 +9326,7 @@
                 <a:ea typeface="Trebuchet MS" pitchFamily="34" charset="-122"/>
                 <a:cs typeface="Trebuchet MS" pitchFamily="34" charset="-120"/>
               </a:rPr>
-              <a:t>pre</a:t>
+              <a:t>re</a:t>
             </a:r>
             <a:endParaRPr lang="en-US" sz="1400" dirty="0"/>
           </a:p>
@@ -9124,14 +9334,14 @@
       </p:sp>
       <p:sp>
         <p:nvSpPr>
-          <p:cNvPr id="27" name="Text 25"/>
-          <p:cNvSpPr/>
-          <p:nvPr/>
-        </p:nvSpPr>
-        <p:spPr>
-          <a:xfrm>
-            <a:off x="4645152" y="3364992"/>
-            <a:ext cx="1097280" cy="475488"/>
+          <p:cNvPr id="30" name="Text 28"/>
+          <p:cNvSpPr/>
+          <p:nvPr/>
+        </p:nvSpPr>
+        <p:spPr>
+          <a:xfrm>
+            <a:off x="3959352" y="3364992"/>
+            <a:ext cx="411480" cy="475488"/>
           </a:xfrm>
           <a:prstGeom prst="rect">
             <a:avLst/>
@@ -9163,13 +9373,13 @@
       </p:sp>
       <p:sp>
         <p:nvSpPr>
-          <p:cNvPr id="28" name="Shape 26"/>
-          <p:cNvSpPr/>
-          <p:nvPr/>
-        </p:nvSpPr>
-        <p:spPr>
-          <a:xfrm>
-            <a:off x="5742432" y="3364992"/>
+          <p:cNvPr id="31" name="Shape 29"/>
+          <p:cNvSpPr/>
+          <p:nvPr/>
+        </p:nvSpPr>
+        <p:spPr>
+          <a:xfrm>
+            <a:off x="4370832" y="3364992"/>
             <a:ext cx="1645920" cy="475488"/>
           </a:xfrm>
           <a:prstGeom prst="rect">
@@ -9190,13 +9400,13 @@
       </p:sp>
       <p:sp>
         <p:nvSpPr>
-          <p:cNvPr id="29" name="Text 27"/>
-          <p:cNvSpPr/>
-          <p:nvPr/>
-        </p:nvSpPr>
-        <p:spPr>
-          <a:xfrm>
-            <a:off x="5742432" y="3364992"/>
+          <p:cNvPr id="32" name="Text 30"/>
+          <p:cNvSpPr/>
+          <p:nvPr/>
+        </p:nvSpPr>
+        <p:spPr>
+          <a:xfrm>
+            <a:off x="4370832" y="3364992"/>
             <a:ext cx="1645920" cy="475488"/>
           </a:xfrm>
           <a:prstGeom prst="rect">
@@ -9229,7 +9439,112 @@
       </p:sp>
       <p:sp>
         <p:nvSpPr>
-          <p:cNvPr id="30" name="Shape 28"/>
+          <p:cNvPr id="33" name="Text 31"/>
+          <p:cNvSpPr/>
+          <p:nvPr/>
+        </p:nvSpPr>
+        <p:spPr>
+          <a:xfrm>
+            <a:off x="6016752" y="3364992"/>
+            <a:ext cx="411480" cy="475488"/>
+          </a:xfrm>
+          <a:prstGeom prst="rect">
+            <a:avLst/>
+          </a:prstGeom>
+          <a:noFill/>
+          <a:ln/>
+        </p:spPr>
+        <p:txBody>
+          <a:bodyPr wrap="square" lIns="0" tIns="0" rIns="0" bIns="0" rtlCol="0" anchor="ctr"/>
+          <a:lstStyle/>
+          <a:p>
+            <a:pPr algn="ctr" indent="0" marL="0">
+              <a:buNone/>
+            </a:pPr>
+            <a:r>
+              <a:rPr lang="en-US" sz="1600" b="1" dirty="0">
+                <a:solidFill>
+                  <a:srgbClr val="0D9488"/>
+                </a:solidFill>
+                <a:latin typeface="Trebuchet MS" pitchFamily="34" charset="0"/>
+                <a:ea typeface="Trebuchet MS" pitchFamily="34" charset="-122"/>
+                <a:cs typeface="Trebuchet MS" pitchFamily="34" charset="-120"/>
+              </a:rPr>
+              <a:t>·</a:t>
+            </a:r>
+            <a:endParaRPr lang="en-US" sz="1600" dirty="0"/>
+          </a:p>
+        </p:txBody>
+      </p:sp>
+      <p:sp>
+        <p:nvSpPr>
+          <p:cNvPr id="34" name="Shape 32"/>
+          <p:cNvSpPr/>
+          <p:nvPr/>
+        </p:nvSpPr>
+        <p:spPr>
+          <a:xfrm>
+            <a:off x="6428232" y="3364992"/>
+            <a:ext cx="1645920" cy="475488"/>
+          </a:xfrm>
+          <a:prstGeom prst="rect">
+            <a:avLst>
+              <a:gd name="adj" fmla="val 9615"/>
+            </a:avLst>
+          </a:prstGeom>
+          <a:solidFill>
+            <a:srgbClr val="FFFFFF"/>
+          </a:solidFill>
+          <a:ln w="12700">
+            <a:solidFill>
+              <a:srgbClr val="0D9488"/>
+            </a:solidFill>
+            <a:prstDash val="solid"/>
+          </a:ln>
+        </p:spPr>
+      </p:sp>
+      <p:sp>
+        <p:nvSpPr>
+          <p:cNvPr id="35" name="Text 33"/>
+          <p:cNvSpPr/>
+          <p:nvPr/>
+        </p:nvSpPr>
+        <p:spPr>
+          <a:xfrm>
+            <a:off x="6428232" y="3364992"/>
+            <a:ext cx="1645920" cy="475488"/>
+          </a:xfrm>
+          <a:prstGeom prst="rect">
+            <a:avLst/>
+          </a:prstGeom>
+          <a:noFill/>
+          <a:ln/>
+        </p:spPr>
+        <p:txBody>
+          <a:bodyPr wrap="square" lIns="0" tIns="0" rIns="0" bIns="0" rtlCol="0" anchor="ctr"/>
+          <a:lstStyle/>
+          <a:p>
+            <a:pPr algn="ctr" indent="0" marL="0">
+              <a:buNone/>
+            </a:pPr>
+            <a:r>
+              <a:rPr lang="en-US" sz="1400" b="1" dirty="0">
+                <a:solidFill>
+                  <a:srgbClr val="0D9488"/>
+                </a:solidFill>
+                <a:latin typeface="Trebuchet MS" pitchFamily="34" charset="0"/>
+                <a:ea typeface="Trebuchet MS" pitchFamily="34" charset="-122"/>
+                <a:cs typeface="Trebuchet MS" pitchFamily="34" charset="-120"/>
+              </a:rPr>
+              <a:t>ing</a:t>
+            </a:r>
+            <a:endParaRPr lang="en-US" sz="1400" dirty="0"/>
+          </a:p>
+        </p:txBody>
+      </p:sp>
+      <p:sp>
+        <p:nvSpPr>
+          <p:cNvPr id="36" name="Shape 34"/>
           <p:cNvSpPr/>
           <p:nvPr/>
         </p:nvSpPr>
@@ -9256,7 +9571,7 @@
       </p:sp>
       <p:sp>
         <p:nvSpPr>
-          <p:cNvPr id="31" name="Text 29"/>
+          <p:cNvPr id="37" name="Text 35"/>
           <p:cNvSpPr/>
           <p:nvPr/>
         </p:nvSpPr>
@@ -9295,7 +9610,7 @@
       </p:sp>
       <p:sp>
         <p:nvSpPr>
-          <p:cNvPr id="32" name="Shape 30"/>
+          <p:cNvPr id="38" name="Shape 36"/>
           <p:cNvSpPr/>
           <p:nvPr/>
         </p:nvSpPr>
@@ -9322,7 +9637,7 @@
       </p:sp>
       <p:sp>
         <p:nvSpPr>
-          <p:cNvPr id="33" name="Text 31"/>
+          <p:cNvPr id="39" name="Text 37"/>
           <p:cNvSpPr/>
           <p:nvPr/>
         </p:nvSpPr>
@@ -9645,7 +9960,7 @@
                 <a:ea typeface="Calibri" pitchFamily="34" charset="-122"/>
                 <a:cs typeface="Calibri" pitchFamily="34" charset="-120"/>
               </a:rPr>
-              <a:t>Word Labs  •  wordlabs.app  •  Root: 'heat' = warmth or high temperature</a:t>
+              <a:t>Word Labs  •  wordlabs.app  •  Root: 'heat' = warmth; to make warm</a:t>
             </a:r>
             <a:endParaRPr lang="en-US" sz="800" dirty="0"/>
           </a:p>
@@ -9784,7 +10099,7 @@
                 <a:ea typeface="Trebuchet MS" pitchFamily="34" charset="-122"/>
                 <a:cs typeface="Trebuchet MS" pitchFamily="34" charset="-120"/>
               </a:rPr>
-              <a:t>preheat</a:t>
+              <a:t>reheating</a:t>
             </a:r>
             <a:endParaRPr lang="en-US" sz="2800" dirty="0"/>
           </a:p>
@@ -9864,7 +10179,7 @@
         </p:nvSpPr>
         <p:spPr>
           <a:xfrm>
-            <a:off x="2938272" y="2258568"/>
+            <a:off x="2221992" y="2258568"/>
             <a:ext cx="1828800" cy="292608"/>
           </a:xfrm>
           <a:prstGeom prst="rect">
@@ -9898,7 +10213,7 @@
         </p:nvSpPr>
         <p:spPr>
           <a:xfrm>
-            <a:off x="2938272" y="2258568"/>
+            <a:off x="2221992" y="2258568"/>
             <a:ext cx="1828800" cy="292608"/>
           </a:xfrm>
           <a:prstGeom prst="rect">
@@ -9923,7 +10238,7 @@
                 <a:ea typeface="Trebuchet MS" pitchFamily="34" charset="-122"/>
                 <a:cs typeface="Trebuchet MS" pitchFamily="34" charset="-120"/>
               </a:rPr>
-              <a:t>pre</a:t>
+              <a:t>re</a:t>
             </a:r>
             <a:endParaRPr lang="en-US" sz="1300" dirty="0"/>
           </a:p>
@@ -9937,7 +10252,7 @@
         </p:nvSpPr>
         <p:spPr>
           <a:xfrm>
-            <a:off x="2938272" y="2569464"/>
+            <a:off x="2221992" y="2569464"/>
             <a:ext cx="1828800" cy="201168"/>
           </a:xfrm>
           <a:prstGeom prst="rect">
@@ -9962,7 +10277,7 @@
                 <a:ea typeface="Calibri" pitchFamily="34" charset="-122"/>
                 <a:cs typeface="Calibri" pitchFamily="34" charset="-120"/>
               </a:rPr>
-              <a:t>before</a:t>
+              <a:t>again</a:t>
             </a:r>
             <a:endParaRPr lang="en-US" sz="850" dirty="0"/>
           </a:p>
@@ -9976,7 +10291,7 @@
         </p:nvSpPr>
         <p:spPr>
           <a:xfrm>
-            <a:off x="5803392" y="2258568"/>
+            <a:off x="4370832" y="2258568"/>
             <a:ext cx="1828800" cy="292608"/>
           </a:xfrm>
           <a:prstGeom prst="rect">
@@ -10010,7 +10325,7 @@
         </p:nvSpPr>
         <p:spPr>
           <a:xfrm>
-            <a:off x="5803392" y="2258568"/>
+            <a:off x="4370832" y="2258568"/>
             <a:ext cx="1828800" cy="292608"/>
           </a:xfrm>
           <a:prstGeom prst="rect">
@@ -10049,7 +10364,7 @@
         </p:nvSpPr>
         <p:spPr>
           <a:xfrm>
-            <a:off x="5803392" y="2569464"/>
+            <a:off x="4370832" y="2569464"/>
             <a:ext cx="1828800" cy="201168"/>
           </a:xfrm>
           <a:prstGeom prst="rect">
@@ -10074,7 +10389,7 @@
                 <a:ea typeface="Calibri" pitchFamily="34" charset="-122"/>
                 <a:cs typeface="Calibri" pitchFamily="34" charset="-120"/>
               </a:rPr>
-              <a:t>warmth or high temperature</a:t>
+              <a:t>warmth; to make warm</a:t>
             </a:r>
             <a:endParaRPr lang="en-US" sz="850" dirty="0"/>
           </a:p>
@@ -10083,6 +10398,118 @@
       <p:sp>
         <p:nvSpPr>
           <p:cNvPr id="22" name="Shape 20"/>
+          <p:cNvSpPr/>
+          <p:nvPr/>
+        </p:nvSpPr>
+        <p:spPr>
+          <a:xfrm>
+            <a:off x="6519672" y="2258568"/>
+            <a:ext cx="1828800" cy="292608"/>
+          </a:xfrm>
+          <a:prstGeom prst="rect">
+            <a:avLst>
+              <a:gd name="adj" fmla="val 25000"/>
+            </a:avLst>
+          </a:prstGeom>
+          <a:solidFill>
+            <a:srgbClr val="FCE7F3"/>
+          </a:solidFill>
+          <a:ln w="19050">
+            <a:solidFill>
+              <a:srgbClr val="DB2777"/>
+            </a:solidFill>
+            <a:prstDash val="solid"/>
+          </a:ln>
+          <a:effectLst>
+            <a:outerShdw sx="100000" sy="100000" kx="0" ky="0" algn="bl" rotWithShape="0" blurRad="101600" dist="38100" dir="8100000">
+              <a:srgbClr val="000000">
+                <a:alpha val="12000"/>
+              </a:srgbClr>
+            </a:outerShdw>
+          </a:effectLst>
+        </p:spPr>
+      </p:sp>
+      <p:sp>
+        <p:nvSpPr>
+          <p:cNvPr id="23" name="Text 21"/>
+          <p:cNvSpPr/>
+          <p:nvPr/>
+        </p:nvSpPr>
+        <p:spPr>
+          <a:xfrm>
+            <a:off x="6519672" y="2258568"/>
+            <a:ext cx="1828800" cy="292608"/>
+          </a:xfrm>
+          <a:prstGeom prst="rect">
+            <a:avLst/>
+          </a:prstGeom>
+          <a:noFill/>
+          <a:ln/>
+        </p:spPr>
+        <p:txBody>
+          <a:bodyPr wrap="square" lIns="0" tIns="0" rIns="0" bIns="0" rtlCol="0" anchor="ctr"/>
+          <a:lstStyle/>
+          <a:p>
+            <a:pPr algn="ctr" indent="0" marL="0">
+              <a:buNone/>
+            </a:pPr>
+            <a:r>
+              <a:rPr lang="en-US" sz="1300" b="1" dirty="0">
+                <a:solidFill>
+                  <a:srgbClr val="9D174D"/>
+                </a:solidFill>
+                <a:latin typeface="Trebuchet MS" pitchFamily="34" charset="0"/>
+                <a:ea typeface="Trebuchet MS" pitchFamily="34" charset="-122"/>
+                <a:cs typeface="Trebuchet MS" pitchFamily="34" charset="-120"/>
+              </a:rPr>
+              <a:t>ing</a:t>
+            </a:r>
+            <a:endParaRPr lang="en-US" sz="1300" dirty="0"/>
+          </a:p>
+        </p:txBody>
+      </p:sp>
+      <p:sp>
+        <p:nvSpPr>
+          <p:cNvPr id="24" name="Text 22"/>
+          <p:cNvSpPr/>
+          <p:nvPr/>
+        </p:nvSpPr>
+        <p:spPr>
+          <a:xfrm>
+            <a:off x="6519672" y="2569464"/>
+            <a:ext cx="1828800" cy="201168"/>
+          </a:xfrm>
+          <a:prstGeom prst="rect">
+            <a:avLst/>
+          </a:prstGeom>
+          <a:noFill/>
+          <a:ln/>
+        </p:spPr>
+        <p:txBody>
+          <a:bodyPr wrap="square" lIns="0" tIns="0" rIns="0" bIns="0" rtlCol="0" anchor="t"/>
+          <a:lstStyle/>
+          <a:p>
+            <a:pPr algn="ctr" indent="0" marL="0">
+              <a:buNone/>
+            </a:pPr>
+            <a:r>
+              <a:rPr lang="en-US" sz="850" dirty="0">
+                <a:solidFill>
+                  <a:srgbClr val="475569"/>
+                </a:solidFill>
+                <a:latin typeface="Calibri" pitchFamily="34" charset="0"/>
+                <a:ea typeface="Calibri" pitchFamily="34" charset="-122"/>
+                <a:cs typeface="Calibri" pitchFamily="34" charset="-120"/>
+              </a:rPr>
+              <a:t>happening now</a:t>
+            </a:r>
+            <a:endParaRPr lang="en-US" sz="850" dirty="0"/>
+          </a:p>
+        </p:txBody>
+      </p:sp>
+      <p:sp>
+        <p:nvSpPr>
+          <p:cNvPr id="25" name="Shape 23"/>
           <p:cNvSpPr/>
           <p:nvPr/>
         </p:nvSpPr>
@@ -10109,7 +10536,7 @@
       </p:sp>
       <p:sp>
         <p:nvSpPr>
-          <p:cNvPr id="23" name="Text 21"/>
+          <p:cNvPr id="26" name="Text 24"/>
           <p:cNvSpPr/>
           <p:nvPr/>
         </p:nvSpPr>
@@ -10148,7 +10575,7 @@
       </p:sp>
       <p:sp>
         <p:nvSpPr>
-          <p:cNvPr id="24" name="Shape 22"/>
+          <p:cNvPr id="27" name="Shape 25"/>
           <p:cNvSpPr/>
           <p:nvPr/>
         </p:nvSpPr>
@@ -10175,13 +10602,13 @@
       </p:sp>
       <p:sp>
         <p:nvSpPr>
-          <p:cNvPr id="25" name="Shape 23"/>
-          <p:cNvSpPr/>
-          <p:nvPr/>
-        </p:nvSpPr>
-        <p:spPr>
-          <a:xfrm>
-            <a:off x="2999232" y="3364992"/>
+          <p:cNvPr id="28" name="Shape 26"/>
+          <p:cNvSpPr/>
+          <p:nvPr/>
+        </p:nvSpPr>
+        <p:spPr>
+          <a:xfrm>
+            <a:off x="2313432" y="3364992"/>
             <a:ext cx="1645920" cy="475488"/>
           </a:xfrm>
           <a:prstGeom prst="rect">
@@ -10202,13 +10629,13 @@
       </p:sp>
       <p:sp>
         <p:nvSpPr>
-          <p:cNvPr id="26" name="Text 24"/>
-          <p:cNvSpPr/>
-          <p:nvPr/>
-        </p:nvSpPr>
-        <p:spPr>
-          <a:xfrm>
-            <a:off x="2999232" y="3364992"/>
+          <p:cNvPr id="29" name="Text 27"/>
+          <p:cNvSpPr/>
+          <p:nvPr/>
+        </p:nvSpPr>
+        <p:spPr>
+          <a:xfrm>
+            <a:off x="2313432" y="3364992"/>
             <a:ext cx="1645920" cy="475488"/>
           </a:xfrm>
           <a:prstGeom prst="rect">
@@ -10233,7 +10660,7 @@
                 <a:ea typeface="Trebuchet MS" pitchFamily="34" charset="-122"/>
                 <a:cs typeface="Trebuchet MS" pitchFamily="34" charset="-120"/>
               </a:rPr>
-              <a:t>pre</a:t>
+              <a:t>re</a:t>
             </a:r>
             <a:endParaRPr lang="en-US" sz="1400" dirty="0"/>
           </a:p>
@@ -10241,14 +10668,14 @@
       </p:sp>
       <p:sp>
         <p:nvSpPr>
-          <p:cNvPr id="27" name="Text 25"/>
-          <p:cNvSpPr/>
-          <p:nvPr/>
-        </p:nvSpPr>
-        <p:spPr>
-          <a:xfrm>
-            <a:off x="4645152" y="3364992"/>
-            <a:ext cx="1097280" cy="475488"/>
+          <p:cNvPr id="30" name="Text 28"/>
+          <p:cNvSpPr/>
+          <p:nvPr/>
+        </p:nvSpPr>
+        <p:spPr>
+          <a:xfrm>
+            <a:off x="3959352" y="3364992"/>
+            <a:ext cx="411480" cy="475488"/>
           </a:xfrm>
           <a:prstGeom prst="rect">
             <a:avLst/>
@@ -10280,13 +10707,13 @@
       </p:sp>
       <p:sp>
         <p:nvSpPr>
-          <p:cNvPr id="28" name="Shape 26"/>
-          <p:cNvSpPr/>
-          <p:nvPr/>
-        </p:nvSpPr>
-        <p:spPr>
-          <a:xfrm>
-            <a:off x="5742432" y="3364992"/>
+          <p:cNvPr id="31" name="Shape 29"/>
+          <p:cNvSpPr/>
+          <p:nvPr/>
+        </p:nvSpPr>
+        <p:spPr>
+          <a:xfrm>
+            <a:off x="4370832" y="3364992"/>
             <a:ext cx="1645920" cy="475488"/>
           </a:xfrm>
           <a:prstGeom prst="rect">
@@ -10307,13 +10734,13 @@
       </p:sp>
       <p:sp>
         <p:nvSpPr>
-          <p:cNvPr id="29" name="Text 27"/>
-          <p:cNvSpPr/>
-          <p:nvPr/>
-        </p:nvSpPr>
-        <p:spPr>
-          <a:xfrm>
-            <a:off x="5742432" y="3364992"/>
+          <p:cNvPr id="32" name="Text 30"/>
+          <p:cNvSpPr/>
+          <p:nvPr/>
+        </p:nvSpPr>
+        <p:spPr>
+          <a:xfrm>
+            <a:off x="4370832" y="3364992"/>
             <a:ext cx="1645920" cy="475488"/>
           </a:xfrm>
           <a:prstGeom prst="rect">
@@ -10346,7 +10773,112 @@
       </p:sp>
       <p:sp>
         <p:nvSpPr>
-          <p:cNvPr id="30" name="Shape 28"/>
+          <p:cNvPr id="33" name="Text 31"/>
+          <p:cNvSpPr/>
+          <p:nvPr/>
+        </p:nvSpPr>
+        <p:spPr>
+          <a:xfrm>
+            <a:off x="6016752" y="3364992"/>
+            <a:ext cx="411480" cy="475488"/>
+          </a:xfrm>
+          <a:prstGeom prst="rect">
+            <a:avLst/>
+          </a:prstGeom>
+          <a:noFill/>
+          <a:ln/>
+        </p:spPr>
+        <p:txBody>
+          <a:bodyPr wrap="square" lIns="0" tIns="0" rIns="0" bIns="0" rtlCol="0" anchor="ctr"/>
+          <a:lstStyle/>
+          <a:p>
+            <a:pPr algn="ctr" indent="0" marL="0">
+              <a:buNone/>
+            </a:pPr>
+            <a:r>
+              <a:rPr lang="en-US" sz="1600" b="1" dirty="0">
+                <a:solidFill>
+                  <a:srgbClr val="0D9488"/>
+                </a:solidFill>
+                <a:latin typeface="Trebuchet MS" pitchFamily="34" charset="0"/>
+                <a:ea typeface="Trebuchet MS" pitchFamily="34" charset="-122"/>
+                <a:cs typeface="Trebuchet MS" pitchFamily="34" charset="-120"/>
+              </a:rPr>
+              <a:t>·</a:t>
+            </a:r>
+            <a:endParaRPr lang="en-US" sz="1600" dirty="0"/>
+          </a:p>
+        </p:txBody>
+      </p:sp>
+      <p:sp>
+        <p:nvSpPr>
+          <p:cNvPr id="34" name="Shape 32"/>
+          <p:cNvSpPr/>
+          <p:nvPr/>
+        </p:nvSpPr>
+        <p:spPr>
+          <a:xfrm>
+            <a:off x="6428232" y="3364992"/>
+            <a:ext cx="1645920" cy="475488"/>
+          </a:xfrm>
+          <a:prstGeom prst="rect">
+            <a:avLst>
+              <a:gd name="adj" fmla="val 9615"/>
+            </a:avLst>
+          </a:prstGeom>
+          <a:solidFill>
+            <a:srgbClr val="FFFFFF"/>
+          </a:solidFill>
+          <a:ln w="12700">
+            <a:solidFill>
+              <a:srgbClr val="0D9488"/>
+            </a:solidFill>
+            <a:prstDash val="solid"/>
+          </a:ln>
+        </p:spPr>
+      </p:sp>
+      <p:sp>
+        <p:nvSpPr>
+          <p:cNvPr id="35" name="Text 33"/>
+          <p:cNvSpPr/>
+          <p:nvPr/>
+        </p:nvSpPr>
+        <p:spPr>
+          <a:xfrm>
+            <a:off x="6428232" y="3364992"/>
+            <a:ext cx="1645920" cy="475488"/>
+          </a:xfrm>
+          <a:prstGeom prst="rect">
+            <a:avLst/>
+          </a:prstGeom>
+          <a:noFill/>
+          <a:ln/>
+        </p:spPr>
+        <p:txBody>
+          <a:bodyPr wrap="square" lIns="0" tIns="0" rIns="0" bIns="0" rtlCol="0" anchor="ctr"/>
+          <a:lstStyle/>
+          <a:p>
+            <a:pPr algn="ctr" indent="0" marL="0">
+              <a:buNone/>
+            </a:pPr>
+            <a:r>
+              <a:rPr lang="en-US" sz="1400" b="1" dirty="0">
+                <a:solidFill>
+                  <a:srgbClr val="0D9488"/>
+                </a:solidFill>
+                <a:latin typeface="Trebuchet MS" pitchFamily="34" charset="0"/>
+                <a:ea typeface="Trebuchet MS" pitchFamily="34" charset="-122"/>
+                <a:cs typeface="Trebuchet MS" pitchFamily="34" charset="-120"/>
+              </a:rPr>
+              <a:t>ing</a:t>
+            </a:r>
+            <a:endParaRPr lang="en-US" sz="1400" dirty="0"/>
+          </a:p>
+        </p:txBody>
+      </p:sp>
+      <p:sp>
+        <p:nvSpPr>
+          <p:cNvPr id="36" name="Shape 34"/>
           <p:cNvSpPr/>
           <p:nvPr/>
         </p:nvSpPr>
@@ -10373,7 +10905,7 @@
       </p:sp>
       <p:sp>
         <p:nvSpPr>
-          <p:cNvPr id="31" name="Text 29"/>
+          <p:cNvPr id="37" name="Text 35"/>
           <p:cNvSpPr/>
           <p:nvPr/>
         </p:nvSpPr>
@@ -10412,7 +10944,7 @@
       </p:sp>
       <p:sp>
         <p:nvSpPr>
-          <p:cNvPr id="32" name="Shape 30"/>
+          <p:cNvPr id="38" name="Shape 36"/>
           <p:cNvSpPr/>
           <p:nvPr/>
         </p:nvSpPr>
@@ -10439,13 +10971,13 @@
       </p:sp>
       <p:sp>
         <p:nvSpPr>
-          <p:cNvPr id="33" name="Shape 31"/>
-          <p:cNvSpPr/>
-          <p:nvPr/>
-        </p:nvSpPr>
-        <p:spPr>
-          <a:xfrm>
-            <a:off x="2254649" y="4169664"/>
+          <p:cNvPr id="39" name="Shape 37"/>
+          <p:cNvSpPr/>
+          <p:nvPr/>
+        </p:nvSpPr>
+        <p:spPr>
+          <a:xfrm>
+            <a:off x="2124837" y="4169664"/>
             <a:ext cx="685800" cy="475488"/>
           </a:xfrm>
           <a:prstGeom prst="rect">
@@ -10466,13 +10998,13 @@
       </p:sp>
       <p:sp>
         <p:nvSpPr>
-          <p:cNvPr id="34" name="Text 32"/>
-          <p:cNvSpPr/>
-          <p:nvPr/>
-        </p:nvSpPr>
-        <p:spPr>
-          <a:xfrm>
-            <a:off x="2254649" y="4169664"/>
+          <p:cNvPr id="40" name="Text 38"/>
+          <p:cNvSpPr/>
+          <p:nvPr/>
+        </p:nvSpPr>
+        <p:spPr>
+          <a:xfrm>
+            <a:off x="2124837" y="4169664"/>
             <a:ext cx="685800" cy="475488"/>
           </a:xfrm>
           <a:prstGeom prst="rect">
@@ -10497,7 +11029,7 @@
                 <a:ea typeface="Trebuchet MS" pitchFamily="34" charset="-122"/>
                 <a:cs typeface="Trebuchet MS" pitchFamily="34" charset="-120"/>
               </a:rPr>
-              <a:t>p</a:t>
+              <a:t>r</a:t>
             </a:r>
             <a:endParaRPr lang="en-US" sz="900" dirty="0"/>
           </a:p>
@@ -10505,13 +11037,13 @@
       </p:sp>
       <p:sp>
         <p:nvSpPr>
-          <p:cNvPr id="35" name="Shape 33"/>
-          <p:cNvSpPr/>
-          <p:nvPr/>
-        </p:nvSpPr>
-        <p:spPr>
-          <a:xfrm>
-            <a:off x="3293146" y="4169664"/>
+          <p:cNvPr id="41" name="Shape 39"/>
+          <p:cNvSpPr/>
+          <p:nvPr/>
+        </p:nvSpPr>
+        <p:spPr>
+          <a:xfrm>
+            <a:off x="3033522" y="4169664"/>
             <a:ext cx="685800" cy="475488"/>
           </a:xfrm>
           <a:prstGeom prst="rect">
@@ -10532,13 +11064,13 @@
       </p:sp>
       <p:sp>
         <p:nvSpPr>
-          <p:cNvPr id="36" name="Text 34"/>
-          <p:cNvSpPr/>
-          <p:nvPr/>
-        </p:nvSpPr>
-        <p:spPr>
-          <a:xfrm>
-            <a:off x="3293146" y="4169664"/>
+          <p:cNvPr id="42" name="Text 40"/>
+          <p:cNvSpPr/>
+          <p:nvPr/>
+        </p:nvSpPr>
+        <p:spPr>
+          <a:xfrm>
+            <a:off x="3033522" y="4169664"/>
             <a:ext cx="685800" cy="475488"/>
           </a:xfrm>
           <a:prstGeom prst="rect">
@@ -10563,7 +11095,7 @@
                 <a:ea typeface="Trebuchet MS" pitchFamily="34" charset="-122"/>
                 <a:cs typeface="Trebuchet MS" pitchFamily="34" charset="-120"/>
               </a:rPr>
-              <a:t>r</a:t>
+              <a:t>e</a:t>
             </a:r>
             <a:endParaRPr lang="en-US" sz="900" dirty="0"/>
           </a:p>
@@ -10571,13 +11103,13 @@
       </p:sp>
       <p:sp>
         <p:nvSpPr>
-          <p:cNvPr id="37" name="Shape 35"/>
-          <p:cNvSpPr/>
-          <p:nvPr/>
-        </p:nvSpPr>
-        <p:spPr>
-          <a:xfrm>
-            <a:off x="4331643" y="4169664"/>
+          <p:cNvPr id="43" name="Shape 41"/>
+          <p:cNvSpPr/>
+          <p:nvPr/>
+        </p:nvSpPr>
+        <p:spPr>
+          <a:xfrm>
+            <a:off x="3942207" y="4169664"/>
             <a:ext cx="685800" cy="475488"/>
           </a:xfrm>
           <a:prstGeom prst="rect">
@@ -10598,13 +11130,13 @@
       </p:sp>
       <p:sp>
         <p:nvSpPr>
-          <p:cNvPr id="38" name="Text 36"/>
-          <p:cNvSpPr/>
-          <p:nvPr/>
-        </p:nvSpPr>
-        <p:spPr>
-          <a:xfrm>
-            <a:off x="4331643" y="4169664"/>
+          <p:cNvPr id="44" name="Text 42"/>
+          <p:cNvSpPr/>
+          <p:nvPr/>
+        </p:nvSpPr>
+        <p:spPr>
+          <a:xfrm>
+            <a:off x="3942207" y="4169664"/>
             <a:ext cx="685800" cy="475488"/>
           </a:xfrm>
           <a:prstGeom prst="rect">
@@ -10629,7 +11161,7 @@
                 <a:ea typeface="Trebuchet MS" pitchFamily="34" charset="-122"/>
                 <a:cs typeface="Trebuchet MS" pitchFamily="34" charset="-120"/>
               </a:rPr>
-              <a:t>e</a:t>
+              <a:t>h</a:t>
             </a:r>
             <a:endParaRPr lang="en-US" sz="900" dirty="0"/>
           </a:p>
@@ -10637,13 +11169,13 @@
       </p:sp>
       <p:sp>
         <p:nvSpPr>
-          <p:cNvPr id="39" name="Shape 37"/>
-          <p:cNvSpPr/>
-          <p:nvPr/>
-        </p:nvSpPr>
-        <p:spPr>
-          <a:xfrm>
-            <a:off x="5370141" y="4169664"/>
+          <p:cNvPr id="45" name="Shape 43"/>
+          <p:cNvSpPr/>
+          <p:nvPr/>
+        </p:nvSpPr>
+        <p:spPr>
+          <a:xfrm>
+            <a:off x="4850892" y="4169664"/>
             <a:ext cx="685800" cy="475488"/>
           </a:xfrm>
           <a:prstGeom prst="rect">
@@ -10664,13 +11196,13 @@
       </p:sp>
       <p:sp>
         <p:nvSpPr>
-          <p:cNvPr id="40" name="Text 38"/>
-          <p:cNvSpPr/>
-          <p:nvPr/>
-        </p:nvSpPr>
-        <p:spPr>
-          <a:xfrm>
-            <a:off x="5370141" y="4169664"/>
+          <p:cNvPr id="46" name="Text 44"/>
+          <p:cNvSpPr/>
+          <p:nvPr/>
+        </p:nvSpPr>
+        <p:spPr>
+          <a:xfrm>
+            <a:off x="4850892" y="4169664"/>
             <a:ext cx="685800" cy="475488"/>
           </a:xfrm>
           <a:prstGeom prst="rect">
@@ -10695,7 +11227,7 @@
                 <a:ea typeface="Trebuchet MS" pitchFamily="34" charset="-122"/>
                 <a:cs typeface="Trebuchet MS" pitchFamily="34" charset="-120"/>
               </a:rPr>
-              <a:t>h</a:t>
+              <a:t>ea</a:t>
             </a:r>
             <a:endParaRPr lang="en-US" sz="900" dirty="0"/>
           </a:p>
@@ -10703,13 +11235,13 @@
       </p:sp>
       <p:sp>
         <p:nvSpPr>
-          <p:cNvPr id="41" name="Shape 39"/>
-          <p:cNvSpPr/>
-          <p:nvPr/>
-        </p:nvSpPr>
-        <p:spPr>
-          <a:xfrm>
-            <a:off x="6408638" y="4169664"/>
+          <p:cNvPr id="47" name="Shape 45"/>
+          <p:cNvSpPr/>
+          <p:nvPr/>
+        </p:nvSpPr>
+        <p:spPr>
+          <a:xfrm>
+            <a:off x="5759577" y="4169664"/>
             <a:ext cx="685800" cy="475488"/>
           </a:xfrm>
           <a:prstGeom prst="rect">
@@ -10730,13 +11262,13 @@
       </p:sp>
       <p:sp>
         <p:nvSpPr>
-          <p:cNvPr id="42" name="Text 40"/>
-          <p:cNvSpPr/>
-          <p:nvPr/>
-        </p:nvSpPr>
-        <p:spPr>
-          <a:xfrm>
-            <a:off x="6408638" y="4169664"/>
+          <p:cNvPr id="48" name="Text 46"/>
+          <p:cNvSpPr/>
+          <p:nvPr/>
+        </p:nvSpPr>
+        <p:spPr>
+          <a:xfrm>
+            <a:off x="5759577" y="4169664"/>
             <a:ext cx="685800" cy="475488"/>
           </a:xfrm>
           <a:prstGeom prst="rect">
@@ -10761,7 +11293,7 @@
                 <a:ea typeface="Trebuchet MS" pitchFamily="34" charset="-122"/>
                 <a:cs typeface="Trebuchet MS" pitchFamily="34" charset="-120"/>
               </a:rPr>
-              <a:t>ea</a:t>
+              <a:t>t</a:t>
             </a:r>
             <a:endParaRPr lang="en-US" sz="900" dirty="0"/>
           </a:p>
@@ -10769,13 +11301,13 @@
       </p:sp>
       <p:sp>
         <p:nvSpPr>
-          <p:cNvPr id="43" name="Shape 41"/>
-          <p:cNvSpPr/>
-          <p:nvPr/>
-        </p:nvSpPr>
-        <p:spPr>
-          <a:xfrm>
-            <a:off x="7447135" y="4169664"/>
+          <p:cNvPr id="49" name="Shape 47"/>
+          <p:cNvSpPr/>
+          <p:nvPr/>
+        </p:nvSpPr>
+        <p:spPr>
+          <a:xfrm>
+            <a:off x="6668262" y="4169664"/>
             <a:ext cx="685800" cy="475488"/>
           </a:xfrm>
           <a:prstGeom prst="rect">
@@ -10796,13 +11328,13 @@
       </p:sp>
       <p:sp>
         <p:nvSpPr>
-          <p:cNvPr id="44" name="Text 42"/>
-          <p:cNvSpPr/>
-          <p:nvPr/>
-        </p:nvSpPr>
-        <p:spPr>
-          <a:xfrm>
-            <a:off x="7447135" y="4169664"/>
+          <p:cNvPr id="50" name="Text 48"/>
+          <p:cNvSpPr/>
+          <p:nvPr/>
+        </p:nvSpPr>
+        <p:spPr>
+          <a:xfrm>
+            <a:off x="6668262" y="4169664"/>
             <a:ext cx="685800" cy="475488"/>
           </a:xfrm>
           <a:prstGeom prst="rect">
@@ -10827,7 +11359,73 @@
                 <a:ea typeface="Trebuchet MS" pitchFamily="34" charset="-122"/>
                 <a:cs typeface="Trebuchet MS" pitchFamily="34" charset="-120"/>
               </a:rPr>
-              <a:t>t</a:t>
+              <a:t>i</a:t>
+            </a:r>
+            <a:endParaRPr lang="en-US" sz="900" dirty="0"/>
+          </a:p>
+        </p:txBody>
+      </p:sp>
+      <p:sp>
+        <p:nvSpPr>
+          <p:cNvPr id="51" name="Shape 49"/>
+          <p:cNvSpPr/>
+          <p:nvPr/>
+        </p:nvSpPr>
+        <p:spPr>
+          <a:xfrm>
+            <a:off x="7576947" y="4169664"/>
+            <a:ext cx="685800" cy="475488"/>
+          </a:xfrm>
+          <a:prstGeom prst="rect">
+            <a:avLst>
+              <a:gd name="adj" fmla="val 7692"/>
+            </a:avLst>
+          </a:prstGeom>
+          <a:solidFill>
+            <a:srgbClr val="FFFFFF"/>
+          </a:solidFill>
+          <a:ln w="12700">
+            <a:solidFill>
+              <a:srgbClr val="DB2777"/>
+            </a:solidFill>
+            <a:prstDash val="solid"/>
+          </a:ln>
+        </p:spPr>
+      </p:sp>
+      <p:sp>
+        <p:nvSpPr>
+          <p:cNvPr id="52" name="Text 50"/>
+          <p:cNvSpPr/>
+          <p:nvPr/>
+        </p:nvSpPr>
+        <p:spPr>
+          <a:xfrm>
+            <a:off x="7576947" y="4169664"/>
+            <a:ext cx="685800" cy="475488"/>
+          </a:xfrm>
+          <a:prstGeom prst="rect">
+            <a:avLst/>
+          </a:prstGeom>
+          <a:noFill/>
+          <a:ln/>
+        </p:spPr>
+        <p:txBody>
+          <a:bodyPr wrap="square" lIns="0" tIns="0" rIns="0" bIns="0" rtlCol="0" anchor="ctr"/>
+          <a:lstStyle/>
+          <a:p>
+            <a:pPr algn="ctr" indent="0" marL="0">
+              <a:buNone/>
+            </a:pPr>
+            <a:r>
+              <a:rPr lang="en-US" sz="900" b="1" dirty="0">
+                <a:solidFill>
+                  <a:srgbClr val="9D174D"/>
+                </a:solidFill>
+                <a:latin typeface="Trebuchet MS" pitchFamily="34" charset="0"/>
+                <a:ea typeface="Trebuchet MS" pitchFamily="34" charset="-122"/>
+                <a:cs typeface="Trebuchet MS" pitchFamily="34" charset="-120"/>
+              </a:rPr>
+              <a:t>ng</a:t>
             </a:r>
             <a:endParaRPr lang="en-US" sz="900" dirty="0"/>
           </a:p>
@@ -11119,7 +11717,7 @@
                 <a:ea typeface="Calibri" pitchFamily="34" charset="-122"/>
                 <a:cs typeface="Calibri" pitchFamily="34" charset="-120"/>
               </a:rPr>
-              <a:t>Word Labs  •  wordlabs.app  •  Root: 'heat' = warmth or high temperature</a:t>
+              <a:t>Word Labs  •  wordlabs.app  •  Root: 'heat' = warmth; to make warm</a:t>
             </a:r>
             <a:endParaRPr lang="en-US" sz="800" dirty="0"/>
           </a:p>
@@ -11258,7 +11856,7 @@
                 <a:ea typeface="Trebuchet MS" pitchFamily="34" charset="-122"/>
                 <a:cs typeface="Trebuchet MS" pitchFamily="34" charset="-120"/>
               </a:rPr>
-              <a:t>reheated</a:t>
+              <a:t>preheating</a:t>
             </a:r>
             <a:endParaRPr lang="en-US" sz="2800" dirty="0"/>
           </a:p>
@@ -11946,7 +12544,7 @@
                 <a:ea typeface="Calibri" pitchFamily="34" charset="-122"/>
                 <a:cs typeface="Calibri" pitchFamily="34" charset="-120"/>
               </a:rPr>
-              <a:t>Word Labs  •  wordlabs.app  •  Root: 'heat' = warmth or high temperature</a:t>
+              <a:t>Word Labs  •  wordlabs.app  •  Root: 'heat' = warmth; to make warm</a:t>
             </a:r>
             <a:endParaRPr lang="en-US" sz="800" dirty="0"/>
           </a:p>
@@ -12085,7 +12683,7 @@
                 <a:ea typeface="Trebuchet MS" pitchFamily="34" charset="-122"/>
                 <a:cs typeface="Trebuchet MS" pitchFamily="34" charset="-120"/>
               </a:rPr>
-              <a:t>reheated</a:t>
+              <a:t>preheating</a:t>
             </a:r>
             <a:endParaRPr lang="en-US" sz="2800" dirty="0"/>
           </a:p>
@@ -12224,7 +12822,7 @@
                 <a:ea typeface="Trebuchet MS" pitchFamily="34" charset="-122"/>
                 <a:cs typeface="Trebuchet MS" pitchFamily="34" charset="-120"/>
               </a:rPr>
-              <a:t>re</a:t>
+              <a:t>pre</a:t>
             </a:r>
             <a:endParaRPr lang="en-US" sz="1300" dirty="0"/>
           </a:p>
@@ -12263,7 +12861,7 @@
                 <a:ea typeface="Calibri" pitchFamily="34" charset="-122"/>
                 <a:cs typeface="Calibri" pitchFamily="34" charset="-120"/>
               </a:rPr>
-              <a:t>again</a:t>
+              <a:t>before</a:t>
             </a:r>
             <a:endParaRPr lang="en-US" sz="850" dirty="0"/>
           </a:p>
@@ -12375,7 +12973,7 @@
                 <a:ea typeface="Calibri" pitchFamily="34" charset="-122"/>
                 <a:cs typeface="Calibri" pitchFamily="34" charset="-120"/>
               </a:rPr>
-              <a:t>warmth or high temperature</a:t>
+              <a:t>warmth; to make warm</a:t>
             </a:r>
             <a:endParaRPr lang="en-US" sz="850" dirty="0"/>
           </a:p>
@@ -12448,7 +13046,7 @@
                 <a:ea typeface="Trebuchet MS" pitchFamily="34" charset="-122"/>
                 <a:cs typeface="Trebuchet MS" pitchFamily="34" charset="-120"/>
               </a:rPr>
-              <a:t>ed</a:t>
+              <a:t>ing</a:t>
             </a:r>
             <a:endParaRPr lang="en-US" sz="1300" dirty="0"/>
           </a:p>
@@ -12487,7 +13085,7 @@
                 <a:ea typeface="Calibri" pitchFamily="34" charset="-122"/>
                 <a:cs typeface="Calibri" pitchFamily="34" charset="-120"/>
               </a:rPr>
-              <a:t>past tense</a:t>
+              <a:t>happening now</a:t>
             </a:r>
             <a:endParaRPr lang="en-US" sz="850" dirty="0"/>
           </a:p>
@@ -13043,7 +13641,7 @@
                 <a:ea typeface="Calibri" pitchFamily="34" charset="-122"/>
                 <a:cs typeface="Calibri" pitchFamily="34" charset="-120"/>
               </a:rPr>
-              <a:t>Word Labs  •  wordlabs.app  •  Root: 'heat' = warmth or high temperature</a:t>
+              <a:t>Word Labs  •  wordlabs.app  •  Root: 'heat' = warmth; to make warm</a:t>
             </a:r>
             <a:endParaRPr lang="en-US" sz="800" dirty="0"/>
           </a:p>
@@ -13182,7 +13780,7 @@
                 <a:ea typeface="Trebuchet MS" pitchFamily="34" charset="-122"/>
                 <a:cs typeface="Trebuchet MS" pitchFamily="34" charset="-120"/>
               </a:rPr>
-              <a:t>reheated</a:t>
+              <a:t>preheating</a:t>
             </a:r>
             <a:endParaRPr lang="en-US" sz="2800" dirty="0"/>
           </a:p>
@@ -13321,7 +13919,7 @@
                 <a:ea typeface="Trebuchet MS" pitchFamily="34" charset="-122"/>
                 <a:cs typeface="Trebuchet MS" pitchFamily="34" charset="-120"/>
               </a:rPr>
-              <a:t>re</a:t>
+              <a:t>pre</a:t>
             </a:r>
             <a:endParaRPr lang="en-US" sz="1300" dirty="0"/>
           </a:p>
@@ -13360,7 +13958,7 @@
                 <a:ea typeface="Calibri" pitchFamily="34" charset="-122"/>
                 <a:cs typeface="Calibri" pitchFamily="34" charset="-120"/>
               </a:rPr>
-              <a:t>again</a:t>
+              <a:t>before</a:t>
             </a:r>
             <a:endParaRPr lang="en-US" sz="850" dirty="0"/>
           </a:p>
@@ -13472,7 +14070,7 @@
                 <a:ea typeface="Calibri" pitchFamily="34" charset="-122"/>
                 <a:cs typeface="Calibri" pitchFamily="34" charset="-120"/>
               </a:rPr>
-              <a:t>warmth or high temperature</a:t>
+              <a:t>warmth; to make warm</a:t>
             </a:r>
             <a:endParaRPr lang="en-US" sz="850" dirty="0"/>
           </a:p>
@@ -13545,7 +14143,7 @@
                 <a:ea typeface="Trebuchet MS" pitchFamily="34" charset="-122"/>
                 <a:cs typeface="Trebuchet MS" pitchFamily="34" charset="-120"/>
               </a:rPr>
-              <a:t>ed</a:t>
+              <a:t>ing</a:t>
             </a:r>
             <a:endParaRPr lang="en-US" sz="1300" dirty="0"/>
           </a:p>
@@ -13584,7 +14182,7 @@
                 <a:ea typeface="Calibri" pitchFamily="34" charset="-122"/>
                 <a:cs typeface="Calibri" pitchFamily="34" charset="-120"/>
               </a:rPr>
-              <a:t>past tense</a:t>
+              <a:t>happening now</a:t>
             </a:r>
             <a:endParaRPr lang="en-US" sz="850" dirty="0"/>
           </a:p>
@@ -13743,7 +14341,7 @@
                 <a:ea typeface="Trebuchet MS" pitchFamily="34" charset="-122"/>
                 <a:cs typeface="Trebuchet MS" pitchFamily="34" charset="-120"/>
               </a:rPr>
-              <a:t>re</a:t>
+              <a:t>pre</a:t>
             </a:r>
             <a:endParaRPr lang="en-US" sz="1400" dirty="0"/>
           </a:p>
@@ -13953,7 +14551,7 @@
                 <a:ea typeface="Trebuchet MS" pitchFamily="34" charset="-122"/>
                 <a:cs typeface="Trebuchet MS" pitchFamily="34" charset="-120"/>
               </a:rPr>
-              <a:t>ed</a:t>
+              <a:t>ing</a:t>
             </a:r>
             <a:endParaRPr lang="en-US" sz="1400" dirty="0"/>
           </a:p>
@@ -14286,7 +14884,7 @@
                 <a:ea typeface="Calibri" pitchFamily="34" charset="-122"/>
                 <a:cs typeface="Calibri" pitchFamily="34" charset="-120"/>
               </a:rPr>
-              <a:t>Root 'heat' — warmth or high temperature</a:t>
+              <a:t>Root 'heat' — warmth; to make warm</a:t>
             </a:r>
             <a:endParaRPr lang="en-US" sz="1600" dirty="0"/>
           </a:p>
@@ -14642,7 +15240,7 @@
                 <a:ea typeface="Calibri" pitchFamily="34" charset="-122"/>
                 <a:cs typeface="Calibri" pitchFamily="34" charset="-120"/>
               </a:rPr>
-              <a:t>Word Labs  •  wordlabs.app  •  Root: 'heat' = warmth or high temperature</a:t>
+              <a:t>Word Labs  •  wordlabs.app  •  Root: 'heat' = warmth; to make warm</a:t>
             </a:r>
             <a:endParaRPr lang="en-US" sz="800" dirty="0"/>
           </a:p>
@@ -14781,7 +15379,7 @@
                 <a:ea typeface="Trebuchet MS" pitchFamily="34" charset="-122"/>
                 <a:cs typeface="Trebuchet MS" pitchFamily="34" charset="-120"/>
               </a:rPr>
-              <a:t>reheated</a:t>
+              <a:t>preheating</a:t>
             </a:r>
             <a:endParaRPr lang="en-US" sz="2800" dirty="0"/>
           </a:p>
@@ -14920,7 +15518,7 @@
                 <a:ea typeface="Trebuchet MS" pitchFamily="34" charset="-122"/>
                 <a:cs typeface="Trebuchet MS" pitchFamily="34" charset="-120"/>
               </a:rPr>
-              <a:t>re</a:t>
+              <a:t>pre</a:t>
             </a:r>
             <a:endParaRPr lang="en-US" sz="1300" dirty="0"/>
           </a:p>
@@ -14959,7 +15557,7 @@
                 <a:ea typeface="Calibri" pitchFamily="34" charset="-122"/>
                 <a:cs typeface="Calibri" pitchFamily="34" charset="-120"/>
               </a:rPr>
-              <a:t>again</a:t>
+              <a:t>before</a:t>
             </a:r>
             <a:endParaRPr lang="en-US" sz="850" dirty="0"/>
           </a:p>
@@ -15071,7 +15669,7 @@
                 <a:ea typeface="Calibri" pitchFamily="34" charset="-122"/>
                 <a:cs typeface="Calibri" pitchFamily="34" charset="-120"/>
               </a:rPr>
-              <a:t>warmth or high temperature</a:t>
+              <a:t>warmth; to make warm</a:t>
             </a:r>
             <a:endParaRPr lang="en-US" sz="850" dirty="0"/>
           </a:p>
@@ -15144,7 +15742,7 @@
                 <a:ea typeface="Trebuchet MS" pitchFamily="34" charset="-122"/>
                 <a:cs typeface="Trebuchet MS" pitchFamily="34" charset="-120"/>
               </a:rPr>
-              <a:t>ed</a:t>
+              <a:t>ing</a:t>
             </a:r>
             <a:endParaRPr lang="en-US" sz="1300" dirty="0"/>
           </a:p>
@@ -15183,7 +15781,7 @@
                 <a:ea typeface="Calibri" pitchFamily="34" charset="-122"/>
                 <a:cs typeface="Calibri" pitchFamily="34" charset="-120"/>
               </a:rPr>
-              <a:t>past tense</a:t>
+              <a:t>happening now</a:t>
             </a:r>
             <a:endParaRPr lang="en-US" sz="850" dirty="0"/>
           </a:p>
@@ -15342,7 +15940,7 @@
                 <a:ea typeface="Trebuchet MS" pitchFamily="34" charset="-122"/>
                 <a:cs typeface="Trebuchet MS" pitchFamily="34" charset="-120"/>
               </a:rPr>
-              <a:t>re</a:t>
+              <a:t>pre</a:t>
             </a:r>
             <a:endParaRPr lang="en-US" sz="1400" dirty="0"/>
           </a:p>
@@ -15552,7 +16150,7 @@
                 <a:ea typeface="Trebuchet MS" pitchFamily="34" charset="-122"/>
                 <a:cs typeface="Trebuchet MS" pitchFamily="34" charset="-120"/>
               </a:rPr>
-              <a:t>ed</a:t>
+              <a:t>ing</a:t>
             </a:r>
             <a:endParaRPr lang="en-US" sz="1400" dirty="0"/>
           </a:p>
@@ -15659,7 +16257,7 @@
         </p:nvSpPr>
         <p:spPr>
           <a:xfrm>
-            <a:off x="2254649" y="4169664"/>
+            <a:off x="2023872" y="4169664"/>
             <a:ext cx="685800" cy="475488"/>
           </a:xfrm>
           <a:prstGeom prst="rect">
@@ -15686,7 +16284,7 @@
         </p:nvSpPr>
         <p:spPr>
           <a:xfrm>
-            <a:off x="2254649" y="4169664"/>
+            <a:off x="2023872" y="4169664"/>
             <a:ext cx="685800" cy="475488"/>
           </a:xfrm>
           <a:prstGeom prst="rect">
@@ -15711,7 +16309,7 @@
                 <a:ea typeface="Trebuchet MS" pitchFamily="34" charset="-122"/>
                 <a:cs typeface="Trebuchet MS" pitchFamily="34" charset="-120"/>
               </a:rPr>
-              <a:t>r</a:t>
+              <a:t>p</a:t>
             </a:r>
             <a:endParaRPr lang="en-US" sz="900" dirty="0"/>
           </a:p>
@@ -15725,7 +16323,7 @@
         </p:nvSpPr>
         <p:spPr>
           <a:xfrm>
-            <a:off x="3293146" y="4169664"/>
+            <a:off x="2831592" y="4169664"/>
             <a:ext cx="685800" cy="475488"/>
           </a:xfrm>
           <a:prstGeom prst="rect">
@@ -15752,7 +16350,7 @@
         </p:nvSpPr>
         <p:spPr>
           <a:xfrm>
-            <a:off x="3293146" y="4169664"/>
+            <a:off x="2831592" y="4169664"/>
             <a:ext cx="685800" cy="475488"/>
           </a:xfrm>
           <a:prstGeom prst="rect">
@@ -15777,7 +16375,7 @@
                 <a:ea typeface="Trebuchet MS" pitchFamily="34" charset="-122"/>
                 <a:cs typeface="Trebuchet MS" pitchFamily="34" charset="-120"/>
               </a:rPr>
-              <a:t>e</a:t>
+              <a:t>r</a:t>
             </a:r>
             <a:endParaRPr lang="en-US" sz="900" dirty="0"/>
           </a:p>
@@ -15791,7 +16389,7 @@
         </p:nvSpPr>
         <p:spPr>
           <a:xfrm>
-            <a:off x="4331643" y="4169664"/>
+            <a:off x="3639312" y="4169664"/>
             <a:ext cx="685800" cy="475488"/>
           </a:xfrm>
           <a:prstGeom prst="rect">
@@ -15818,7 +16416,7 @@
         </p:nvSpPr>
         <p:spPr>
           <a:xfrm>
-            <a:off x="4331643" y="4169664"/>
+            <a:off x="3639312" y="4169664"/>
             <a:ext cx="685800" cy="475488"/>
           </a:xfrm>
           <a:prstGeom prst="rect">
@@ -15843,7 +16441,7 @@
                 <a:ea typeface="Trebuchet MS" pitchFamily="34" charset="-122"/>
                 <a:cs typeface="Trebuchet MS" pitchFamily="34" charset="-120"/>
               </a:rPr>
-              <a:t>h</a:t>
+              <a:t>e</a:t>
             </a:r>
             <a:endParaRPr lang="en-US" sz="900" dirty="0"/>
           </a:p>
@@ -15857,7 +16455,7 @@
         </p:nvSpPr>
         <p:spPr>
           <a:xfrm>
-            <a:off x="5370141" y="4169664"/>
+            <a:off x="4447032" y="4169664"/>
             <a:ext cx="685800" cy="475488"/>
           </a:xfrm>
           <a:prstGeom prst="rect">
@@ -15884,7 +16482,7 @@
         </p:nvSpPr>
         <p:spPr>
           <a:xfrm>
-            <a:off x="5370141" y="4169664"/>
+            <a:off x="4447032" y="4169664"/>
             <a:ext cx="685800" cy="475488"/>
           </a:xfrm>
           <a:prstGeom prst="rect">
@@ -15909,7 +16507,7 @@
                 <a:ea typeface="Trebuchet MS" pitchFamily="34" charset="-122"/>
                 <a:cs typeface="Trebuchet MS" pitchFamily="34" charset="-120"/>
               </a:rPr>
-              <a:t>ea</a:t>
+              <a:t>h</a:t>
             </a:r>
             <a:endParaRPr lang="en-US" sz="900" dirty="0"/>
           </a:p>
@@ -15923,7 +16521,7 @@
         </p:nvSpPr>
         <p:spPr>
           <a:xfrm>
-            <a:off x="6408638" y="4169664"/>
+            <a:off x="5254752" y="4169664"/>
             <a:ext cx="685800" cy="475488"/>
           </a:xfrm>
           <a:prstGeom prst="rect">
@@ -15950,7 +16548,7 @@
         </p:nvSpPr>
         <p:spPr>
           <a:xfrm>
-            <a:off x="6408638" y="4169664"/>
+            <a:off x="5254752" y="4169664"/>
             <a:ext cx="685800" cy="475488"/>
           </a:xfrm>
           <a:prstGeom prst="rect">
@@ -15975,7 +16573,7 @@
                 <a:ea typeface="Trebuchet MS" pitchFamily="34" charset="-122"/>
                 <a:cs typeface="Trebuchet MS" pitchFamily="34" charset="-120"/>
               </a:rPr>
-              <a:t>t</a:t>
+              <a:t>ea</a:t>
             </a:r>
             <a:endParaRPr lang="en-US" sz="900" dirty="0"/>
           </a:p>
@@ -15989,7 +16587,7 @@
         </p:nvSpPr>
         <p:spPr>
           <a:xfrm>
-            <a:off x="7447135" y="4169664"/>
+            <a:off x="6062472" y="4169664"/>
             <a:ext cx="685800" cy="475488"/>
           </a:xfrm>
           <a:prstGeom prst="rect">
@@ -16016,7 +16614,7 @@
         </p:nvSpPr>
         <p:spPr>
           <a:xfrm>
-            <a:off x="7447135" y="4169664"/>
+            <a:off x="6062472" y="4169664"/>
             <a:ext cx="685800" cy="475488"/>
           </a:xfrm>
           <a:prstGeom prst="rect">
@@ -16041,7 +16639,139 @@
                 <a:ea typeface="Trebuchet MS" pitchFamily="34" charset="-122"/>
                 <a:cs typeface="Trebuchet MS" pitchFamily="34" charset="-120"/>
               </a:rPr>
-              <a:t>ed</a:t>
+              <a:t>t</a:t>
+            </a:r>
+            <a:endParaRPr lang="en-US" sz="900" dirty="0"/>
+          </a:p>
+        </p:txBody>
+      </p:sp>
+      <p:sp>
+        <p:nvSpPr>
+          <p:cNvPr id="51" name="Shape 49"/>
+          <p:cNvSpPr/>
+          <p:nvPr/>
+        </p:nvSpPr>
+        <p:spPr>
+          <a:xfrm>
+            <a:off x="6870192" y="4169664"/>
+            <a:ext cx="685800" cy="475488"/>
+          </a:xfrm>
+          <a:prstGeom prst="rect">
+            <a:avLst>
+              <a:gd name="adj" fmla="val 7692"/>
+            </a:avLst>
+          </a:prstGeom>
+          <a:solidFill>
+            <a:srgbClr val="FFFFFF"/>
+          </a:solidFill>
+          <a:ln w="12700">
+            <a:solidFill>
+              <a:srgbClr val="DB2777"/>
+            </a:solidFill>
+            <a:prstDash val="solid"/>
+          </a:ln>
+        </p:spPr>
+      </p:sp>
+      <p:sp>
+        <p:nvSpPr>
+          <p:cNvPr id="52" name="Text 50"/>
+          <p:cNvSpPr/>
+          <p:nvPr/>
+        </p:nvSpPr>
+        <p:spPr>
+          <a:xfrm>
+            <a:off x="6870192" y="4169664"/>
+            <a:ext cx="685800" cy="475488"/>
+          </a:xfrm>
+          <a:prstGeom prst="rect">
+            <a:avLst/>
+          </a:prstGeom>
+          <a:noFill/>
+          <a:ln/>
+        </p:spPr>
+        <p:txBody>
+          <a:bodyPr wrap="square" lIns="0" tIns="0" rIns="0" bIns="0" rtlCol="0" anchor="ctr"/>
+          <a:lstStyle/>
+          <a:p>
+            <a:pPr algn="ctr" indent="0" marL="0">
+              <a:buNone/>
+            </a:pPr>
+            <a:r>
+              <a:rPr lang="en-US" sz="900" b="1" dirty="0">
+                <a:solidFill>
+                  <a:srgbClr val="9D174D"/>
+                </a:solidFill>
+                <a:latin typeface="Trebuchet MS" pitchFamily="34" charset="0"/>
+                <a:ea typeface="Trebuchet MS" pitchFamily="34" charset="-122"/>
+                <a:cs typeface="Trebuchet MS" pitchFamily="34" charset="-120"/>
+              </a:rPr>
+              <a:t>i</a:t>
+            </a:r>
+            <a:endParaRPr lang="en-US" sz="900" dirty="0"/>
+          </a:p>
+        </p:txBody>
+      </p:sp>
+      <p:sp>
+        <p:nvSpPr>
+          <p:cNvPr id="53" name="Shape 51"/>
+          <p:cNvSpPr/>
+          <p:nvPr/>
+        </p:nvSpPr>
+        <p:spPr>
+          <a:xfrm>
+            <a:off x="7677912" y="4169664"/>
+            <a:ext cx="685800" cy="475488"/>
+          </a:xfrm>
+          <a:prstGeom prst="rect">
+            <a:avLst>
+              <a:gd name="adj" fmla="val 7692"/>
+            </a:avLst>
+          </a:prstGeom>
+          <a:solidFill>
+            <a:srgbClr val="FFFFFF"/>
+          </a:solidFill>
+          <a:ln w="12700">
+            <a:solidFill>
+              <a:srgbClr val="DB2777"/>
+            </a:solidFill>
+            <a:prstDash val="solid"/>
+          </a:ln>
+        </p:spPr>
+      </p:sp>
+      <p:sp>
+        <p:nvSpPr>
+          <p:cNvPr id="54" name="Text 52"/>
+          <p:cNvSpPr/>
+          <p:nvPr/>
+        </p:nvSpPr>
+        <p:spPr>
+          <a:xfrm>
+            <a:off x="7677912" y="4169664"/>
+            <a:ext cx="685800" cy="475488"/>
+          </a:xfrm>
+          <a:prstGeom prst="rect">
+            <a:avLst/>
+          </a:prstGeom>
+          <a:noFill/>
+          <a:ln/>
+        </p:spPr>
+        <p:txBody>
+          <a:bodyPr wrap="square" lIns="0" tIns="0" rIns="0" bIns="0" rtlCol="0" anchor="ctr"/>
+          <a:lstStyle/>
+          <a:p>
+            <a:pPr algn="ctr" indent="0" marL="0">
+              <a:buNone/>
+            </a:pPr>
+            <a:r>
+              <a:rPr lang="en-US" sz="900" b="1" dirty="0">
+                <a:solidFill>
+                  <a:srgbClr val="9D174D"/>
+                </a:solidFill>
+                <a:latin typeface="Trebuchet MS" pitchFamily="34" charset="0"/>
+                <a:ea typeface="Trebuchet MS" pitchFamily="34" charset="-122"/>
+                <a:cs typeface="Trebuchet MS" pitchFamily="34" charset="-120"/>
+              </a:rPr>
+              <a:t>ng</a:t>
             </a:r>
             <a:endParaRPr lang="en-US" sz="900" dirty="0"/>
           </a:p>
@@ -16615,7 +17345,7 @@
                 <a:ea typeface="Calibri" pitchFamily="34" charset="-122"/>
                 <a:cs typeface="Calibri" pitchFamily="34" charset="-120"/>
               </a:rPr>
-              <a:t>Word Labs  •  wordlabs.app  •  Root: 'heat' = warmth or high temperature</a:t>
+              <a:t>Word Labs  •  wordlabs.app  •  Root: 'heat' = warmth; to make warm</a:t>
             </a:r>
             <a:endParaRPr lang="en-US" sz="800" dirty="0"/>
           </a:p>
@@ -16949,7 +17679,7 @@
                 <a:ea typeface="Trebuchet MS" pitchFamily="34" charset="-122"/>
                 <a:cs typeface="Trebuchet MS" pitchFamily="34" charset="-120"/>
               </a:rPr>
-              <a:t>2</a:t>
+              <a:t>0</a:t>
             </a:r>
             <a:pPr algn="ctr" indent="0" marL="0">
               <a:buNone/>
@@ -16963,7 +17693,7 @@
                 <a:ea typeface="Trebuchet MS" pitchFamily="34" charset="-122"/>
                 <a:cs typeface="Trebuchet MS" pitchFamily="34" charset="-120"/>
               </a:rPr>
-              <a:t>  punctuation marks</a:t>
+              <a:t>  punctuation mark</a:t>
             </a:r>
             <a:endParaRPr lang="en-US" sz="2800" dirty="0"/>
           </a:p>
@@ -17255,7 +17985,7 @@
                 <a:ea typeface="Calibri" pitchFamily="34" charset="-122"/>
                 <a:cs typeface="Calibri" pitchFamily="34" charset="-120"/>
               </a:rPr>
-              <a:t>Word Labs  •  wordlabs.app  •  Root: 'heat' = warmth or high temperature</a:t>
+              <a:t>Word Labs  •  wordlabs.app  •  Root: 'heat' = warmth; to make warm</a:t>
             </a:r>
             <a:endParaRPr lang="en-US" sz="800" dirty="0"/>
           </a:p>
@@ -17367,7 +18097,7 @@
                 <a:ea typeface="Calibri" pitchFamily="34" charset="-122"/>
                 <a:cs typeface="Calibri" pitchFamily="34" charset="-120"/>
               </a:rPr>
-              <a:t>During the </a:t>
+              <a:t>Old computers can </a:t>
             </a:r>
             <a:pPr algn="l" indent="0" marL="0">
               <a:buNone/>
@@ -17384,7 +18114,7 @@
                 <a:ea typeface="Calibri" pitchFamily="34" charset="-122"/>
                 <a:cs typeface="Calibri" pitchFamily="34" charset="-120"/>
               </a:rPr>
-              <a:t>heatwave</a:t>
+              <a:t>overheat</a:t>
             </a:r>
             <a:pPr algn="l" indent="0" marL="0">
               <a:buNone/>
@@ -17398,7 +18128,7 @@
                 <a:ea typeface="Calibri" pitchFamily="34" charset="-122"/>
                 <a:cs typeface="Calibri" pitchFamily="34" charset="-120"/>
               </a:rPr>
-              <a:t>, the </a:t>
+              <a:t> if they are used for too long without a break. The </a:t>
             </a:r>
             <a:pPr algn="l" indent="0" marL="0">
               <a:buNone/>
@@ -17429,7 +18159,7 @@
                 <a:ea typeface="Calibri" pitchFamily="34" charset="-122"/>
                 <a:cs typeface="Calibri" pitchFamily="34" charset="-120"/>
               </a:rPr>
-              <a:t> swimmer drank lots of water, because her coach was worried about </a:t>
+              <a:t> engine began to smoke on the motorway. The old car's engine started </a:t>
             </a:r>
             <a:pPr algn="l" indent="0" marL="0">
               <a:buNone/>
@@ -17446,7 +18176,7 @@
                 <a:ea typeface="Calibri" pitchFamily="34" charset="-122"/>
                 <a:cs typeface="Calibri" pitchFamily="34" charset="-120"/>
               </a:rPr>
-              <a:t>heatstroke</a:t>
+              <a:t>overheating</a:t>
             </a:r>
             <a:pPr algn="l" indent="0" marL="0">
               <a:buNone/>
@@ -17460,7 +18190,7 @@
                 <a:ea typeface="Calibri" pitchFamily="34" charset="-122"/>
                 <a:cs typeface="Calibri" pitchFamily="34" charset="-120"/>
               </a:rPr>
-              <a:t>.</a:t>
+              <a:t> on the motorway.</a:t>
             </a:r>
             <a:endParaRPr lang="en-US" sz="1800" dirty="0"/>
           </a:p>
@@ -17615,7 +18345,7 @@
                 <a:ea typeface="Trebuchet MS" pitchFamily="34" charset="-122"/>
                 <a:cs typeface="Trebuchet MS" pitchFamily="34" charset="-120"/>
               </a:rPr>
-              <a:t>heatwave</a:t>
+              <a:t>overheat</a:t>
             </a:r>
             <a:endParaRPr lang="en-US" sz="1400" dirty="0"/>
           </a:p>
@@ -17871,7 +18601,7 @@
                 <a:ea typeface="Trebuchet MS" pitchFamily="34" charset="-122"/>
                 <a:cs typeface="Trebuchet MS" pitchFamily="34" charset="-120"/>
               </a:rPr>
-              <a:t>heatstroke</a:t>
+              <a:t>overheating</a:t>
             </a:r>
             <a:endParaRPr lang="en-US" sz="1400" dirty="0"/>
           </a:p>
@@ -18202,7 +18932,7 @@
                 <a:ea typeface="Calibri" pitchFamily="34" charset="-122"/>
                 <a:cs typeface="Calibri" pitchFamily="34" charset="-120"/>
               </a:rPr>
-              <a:t>Word Labs  •  wordlabs.app  •  Root: 'heat' = warmth or high temperature</a:t>
+              <a:t>Word Labs  •  wordlabs.app  •  Root: 'heat' = warmth; to make warm</a:t>
             </a:r>
             <a:endParaRPr lang="en-US" sz="800" dirty="0"/>
           </a:p>
@@ -18341,7 +19071,7 @@
                 <a:ea typeface="Trebuchet MS" pitchFamily="34" charset="-122"/>
                 <a:cs typeface="Trebuchet MS" pitchFamily="34" charset="-120"/>
               </a:rPr>
-              <a:t>heatwave</a:t>
+              <a:t>overheat</a:t>
             </a:r>
             <a:endParaRPr lang="en-US" sz="2800" dirty="0"/>
           </a:p>
@@ -19029,7 +19759,7 @@
                 <a:ea typeface="Calibri" pitchFamily="34" charset="-122"/>
                 <a:cs typeface="Calibri" pitchFamily="34" charset="-120"/>
               </a:rPr>
-              <a:t>Word Labs  •  wordlabs.app  •  Root: 'heat' = warmth or high temperature</a:t>
+              <a:t>Word Labs  •  wordlabs.app  •  Root: 'heat' = warmth; to make warm</a:t>
             </a:r>
             <a:endParaRPr lang="en-US" sz="800" dirty="0"/>
           </a:p>
@@ -19168,7 +19898,7 @@
                 <a:ea typeface="Trebuchet MS" pitchFamily="34" charset="-122"/>
                 <a:cs typeface="Trebuchet MS" pitchFamily="34" charset="-120"/>
               </a:rPr>
-              <a:t>heatwave</a:t>
+              <a:t>overheat</a:t>
             </a:r>
             <a:endParaRPr lang="en-US" sz="2800" dirty="0"/>
           </a:p>
@@ -19257,11 +19987,11 @@
             </a:avLst>
           </a:prstGeom>
           <a:solidFill>
-            <a:srgbClr val="CCFBF1"/>
+            <a:srgbClr val="DDD6FE"/>
           </a:solidFill>
           <a:ln w="19050">
             <a:solidFill>
-              <a:srgbClr val="0D9488"/>
+              <a:srgbClr val="7C3AED"/>
             </a:solidFill>
             <a:prstDash val="solid"/>
           </a:ln>
@@ -19301,13 +20031,13 @@
             <a:r>
               <a:rPr lang="en-US" sz="1300" b="1" dirty="0">
                 <a:solidFill>
-                  <a:srgbClr val="0F766E"/>
+                  <a:srgbClr val="4C1D95"/>
                 </a:solidFill>
                 <a:latin typeface="Trebuchet MS" pitchFamily="34" charset="0"/>
                 <a:ea typeface="Trebuchet MS" pitchFamily="34" charset="-122"/>
                 <a:cs typeface="Trebuchet MS" pitchFamily="34" charset="-120"/>
               </a:rPr>
-              <a:t>heat</a:t>
+              <a:t>over</a:t>
             </a:r>
             <a:endParaRPr lang="en-US" sz="1300" dirty="0"/>
           </a:p>
@@ -19346,7 +20076,7 @@
                 <a:ea typeface="Calibri" pitchFamily="34" charset="-122"/>
                 <a:cs typeface="Calibri" pitchFamily="34" charset="-120"/>
               </a:rPr>
-              <a:t>warmth or high temperature</a:t>
+              <a:t>too much</a:t>
             </a:r>
             <a:endParaRPr lang="en-US" sz="850" dirty="0"/>
           </a:p>
@@ -19369,11 +20099,11 @@
             </a:avLst>
           </a:prstGeom>
           <a:solidFill>
-            <a:srgbClr val="FCE7F3"/>
+            <a:srgbClr val="CCFBF1"/>
           </a:solidFill>
           <a:ln w="19050">
             <a:solidFill>
-              <a:srgbClr val="DB2777"/>
+              <a:srgbClr val="0D9488"/>
             </a:solidFill>
             <a:prstDash val="solid"/>
           </a:ln>
@@ -19413,13 +20143,13 @@
             <a:r>
               <a:rPr lang="en-US" sz="1300" b="1" dirty="0">
                 <a:solidFill>
-                  <a:srgbClr val="9D174D"/>
+                  <a:srgbClr val="0F766E"/>
                 </a:solidFill>
                 <a:latin typeface="Trebuchet MS" pitchFamily="34" charset="0"/>
                 <a:ea typeface="Trebuchet MS" pitchFamily="34" charset="-122"/>
                 <a:cs typeface="Trebuchet MS" pitchFamily="34" charset="-120"/>
               </a:rPr>
-              <a:t>wave</a:t>
+              <a:t>heat</a:t>
             </a:r>
             <a:endParaRPr lang="en-US" sz="1300" dirty="0"/>
           </a:p>
@@ -19458,7 +20188,7 @@
                 <a:ea typeface="Calibri" pitchFamily="34" charset="-122"/>
                 <a:cs typeface="Calibri" pitchFamily="34" charset="-120"/>
               </a:rPr>
-              <a:t>a moving swell or surge</a:t>
+              <a:t>warmth; to make warm</a:t>
             </a:r>
             <a:endParaRPr lang="en-US" sz="850" dirty="0"/>
           </a:p>
@@ -20014,7 +20744,7 @@
                 <a:ea typeface="Calibri" pitchFamily="34" charset="-122"/>
                 <a:cs typeface="Calibri" pitchFamily="34" charset="-120"/>
               </a:rPr>
-              <a:t>Word Labs  •  wordlabs.app  •  Root: 'heat' = warmth or high temperature</a:t>
+              <a:t>Word Labs  •  wordlabs.app  •  Root: 'heat' = warmth; to make warm</a:t>
             </a:r>
             <a:endParaRPr lang="en-US" sz="800" dirty="0"/>
           </a:p>
@@ -20153,7 +20883,7 @@
                 <a:ea typeface="Trebuchet MS" pitchFamily="34" charset="-122"/>
                 <a:cs typeface="Trebuchet MS" pitchFamily="34" charset="-120"/>
               </a:rPr>
-              <a:t>heatwave</a:t>
+              <a:t>overheat</a:t>
             </a:r>
             <a:endParaRPr lang="en-US" sz="2800" dirty="0"/>
           </a:p>
@@ -20242,11 +20972,11 @@
             </a:avLst>
           </a:prstGeom>
           <a:solidFill>
-            <a:srgbClr val="CCFBF1"/>
+            <a:srgbClr val="DDD6FE"/>
           </a:solidFill>
           <a:ln w="19050">
             <a:solidFill>
-              <a:srgbClr val="0D9488"/>
+              <a:srgbClr val="7C3AED"/>
             </a:solidFill>
             <a:prstDash val="solid"/>
           </a:ln>
@@ -20286,13 +21016,13 @@
             <a:r>
               <a:rPr lang="en-US" sz="1300" b="1" dirty="0">
                 <a:solidFill>
-                  <a:srgbClr val="0F766E"/>
+                  <a:srgbClr val="4C1D95"/>
                 </a:solidFill>
                 <a:latin typeface="Trebuchet MS" pitchFamily="34" charset="0"/>
                 <a:ea typeface="Trebuchet MS" pitchFamily="34" charset="-122"/>
                 <a:cs typeface="Trebuchet MS" pitchFamily="34" charset="-120"/>
               </a:rPr>
-              <a:t>heat</a:t>
+              <a:t>over</a:t>
             </a:r>
             <a:endParaRPr lang="en-US" sz="1300" dirty="0"/>
           </a:p>
@@ -20331,7 +21061,7 @@
                 <a:ea typeface="Calibri" pitchFamily="34" charset="-122"/>
                 <a:cs typeface="Calibri" pitchFamily="34" charset="-120"/>
               </a:rPr>
-              <a:t>warmth or high temperature</a:t>
+              <a:t>too much</a:t>
             </a:r>
             <a:endParaRPr lang="en-US" sz="850" dirty="0"/>
           </a:p>
@@ -20354,11 +21084,11 @@
             </a:avLst>
           </a:prstGeom>
           <a:solidFill>
-            <a:srgbClr val="FCE7F3"/>
+            <a:srgbClr val="CCFBF1"/>
           </a:solidFill>
           <a:ln w="19050">
             <a:solidFill>
-              <a:srgbClr val="DB2777"/>
+              <a:srgbClr val="0D9488"/>
             </a:solidFill>
             <a:prstDash val="solid"/>
           </a:ln>
@@ -20398,13 +21128,13 @@
             <a:r>
               <a:rPr lang="en-US" sz="1300" b="1" dirty="0">
                 <a:solidFill>
-                  <a:srgbClr val="9D174D"/>
+                  <a:srgbClr val="0F766E"/>
                 </a:solidFill>
                 <a:latin typeface="Trebuchet MS" pitchFamily="34" charset="0"/>
                 <a:ea typeface="Trebuchet MS" pitchFamily="34" charset="-122"/>
                 <a:cs typeface="Trebuchet MS" pitchFamily="34" charset="-120"/>
               </a:rPr>
-              <a:t>wave</a:t>
+              <a:t>heat</a:t>
             </a:r>
             <a:endParaRPr lang="en-US" sz="1300" dirty="0"/>
           </a:p>
@@ -20443,7 +21173,7 @@
                 <a:ea typeface="Calibri" pitchFamily="34" charset="-122"/>
                 <a:cs typeface="Calibri" pitchFamily="34" charset="-120"/>
               </a:rPr>
-              <a:t>a moving swell or surge</a:t>
+              <a:t>warmth; to make warm</a:t>
             </a:r>
             <a:endParaRPr lang="en-US" sz="850" dirty="0"/>
           </a:p>
@@ -20550,7 +21280,7 @@
         </p:nvSpPr>
         <p:spPr>
           <a:xfrm>
-            <a:off x="2999232" y="3364992"/>
+            <a:off x="2313432" y="3364992"/>
             <a:ext cx="1645920" cy="475488"/>
           </a:xfrm>
           <a:prstGeom prst="rect">
@@ -20577,7 +21307,7 @@
         </p:nvSpPr>
         <p:spPr>
           <a:xfrm>
-            <a:off x="2999232" y="3364992"/>
+            <a:off x="2313432" y="3364992"/>
             <a:ext cx="1645920" cy="475488"/>
           </a:xfrm>
           <a:prstGeom prst="rect">
@@ -20602,7 +21332,7 @@
                 <a:ea typeface="Trebuchet MS" pitchFamily="34" charset="-122"/>
                 <a:cs typeface="Trebuchet MS" pitchFamily="34" charset="-120"/>
               </a:rPr>
-              <a:t>heat</a:t>
+              <a:t>o</a:t>
             </a:r>
             <a:endParaRPr lang="en-US" sz="1400" dirty="0"/>
           </a:p>
@@ -20616,8 +21346,8 @@
         </p:nvSpPr>
         <p:spPr>
           <a:xfrm>
-            <a:off x="4645152" y="3364992"/>
-            <a:ext cx="1097280" cy="475488"/>
+            <a:off x="3959352" y="3364992"/>
+            <a:ext cx="411480" cy="475488"/>
           </a:xfrm>
           <a:prstGeom prst="rect">
             <a:avLst/>
@@ -20655,7 +21385,7 @@
         </p:nvSpPr>
         <p:spPr>
           <a:xfrm>
-            <a:off x="5742432" y="3364992"/>
+            <a:off x="4370832" y="3364992"/>
             <a:ext cx="1645920" cy="475488"/>
           </a:xfrm>
           <a:prstGeom prst="rect">
@@ -20682,7 +21412,7 @@
         </p:nvSpPr>
         <p:spPr>
           <a:xfrm>
-            <a:off x="5742432" y="3364992"/>
+            <a:off x="4370832" y="3364992"/>
             <a:ext cx="1645920" cy="475488"/>
           </a:xfrm>
           <a:prstGeom prst="rect">
@@ -20707,7 +21437,7 @@
                 <a:ea typeface="Trebuchet MS" pitchFamily="34" charset="-122"/>
                 <a:cs typeface="Trebuchet MS" pitchFamily="34" charset="-120"/>
               </a:rPr>
-              <a:t>wave</a:t>
+              <a:t>ver</a:t>
             </a:r>
             <a:endParaRPr lang="en-US" sz="1400" dirty="0"/>
           </a:p>
@@ -20715,7 +21445,112 @@
       </p:sp>
       <p:sp>
         <p:nvSpPr>
-          <p:cNvPr id="30" name="Shape 28"/>
+          <p:cNvPr id="30" name="Text 28"/>
+          <p:cNvSpPr/>
+          <p:nvPr/>
+        </p:nvSpPr>
+        <p:spPr>
+          <a:xfrm>
+            <a:off x="6016752" y="3364992"/>
+            <a:ext cx="411480" cy="475488"/>
+          </a:xfrm>
+          <a:prstGeom prst="rect">
+            <a:avLst/>
+          </a:prstGeom>
+          <a:noFill/>
+          <a:ln/>
+        </p:spPr>
+        <p:txBody>
+          <a:bodyPr wrap="square" lIns="0" tIns="0" rIns="0" bIns="0" rtlCol="0" anchor="ctr"/>
+          <a:lstStyle/>
+          <a:p>
+            <a:pPr algn="ctr" indent="0" marL="0">
+              <a:buNone/>
+            </a:pPr>
+            <a:r>
+              <a:rPr lang="en-US" sz="1600" b="1" dirty="0">
+                <a:solidFill>
+                  <a:srgbClr val="0D9488"/>
+                </a:solidFill>
+                <a:latin typeface="Trebuchet MS" pitchFamily="34" charset="0"/>
+                <a:ea typeface="Trebuchet MS" pitchFamily="34" charset="-122"/>
+                <a:cs typeface="Trebuchet MS" pitchFamily="34" charset="-120"/>
+              </a:rPr>
+              <a:t>·</a:t>
+            </a:r>
+            <a:endParaRPr lang="en-US" sz="1600" dirty="0"/>
+          </a:p>
+        </p:txBody>
+      </p:sp>
+      <p:sp>
+        <p:nvSpPr>
+          <p:cNvPr id="31" name="Shape 29"/>
+          <p:cNvSpPr/>
+          <p:nvPr/>
+        </p:nvSpPr>
+        <p:spPr>
+          <a:xfrm>
+            <a:off x="6428232" y="3364992"/>
+            <a:ext cx="1645920" cy="475488"/>
+          </a:xfrm>
+          <a:prstGeom prst="rect">
+            <a:avLst>
+              <a:gd name="adj" fmla="val 9615"/>
+            </a:avLst>
+          </a:prstGeom>
+          <a:solidFill>
+            <a:srgbClr val="FFFFFF"/>
+          </a:solidFill>
+          <a:ln w="12700">
+            <a:solidFill>
+              <a:srgbClr val="0D9488"/>
+            </a:solidFill>
+            <a:prstDash val="solid"/>
+          </a:ln>
+        </p:spPr>
+      </p:sp>
+      <p:sp>
+        <p:nvSpPr>
+          <p:cNvPr id="32" name="Text 30"/>
+          <p:cNvSpPr/>
+          <p:nvPr/>
+        </p:nvSpPr>
+        <p:spPr>
+          <a:xfrm>
+            <a:off x="6428232" y="3364992"/>
+            <a:ext cx="1645920" cy="475488"/>
+          </a:xfrm>
+          <a:prstGeom prst="rect">
+            <a:avLst/>
+          </a:prstGeom>
+          <a:noFill/>
+          <a:ln/>
+        </p:spPr>
+        <p:txBody>
+          <a:bodyPr wrap="square" lIns="0" tIns="0" rIns="0" bIns="0" rtlCol="0" anchor="ctr"/>
+          <a:lstStyle/>
+          <a:p>
+            <a:pPr algn="ctr" indent="0" marL="0">
+              <a:buNone/>
+            </a:pPr>
+            <a:r>
+              <a:rPr lang="en-US" sz="1400" b="1" dirty="0">
+                <a:solidFill>
+                  <a:srgbClr val="0D9488"/>
+                </a:solidFill>
+                <a:latin typeface="Trebuchet MS" pitchFamily="34" charset="0"/>
+                <a:ea typeface="Trebuchet MS" pitchFamily="34" charset="-122"/>
+                <a:cs typeface="Trebuchet MS" pitchFamily="34" charset="-120"/>
+              </a:rPr>
+              <a:t>heat</a:t>
+            </a:r>
+            <a:endParaRPr lang="en-US" sz="1400" dirty="0"/>
+          </a:p>
+        </p:txBody>
+      </p:sp>
+      <p:sp>
+        <p:nvSpPr>
+          <p:cNvPr id="33" name="Shape 31"/>
           <p:cNvSpPr/>
           <p:nvPr/>
         </p:nvSpPr>
@@ -20742,7 +21577,7 @@
       </p:sp>
       <p:sp>
         <p:nvSpPr>
-          <p:cNvPr id="31" name="Text 29"/>
+          <p:cNvPr id="34" name="Text 32"/>
           <p:cNvSpPr/>
           <p:nvPr/>
         </p:nvSpPr>
@@ -20781,7 +21616,7 @@
       </p:sp>
       <p:sp>
         <p:nvSpPr>
-          <p:cNvPr id="32" name="Shape 30"/>
+          <p:cNvPr id="35" name="Shape 33"/>
           <p:cNvSpPr/>
           <p:nvPr/>
         </p:nvSpPr>
@@ -20808,7 +21643,7 @@
       </p:sp>
       <p:sp>
         <p:nvSpPr>
-          <p:cNvPr id="33" name="Text 31"/>
+          <p:cNvPr id="36" name="Text 34"/>
           <p:cNvSpPr/>
           <p:nvPr/>
         </p:nvSpPr>
@@ -21131,7 +21966,7 @@
                 <a:ea typeface="Calibri" pitchFamily="34" charset="-122"/>
                 <a:cs typeface="Calibri" pitchFamily="34" charset="-120"/>
               </a:rPr>
-              <a:t>Word Labs  •  wordlabs.app  •  Root: 'heat' = warmth or high temperature</a:t>
+              <a:t>Word Labs  •  wordlabs.app  •  Root: 'heat' = warmth; to make warm</a:t>
             </a:r>
             <a:endParaRPr lang="en-US" sz="800" dirty="0"/>
           </a:p>
@@ -21270,7 +22105,7 @@
                 <a:ea typeface="Trebuchet MS" pitchFamily="34" charset="-122"/>
                 <a:cs typeface="Trebuchet MS" pitchFamily="34" charset="-120"/>
               </a:rPr>
-              <a:t>heatwave</a:t>
+              <a:t>overheat</a:t>
             </a:r>
             <a:endParaRPr lang="en-US" sz="2800" dirty="0"/>
           </a:p>
@@ -21359,11 +22194,11 @@
             </a:avLst>
           </a:prstGeom>
           <a:solidFill>
-            <a:srgbClr val="CCFBF1"/>
+            <a:srgbClr val="DDD6FE"/>
           </a:solidFill>
           <a:ln w="19050">
             <a:solidFill>
-              <a:srgbClr val="0D9488"/>
+              <a:srgbClr val="7C3AED"/>
             </a:solidFill>
             <a:prstDash val="solid"/>
           </a:ln>
@@ -21403,13 +22238,13 @@
             <a:r>
               <a:rPr lang="en-US" sz="1300" b="1" dirty="0">
                 <a:solidFill>
-                  <a:srgbClr val="0F766E"/>
+                  <a:srgbClr val="4C1D95"/>
                 </a:solidFill>
                 <a:latin typeface="Trebuchet MS" pitchFamily="34" charset="0"/>
                 <a:ea typeface="Trebuchet MS" pitchFamily="34" charset="-122"/>
                 <a:cs typeface="Trebuchet MS" pitchFamily="34" charset="-120"/>
               </a:rPr>
-              <a:t>heat</a:t>
+              <a:t>over</a:t>
             </a:r>
             <a:endParaRPr lang="en-US" sz="1300" dirty="0"/>
           </a:p>
@@ -21448,7 +22283,7 @@
                 <a:ea typeface="Calibri" pitchFamily="34" charset="-122"/>
                 <a:cs typeface="Calibri" pitchFamily="34" charset="-120"/>
               </a:rPr>
-              <a:t>warmth or high temperature</a:t>
+              <a:t>too much</a:t>
             </a:r>
             <a:endParaRPr lang="en-US" sz="850" dirty="0"/>
           </a:p>
@@ -21471,11 +22306,11 @@
             </a:avLst>
           </a:prstGeom>
           <a:solidFill>
-            <a:srgbClr val="FCE7F3"/>
+            <a:srgbClr val="CCFBF1"/>
           </a:solidFill>
           <a:ln w="19050">
             <a:solidFill>
-              <a:srgbClr val="DB2777"/>
+              <a:srgbClr val="0D9488"/>
             </a:solidFill>
             <a:prstDash val="solid"/>
           </a:ln>
@@ -21515,13 +22350,13 @@
             <a:r>
               <a:rPr lang="en-US" sz="1300" b="1" dirty="0">
                 <a:solidFill>
-                  <a:srgbClr val="9D174D"/>
+                  <a:srgbClr val="0F766E"/>
                 </a:solidFill>
                 <a:latin typeface="Trebuchet MS" pitchFamily="34" charset="0"/>
                 <a:ea typeface="Trebuchet MS" pitchFamily="34" charset="-122"/>
                 <a:cs typeface="Trebuchet MS" pitchFamily="34" charset="-120"/>
               </a:rPr>
-              <a:t>wave</a:t>
+              <a:t>heat</a:t>
             </a:r>
             <a:endParaRPr lang="en-US" sz="1300" dirty="0"/>
           </a:p>
@@ -21560,7 +22395,7 @@
                 <a:ea typeface="Calibri" pitchFamily="34" charset="-122"/>
                 <a:cs typeface="Calibri" pitchFamily="34" charset="-120"/>
               </a:rPr>
-              <a:t>a moving swell or surge</a:t>
+              <a:t>warmth; to make warm</a:t>
             </a:r>
             <a:endParaRPr lang="en-US" sz="850" dirty="0"/>
           </a:p>
@@ -21667,7 +22502,7 @@
         </p:nvSpPr>
         <p:spPr>
           <a:xfrm>
-            <a:off x="2999232" y="3364992"/>
+            <a:off x="2313432" y="3364992"/>
             <a:ext cx="1645920" cy="475488"/>
           </a:xfrm>
           <a:prstGeom prst="rect">
@@ -21694,7 +22529,7 @@
         </p:nvSpPr>
         <p:spPr>
           <a:xfrm>
-            <a:off x="2999232" y="3364992"/>
+            <a:off x="2313432" y="3364992"/>
             <a:ext cx="1645920" cy="475488"/>
           </a:xfrm>
           <a:prstGeom prst="rect">
@@ -21719,7 +22554,7 @@
                 <a:ea typeface="Trebuchet MS" pitchFamily="34" charset="-122"/>
                 <a:cs typeface="Trebuchet MS" pitchFamily="34" charset="-120"/>
               </a:rPr>
-              <a:t>heat</a:t>
+              <a:t>o</a:t>
             </a:r>
             <a:endParaRPr lang="en-US" sz="1400" dirty="0"/>
           </a:p>
@@ -21733,8 +22568,8 @@
         </p:nvSpPr>
         <p:spPr>
           <a:xfrm>
-            <a:off x="4645152" y="3364992"/>
-            <a:ext cx="1097280" cy="475488"/>
+            <a:off x="3959352" y="3364992"/>
+            <a:ext cx="411480" cy="475488"/>
           </a:xfrm>
           <a:prstGeom prst="rect">
             <a:avLst/>
@@ -21772,7 +22607,7 @@
         </p:nvSpPr>
         <p:spPr>
           <a:xfrm>
-            <a:off x="5742432" y="3364992"/>
+            <a:off x="4370832" y="3364992"/>
             <a:ext cx="1645920" cy="475488"/>
           </a:xfrm>
           <a:prstGeom prst="rect">
@@ -21799,7 +22634,7 @@
         </p:nvSpPr>
         <p:spPr>
           <a:xfrm>
-            <a:off x="5742432" y="3364992"/>
+            <a:off x="4370832" y="3364992"/>
             <a:ext cx="1645920" cy="475488"/>
           </a:xfrm>
           <a:prstGeom prst="rect">
@@ -21824,7 +22659,7 @@
                 <a:ea typeface="Trebuchet MS" pitchFamily="34" charset="-122"/>
                 <a:cs typeface="Trebuchet MS" pitchFamily="34" charset="-120"/>
               </a:rPr>
-              <a:t>wave</a:t>
+              <a:t>ver</a:t>
             </a:r>
             <a:endParaRPr lang="en-US" sz="1400" dirty="0"/>
           </a:p>
@@ -21832,7 +22667,112 @@
       </p:sp>
       <p:sp>
         <p:nvSpPr>
-          <p:cNvPr id="30" name="Shape 28"/>
+          <p:cNvPr id="30" name="Text 28"/>
+          <p:cNvSpPr/>
+          <p:nvPr/>
+        </p:nvSpPr>
+        <p:spPr>
+          <a:xfrm>
+            <a:off x="6016752" y="3364992"/>
+            <a:ext cx="411480" cy="475488"/>
+          </a:xfrm>
+          <a:prstGeom prst="rect">
+            <a:avLst/>
+          </a:prstGeom>
+          <a:noFill/>
+          <a:ln/>
+        </p:spPr>
+        <p:txBody>
+          <a:bodyPr wrap="square" lIns="0" tIns="0" rIns="0" bIns="0" rtlCol="0" anchor="ctr"/>
+          <a:lstStyle/>
+          <a:p>
+            <a:pPr algn="ctr" indent="0" marL="0">
+              <a:buNone/>
+            </a:pPr>
+            <a:r>
+              <a:rPr lang="en-US" sz="1600" b="1" dirty="0">
+                <a:solidFill>
+                  <a:srgbClr val="0D9488"/>
+                </a:solidFill>
+                <a:latin typeface="Trebuchet MS" pitchFamily="34" charset="0"/>
+                <a:ea typeface="Trebuchet MS" pitchFamily="34" charset="-122"/>
+                <a:cs typeface="Trebuchet MS" pitchFamily="34" charset="-120"/>
+              </a:rPr>
+              <a:t>·</a:t>
+            </a:r>
+            <a:endParaRPr lang="en-US" sz="1600" dirty="0"/>
+          </a:p>
+        </p:txBody>
+      </p:sp>
+      <p:sp>
+        <p:nvSpPr>
+          <p:cNvPr id="31" name="Shape 29"/>
+          <p:cNvSpPr/>
+          <p:nvPr/>
+        </p:nvSpPr>
+        <p:spPr>
+          <a:xfrm>
+            <a:off x="6428232" y="3364992"/>
+            <a:ext cx="1645920" cy="475488"/>
+          </a:xfrm>
+          <a:prstGeom prst="rect">
+            <a:avLst>
+              <a:gd name="adj" fmla="val 9615"/>
+            </a:avLst>
+          </a:prstGeom>
+          <a:solidFill>
+            <a:srgbClr val="FFFFFF"/>
+          </a:solidFill>
+          <a:ln w="12700">
+            <a:solidFill>
+              <a:srgbClr val="0D9488"/>
+            </a:solidFill>
+            <a:prstDash val="solid"/>
+          </a:ln>
+        </p:spPr>
+      </p:sp>
+      <p:sp>
+        <p:nvSpPr>
+          <p:cNvPr id="32" name="Text 30"/>
+          <p:cNvSpPr/>
+          <p:nvPr/>
+        </p:nvSpPr>
+        <p:spPr>
+          <a:xfrm>
+            <a:off x="6428232" y="3364992"/>
+            <a:ext cx="1645920" cy="475488"/>
+          </a:xfrm>
+          <a:prstGeom prst="rect">
+            <a:avLst/>
+          </a:prstGeom>
+          <a:noFill/>
+          <a:ln/>
+        </p:spPr>
+        <p:txBody>
+          <a:bodyPr wrap="square" lIns="0" tIns="0" rIns="0" bIns="0" rtlCol="0" anchor="ctr"/>
+          <a:lstStyle/>
+          <a:p>
+            <a:pPr algn="ctr" indent="0" marL="0">
+              <a:buNone/>
+            </a:pPr>
+            <a:r>
+              <a:rPr lang="en-US" sz="1400" b="1" dirty="0">
+                <a:solidFill>
+                  <a:srgbClr val="0D9488"/>
+                </a:solidFill>
+                <a:latin typeface="Trebuchet MS" pitchFamily="34" charset="0"/>
+                <a:ea typeface="Trebuchet MS" pitchFamily="34" charset="-122"/>
+                <a:cs typeface="Trebuchet MS" pitchFamily="34" charset="-120"/>
+              </a:rPr>
+              <a:t>heat</a:t>
+            </a:r>
+            <a:endParaRPr lang="en-US" sz="1400" dirty="0"/>
+          </a:p>
+        </p:txBody>
+      </p:sp>
+      <p:sp>
+        <p:nvSpPr>
+          <p:cNvPr id="33" name="Shape 31"/>
           <p:cNvSpPr/>
           <p:nvPr/>
         </p:nvSpPr>
@@ -21859,7 +22799,7 @@
       </p:sp>
       <p:sp>
         <p:nvSpPr>
-          <p:cNvPr id="31" name="Text 29"/>
+          <p:cNvPr id="34" name="Text 32"/>
           <p:cNvSpPr/>
           <p:nvPr/>
         </p:nvSpPr>
@@ -21898,7 +22838,7 @@
       </p:sp>
       <p:sp>
         <p:nvSpPr>
-          <p:cNvPr id="32" name="Shape 30"/>
+          <p:cNvPr id="35" name="Shape 33"/>
           <p:cNvSpPr/>
           <p:nvPr/>
         </p:nvSpPr>
@@ -21925,7 +22865,7 @@
       </p:sp>
       <p:sp>
         <p:nvSpPr>
-          <p:cNvPr id="33" name="Shape 31"/>
+          <p:cNvPr id="36" name="Shape 34"/>
           <p:cNvSpPr/>
           <p:nvPr/>
         </p:nvSpPr>
@@ -21952,7 +22892,7 @@
       </p:sp>
       <p:sp>
         <p:nvSpPr>
-          <p:cNvPr id="34" name="Text 32"/>
+          <p:cNvPr id="37" name="Text 35"/>
           <p:cNvSpPr/>
           <p:nvPr/>
         </p:nvSpPr>
@@ -21983,7 +22923,7 @@
                 <a:ea typeface="Trebuchet MS" pitchFamily="34" charset="-122"/>
                 <a:cs typeface="Trebuchet MS" pitchFamily="34" charset="-120"/>
               </a:rPr>
-              <a:t>h</a:t>
+              <a:t>o</a:t>
             </a:r>
             <a:endParaRPr lang="en-US" sz="900" dirty="0"/>
           </a:p>
@@ -21991,7 +22931,7 @@
       </p:sp>
       <p:sp>
         <p:nvSpPr>
-          <p:cNvPr id="35" name="Shape 33"/>
+          <p:cNvPr id="38" name="Shape 36"/>
           <p:cNvSpPr/>
           <p:nvPr/>
         </p:nvSpPr>
@@ -22018,7 +22958,7 @@
       </p:sp>
       <p:sp>
         <p:nvSpPr>
-          <p:cNvPr id="36" name="Text 34"/>
+          <p:cNvPr id="39" name="Text 37"/>
           <p:cNvSpPr/>
           <p:nvPr/>
         </p:nvSpPr>
@@ -22049,7 +22989,7 @@
                 <a:ea typeface="Trebuchet MS" pitchFamily="34" charset="-122"/>
                 <a:cs typeface="Trebuchet MS" pitchFamily="34" charset="-120"/>
               </a:rPr>
-              <a:t>ea</a:t>
+              <a:t>v</a:t>
             </a:r>
             <a:endParaRPr lang="en-US" sz="900" dirty="0"/>
           </a:p>
@@ -22057,7 +22997,7 @@
       </p:sp>
       <p:sp>
         <p:nvSpPr>
-          <p:cNvPr id="37" name="Shape 35"/>
+          <p:cNvPr id="40" name="Shape 38"/>
           <p:cNvSpPr/>
           <p:nvPr/>
         </p:nvSpPr>
@@ -22084,7 +23024,7 @@
       </p:sp>
       <p:sp>
         <p:nvSpPr>
-          <p:cNvPr id="38" name="Text 36"/>
+          <p:cNvPr id="41" name="Text 39"/>
           <p:cNvSpPr/>
           <p:nvPr/>
         </p:nvSpPr>
@@ -22115,7 +23055,7 @@
                 <a:ea typeface="Trebuchet MS" pitchFamily="34" charset="-122"/>
                 <a:cs typeface="Trebuchet MS" pitchFamily="34" charset="-120"/>
               </a:rPr>
-              <a:t>t</a:t>
+              <a:t>er</a:t>
             </a:r>
             <a:endParaRPr lang="en-US" sz="900" dirty="0"/>
           </a:p>
@@ -22123,7 +23063,7 @@
       </p:sp>
       <p:sp>
         <p:nvSpPr>
-          <p:cNvPr id="39" name="Shape 37"/>
+          <p:cNvPr id="42" name="Shape 40"/>
           <p:cNvSpPr/>
           <p:nvPr/>
         </p:nvSpPr>
@@ -22150,7 +23090,7 @@
       </p:sp>
       <p:sp>
         <p:nvSpPr>
-          <p:cNvPr id="40" name="Text 38"/>
+          <p:cNvPr id="43" name="Text 41"/>
           <p:cNvSpPr/>
           <p:nvPr/>
         </p:nvSpPr>
@@ -22181,7 +23121,7 @@
                 <a:ea typeface="Trebuchet MS" pitchFamily="34" charset="-122"/>
                 <a:cs typeface="Trebuchet MS" pitchFamily="34" charset="-120"/>
               </a:rPr>
-              <a:t>w</a:t>
+              <a:t>h</a:t>
             </a:r>
             <a:endParaRPr lang="en-US" sz="900" dirty="0"/>
           </a:p>
@@ -22189,7 +23129,7 @@
       </p:sp>
       <p:sp>
         <p:nvSpPr>
-          <p:cNvPr id="41" name="Shape 39"/>
+          <p:cNvPr id="44" name="Shape 42"/>
           <p:cNvSpPr/>
           <p:nvPr/>
         </p:nvSpPr>
@@ -22216,7 +23156,7 @@
       </p:sp>
       <p:sp>
         <p:nvSpPr>
-          <p:cNvPr id="42" name="Text 40"/>
+          <p:cNvPr id="45" name="Text 43"/>
           <p:cNvSpPr/>
           <p:nvPr/>
         </p:nvSpPr>
@@ -22247,7 +23187,7 @@
                 <a:ea typeface="Trebuchet MS" pitchFamily="34" charset="-122"/>
                 <a:cs typeface="Trebuchet MS" pitchFamily="34" charset="-120"/>
               </a:rPr>
-              <a:t>a</a:t>
+              <a:t>ea</a:t>
             </a:r>
             <a:endParaRPr lang="en-US" sz="900" dirty="0"/>
           </a:p>
@@ -22255,7 +23195,7 @@
       </p:sp>
       <p:sp>
         <p:nvSpPr>
-          <p:cNvPr id="43" name="Shape 41"/>
+          <p:cNvPr id="46" name="Shape 44"/>
           <p:cNvSpPr/>
           <p:nvPr/>
         </p:nvSpPr>
@@ -22282,7 +23222,7 @@
       </p:sp>
       <p:sp>
         <p:nvSpPr>
-          <p:cNvPr id="44" name="Text 42"/>
+          <p:cNvPr id="47" name="Text 45"/>
           <p:cNvSpPr/>
           <p:nvPr/>
         </p:nvSpPr>
@@ -22313,7 +23253,7 @@
                 <a:ea typeface="Trebuchet MS" pitchFamily="34" charset="-122"/>
                 <a:cs typeface="Trebuchet MS" pitchFamily="34" charset="-120"/>
               </a:rPr>
-              <a:t>ve</a:t>
+              <a:t>t</a:t>
             </a:r>
             <a:endParaRPr lang="en-US" sz="900" dirty="0"/>
           </a:p>
@@ -22605,7 +23545,7 @@
                 <a:ea typeface="Calibri" pitchFamily="34" charset="-122"/>
                 <a:cs typeface="Calibri" pitchFamily="34" charset="-120"/>
               </a:rPr>
-              <a:t>Word Labs  •  wordlabs.app  •  Root: 'heat' = warmth or high temperature</a:t>
+              <a:t>Word Labs  •  wordlabs.app  •  Root: 'heat' = warmth; to make warm</a:t>
             </a:r>
             <a:endParaRPr lang="en-US" sz="800" dirty="0"/>
           </a:p>
@@ -23432,7 +24372,7 @@
                 <a:ea typeface="Calibri" pitchFamily="34" charset="-122"/>
                 <a:cs typeface="Calibri" pitchFamily="34" charset="-120"/>
               </a:rPr>
-              <a:t>Word Labs  •  wordlabs.app  •  Root: 'heat' = warmth or high temperature</a:t>
+              <a:t>Word Labs  •  wordlabs.app  •  Root: 'heat' = warmth; to make warm</a:t>
             </a:r>
             <a:endParaRPr lang="en-US" sz="800" dirty="0"/>
           </a:p>
@@ -23749,7 +24689,7 @@
                 <a:ea typeface="Calibri" pitchFamily="34" charset="-122"/>
                 <a:cs typeface="Calibri" pitchFamily="34" charset="-120"/>
               </a:rPr>
-              <a:t>too much or above</a:t>
+              <a:t>too much</a:t>
             </a:r>
             <a:endParaRPr lang="en-US" sz="850" dirty="0"/>
           </a:p>
@@ -23861,7 +24801,7 @@
                 <a:ea typeface="Calibri" pitchFamily="34" charset="-122"/>
                 <a:cs typeface="Calibri" pitchFamily="34" charset="-120"/>
               </a:rPr>
-              <a:t>warmth or high temperature</a:t>
+              <a:t>warmth; to make warm</a:t>
             </a:r>
             <a:endParaRPr lang="en-US" sz="850" dirty="0"/>
           </a:p>
@@ -24529,7 +25469,7 @@
                 <a:ea typeface="Calibri" pitchFamily="34" charset="-122"/>
                 <a:cs typeface="Calibri" pitchFamily="34" charset="-120"/>
               </a:rPr>
-              <a:t>Word Labs  •  wordlabs.app  •  Root: 'heat' = warmth or high temperature</a:t>
+              <a:t>Word Labs  •  wordlabs.app  •  Root: 'heat' = warmth; to make warm</a:t>
             </a:r>
             <a:endParaRPr lang="en-US" sz="800" dirty="0"/>
           </a:p>
@@ -24602,7 +25542,7 @@
                 <a:ea typeface="Trebuchet MS" pitchFamily="34" charset="-122"/>
                 <a:cs typeface="Trebuchet MS" pitchFamily="34" charset="-120"/>
               </a:rPr>
-              <a:t>We are learning that the root 'heat' means 'warmth or high temperature'.</a:t>
+              <a:t>We are learning that the root 'heat' means 'warmth; to make warm'.</a:t>
             </a:r>
             <a:endParaRPr lang="en-US" sz="2000" dirty="0"/>
           </a:p>
@@ -25248,7 +26188,7 @@
                 <a:ea typeface="Calibri" pitchFamily="34" charset="-122"/>
                 <a:cs typeface="Calibri" pitchFamily="34" charset="-120"/>
               </a:rPr>
-              <a:t>Word Labs  •  wordlabs.app  •  Root: 'heat' = warmth or high temperature</a:t>
+              <a:t>Word Labs  •  wordlabs.app  •  Root: 'heat' = warmth; to make warm</a:t>
             </a:r>
             <a:endParaRPr lang="en-US" sz="800" dirty="0"/>
           </a:p>
@@ -25565,7 +26505,7 @@
                 <a:ea typeface="Calibri" pitchFamily="34" charset="-122"/>
                 <a:cs typeface="Calibri" pitchFamily="34" charset="-120"/>
               </a:rPr>
-              <a:t>too much or above</a:t>
+              <a:t>too much</a:t>
             </a:r>
             <a:endParaRPr lang="en-US" sz="850" dirty="0"/>
           </a:p>
@@ -25677,7 +26617,7 @@
                 <a:ea typeface="Calibri" pitchFamily="34" charset="-122"/>
                 <a:cs typeface="Calibri" pitchFamily="34" charset="-120"/>
               </a:rPr>
-              <a:t>warmth or high temperature</a:t>
+              <a:t>warmth; to make warm</a:t>
             </a:r>
             <a:endParaRPr lang="en-US" sz="850" dirty="0"/>
           </a:p>
@@ -26687,7 +27627,7 @@
                 <a:ea typeface="Calibri" pitchFamily="34" charset="-122"/>
                 <a:cs typeface="Calibri" pitchFamily="34" charset="-120"/>
               </a:rPr>
-              <a:t>Word Labs  •  wordlabs.app  •  Root: 'heat' = warmth or high temperature</a:t>
+              <a:t>Word Labs  •  wordlabs.app  •  Root: 'heat' = warmth; to make warm</a:t>
             </a:r>
             <a:endParaRPr lang="en-US" sz="800" dirty="0"/>
           </a:p>
@@ -27004,7 +27944,7 @@
                 <a:ea typeface="Calibri" pitchFamily="34" charset="-122"/>
                 <a:cs typeface="Calibri" pitchFamily="34" charset="-120"/>
               </a:rPr>
-              <a:t>too much or above</a:t>
+              <a:t>too much</a:t>
             </a:r>
             <a:endParaRPr lang="en-US" sz="850" dirty="0"/>
           </a:p>
@@ -27116,7 +28056,7 @@
                 <a:ea typeface="Calibri" pitchFamily="34" charset="-122"/>
                 <a:cs typeface="Calibri" pitchFamily="34" charset="-120"/>
               </a:rPr>
-              <a:t>warmth or high temperature</a:t>
+              <a:t>warmth; to make warm</a:t>
             </a:r>
             <a:endParaRPr lang="en-US" sz="850" dirty="0"/>
           </a:p>
@@ -28549,7 +29489,7 @@
                 <a:ea typeface="Calibri" pitchFamily="34" charset="-122"/>
                 <a:cs typeface="Calibri" pitchFamily="34" charset="-120"/>
               </a:rPr>
-              <a:t>Word Labs  •  wordlabs.app  •  Root: 'heat' = warmth or high temperature</a:t>
+              <a:t>Word Labs  •  wordlabs.app  •  Root: 'heat' = warmth; to make warm</a:t>
             </a:r>
             <a:endParaRPr lang="en-US" sz="800" dirty="0"/>
           </a:p>
@@ -28688,7 +29628,7 @@
                 <a:ea typeface="Trebuchet MS" pitchFamily="34" charset="-122"/>
                 <a:cs typeface="Trebuchet MS" pitchFamily="34" charset="-120"/>
               </a:rPr>
-              <a:t>heatstroke</a:t>
+              <a:t>overheating</a:t>
             </a:r>
             <a:endParaRPr lang="en-US" sz="2800" dirty="0"/>
           </a:p>
@@ -29376,7 +30316,7 @@
                 <a:ea typeface="Calibri" pitchFamily="34" charset="-122"/>
                 <a:cs typeface="Calibri" pitchFamily="34" charset="-120"/>
               </a:rPr>
-              <a:t>Word Labs  •  wordlabs.app  •  Root: 'heat' = warmth or high temperature</a:t>
+              <a:t>Word Labs  •  wordlabs.app  •  Root: 'heat' = warmth; to make warm</a:t>
             </a:r>
             <a:endParaRPr lang="en-US" sz="800" dirty="0"/>
           </a:p>
@@ -29515,7 +30455,7 @@
                 <a:ea typeface="Trebuchet MS" pitchFamily="34" charset="-122"/>
                 <a:cs typeface="Trebuchet MS" pitchFamily="34" charset="-120"/>
               </a:rPr>
-              <a:t>heatstroke</a:t>
+              <a:t>overheating</a:t>
             </a:r>
             <a:endParaRPr lang="en-US" sz="2800" dirty="0"/>
           </a:p>
@@ -29595,7 +30535,7 @@
         </p:nvSpPr>
         <p:spPr>
           <a:xfrm>
-            <a:off x="2938272" y="2258568"/>
+            <a:off x="2221992" y="2258568"/>
             <a:ext cx="1828800" cy="292608"/>
           </a:xfrm>
           <a:prstGeom prst="rect">
@@ -29604,11 +30544,11 @@
             </a:avLst>
           </a:prstGeom>
           <a:solidFill>
-            <a:srgbClr val="CCFBF1"/>
+            <a:srgbClr val="DDD6FE"/>
           </a:solidFill>
           <a:ln w="19050">
             <a:solidFill>
-              <a:srgbClr val="0D9488"/>
+              <a:srgbClr val="7C3AED"/>
             </a:solidFill>
             <a:prstDash val="solid"/>
           </a:ln>
@@ -29629,7 +30569,7 @@
         </p:nvSpPr>
         <p:spPr>
           <a:xfrm>
-            <a:off x="2938272" y="2258568"/>
+            <a:off x="2221992" y="2258568"/>
             <a:ext cx="1828800" cy="292608"/>
           </a:xfrm>
           <a:prstGeom prst="rect">
@@ -29648,13 +30588,13 @@
             <a:r>
               <a:rPr lang="en-US" sz="1300" b="1" dirty="0">
                 <a:solidFill>
-                  <a:srgbClr val="0F766E"/>
+                  <a:srgbClr val="4C1D95"/>
                 </a:solidFill>
                 <a:latin typeface="Trebuchet MS" pitchFamily="34" charset="0"/>
                 <a:ea typeface="Trebuchet MS" pitchFamily="34" charset="-122"/>
                 <a:cs typeface="Trebuchet MS" pitchFamily="34" charset="-120"/>
               </a:rPr>
-              <a:t>heat</a:t>
+              <a:t>over</a:t>
             </a:r>
             <a:endParaRPr lang="en-US" sz="1300" dirty="0"/>
           </a:p>
@@ -29668,7 +30608,7 @@
         </p:nvSpPr>
         <p:spPr>
           <a:xfrm>
-            <a:off x="2938272" y="2569464"/>
+            <a:off x="2221992" y="2569464"/>
             <a:ext cx="1828800" cy="201168"/>
           </a:xfrm>
           <a:prstGeom prst="rect">
@@ -29693,7 +30633,7 @@
                 <a:ea typeface="Calibri" pitchFamily="34" charset="-122"/>
                 <a:cs typeface="Calibri" pitchFamily="34" charset="-120"/>
               </a:rPr>
-              <a:t>warmth or high temperature</a:t>
+              <a:t>too much</a:t>
             </a:r>
             <a:endParaRPr lang="en-US" sz="850" dirty="0"/>
           </a:p>
@@ -29707,7 +30647,7 @@
         </p:nvSpPr>
         <p:spPr>
           <a:xfrm>
-            <a:off x="5803392" y="2258568"/>
+            <a:off x="4370832" y="2258568"/>
             <a:ext cx="1828800" cy="292608"/>
           </a:xfrm>
           <a:prstGeom prst="rect">
@@ -29716,11 +30656,11 @@
             </a:avLst>
           </a:prstGeom>
           <a:solidFill>
-            <a:srgbClr val="FCE7F3"/>
+            <a:srgbClr val="CCFBF1"/>
           </a:solidFill>
           <a:ln w="19050">
             <a:solidFill>
-              <a:srgbClr val="DB2777"/>
+              <a:srgbClr val="0D9488"/>
             </a:solidFill>
             <a:prstDash val="solid"/>
           </a:ln>
@@ -29741,7 +30681,7 @@
         </p:nvSpPr>
         <p:spPr>
           <a:xfrm>
-            <a:off x="5803392" y="2258568"/>
+            <a:off x="4370832" y="2258568"/>
             <a:ext cx="1828800" cy="292608"/>
           </a:xfrm>
           <a:prstGeom prst="rect">
@@ -29760,13 +30700,13 @@
             <a:r>
               <a:rPr lang="en-US" sz="1300" b="1" dirty="0">
                 <a:solidFill>
-                  <a:srgbClr val="9D174D"/>
+                  <a:srgbClr val="0F766E"/>
                 </a:solidFill>
                 <a:latin typeface="Trebuchet MS" pitchFamily="34" charset="0"/>
                 <a:ea typeface="Trebuchet MS" pitchFamily="34" charset="-122"/>
                 <a:cs typeface="Trebuchet MS" pitchFamily="34" charset="-120"/>
               </a:rPr>
-              <a:t>stroke</a:t>
+              <a:t>heat</a:t>
             </a:r>
             <a:endParaRPr lang="en-US" sz="1300" dirty="0"/>
           </a:p>
@@ -29780,7 +30720,7 @@
         </p:nvSpPr>
         <p:spPr>
           <a:xfrm>
-            <a:off x="5803392" y="2569464"/>
+            <a:off x="4370832" y="2569464"/>
             <a:ext cx="1828800" cy="201168"/>
           </a:xfrm>
           <a:prstGeom prst="rect">
@@ -29805,7 +30745,7 @@
                 <a:ea typeface="Calibri" pitchFamily="34" charset="-122"/>
                 <a:cs typeface="Calibri" pitchFamily="34" charset="-120"/>
               </a:rPr>
-              <a:t>a sudden blow or attack</a:t>
+              <a:t>warmth; to make warm</a:t>
             </a:r>
             <a:endParaRPr lang="en-US" sz="850" dirty="0"/>
           </a:p>
@@ -29814,6 +30754,118 @@
       <p:sp>
         <p:nvSpPr>
           <p:cNvPr id="22" name="Shape 20"/>
+          <p:cNvSpPr/>
+          <p:nvPr/>
+        </p:nvSpPr>
+        <p:spPr>
+          <a:xfrm>
+            <a:off x="6519672" y="2258568"/>
+            <a:ext cx="1828800" cy="292608"/>
+          </a:xfrm>
+          <a:prstGeom prst="rect">
+            <a:avLst>
+              <a:gd name="adj" fmla="val 25000"/>
+            </a:avLst>
+          </a:prstGeom>
+          <a:solidFill>
+            <a:srgbClr val="FCE7F3"/>
+          </a:solidFill>
+          <a:ln w="19050">
+            <a:solidFill>
+              <a:srgbClr val="DB2777"/>
+            </a:solidFill>
+            <a:prstDash val="solid"/>
+          </a:ln>
+          <a:effectLst>
+            <a:outerShdw sx="100000" sy="100000" kx="0" ky="0" algn="bl" rotWithShape="0" blurRad="101600" dist="38100" dir="8100000">
+              <a:srgbClr val="000000">
+                <a:alpha val="12000"/>
+              </a:srgbClr>
+            </a:outerShdw>
+          </a:effectLst>
+        </p:spPr>
+      </p:sp>
+      <p:sp>
+        <p:nvSpPr>
+          <p:cNvPr id="23" name="Text 21"/>
+          <p:cNvSpPr/>
+          <p:nvPr/>
+        </p:nvSpPr>
+        <p:spPr>
+          <a:xfrm>
+            <a:off x="6519672" y="2258568"/>
+            <a:ext cx="1828800" cy="292608"/>
+          </a:xfrm>
+          <a:prstGeom prst="rect">
+            <a:avLst/>
+          </a:prstGeom>
+          <a:noFill/>
+          <a:ln/>
+        </p:spPr>
+        <p:txBody>
+          <a:bodyPr wrap="square" lIns="0" tIns="0" rIns="0" bIns="0" rtlCol="0" anchor="ctr"/>
+          <a:lstStyle/>
+          <a:p>
+            <a:pPr algn="ctr" indent="0" marL="0">
+              <a:buNone/>
+            </a:pPr>
+            <a:r>
+              <a:rPr lang="en-US" sz="1300" b="1" dirty="0">
+                <a:solidFill>
+                  <a:srgbClr val="9D174D"/>
+                </a:solidFill>
+                <a:latin typeface="Trebuchet MS" pitchFamily="34" charset="0"/>
+                <a:ea typeface="Trebuchet MS" pitchFamily="34" charset="-122"/>
+                <a:cs typeface="Trebuchet MS" pitchFamily="34" charset="-120"/>
+              </a:rPr>
+              <a:t>ing</a:t>
+            </a:r>
+            <a:endParaRPr lang="en-US" sz="1300" dirty="0"/>
+          </a:p>
+        </p:txBody>
+      </p:sp>
+      <p:sp>
+        <p:nvSpPr>
+          <p:cNvPr id="24" name="Text 22"/>
+          <p:cNvSpPr/>
+          <p:nvPr/>
+        </p:nvSpPr>
+        <p:spPr>
+          <a:xfrm>
+            <a:off x="6519672" y="2569464"/>
+            <a:ext cx="1828800" cy="201168"/>
+          </a:xfrm>
+          <a:prstGeom prst="rect">
+            <a:avLst/>
+          </a:prstGeom>
+          <a:noFill/>
+          <a:ln/>
+        </p:spPr>
+        <p:txBody>
+          <a:bodyPr wrap="square" lIns="0" tIns="0" rIns="0" bIns="0" rtlCol="0" anchor="t"/>
+          <a:lstStyle/>
+          <a:p>
+            <a:pPr algn="ctr" indent="0" marL="0">
+              <a:buNone/>
+            </a:pPr>
+            <a:r>
+              <a:rPr lang="en-US" sz="850" dirty="0">
+                <a:solidFill>
+                  <a:srgbClr val="475569"/>
+                </a:solidFill>
+                <a:latin typeface="Calibri" pitchFamily="34" charset="0"/>
+                <a:ea typeface="Calibri" pitchFamily="34" charset="-122"/>
+                <a:cs typeface="Calibri" pitchFamily="34" charset="-120"/>
+              </a:rPr>
+              <a:t>happening now</a:t>
+            </a:r>
+            <a:endParaRPr lang="en-US" sz="850" dirty="0"/>
+          </a:p>
+        </p:txBody>
+      </p:sp>
+      <p:sp>
+        <p:nvSpPr>
+          <p:cNvPr id="25" name="Shape 23"/>
           <p:cNvSpPr/>
           <p:nvPr/>
         </p:nvSpPr>
@@ -29840,7 +30892,7 @@
       </p:sp>
       <p:sp>
         <p:nvSpPr>
-          <p:cNvPr id="23" name="Text 21"/>
+          <p:cNvPr id="26" name="Text 24"/>
           <p:cNvSpPr/>
           <p:nvPr/>
         </p:nvSpPr>
@@ -29879,7 +30931,7 @@
       </p:sp>
       <p:sp>
         <p:nvSpPr>
-          <p:cNvPr id="24" name="Shape 22"/>
+          <p:cNvPr id="27" name="Shape 25"/>
           <p:cNvSpPr/>
           <p:nvPr/>
         </p:nvSpPr>
@@ -29906,7 +30958,7 @@
       </p:sp>
       <p:sp>
         <p:nvSpPr>
-          <p:cNvPr id="25" name="Text 23"/>
+          <p:cNvPr id="28" name="Text 26"/>
           <p:cNvSpPr/>
           <p:nvPr/>
         </p:nvSpPr>
@@ -29945,7 +30997,7 @@
       </p:sp>
       <p:sp>
         <p:nvSpPr>
-          <p:cNvPr id="26" name="Shape 24"/>
+          <p:cNvPr id="29" name="Shape 27"/>
           <p:cNvSpPr/>
           <p:nvPr/>
         </p:nvSpPr>
@@ -29972,7 +31024,7 @@
       </p:sp>
       <p:sp>
         <p:nvSpPr>
-          <p:cNvPr id="27" name="Text 25"/>
+          <p:cNvPr id="30" name="Text 28"/>
           <p:cNvSpPr/>
           <p:nvPr/>
         </p:nvSpPr>
@@ -30011,7 +31063,7 @@
       </p:sp>
       <p:sp>
         <p:nvSpPr>
-          <p:cNvPr id="28" name="Shape 26"/>
+          <p:cNvPr id="31" name="Shape 29"/>
           <p:cNvSpPr/>
           <p:nvPr/>
         </p:nvSpPr>
@@ -30038,7 +31090,7 @@
       </p:sp>
       <p:sp>
         <p:nvSpPr>
-          <p:cNvPr id="29" name="Text 27"/>
+          <p:cNvPr id="32" name="Text 30"/>
           <p:cNvSpPr/>
           <p:nvPr/>
         </p:nvSpPr>
@@ -30361,7 +31413,7 @@
                 <a:ea typeface="Calibri" pitchFamily="34" charset="-122"/>
                 <a:cs typeface="Calibri" pitchFamily="34" charset="-120"/>
               </a:rPr>
-              <a:t>Word Labs  •  wordlabs.app  •  Root: 'heat' = warmth or high temperature</a:t>
+              <a:t>Word Labs  •  wordlabs.app  •  Root: 'heat' = warmth; to make warm</a:t>
             </a:r>
             <a:endParaRPr lang="en-US" sz="800" dirty="0"/>
           </a:p>
@@ -30500,7 +31552,7 @@
                 <a:ea typeface="Trebuchet MS" pitchFamily="34" charset="-122"/>
                 <a:cs typeface="Trebuchet MS" pitchFamily="34" charset="-120"/>
               </a:rPr>
-              <a:t>heatstroke</a:t>
+              <a:t>overheating</a:t>
             </a:r>
             <a:endParaRPr lang="en-US" sz="2800" dirty="0"/>
           </a:p>
@@ -30580,7 +31632,7 @@
         </p:nvSpPr>
         <p:spPr>
           <a:xfrm>
-            <a:off x="2938272" y="2258568"/>
+            <a:off x="2221992" y="2258568"/>
             <a:ext cx="1828800" cy="292608"/>
           </a:xfrm>
           <a:prstGeom prst="rect">
@@ -30589,11 +31641,11 @@
             </a:avLst>
           </a:prstGeom>
           <a:solidFill>
-            <a:srgbClr val="CCFBF1"/>
+            <a:srgbClr val="DDD6FE"/>
           </a:solidFill>
           <a:ln w="19050">
             <a:solidFill>
-              <a:srgbClr val="0D9488"/>
+              <a:srgbClr val="7C3AED"/>
             </a:solidFill>
             <a:prstDash val="solid"/>
           </a:ln>
@@ -30614,7 +31666,7 @@
         </p:nvSpPr>
         <p:spPr>
           <a:xfrm>
-            <a:off x="2938272" y="2258568"/>
+            <a:off x="2221992" y="2258568"/>
             <a:ext cx="1828800" cy="292608"/>
           </a:xfrm>
           <a:prstGeom prst="rect">
@@ -30633,13 +31685,13 @@
             <a:r>
               <a:rPr lang="en-US" sz="1300" b="1" dirty="0">
                 <a:solidFill>
-                  <a:srgbClr val="0F766E"/>
+                  <a:srgbClr val="4C1D95"/>
                 </a:solidFill>
                 <a:latin typeface="Trebuchet MS" pitchFamily="34" charset="0"/>
                 <a:ea typeface="Trebuchet MS" pitchFamily="34" charset="-122"/>
                 <a:cs typeface="Trebuchet MS" pitchFamily="34" charset="-120"/>
               </a:rPr>
-              <a:t>heat</a:t>
+              <a:t>over</a:t>
             </a:r>
             <a:endParaRPr lang="en-US" sz="1300" dirty="0"/>
           </a:p>
@@ -30653,7 +31705,7 @@
         </p:nvSpPr>
         <p:spPr>
           <a:xfrm>
-            <a:off x="2938272" y="2569464"/>
+            <a:off x="2221992" y="2569464"/>
             <a:ext cx="1828800" cy="201168"/>
           </a:xfrm>
           <a:prstGeom prst="rect">
@@ -30678,7 +31730,7 @@
                 <a:ea typeface="Calibri" pitchFamily="34" charset="-122"/>
                 <a:cs typeface="Calibri" pitchFamily="34" charset="-120"/>
               </a:rPr>
-              <a:t>warmth or high temperature</a:t>
+              <a:t>too much</a:t>
             </a:r>
             <a:endParaRPr lang="en-US" sz="850" dirty="0"/>
           </a:p>
@@ -30692,7 +31744,7 @@
         </p:nvSpPr>
         <p:spPr>
           <a:xfrm>
-            <a:off x="5803392" y="2258568"/>
+            <a:off x="4370832" y="2258568"/>
             <a:ext cx="1828800" cy="292608"/>
           </a:xfrm>
           <a:prstGeom prst="rect">
@@ -30701,11 +31753,11 @@
             </a:avLst>
           </a:prstGeom>
           <a:solidFill>
-            <a:srgbClr val="FCE7F3"/>
+            <a:srgbClr val="CCFBF1"/>
           </a:solidFill>
           <a:ln w="19050">
             <a:solidFill>
-              <a:srgbClr val="DB2777"/>
+              <a:srgbClr val="0D9488"/>
             </a:solidFill>
             <a:prstDash val="solid"/>
           </a:ln>
@@ -30726,7 +31778,7 @@
         </p:nvSpPr>
         <p:spPr>
           <a:xfrm>
-            <a:off x="5803392" y="2258568"/>
+            <a:off x="4370832" y="2258568"/>
             <a:ext cx="1828800" cy="292608"/>
           </a:xfrm>
           <a:prstGeom prst="rect">
@@ -30745,13 +31797,13 @@
             <a:r>
               <a:rPr lang="en-US" sz="1300" b="1" dirty="0">
                 <a:solidFill>
-                  <a:srgbClr val="9D174D"/>
+                  <a:srgbClr val="0F766E"/>
                 </a:solidFill>
                 <a:latin typeface="Trebuchet MS" pitchFamily="34" charset="0"/>
                 <a:ea typeface="Trebuchet MS" pitchFamily="34" charset="-122"/>
                 <a:cs typeface="Trebuchet MS" pitchFamily="34" charset="-120"/>
               </a:rPr>
-              <a:t>stroke</a:t>
+              <a:t>heat</a:t>
             </a:r>
             <a:endParaRPr lang="en-US" sz="1300" dirty="0"/>
           </a:p>
@@ -30765,7 +31817,7 @@
         </p:nvSpPr>
         <p:spPr>
           <a:xfrm>
-            <a:off x="5803392" y="2569464"/>
+            <a:off x="4370832" y="2569464"/>
             <a:ext cx="1828800" cy="201168"/>
           </a:xfrm>
           <a:prstGeom prst="rect">
@@ -30790,7 +31842,7 @@
                 <a:ea typeface="Calibri" pitchFamily="34" charset="-122"/>
                 <a:cs typeface="Calibri" pitchFamily="34" charset="-120"/>
               </a:rPr>
-              <a:t>a sudden blow or attack</a:t>
+              <a:t>warmth; to make warm</a:t>
             </a:r>
             <a:endParaRPr lang="en-US" sz="850" dirty="0"/>
           </a:p>
@@ -30799,6 +31851,118 @@
       <p:sp>
         <p:nvSpPr>
           <p:cNvPr id="22" name="Shape 20"/>
+          <p:cNvSpPr/>
+          <p:nvPr/>
+        </p:nvSpPr>
+        <p:spPr>
+          <a:xfrm>
+            <a:off x="6519672" y="2258568"/>
+            <a:ext cx="1828800" cy="292608"/>
+          </a:xfrm>
+          <a:prstGeom prst="rect">
+            <a:avLst>
+              <a:gd name="adj" fmla="val 25000"/>
+            </a:avLst>
+          </a:prstGeom>
+          <a:solidFill>
+            <a:srgbClr val="FCE7F3"/>
+          </a:solidFill>
+          <a:ln w="19050">
+            <a:solidFill>
+              <a:srgbClr val="DB2777"/>
+            </a:solidFill>
+            <a:prstDash val="solid"/>
+          </a:ln>
+          <a:effectLst>
+            <a:outerShdw sx="100000" sy="100000" kx="0" ky="0" algn="bl" rotWithShape="0" blurRad="101600" dist="38100" dir="8100000">
+              <a:srgbClr val="000000">
+                <a:alpha val="12000"/>
+              </a:srgbClr>
+            </a:outerShdw>
+          </a:effectLst>
+        </p:spPr>
+      </p:sp>
+      <p:sp>
+        <p:nvSpPr>
+          <p:cNvPr id="23" name="Text 21"/>
+          <p:cNvSpPr/>
+          <p:nvPr/>
+        </p:nvSpPr>
+        <p:spPr>
+          <a:xfrm>
+            <a:off x="6519672" y="2258568"/>
+            <a:ext cx="1828800" cy="292608"/>
+          </a:xfrm>
+          <a:prstGeom prst="rect">
+            <a:avLst/>
+          </a:prstGeom>
+          <a:noFill/>
+          <a:ln/>
+        </p:spPr>
+        <p:txBody>
+          <a:bodyPr wrap="square" lIns="0" tIns="0" rIns="0" bIns="0" rtlCol="0" anchor="ctr"/>
+          <a:lstStyle/>
+          <a:p>
+            <a:pPr algn="ctr" indent="0" marL="0">
+              <a:buNone/>
+            </a:pPr>
+            <a:r>
+              <a:rPr lang="en-US" sz="1300" b="1" dirty="0">
+                <a:solidFill>
+                  <a:srgbClr val="9D174D"/>
+                </a:solidFill>
+                <a:latin typeface="Trebuchet MS" pitchFamily="34" charset="0"/>
+                <a:ea typeface="Trebuchet MS" pitchFamily="34" charset="-122"/>
+                <a:cs typeface="Trebuchet MS" pitchFamily="34" charset="-120"/>
+              </a:rPr>
+              <a:t>ing</a:t>
+            </a:r>
+            <a:endParaRPr lang="en-US" sz="1300" dirty="0"/>
+          </a:p>
+        </p:txBody>
+      </p:sp>
+      <p:sp>
+        <p:nvSpPr>
+          <p:cNvPr id="24" name="Text 22"/>
+          <p:cNvSpPr/>
+          <p:nvPr/>
+        </p:nvSpPr>
+        <p:spPr>
+          <a:xfrm>
+            <a:off x="6519672" y="2569464"/>
+            <a:ext cx="1828800" cy="201168"/>
+          </a:xfrm>
+          <a:prstGeom prst="rect">
+            <a:avLst/>
+          </a:prstGeom>
+          <a:noFill/>
+          <a:ln/>
+        </p:spPr>
+        <p:txBody>
+          <a:bodyPr wrap="square" lIns="0" tIns="0" rIns="0" bIns="0" rtlCol="0" anchor="t"/>
+          <a:lstStyle/>
+          <a:p>
+            <a:pPr algn="ctr" indent="0" marL="0">
+              <a:buNone/>
+            </a:pPr>
+            <a:r>
+              <a:rPr lang="en-US" sz="850" dirty="0">
+                <a:solidFill>
+                  <a:srgbClr val="475569"/>
+                </a:solidFill>
+                <a:latin typeface="Calibri" pitchFamily="34" charset="0"/>
+                <a:ea typeface="Calibri" pitchFamily="34" charset="-122"/>
+                <a:cs typeface="Calibri" pitchFamily="34" charset="-120"/>
+              </a:rPr>
+              <a:t>happening now</a:t>
+            </a:r>
+            <a:endParaRPr lang="en-US" sz="850" dirty="0"/>
+          </a:p>
+        </p:txBody>
+      </p:sp>
+      <p:sp>
+        <p:nvSpPr>
+          <p:cNvPr id="25" name="Shape 23"/>
           <p:cNvSpPr/>
           <p:nvPr/>
         </p:nvSpPr>
@@ -30825,7 +31989,7 @@
       </p:sp>
       <p:sp>
         <p:nvSpPr>
-          <p:cNvPr id="23" name="Text 21"/>
+          <p:cNvPr id="26" name="Text 24"/>
           <p:cNvSpPr/>
           <p:nvPr/>
         </p:nvSpPr>
@@ -30864,7 +32028,7 @@
       </p:sp>
       <p:sp>
         <p:nvSpPr>
-          <p:cNvPr id="24" name="Shape 22"/>
+          <p:cNvPr id="27" name="Shape 25"/>
           <p:cNvSpPr/>
           <p:nvPr/>
         </p:nvSpPr>
@@ -30891,14 +32055,14 @@
       </p:sp>
       <p:sp>
         <p:nvSpPr>
-          <p:cNvPr id="25" name="Shape 23"/>
-          <p:cNvSpPr/>
-          <p:nvPr/>
-        </p:nvSpPr>
-        <p:spPr>
-          <a:xfrm>
-            <a:off x="2999232" y="3364992"/>
-            <a:ext cx="1645920" cy="475488"/>
+          <p:cNvPr id="28" name="Shape 26"/>
+          <p:cNvSpPr/>
+          <p:nvPr/>
+        </p:nvSpPr>
+        <p:spPr>
+          <a:xfrm>
+            <a:off x="1975104" y="3364992"/>
+            <a:ext cx="1554480" cy="475488"/>
           </a:xfrm>
           <a:prstGeom prst="rect">
             <a:avLst>
@@ -30918,14 +32082,14 @@
       </p:sp>
       <p:sp>
         <p:nvSpPr>
-          <p:cNvPr id="26" name="Text 24"/>
-          <p:cNvSpPr/>
-          <p:nvPr/>
-        </p:nvSpPr>
-        <p:spPr>
-          <a:xfrm>
-            <a:off x="2999232" y="3364992"/>
-            <a:ext cx="1645920" cy="475488"/>
+          <p:cNvPr id="29" name="Text 27"/>
+          <p:cNvSpPr/>
+          <p:nvPr/>
+        </p:nvSpPr>
+        <p:spPr>
+          <a:xfrm>
+            <a:off x="1975104" y="3364992"/>
+            <a:ext cx="1554480" cy="475488"/>
           </a:xfrm>
           <a:prstGeom prst="rect">
             <a:avLst/>
@@ -30949,7 +32113,7 @@
                 <a:ea typeface="Trebuchet MS" pitchFamily="34" charset="-122"/>
                 <a:cs typeface="Trebuchet MS" pitchFamily="34" charset="-120"/>
               </a:rPr>
-              <a:t>heat</a:t>
+              <a:t>o</a:t>
             </a:r>
             <a:endParaRPr lang="en-US" sz="1400" dirty="0"/>
           </a:p>
@@ -30957,14 +32121,14 @@
       </p:sp>
       <p:sp>
         <p:nvSpPr>
-          <p:cNvPr id="27" name="Text 25"/>
-          <p:cNvSpPr/>
-          <p:nvPr/>
-        </p:nvSpPr>
-        <p:spPr>
-          <a:xfrm>
-            <a:off x="4645152" y="3364992"/>
-            <a:ext cx="1097280" cy="475488"/>
+          <p:cNvPr id="30" name="Text 28"/>
+          <p:cNvSpPr/>
+          <p:nvPr/>
+        </p:nvSpPr>
+        <p:spPr>
+          <a:xfrm>
+            <a:off x="3529584" y="3364992"/>
+            <a:ext cx="73152" cy="475488"/>
           </a:xfrm>
           <a:prstGeom prst="rect">
             <a:avLst/>
@@ -30996,14 +32160,14 @@
       </p:sp>
       <p:sp>
         <p:nvSpPr>
-          <p:cNvPr id="28" name="Shape 26"/>
-          <p:cNvSpPr/>
-          <p:nvPr/>
-        </p:nvSpPr>
-        <p:spPr>
-          <a:xfrm>
-            <a:off x="5742432" y="3364992"/>
-            <a:ext cx="1645920" cy="475488"/>
+          <p:cNvPr id="31" name="Shape 29"/>
+          <p:cNvSpPr/>
+          <p:nvPr/>
+        </p:nvSpPr>
+        <p:spPr>
+          <a:xfrm>
+            <a:off x="3602736" y="3364992"/>
+            <a:ext cx="1554480" cy="475488"/>
           </a:xfrm>
           <a:prstGeom prst="rect">
             <a:avLst>
@@ -31023,14 +32187,14 @@
       </p:sp>
       <p:sp>
         <p:nvSpPr>
-          <p:cNvPr id="29" name="Text 27"/>
-          <p:cNvSpPr/>
-          <p:nvPr/>
-        </p:nvSpPr>
-        <p:spPr>
-          <a:xfrm>
-            <a:off x="5742432" y="3364992"/>
-            <a:ext cx="1645920" cy="475488"/>
+          <p:cNvPr id="32" name="Text 30"/>
+          <p:cNvSpPr/>
+          <p:nvPr/>
+        </p:nvSpPr>
+        <p:spPr>
+          <a:xfrm>
+            <a:off x="3602736" y="3364992"/>
+            <a:ext cx="1554480" cy="475488"/>
           </a:xfrm>
           <a:prstGeom prst="rect">
             <a:avLst/>
@@ -31054,7 +32218,7 @@
                 <a:ea typeface="Trebuchet MS" pitchFamily="34" charset="-122"/>
                 <a:cs typeface="Trebuchet MS" pitchFamily="34" charset="-120"/>
               </a:rPr>
-              <a:t>stroke</a:t>
+              <a:t>ver</a:t>
             </a:r>
             <a:endParaRPr lang="en-US" sz="1400" dirty="0"/>
           </a:p>
@@ -31062,7 +32226,217 @@
       </p:sp>
       <p:sp>
         <p:nvSpPr>
-          <p:cNvPr id="30" name="Shape 28"/>
+          <p:cNvPr id="33" name="Text 31"/>
+          <p:cNvSpPr/>
+          <p:nvPr/>
+        </p:nvSpPr>
+        <p:spPr>
+          <a:xfrm>
+            <a:off x="5157216" y="3364992"/>
+            <a:ext cx="73152" cy="475488"/>
+          </a:xfrm>
+          <a:prstGeom prst="rect">
+            <a:avLst/>
+          </a:prstGeom>
+          <a:noFill/>
+          <a:ln/>
+        </p:spPr>
+        <p:txBody>
+          <a:bodyPr wrap="square" lIns="0" tIns="0" rIns="0" bIns="0" rtlCol="0" anchor="ctr"/>
+          <a:lstStyle/>
+          <a:p>
+            <a:pPr algn="ctr" indent="0" marL="0">
+              <a:buNone/>
+            </a:pPr>
+            <a:r>
+              <a:rPr lang="en-US" sz="1600" b="1" dirty="0">
+                <a:solidFill>
+                  <a:srgbClr val="0D9488"/>
+                </a:solidFill>
+                <a:latin typeface="Trebuchet MS" pitchFamily="34" charset="0"/>
+                <a:ea typeface="Trebuchet MS" pitchFamily="34" charset="-122"/>
+                <a:cs typeface="Trebuchet MS" pitchFamily="34" charset="-120"/>
+              </a:rPr>
+              <a:t>·</a:t>
+            </a:r>
+            <a:endParaRPr lang="en-US" sz="1600" dirty="0"/>
+          </a:p>
+        </p:txBody>
+      </p:sp>
+      <p:sp>
+        <p:nvSpPr>
+          <p:cNvPr id="34" name="Shape 32"/>
+          <p:cNvSpPr/>
+          <p:nvPr/>
+        </p:nvSpPr>
+        <p:spPr>
+          <a:xfrm>
+            <a:off x="5230368" y="3364992"/>
+            <a:ext cx="1554480" cy="475488"/>
+          </a:xfrm>
+          <a:prstGeom prst="rect">
+            <a:avLst>
+              <a:gd name="adj" fmla="val 9615"/>
+            </a:avLst>
+          </a:prstGeom>
+          <a:solidFill>
+            <a:srgbClr val="FFFFFF"/>
+          </a:solidFill>
+          <a:ln w="12700">
+            <a:solidFill>
+              <a:srgbClr val="0D9488"/>
+            </a:solidFill>
+            <a:prstDash val="solid"/>
+          </a:ln>
+        </p:spPr>
+      </p:sp>
+      <p:sp>
+        <p:nvSpPr>
+          <p:cNvPr id="35" name="Text 33"/>
+          <p:cNvSpPr/>
+          <p:nvPr/>
+        </p:nvSpPr>
+        <p:spPr>
+          <a:xfrm>
+            <a:off x="5230368" y="3364992"/>
+            <a:ext cx="1554480" cy="475488"/>
+          </a:xfrm>
+          <a:prstGeom prst="rect">
+            <a:avLst/>
+          </a:prstGeom>
+          <a:noFill/>
+          <a:ln/>
+        </p:spPr>
+        <p:txBody>
+          <a:bodyPr wrap="square" lIns="0" tIns="0" rIns="0" bIns="0" rtlCol="0" anchor="ctr"/>
+          <a:lstStyle/>
+          <a:p>
+            <a:pPr algn="ctr" indent="0" marL="0">
+              <a:buNone/>
+            </a:pPr>
+            <a:r>
+              <a:rPr lang="en-US" sz="1400" b="1" dirty="0">
+                <a:solidFill>
+                  <a:srgbClr val="0D9488"/>
+                </a:solidFill>
+                <a:latin typeface="Trebuchet MS" pitchFamily="34" charset="0"/>
+                <a:ea typeface="Trebuchet MS" pitchFamily="34" charset="-122"/>
+                <a:cs typeface="Trebuchet MS" pitchFamily="34" charset="-120"/>
+              </a:rPr>
+              <a:t>heat</a:t>
+            </a:r>
+            <a:endParaRPr lang="en-US" sz="1400" dirty="0"/>
+          </a:p>
+        </p:txBody>
+      </p:sp>
+      <p:sp>
+        <p:nvSpPr>
+          <p:cNvPr id="36" name="Text 34"/>
+          <p:cNvSpPr/>
+          <p:nvPr/>
+        </p:nvSpPr>
+        <p:spPr>
+          <a:xfrm>
+            <a:off x="6784848" y="3364992"/>
+            <a:ext cx="73152" cy="475488"/>
+          </a:xfrm>
+          <a:prstGeom prst="rect">
+            <a:avLst/>
+          </a:prstGeom>
+          <a:noFill/>
+          <a:ln/>
+        </p:spPr>
+        <p:txBody>
+          <a:bodyPr wrap="square" lIns="0" tIns="0" rIns="0" bIns="0" rtlCol="0" anchor="ctr"/>
+          <a:lstStyle/>
+          <a:p>
+            <a:pPr algn="ctr" indent="0" marL="0">
+              <a:buNone/>
+            </a:pPr>
+            <a:r>
+              <a:rPr lang="en-US" sz="1600" b="1" dirty="0">
+                <a:solidFill>
+                  <a:srgbClr val="0D9488"/>
+                </a:solidFill>
+                <a:latin typeface="Trebuchet MS" pitchFamily="34" charset="0"/>
+                <a:ea typeface="Trebuchet MS" pitchFamily="34" charset="-122"/>
+                <a:cs typeface="Trebuchet MS" pitchFamily="34" charset="-120"/>
+              </a:rPr>
+              <a:t>·</a:t>
+            </a:r>
+            <a:endParaRPr lang="en-US" sz="1600" dirty="0"/>
+          </a:p>
+        </p:txBody>
+      </p:sp>
+      <p:sp>
+        <p:nvSpPr>
+          <p:cNvPr id="37" name="Shape 35"/>
+          <p:cNvSpPr/>
+          <p:nvPr/>
+        </p:nvSpPr>
+        <p:spPr>
+          <a:xfrm>
+            <a:off x="6858000" y="3364992"/>
+            <a:ext cx="1554480" cy="475488"/>
+          </a:xfrm>
+          <a:prstGeom prst="rect">
+            <a:avLst>
+              <a:gd name="adj" fmla="val 9615"/>
+            </a:avLst>
+          </a:prstGeom>
+          <a:solidFill>
+            <a:srgbClr val="FFFFFF"/>
+          </a:solidFill>
+          <a:ln w="12700">
+            <a:solidFill>
+              <a:srgbClr val="0D9488"/>
+            </a:solidFill>
+            <a:prstDash val="solid"/>
+          </a:ln>
+        </p:spPr>
+      </p:sp>
+      <p:sp>
+        <p:nvSpPr>
+          <p:cNvPr id="38" name="Text 36"/>
+          <p:cNvSpPr/>
+          <p:nvPr/>
+        </p:nvSpPr>
+        <p:spPr>
+          <a:xfrm>
+            <a:off x="6858000" y="3364992"/>
+            <a:ext cx="1554480" cy="475488"/>
+          </a:xfrm>
+          <a:prstGeom prst="rect">
+            <a:avLst/>
+          </a:prstGeom>
+          <a:noFill/>
+          <a:ln/>
+        </p:spPr>
+        <p:txBody>
+          <a:bodyPr wrap="square" lIns="0" tIns="0" rIns="0" bIns="0" rtlCol="0" anchor="ctr"/>
+          <a:lstStyle/>
+          <a:p>
+            <a:pPr algn="ctr" indent="0" marL="0">
+              <a:buNone/>
+            </a:pPr>
+            <a:r>
+              <a:rPr lang="en-US" sz="1400" b="1" dirty="0">
+                <a:solidFill>
+                  <a:srgbClr val="0D9488"/>
+                </a:solidFill>
+                <a:latin typeface="Trebuchet MS" pitchFamily="34" charset="0"/>
+                <a:ea typeface="Trebuchet MS" pitchFamily="34" charset="-122"/>
+                <a:cs typeface="Trebuchet MS" pitchFamily="34" charset="-120"/>
+              </a:rPr>
+              <a:t>ing</a:t>
+            </a:r>
+            <a:endParaRPr lang="en-US" sz="1400" dirty="0"/>
+          </a:p>
+        </p:txBody>
+      </p:sp>
+      <p:sp>
+        <p:nvSpPr>
+          <p:cNvPr id="39" name="Shape 37"/>
           <p:cNvSpPr/>
           <p:nvPr/>
         </p:nvSpPr>
@@ -31089,7 +32463,7 @@
       </p:sp>
       <p:sp>
         <p:nvSpPr>
-          <p:cNvPr id="31" name="Text 29"/>
+          <p:cNvPr id="40" name="Text 38"/>
           <p:cNvSpPr/>
           <p:nvPr/>
         </p:nvSpPr>
@@ -31128,7 +32502,7 @@
       </p:sp>
       <p:sp>
         <p:nvSpPr>
-          <p:cNvPr id="32" name="Shape 30"/>
+          <p:cNvPr id="41" name="Shape 39"/>
           <p:cNvSpPr/>
           <p:nvPr/>
         </p:nvSpPr>
@@ -31155,7 +32529,7 @@
       </p:sp>
       <p:sp>
         <p:nvSpPr>
-          <p:cNvPr id="33" name="Text 31"/>
+          <p:cNvPr id="42" name="Text 40"/>
           <p:cNvSpPr/>
           <p:nvPr/>
         </p:nvSpPr>
@@ -31478,7 +32852,7 @@
                 <a:ea typeface="Calibri" pitchFamily="34" charset="-122"/>
                 <a:cs typeface="Calibri" pitchFamily="34" charset="-120"/>
               </a:rPr>
-              <a:t>Word Labs  •  wordlabs.app  •  Root: 'heat' = warmth or high temperature</a:t>
+              <a:t>Word Labs  •  wordlabs.app  •  Root: 'heat' = warmth; to make warm</a:t>
             </a:r>
             <a:endParaRPr lang="en-US" sz="800" dirty="0"/>
           </a:p>
@@ -31617,7 +32991,7 @@
                 <a:ea typeface="Trebuchet MS" pitchFamily="34" charset="-122"/>
                 <a:cs typeface="Trebuchet MS" pitchFamily="34" charset="-120"/>
               </a:rPr>
-              <a:t>heatstroke</a:t>
+              <a:t>overheating</a:t>
             </a:r>
             <a:endParaRPr lang="en-US" sz="2800" dirty="0"/>
           </a:p>
@@ -31697,7 +33071,7 @@
         </p:nvSpPr>
         <p:spPr>
           <a:xfrm>
-            <a:off x="2938272" y="2258568"/>
+            <a:off x="2221992" y="2258568"/>
             <a:ext cx="1828800" cy="292608"/>
           </a:xfrm>
           <a:prstGeom prst="rect">
@@ -31706,11 +33080,11 @@
             </a:avLst>
           </a:prstGeom>
           <a:solidFill>
-            <a:srgbClr val="CCFBF1"/>
+            <a:srgbClr val="DDD6FE"/>
           </a:solidFill>
           <a:ln w="19050">
             <a:solidFill>
-              <a:srgbClr val="0D9488"/>
+              <a:srgbClr val="7C3AED"/>
             </a:solidFill>
             <a:prstDash val="solid"/>
           </a:ln>
@@ -31731,7 +33105,7 @@
         </p:nvSpPr>
         <p:spPr>
           <a:xfrm>
-            <a:off x="2938272" y="2258568"/>
+            <a:off x="2221992" y="2258568"/>
             <a:ext cx="1828800" cy="292608"/>
           </a:xfrm>
           <a:prstGeom prst="rect">
@@ -31750,13 +33124,13 @@
             <a:r>
               <a:rPr lang="en-US" sz="1300" b="1" dirty="0">
                 <a:solidFill>
-                  <a:srgbClr val="0F766E"/>
+                  <a:srgbClr val="4C1D95"/>
                 </a:solidFill>
                 <a:latin typeface="Trebuchet MS" pitchFamily="34" charset="0"/>
                 <a:ea typeface="Trebuchet MS" pitchFamily="34" charset="-122"/>
                 <a:cs typeface="Trebuchet MS" pitchFamily="34" charset="-120"/>
               </a:rPr>
-              <a:t>heat</a:t>
+              <a:t>over</a:t>
             </a:r>
             <a:endParaRPr lang="en-US" sz="1300" dirty="0"/>
           </a:p>
@@ -31770,7 +33144,7 @@
         </p:nvSpPr>
         <p:spPr>
           <a:xfrm>
-            <a:off x="2938272" y="2569464"/>
+            <a:off x="2221992" y="2569464"/>
             <a:ext cx="1828800" cy="201168"/>
           </a:xfrm>
           <a:prstGeom prst="rect">
@@ -31795,7 +33169,7 @@
                 <a:ea typeface="Calibri" pitchFamily="34" charset="-122"/>
                 <a:cs typeface="Calibri" pitchFamily="34" charset="-120"/>
               </a:rPr>
-              <a:t>warmth or high temperature</a:t>
+              <a:t>too much</a:t>
             </a:r>
             <a:endParaRPr lang="en-US" sz="850" dirty="0"/>
           </a:p>
@@ -31809,7 +33183,7 @@
         </p:nvSpPr>
         <p:spPr>
           <a:xfrm>
-            <a:off x="5803392" y="2258568"/>
+            <a:off x="4370832" y="2258568"/>
             <a:ext cx="1828800" cy="292608"/>
           </a:xfrm>
           <a:prstGeom prst="rect">
@@ -31818,11 +33192,11 @@
             </a:avLst>
           </a:prstGeom>
           <a:solidFill>
-            <a:srgbClr val="FCE7F3"/>
+            <a:srgbClr val="CCFBF1"/>
           </a:solidFill>
           <a:ln w="19050">
             <a:solidFill>
-              <a:srgbClr val="DB2777"/>
+              <a:srgbClr val="0D9488"/>
             </a:solidFill>
             <a:prstDash val="solid"/>
           </a:ln>
@@ -31843,7 +33217,7 @@
         </p:nvSpPr>
         <p:spPr>
           <a:xfrm>
-            <a:off x="5803392" y="2258568"/>
+            <a:off x="4370832" y="2258568"/>
             <a:ext cx="1828800" cy="292608"/>
           </a:xfrm>
           <a:prstGeom prst="rect">
@@ -31862,13 +33236,13 @@
             <a:r>
               <a:rPr lang="en-US" sz="1300" b="1" dirty="0">
                 <a:solidFill>
-                  <a:srgbClr val="9D174D"/>
+                  <a:srgbClr val="0F766E"/>
                 </a:solidFill>
                 <a:latin typeface="Trebuchet MS" pitchFamily="34" charset="0"/>
                 <a:ea typeface="Trebuchet MS" pitchFamily="34" charset="-122"/>
                 <a:cs typeface="Trebuchet MS" pitchFamily="34" charset="-120"/>
               </a:rPr>
-              <a:t>stroke</a:t>
+              <a:t>heat</a:t>
             </a:r>
             <a:endParaRPr lang="en-US" sz="1300" dirty="0"/>
           </a:p>
@@ -31882,7 +33256,7 @@
         </p:nvSpPr>
         <p:spPr>
           <a:xfrm>
-            <a:off x="5803392" y="2569464"/>
+            <a:off x="4370832" y="2569464"/>
             <a:ext cx="1828800" cy="201168"/>
           </a:xfrm>
           <a:prstGeom prst="rect">
@@ -31907,7 +33281,7 @@
                 <a:ea typeface="Calibri" pitchFamily="34" charset="-122"/>
                 <a:cs typeface="Calibri" pitchFamily="34" charset="-120"/>
               </a:rPr>
-              <a:t>a sudden blow or attack</a:t>
+              <a:t>warmth; to make warm</a:t>
             </a:r>
             <a:endParaRPr lang="en-US" sz="850" dirty="0"/>
           </a:p>
@@ -31916,6 +33290,118 @@
       <p:sp>
         <p:nvSpPr>
           <p:cNvPr id="22" name="Shape 20"/>
+          <p:cNvSpPr/>
+          <p:nvPr/>
+        </p:nvSpPr>
+        <p:spPr>
+          <a:xfrm>
+            <a:off x="6519672" y="2258568"/>
+            <a:ext cx="1828800" cy="292608"/>
+          </a:xfrm>
+          <a:prstGeom prst="rect">
+            <a:avLst>
+              <a:gd name="adj" fmla="val 25000"/>
+            </a:avLst>
+          </a:prstGeom>
+          <a:solidFill>
+            <a:srgbClr val="FCE7F3"/>
+          </a:solidFill>
+          <a:ln w="19050">
+            <a:solidFill>
+              <a:srgbClr val="DB2777"/>
+            </a:solidFill>
+            <a:prstDash val="solid"/>
+          </a:ln>
+          <a:effectLst>
+            <a:outerShdw sx="100000" sy="100000" kx="0" ky="0" algn="bl" rotWithShape="0" blurRad="101600" dist="38100" dir="8100000">
+              <a:srgbClr val="000000">
+                <a:alpha val="12000"/>
+              </a:srgbClr>
+            </a:outerShdw>
+          </a:effectLst>
+        </p:spPr>
+      </p:sp>
+      <p:sp>
+        <p:nvSpPr>
+          <p:cNvPr id="23" name="Text 21"/>
+          <p:cNvSpPr/>
+          <p:nvPr/>
+        </p:nvSpPr>
+        <p:spPr>
+          <a:xfrm>
+            <a:off x="6519672" y="2258568"/>
+            <a:ext cx="1828800" cy="292608"/>
+          </a:xfrm>
+          <a:prstGeom prst="rect">
+            <a:avLst/>
+          </a:prstGeom>
+          <a:noFill/>
+          <a:ln/>
+        </p:spPr>
+        <p:txBody>
+          <a:bodyPr wrap="square" lIns="0" tIns="0" rIns="0" bIns="0" rtlCol="0" anchor="ctr"/>
+          <a:lstStyle/>
+          <a:p>
+            <a:pPr algn="ctr" indent="0" marL="0">
+              <a:buNone/>
+            </a:pPr>
+            <a:r>
+              <a:rPr lang="en-US" sz="1300" b="1" dirty="0">
+                <a:solidFill>
+                  <a:srgbClr val="9D174D"/>
+                </a:solidFill>
+                <a:latin typeface="Trebuchet MS" pitchFamily="34" charset="0"/>
+                <a:ea typeface="Trebuchet MS" pitchFamily="34" charset="-122"/>
+                <a:cs typeface="Trebuchet MS" pitchFamily="34" charset="-120"/>
+              </a:rPr>
+              <a:t>ing</a:t>
+            </a:r>
+            <a:endParaRPr lang="en-US" sz="1300" dirty="0"/>
+          </a:p>
+        </p:txBody>
+      </p:sp>
+      <p:sp>
+        <p:nvSpPr>
+          <p:cNvPr id="24" name="Text 22"/>
+          <p:cNvSpPr/>
+          <p:nvPr/>
+        </p:nvSpPr>
+        <p:spPr>
+          <a:xfrm>
+            <a:off x="6519672" y="2569464"/>
+            <a:ext cx="1828800" cy="201168"/>
+          </a:xfrm>
+          <a:prstGeom prst="rect">
+            <a:avLst/>
+          </a:prstGeom>
+          <a:noFill/>
+          <a:ln/>
+        </p:spPr>
+        <p:txBody>
+          <a:bodyPr wrap="square" lIns="0" tIns="0" rIns="0" bIns="0" rtlCol="0" anchor="t"/>
+          <a:lstStyle/>
+          <a:p>
+            <a:pPr algn="ctr" indent="0" marL="0">
+              <a:buNone/>
+            </a:pPr>
+            <a:r>
+              <a:rPr lang="en-US" sz="850" dirty="0">
+                <a:solidFill>
+                  <a:srgbClr val="475569"/>
+                </a:solidFill>
+                <a:latin typeface="Calibri" pitchFamily="34" charset="0"/>
+                <a:ea typeface="Calibri" pitchFamily="34" charset="-122"/>
+                <a:cs typeface="Calibri" pitchFamily="34" charset="-120"/>
+              </a:rPr>
+              <a:t>happening now</a:t>
+            </a:r>
+            <a:endParaRPr lang="en-US" sz="850" dirty="0"/>
+          </a:p>
+        </p:txBody>
+      </p:sp>
+      <p:sp>
+        <p:nvSpPr>
+          <p:cNvPr id="25" name="Shape 23"/>
           <p:cNvSpPr/>
           <p:nvPr/>
         </p:nvSpPr>
@@ -31942,7 +33428,7 @@
       </p:sp>
       <p:sp>
         <p:nvSpPr>
-          <p:cNvPr id="23" name="Text 21"/>
+          <p:cNvPr id="26" name="Text 24"/>
           <p:cNvSpPr/>
           <p:nvPr/>
         </p:nvSpPr>
@@ -31981,7 +33467,7 @@
       </p:sp>
       <p:sp>
         <p:nvSpPr>
-          <p:cNvPr id="24" name="Shape 22"/>
+          <p:cNvPr id="27" name="Shape 25"/>
           <p:cNvSpPr/>
           <p:nvPr/>
         </p:nvSpPr>
@@ -32008,14 +33494,14 @@
       </p:sp>
       <p:sp>
         <p:nvSpPr>
-          <p:cNvPr id="25" name="Shape 23"/>
-          <p:cNvSpPr/>
-          <p:nvPr/>
-        </p:nvSpPr>
-        <p:spPr>
-          <a:xfrm>
-            <a:off x="2999232" y="3364992"/>
-            <a:ext cx="1645920" cy="475488"/>
+          <p:cNvPr id="28" name="Shape 26"/>
+          <p:cNvSpPr/>
+          <p:nvPr/>
+        </p:nvSpPr>
+        <p:spPr>
+          <a:xfrm>
+            <a:off x="1975104" y="3364992"/>
+            <a:ext cx="1554480" cy="475488"/>
           </a:xfrm>
           <a:prstGeom prst="rect">
             <a:avLst>
@@ -32035,14 +33521,14 @@
       </p:sp>
       <p:sp>
         <p:nvSpPr>
-          <p:cNvPr id="26" name="Text 24"/>
-          <p:cNvSpPr/>
-          <p:nvPr/>
-        </p:nvSpPr>
-        <p:spPr>
-          <a:xfrm>
-            <a:off x="2999232" y="3364992"/>
-            <a:ext cx="1645920" cy="475488"/>
+          <p:cNvPr id="29" name="Text 27"/>
+          <p:cNvSpPr/>
+          <p:nvPr/>
+        </p:nvSpPr>
+        <p:spPr>
+          <a:xfrm>
+            <a:off x="1975104" y="3364992"/>
+            <a:ext cx="1554480" cy="475488"/>
           </a:xfrm>
           <a:prstGeom prst="rect">
             <a:avLst/>
@@ -32066,7 +33552,7 @@
                 <a:ea typeface="Trebuchet MS" pitchFamily="34" charset="-122"/>
                 <a:cs typeface="Trebuchet MS" pitchFamily="34" charset="-120"/>
               </a:rPr>
-              <a:t>heat</a:t>
+              <a:t>o</a:t>
             </a:r>
             <a:endParaRPr lang="en-US" sz="1400" dirty="0"/>
           </a:p>
@@ -32074,14 +33560,14 @@
       </p:sp>
       <p:sp>
         <p:nvSpPr>
-          <p:cNvPr id="27" name="Text 25"/>
-          <p:cNvSpPr/>
-          <p:nvPr/>
-        </p:nvSpPr>
-        <p:spPr>
-          <a:xfrm>
-            <a:off x="4645152" y="3364992"/>
-            <a:ext cx="1097280" cy="475488"/>
+          <p:cNvPr id="30" name="Text 28"/>
+          <p:cNvSpPr/>
+          <p:nvPr/>
+        </p:nvSpPr>
+        <p:spPr>
+          <a:xfrm>
+            <a:off x="3529584" y="3364992"/>
+            <a:ext cx="73152" cy="475488"/>
           </a:xfrm>
           <a:prstGeom prst="rect">
             <a:avLst/>
@@ -32113,14 +33599,14 @@
       </p:sp>
       <p:sp>
         <p:nvSpPr>
-          <p:cNvPr id="28" name="Shape 26"/>
-          <p:cNvSpPr/>
-          <p:nvPr/>
-        </p:nvSpPr>
-        <p:spPr>
-          <a:xfrm>
-            <a:off x="5742432" y="3364992"/>
-            <a:ext cx="1645920" cy="475488"/>
+          <p:cNvPr id="31" name="Shape 29"/>
+          <p:cNvSpPr/>
+          <p:nvPr/>
+        </p:nvSpPr>
+        <p:spPr>
+          <a:xfrm>
+            <a:off x="3602736" y="3364992"/>
+            <a:ext cx="1554480" cy="475488"/>
           </a:xfrm>
           <a:prstGeom prst="rect">
             <a:avLst>
@@ -32140,14 +33626,14 @@
       </p:sp>
       <p:sp>
         <p:nvSpPr>
-          <p:cNvPr id="29" name="Text 27"/>
-          <p:cNvSpPr/>
-          <p:nvPr/>
-        </p:nvSpPr>
-        <p:spPr>
-          <a:xfrm>
-            <a:off x="5742432" y="3364992"/>
-            <a:ext cx="1645920" cy="475488"/>
+          <p:cNvPr id="32" name="Text 30"/>
+          <p:cNvSpPr/>
+          <p:nvPr/>
+        </p:nvSpPr>
+        <p:spPr>
+          <a:xfrm>
+            <a:off x="3602736" y="3364992"/>
+            <a:ext cx="1554480" cy="475488"/>
           </a:xfrm>
           <a:prstGeom prst="rect">
             <a:avLst/>
@@ -32171,7 +33657,7 @@
                 <a:ea typeface="Trebuchet MS" pitchFamily="34" charset="-122"/>
                 <a:cs typeface="Trebuchet MS" pitchFamily="34" charset="-120"/>
               </a:rPr>
-              <a:t>stroke</a:t>
+              <a:t>ver</a:t>
             </a:r>
             <a:endParaRPr lang="en-US" sz="1400" dirty="0"/>
           </a:p>
@@ -32179,7 +33665,217 @@
       </p:sp>
       <p:sp>
         <p:nvSpPr>
-          <p:cNvPr id="30" name="Shape 28"/>
+          <p:cNvPr id="33" name="Text 31"/>
+          <p:cNvSpPr/>
+          <p:nvPr/>
+        </p:nvSpPr>
+        <p:spPr>
+          <a:xfrm>
+            <a:off x="5157216" y="3364992"/>
+            <a:ext cx="73152" cy="475488"/>
+          </a:xfrm>
+          <a:prstGeom prst="rect">
+            <a:avLst/>
+          </a:prstGeom>
+          <a:noFill/>
+          <a:ln/>
+        </p:spPr>
+        <p:txBody>
+          <a:bodyPr wrap="square" lIns="0" tIns="0" rIns="0" bIns="0" rtlCol="0" anchor="ctr"/>
+          <a:lstStyle/>
+          <a:p>
+            <a:pPr algn="ctr" indent="0" marL="0">
+              <a:buNone/>
+            </a:pPr>
+            <a:r>
+              <a:rPr lang="en-US" sz="1600" b="1" dirty="0">
+                <a:solidFill>
+                  <a:srgbClr val="0D9488"/>
+                </a:solidFill>
+                <a:latin typeface="Trebuchet MS" pitchFamily="34" charset="0"/>
+                <a:ea typeface="Trebuchet MS" pitchFamily="34" charset="-122"/>
+                <a:cs typeface="Trebuchet MS" pitchFamily="34" charset="-120"/>
+              </a:rPr>
+              <a:t>·</a:t>
+            </a:r>
+            <a:endParaRPr lang="en-US" sz="1600" dirty="0"/>
+          </a:p>
+        </p:txBody>
+      </p:sp>
+      <p:sp>
+        <p:nvSpPr>
+          <p:cNvPr id="34" name="Shape 32"/>
+          <p:cNvSpPr/>
+          <p:nvPr/>
+        </p:nvSpPr>
+        <p:spPr>
+          <a:xfrm>
+            <a:off x="5230368" y="3364992"/>
+            <a:ext cx="1554480" cy="475488"/>
+          </a:xfrm>
+          <a:prstGeom prst="rect">
+            <a:avLst>
+              <a:gd name="adj" fmla="val 9615"/>
+            </a:avLst>
+          </a:prstGeom>
+          <a:solidFill>
+            <a:srgbClr val="FFFFFF"/>
+          </a:solidFill>
+          <a:ln w="12700">
+            <a:solidFill>
+              <a:srgbClr val="0D9488"/>
+            </a:solidFill>
+            <a:prstDash val="solid"/>
+          </a:ln>
+        </p:spPr>
+      </p:sp>
+      <p:sp>
+        <p:nvSpPr>
+          <p:cNvPr id="35" name="Text 33"/>
+          <p:cNvSpPr/>
+          <p:nvPr/>
+        </p:nvSpPr>
+        <p:spPr>
+          <a:xfrm>
+            <a:off x="5230368" y="3364992"/>
+            <a:ext cx="1554480" cy="475488"/>
+          </a:xfrm>
+          <a:prstGeom prst="rect">
+            <a:avLst/>
+          </a:prstGeom>
+          <a:noFill/>
+          <a:ln/>
+        </p:spPr>
+        <p:txBody>
+          <a:bodyPr wrap="square" lIns="0" tIns="0" rIns="0" bIns="0" rtlCol="0" anchor="ctr"/>
+          <a:lstStyle/>
+          <a:p>
+            <a:pPr algn="ctr" indent="0" marL="0">
+              <a:buNone/>
+            </a:pPr>
+            <a:r>
+              <a:rPr lang="en-US" sz="1400" b="1" dirty="0">
+                <a:solidFill>
+                  <a:srgbClr val="0D9488"/>
+                </a:solidFill>
+                <a:latin typeface="Trebuchet MS" pitchFamily="34" charset="0"/>
+                <a:ea typeface="Trebuchet MS" pitchFamily="34" charset="-122"/>
+                <a:cs typeface="Trebuchet MS" pitchFamily="34" charset="-120"/>
+              </a:rPr>
+              <a:t>heat</a:t>
+            </a:r>
+            <a:endParaRPr lang="en-US" sz="1400" dirty="0"/>
+          </a:p>
+        </p:txBody>
+      </p:sp>
+      <p:sp>
+        <p:nvSpPr>
+          <p:cNvPr id="36" name="Text 34"/>
+          <p:cNvSpPr/>
+          <p:nvPr/>
+        </p:nvSpPr>
+        <p:spPr>
+          <a:xfrm>
+            <a:off x="6784848" y="3364992"/>
+            <a:ext cx="73152" cy="475488"/>
+          </a:xfrm>
+          <a:prstGeom prst="rect">
+            <a:avLst/>
+          </a:prstGeom>
+          <a:noFill/>
+          <a:ln/>
+        </p:spPr>
+        <p:txBody>
+          <a:bodyPr wrap="square" lIns="0" tIns="0" rIns="0" bIns="0" rtlCol="0" anchor="ctr"/>
+          <a:lstStyle/>
+          <a:p>
+            <a:pPr algn="ctr" indent="0" marL="0">
+              <a:buNone/>
+            </a:pPr>
+            <a:r>
+              <a:rPr lang="en-US" sz="1600" b="1" dirty="0">
+                <a:solidFill>
+                  <a:srgbClr val="0D9488"/>
+                </a:solidFill>
+                <a:latin typeface="Trebuchet MS" pitchFamily="34" charset="0"/>
+                <a:ea typeface="Trebuchet MS" pitchFamily="34" charset="-122"/>
+                <a:cs typeface="Trebuchet MS" pitchFamily="34" charset="-120"/>
+              </a:rPr>
+              <a:t>·</a:t>
+            </a:r>
+            <a:endParaRPr lang="en-US" sz="1600" dirty="0"/>
+          </a:p>
+        </p:txBody>
+      </p:sp>
+      <p:sp>
+        <p:nvSpPr>
+          <p:cNvPr id="37" name="Shape 35"/>
+          <p:cNvSpPr/>
+          <p:nvPr/>
+        </p:nvSpPr>
+        <p:spPr>
+          <a:xfrm>
+            <a:off x="6858000" y="3364992"/>
+            <a:ext cx="1554480" cy="475488"/>
+          </a:xfrm>
+          <a:prstGeom prst="rect">
+            <a:avLst>
+              <a:gd name="adj" fmla="val 9615"/>
+            </a:avLst>
+          </a:prstGeom>
+          <a:solidFill>
+            <a:srgbClr val="FFFFFF"/>
+          </a:solidFill>
+          <a:ln w="12700">
+            <a:solidFill>
+              <a:srgbClr val="0D9488"/>
+            </a:solidFill>
+            <a:prstDash val="solid"/>
+          </a:ln>
+        </p:spPr>
+      </p:sp>
+      <p:sp>
+        <p:nvSpPr>
+          <p:cNvPr id="38" name="Text 36"/>
+          <p:cNvSpPr/>
+          <p:nvPr/>
+        </p:nvSpPr>
+        <p:spPr>
+          <a:xfrm>
+            <a:off x="6858000" y="3364992"/>
+            <a:ext cx="1554480" cy="475488"/>
+          </a:xfrm>
+          <a:prstGeom prst="rect">
+            <a:avLst/>
+          </a:prstGeom>
+          <a:noFill/>
+          <a:ln/>
+        </p:spPr>
+        <p:txBody>
+          <a:bodyPr wrap="square" lIns="0" tIns="0" rIns="0" bIns="0" rtlCol="0" anchor="ctr"/>
+          <a:lstStyle/>
+          <a:p>
+            <a:pPr algn="ctr" indent="0" marL="0">
+              <a:buNone/>
+            </a:pPr>
+            <a:r>
+              <a:rPr lang="en-US" sz="1400" b="1" dirty="0">
+                <a:solidFill>
+                  <a:srgbClr val="0D9488"/>
+                </a:solidFill>
+                <a:latin typeface="Trebuchet MS" pitchFamily="34" charset="0"/>
+                <a:ea typeface="Trebuchet MS" pitchFamily="34" charset="-122"/>
+                <a:cs typeface="Trebuchet MS" pitchFamily="34" charset="-120"/>
+              </a:rPr>
+              <a:t>ing</a:t>
+            </a:r>
+            <a:endParaRPr lang="en-US" sz="1400" dirty="0"/>
+          </a:p>
+        </p:txBody>
+      </p:sp>
+      <p:sp>
+        <p:nvSpPr>
+          <p:cNvPr id="39" name="Shape 37"/>
           <p:cNvSpPr/>
           <p:nvPr/>
         </p:nvSpPr>
@@ -32206,7 +33902,7 @@
       </p:sp>
       <p:sp>
         <p:nvSpPr>
-          <p:cNvPr id="31" name="Text 29"/>
+          <p:cNvPr id="40" name="Text 38"/>
           <p:cNvSpPr/>
           <p:nvPr/>
         </p:nvSpPr>
@@ -32245,7 +33941,7 @@
       </p:sp>
       <p:sp>
         <p:nvSpPr>
-          <p:cNvPr id="32" name="Shape 30"/>
+          <p:cNvPr id="41" name="Shape 39"/>
           <p:cNvSpPr/>
           <p:nvPr/>
         </p:nvSpPr>
@@ -32272,7 +33968,7 @@
       </p:sp>
       <p:sp>
         <p:nvSpPr>
-          <p:cNvPr id="33" name="Shape 31"/>
+          <p:cNvPr id="42" name="Shape 40"/>
           <p:cNvSpPr/>
           <p:nvPr/>
         </p:nvSpPr>
@@ -32299,7 +33995,7 @@
       </p:sp>
       <p:sp>
         <p:nvSpPr>
-          <p:cNvPr id="34" name="Text 32"/>
+          <p:cNvPr id="43" name="Text 41"/>
           <p:cNvSpPr/>
           <p:nvPr/>
         </p:nvSpPr>
@@ -32330,7 +34026,7 @@
                 <a:ea typeface="Trebuchet MS" pitchFamily="34" charset="-122"/>
                 <a:cs typeface="Trebuchet MS" pitchFamily="34" charset="-120"/>
               </a:rPr>
-              <a:t>h</a:t>
+              <a:t>o</a:t>
             </a:r>
             <a:endParaRPr lang="en-US" sz="900" dirty="0"/>
           </a:p>
@@ -32338,7 +34034,7 @@
       </p:sp>
       <p:sp>
         <p:nvSpPr>
-          <p:cNvPr id="35" name="Shape 33"/>
+          <p:cNvPr id="44" name="Shape 42"/>
           <p:cNvSpPr/>
           <p:nvPr/>
         </p:nvSpPr>
@@ -32365,7 +34061,7 @@
       </p:sp>
       <p:sp>
         <p:nvSpPr>
-          <p:cNvPr id="36" name="Text 34"/>
+          <p:cNvPr id="45" name="Text 43"/>
           <p:cNvSpPr/>
           <p:nvPr/>
         </p:nvSpPr>
@@ -32396,7 +34092,7 @@
                 <a:ea typeface="Trebuchet MS" pitchFamily="34" charset="-122"/>
                 <a:cs typeface="Trebuchet MS" pitchFamily="34" charset="-120"/>
               </a:rPr>
-              <a:t>ea</a:t>
+              <a:t>v</a:t>
             </a:r>
             <a:endParaRPr lang="en-US" sz="900" dirty="0"/>
           </a:p>
@@ -32404,7 +34100,7 @@
       </p:sp>
       <p:sp>
         <p:nvSpPr>
-          <p:cNvPr id="37" name="Shape 35"/>
+          <p:cNvPr id="46" name="Shape 44"/>
           <p:cNvSpPr/>
           <p:nvPr/>
         </p:nvSpPr>
@@ -32431,7 +34127,7 @@
       </p:sp>
       <p:sp>
         <p:nvSpPr>
-          <p:cNvPr id="38" name="Text 36"/>
+          <p:cNvPr id="47" name="Text 45"/>
           <p:cNvSpPr/>
           <p:nvPr/>
         </p:nvSpPr>
@@ -32462,7 +34158,7 @@
                 <a:ea typeface="Trebuchet MS" pitchFamily="34" charset="-122"/>
                 <a:cs typeface="Trebuchet MS" pitchFamily="34" charset="-120"/>
               </a:rPr>
-              <a:t>t</a:t>
+              <a:t>er</a:t>
             </a:r>
             <a:endParaRPr lang="en-US" sz="900" dirty="0"/>
           </a:p>
@@ -32470,7 +34166,7 @@
       </p:sp>
       <p:sp>
         <p:nvSpPr>
-          <p:cNvPr id="39" name="Shape 37"/>
+          <p:cNvPr id="48" name="Shape 46"/>
           <p:cNvSpPr/>
           <p:nvPr/>
         </p:nvSpPr>
@@ -32497,7 +34193,7 @@
       </p:sp>
       <p:sp>
         <p:nvSpPr>
-          <p:cNvPr id="40" name="Text 38"/>
+          <p:cNvPr id="49" name="Text 47"/>
           <p:cNvSpPr/>
           <p:nvPr/>
         </p:nvSpPr>
@@ -32528,7 +34224,7 @@
                 <a:ea typeface="Trebuchet MS" pitchFamily="34" charset="-122"/>
                 <a:cs typeface="Trebuchet MS" pitchFamily="34" charset="-120"/>
               </a:rPr>
-              <a:t>s</a:t>
+              <a:t>h</a:t>
             </a:r>
             <a:endParaRPr lang="en-US" sz="900" dirty="0"/>
           </a:p>
@@ -32536,7 +34232,7 @@
       </p:sp>
       <p:sp>
         <p:nvSpPr>
-          <p:cNvPr id="41" name="Shape 39"/>
+          <p:cNvPr id="50" name="Shape 48"/>
           <p:cNvSpPr/>
           <p:nvPr/>
         </p:nvSpPr>
@@ -32563,7 +34259,7 @@
       </p:sp>
       <p:sp>
         <p:nvSpPr>
-          <p:cNvPr id="42" name="Text 40"/>
+          <p:cNvPr id="51" name="Text 49"/>
           <p:cNvSpPr/>
           <p:nvPr/>
         </p:nvSpPr>
@@ -32594,7 +34290,7 @@
                 <a:ea typeface="Trebuchet MS" pitchFamily="34" charset="-122"/>
                 <a:cs typeface="Trebuchet MS" pitchFamily="34" charset="-120"/>
               </a:rPr>
-              <a:t>t</a:t>
+              <a:t>ea</a:t>
             </a:r>
             <a:endParaRPr lang="en-US" sz="900" dirty="0"/>
           </a:p>
@@ -32602,7 +34298,7 @@
       </p:sp>
       <p:sp>
         <p:nvSpPr>
-          <p:cNvPr id="43" name="Shape 41"/>
+          <p:cNvPr id="52" name="Shape 50"/>
           <p:cNvSpPr/>
           <p:nvPr/>
         </p:nvSpPr>
@@ -32629,7 +34325,7 @@
       </p:sp>
       <p:sp>
         <p:nvSpPr>
-          <p:cNvPr id="44" name="Text 42"/>
+          <p:cNvPr id="53" name="Text 51"/>
           <p:cNvSpPr/>
           <p:nvPr/>
         </p:nvSpPr>
@@ -32660,7 +34356,7 @@
                 <a:ea typeface="Trebuchet MS" pitchFamily="34" charset="-122"/>
                 <a:cs typeface="Trebuchet MS" pitchFamily="34" charset="-120"/>
               </a:rPr>
-              <a:t>r</a:t>
+              <a:t>t</a:t>
             </a:r>
             <a:endParaRPr lang="en-US" sz="900" dirty="0"/>
           </a:p>
@@ -32668,7 +34364,7 @@
       </p:sp>
       <p:sp>
         <p:nvSpPr>
-          <p:cNvPr id="45" name="Shape 43"/>
+          <p:cNvPr id="54" name="Shape 52"/>
           <p:cNvSpPr/>
           <p:nvPr/>
         </p:nvSpPr>
@@ -32695,7 +34391,7 @@
       </p:sp>
       <p:sp>
         <p:nvSpPr>
-          <p:cNvPr id="46" name="Text 44"/>
+          <p:cNvPr id="55" name="Text 53"/>
           <p:cNvSpPr/>
           <p:nvPr/>
         </p:nvSpPr>
@@ -32726,7 +34422,7 @@
                 <a:ea typeface="Trebuchet MS" pitchFamily="34" charset="-122"/>
                 <a:cs typeface="Trebuchet MS" pitchFamily="34" charset="-120"/>
               </a:rPr>
-              <a:t>o</a:t>
+              <a:t>i</a:t>
             </a:r>
             <a:endParaRPr lang="en-US" sz="900" dirty="0"/>
           </a:p>
@@ -32734,7 +34430,7 @@
       </p:sp>
       <p:sp>
         <p:nvSpPr>
-          <p:cNvPr id="47" name="Shape 45"/>
+          <p:cNvPr id="56" name="Shape 54"/>
           <p:cNvSpPr/>
           <p:nvPr/>
         </p:nvSpPr>
@@ -32761,7 +34457,7 @@
       </p:sp>
       <p:sp>
         <p:nvSpPr>
-          <p:cNvPr id="48" name="Text 46"/>
+          <p:cNvPr id="57" name="Text 55"/>
           <p:cNvSpPr/>
           <p:nvPr/>
         </p:nvSpPr>
@@ -32792,7 +34488,7 @@
                 <a:ea typeface="Trebuchet MS" pitchFamily="34" charset="-122"/>
                 <a:cs typeface="Trebuchet MS" pitchFamily="34" charset="-120"/>
               </a:rPr>
-              <a:t>ke</a:t>
+              <a:t>ng</a:t>
             </a:r>
             <a:endParaRPr lang="en-US" sz="900" dirty="0"/>
           </a:p>
@@ -33084,7 +34780,7 @@
                 <a:ea typeface="Calibri" pitchFamily="34" charset="-122"/>
                 <a:cs typeface="Calibri" pitchFamily="34" charset="-120"/>
               </a:rPr>
-              <a:t>Word Labs  •  wordlabs.app  •  Root: 'heat' = warmth or high temperature</a:t>
+              <a:t>Word Labs  •  wordlabs.app  •  Root: 'heat' = warmth; to make warm</a:t>
             </a:r>
             <a:endParaRPr lang="en-US" sz="800" dirty="0"/>
           </a:p>
@@ -34253,7 +35949,7 @@
                 <a:ea typeface="Calibri" pitchFamily="34" charset="-122"/>
                 <a:cs typeface="Calibri" pitchFamily="34" charset="-120"/>
               </a:rPr>
-              <a:t>Word Labs  •  wordlabs.app  •  Root: 'heat' = warmth or high temperature</a:t>
+              <a:t>Word Labs  •  wordlabs.app  •  Root: 'heat' = warmth; to make warm</a:t>
             </a:r>
             <a:endParaRPr lang="en-US" sz="800" dirty="0"/>
           </a:p>
@@ -35009,7 +36705,7 @@
             <a:avLst/>
           </a:prstGeom>
           <a:solidFill>
-            <a:srgbClr val="DDD6FE"/>
+            <a:srgbClr val="F1F5F9"/>
           </a:solidFill>
           <a:ln w="12700">
             <a:solidFill>
@@ -35021,14 +36717,64 @@
       </p:sp>
       <p:sp>
         <p:nvSpPr>
-          <p:cNvPr id="34" name="Text 32"/>
-          <p:cNvSpPr/>
-          <p:nvPr/>
-        </p:nvSpPr>
-        <p:spPr>
-          <a:xfrm>
-            <a:off x="365760" y="2825496"/>
-            <a:ext cx="2468880" cy="402336"/>
+          <p:cNvPr id="34" name="Shape 32"/>
+          <p:cNvSpPr/>
+          <p:nvPr/>
+        </p:nvSpPr>
+        <p:spPr>
+          <a:xfrm>
+            <a:off x="2971800" y="2825496"/>
+            <a:ext cx="2834640" cy="402336"/>
+          </a:xfrm>
+          <a:prstGeom prst="rect">
+            <a:avLst/>
+          </a:prstGeom>
+          <a:solidFill>
+            <a:srgbClr val="F1F5F9"/>
+          </a:solidFill>
+          <a:ln w="12700">
+            <a:solidFill>
+              <a:srgbClr val="E2E8F0"/>
+            </a:solidFill>
+            <a:prstDash val="solid"/>
+          </a:ln>
+        </p:spPr>
+      </p:sp>
+      <p:sp>
+        <p:nvSpPr>
+          <p:cNvPr id="35" name="Shape 33"/>
+          <p:cNvSpPr/>
+          <p:nvPr/>
+        </p:nvSpPr>
+        <p:spPr>
+          <a:xfrm>
+            <a:off x="5943600" y="2825496"/>
+            <a:ext cx="2834640" cy="402336"/>
+          </a:xfrm>
+          <a:prstGeom prst="rect">
+            <a:avLst/>
+          </a:prstGeom>
+          <a:solidFill>
+            <a:srgbClr val="FCE7F3"/>
+          </a:solidFill>
+          <a:ln w="12700">
+            <a:solidFill>
+              <a:srgbClr val="E2E8F0"/>
+            </a:solidFill>
+            <a:prstDash val="solid"/>
+          </a:ln>
+        </p:spPr>
+      </p:sp>
+      <p:sp>
+        <p:nvSpPr>
+          <p:cNvPr id="36" name="Text 34"/>
+          <p:cNvSpPr/>
+          <p:nvPr/>
+        </p:nvSpPr>
+        <p:spPr>
+          <a:xfrm>
+            <a:off x="5943600" y="2825496"/>
+            <a:ext cx="2834640" cy="402336"/>
           </a:xfrm>
           <a:prstGeom prst="rect">
             <a:avLst/>
@@ -35046,13 +36792,13 @@
             <a:r>
               <a:rPr lang="en-US" sz="1300" b="1" dirty="0">
                 <a:solidFill>
-                  <a:srgbClr val="4C1D95"/>
+                  <a:srgbClr val="9D174D"/>
                 </a:solidFill>
                 <a:latin typeface="Trebuchet MS" pitchFamily="34" charset="0"/>
                 <a:ea typeface="Trebuchet MS" pitchFamily="34" charset="-122"/>
                 <a:cs typeface="Trebuchet MS" pitchFamily="34" charset="-120"/>
               </a:rPr>
-              <a:t>un-</a:t>
+              <a:t>-s</a:t>
             </a:r>
             <a:endParaRPr lang="en-US" sz="1300" dirty="0"/>
           </a:p>
@@ -35060,90 +36806,40 @@
       </p:sp>
       <p:sp>
         <p:nvSpPr>
-          <p:cNvPr id="35" name="Shape 33"/>
-          <p:cNvSpPr/>
-          <p:nvPr/>
-        </p:nvSpPr>
-        <p:spPr>
-          <a:xfrm>
-            <a:off x="2971800" y="2825496"/>
-            <a:ext cx="2834640" cy="402336"/>
-          </a:xfrm>
-          <a:prstGeom prst="rect">
-            <a:avLst/>
-          </a:prstGeom>
-          <a:solidFill>
-            <a:srgbClr val="F1F5F9"/>
-          </a:solidFill>
-          <a:ln w="12700">
-            <a:solidFill>
-              <a:srgbClr val="E2E8F0"/>
-            </a:solidFill>
-            <a:prstDash val="solid"/>
-          </a:ln>
-        </p:spPr>
-      </p:sp>
-      <p:sp>
-        <p:nvSpPr>
-          <p:cNvPr id="36" name="Shape 34"/>
-          <p:cNvSpPr/>
-          <p:nvPr/>
-        </p:nvSpPr>
-        <p:spPr>
-          <a:xfrm>
-            <a:off x="5943600" y="2825496"/>
-            <a:ext cx="2834640" cy="402336"/>
-          </a:xfrm>
-          <a:prstGeom prst="rect">
-            <a:avLst/>
-          </a:prstGeom>
-          <a:solidFill>
-            <a:srgbClr val="FCE7F3"/>
-          </a:solidFill>
-          <a:ln w="12700">
-            <a:solidFill>
-              <a:srgbClr val="E2E8F0"/>
-            </a:solidFill>
-            <a:prstDash val="solid"/>
-          </a:ln>
-        </p:spPr>
-      </p:sp>
-      <p:sp>
-        <p:nvSpPr>
           <p:cNvPr id="37" name="Text 35"/>
           <p:cNvSpPr/>
           <p:nvPr/>
         </p:nvSpPr>
         <p:spPr>
           <a:xfrm>
-            <a:off x="5943600" y="2825496"/>
-            <a:ext cx="2834640" cy="402336"/>
-          </a:xfrm>
-          <a:prstGeom prst="rect">
-            <a:avLst/>
-          </a:prstGeom>
-          <a:noFill/>
-          <a:ln/>
-        </p:spPr>
-        <p:txBody>
-          <a:bodyPr wrap="square" lIns="0" tIns="0" rIns="0" bIns="0" rtlCol="0" anchor="ctr"/>
-          <a:lstStyle/>
-          <a:p>
-            <a:pPr algn="ctr" indent="0" marL="0">
-              <a:buNone/>
-            </a:pPr>
-            <a:r>
-              <a:rPr lang="en-US" sz="1300" b="1" dirty="0">
-                <a:solidFill>
-                  <a:srgbClr val="9D174D"/>
+            <a:off x="365760" y="3611880"/>
+            <a:ext cx="1828800" cy="347472"/>
+          </a:xfrm>
+          <a:prstGeom prst="rect">
+            <a:avLst/>
+          </a:prstGeom>
+          <a:noFill/>
+          <a:ln/>
+        </p:spPr>
+        <p:txBody>
+          <a:bodyPr wrap="square" lIns="0" tIns="0" rIns="0" bIns="0" rtlCol="0" anchor="ctr"/>
+          <a:lstStyle/>
+          <a:p>
+            <a:pPr algn="l" indent="0" marL="0">
+              <a:buNone/>
+            </a:pPr>
+            <a:r>
+              <a:rPr lang="en-US" sz="1200" b="1" dirty="0">
+                <a:solidFill>
+                  <a:srgbClr val="0F172A"/>
                 </a:solidFill>
                 <a:latin typeface="Trebuchet MS" pitchFamily="34" charset="0"/>
                 <a:ea typeface="Trebuchet MS" pitchFamily="34" charset="-122"/>
                 <a:cs typeface="Trebuchet MS" pitchFamily="34" charset="-120"/>
               </a:rPr>
-              <a:t>-wave</a:t>
-            </a:r>
-            <a:endParaRPr lang="en-US" sz="1300" dirty="0"/>
+              <a:t>Sample words:</a:t>
+            </a:r>
+            <a:endParaRPr lang="en-US" sz="1200" dirty="0"/>
           </a:p>
         </p:txBody>
       </p:sp>
@@ -35155,18 +36851,20 @@
         </p:nvSpPr>
         <p:spPr>
           <a:xfrm>
-            <a:off x="365760" y="3246120"/>
-            <a:ext cx="2468880" cy="402336"/>
-          </a:xfrm>
-          <a:prstGeom prst="rect">
-            <a:avLst/>
-          </a:prstGeom>
-          <a:solidFill>
-            <a:srgbClr val="DDD6FE"/>
-          </a:solidFill>
-          <a:ln w="12700">
-            <a:solidFill>
-              <a:srgbClr val="E2E8F0"/>
+            <a:off x="365760" y="4023360"/>
+            <a:ext cx="2011680" cy="402336"/>
+          </a:xfrm>
+          <a:prstGeom prst="rect">
+            <a:avLst>
+              <a:gd name="adj" fmla="val 13636"/>
+            </a:avLst>
+          </a:prstGeom>
+          <a:solidFill>
+            <a:srgbClr val="EEF2FF"/>
+          </a:solidFill>
+          <a:ln w="12700">
+            <a:solidFill>
+              <a:srgbClr val="6366F1"/>
             </a:solidFill>
             <a:prstDash val="solid"/>
           </a:ln>
@@ -35180,34 +36878,34 @@
         </p:nvSpPr>
         <p:spPr>
           <a:xfrm>
-            <a:off x="365760" y="3246120"/>
-            <a:ext cx="2468880" cy="402336"/>
-          </a:xfrm>
-          <a:prstGeom prst="rect">
-            <a:avLst/>
-          </a:prstGeom>
-          <a:noFill/>
-          <a:ln/>
-        </p:spPr>
-        <p:txBody>
-          <a:bodyPr wrap="square" lIns="0" tIns="0" rIns="0" bIns="0" rtlCol="0" anchor="ctr"/>
-          <a:lstStyle/>
-          <a:p>
-            <a:pPr algn="ctr" indent="0" marL="0">
-              <a:buNone/>
-            </a:pPr>
-            <a:r>
-              <a:rPr lang="en-US" sz="1300" b="1" dirty="0">
-                <a:solidFill>
-                  <a:srgbClr val="4C1D95"/>
+            <a:off x="365760" y="4023360"/>
+            <a:ext cx="2011680" cy="402336"/>
+          </a:xfrm>
+          <a:prstGeom prst="rect">
+            <a:avLst/>
+          </a:prstGeom>
+          <a:noFill/>
+          <a:ln/>
+        </p:spPr>
+        <p:txBody>
+          <a:bodyPr wrap="square" lIns="0" tIns="0" rIns="0" bIns="0" rtlCol="0" anchor="ctr"/>
+          <a:lstStyle/>
+          <a:p>
+            <a:pPr algn="ctr" indent="0" marL="0">
+              <a:buNone/>
+            </a:pPr>
+            <a:r>
+              <a:rPr lang="en-US" sz="1200" b="1" dirty="0">
+                <a:solidFill>
+                  <a:srgbClr val="4338CA"/>
                 </a:solidFill>
                 <a:latin typeface="Trebuchet MS" pitchFamily="34" charset="0"/>
                 <a:ea typeface="Trebuchet MS" pitchFamily="34" charset="-122"/>
                 <a:cs typeface="Trebuchet MS" pitchFamily="34" charset="-120"/>
               </a:rPr>
-              <a:t>super-</a:t>
-            </a:r>
-            <a:endParaRPr lang="en-US" sz="1300" dirty="0"/>
+              <a:t>heat</a:t>
+            </a:r>
+            <a:endParaRPr lang="en-US" sz="1200" dirty="0"/>
           </a:p>
         </p:txBody>
       </p:sp>
@@ -35219,86 +36917,90 @@
         </p:nvSpPr>
         <p:spPr>
           <a:xfrm>
-            <a:off x="2971800" y="3246120"/>
-            <a:ext cx="2834640" cy="402336"/>
-          </a:xfrm>
-          <a:prstGeom prst="rect">
-            <a:avLst/>
-          </a:prstGeom>
-          <a:solidFill>
-            <a:srgbClr val="F8FAFC"/>
-          </a:solidFill>
-          <a:ln w="12700">
-            <a:solidFill>
-              <a:srgbClr val="E2E8F0"/>
-            </a:solidFill>
-            <a:prstDash val="solid"/>
-          </a:ln>
-        </p:spPr>
-      </p:sp>
-      <p:sp>
-        <p:nvSpPr>
-          <p:cNvPr id="41" name="Shape 39"/>
-          <p:cNvSpPr/>
-          <p:nvPr/>
-        </p:nvSpPr>
-        <p:spPr>
-          <a:xfrm>
-            <a:off x="5943600" y="3246120"/>
-            <a:ext cx="2834640" cy="402336"/>
-          </a:xfrm>
-          <a:prstGeom prst="rect">
-            <a:avLst/>
-          </a:prstGeom>
-          <a:solidFill>
-            <a:srgbClr val="FCE7F3"/>
-          </a:solidFill>
-          <a:ln w="12700">
-            <a:solidFill>
-              <a:srgbClr val="E2E8F0"/>
-            </a:solidFill>
-            <a:prstDash val="solid"/>
-          </a:ln>
-        </p:spPr>
-      </p:sp>
-      <p:sp>
-        <p:nvSpPr>
-          <p:cNvPr id="42" name="Text 40"/>
-          <p:cNvSpPr/>
-          <p:nvPr/>
-        </p:nvSpPr>
-        <p:spPr>
-          <a:xfrm>
-            <a:off x="5943600" y="3246120"/>
-            <a:ext cx="2834640" cy="402336"/>
-          </a:xfrm>
-          <a:prstGeom prst="rect">
-            <a:avLst/>
-          </a:prstGeom>
-          <a:noFill/>
-          <a:ln/>
-        </p:spPr>
-        <p:txBody>
-          <a:bodyPr wrap="square" lIns="0" tIns="0" rIns="0" bIns="0" rtlCol="0" anchor="ctr"/>
-          <a:lstStyle/>
-          <a:p>
-            <a:pPr algn="ctr" indent="0" marL="0">
-              <a:buNone/>
-            </a:pPr>
-            <a:r>
-              <a:rPr lang="en-US" sz="1300" b="1" dirty="0">
-                <a:solidFill>
-                  <a:srgbClr val="9D174D"/>
+            <a:off x="2542032" y="4023360"/>
+            <a:ext cx="2011680" cy="402336"/>
+          </a:xfrm>
+          <a:prstGeom prst="rect">
+            <a:avLst>
+              <a:gd name="adj" fmla="val 13636"/>
+            </a:avLst>
+          </a:prstGeom>
+          <a:solidFill>
+            <a:srgbClr val="EEF2FF"/>
+          </a:solidFill>
+          <a:ln w="12700">
+            <a:solidFill>
+              <a:srgbClr val="6366F1"/>
+            </a:solidFill>
+            <a:prstDash val="solid"/>
+          </a:ln>
+        </p:spPr>
+      </p:sp>
+      <p:sp>
+        <p:nvSpPr>
+          <p:cNvPr id="41" name="Text 39"/>
+          <p:cNvSpPr/>
+          <p:nvPr/>
+        </p:nvSpPr>
+        <p:spPr>
+          <a:xfrm>
+            <a:off x="2542032" y="4023360"/>
+            <a:ext cx="2011680" cy="402336"/>
+          </a:xfrm>
+          <a:prstGeom prst="rect">
+            <a:avLst/>
+          </a:prstGeom>
+          <a:noFill/>
+          <a:ln/>
+        </p:spPr>
+        <p:txBody>
+          <a:bodyPr wrap="square" lIns="0" tIns="0" rIns="0" bIns="0" rtlCol="0" anchor="ctr"/>
+          <a:lstStyle/>
+          <a:p>
+            <a:pPr algn="ctr" indent="0" marL="0">
+              <a:buNone/>
+            </a:pPr>
+            <a:r>
+              <a:rPr lang="en-US" sz="1200" b="1" dirty="0">
+                <a:solidFill>
+                  <a:srgbClr val="4338CA"/>
                 </a:solidFill>
                 <a:latin typeface="Trebuchet MS" pitchFamily="34" charset="0"/>
                 <a:ea typeface="Trebuchet MS" pitchFamily="34" charset="-122"/>
                 <a:cs typeface="Trebuchet MS" pitchFamily="34" charset="-120"/>
               </a:rPr>
-              <a:t>-stroke</a:t>
-            </a:r>
-            <a:endParaRPr lang="en-US" sz="1300" dirty="0"/>
-          </a:p>
-        </p:txBody>
+              <a:t>heats</a:t>
+            </a:r>
+            <a:endParaRPr lang="en-US" sz="1200" dirty="0"/>
+          </a:p>
+        </p:txBody>
+      </p:sp>
+      <p:sp>
+        <p:nvSpPr>
+          <p:cNvPr id="42" name="Shape 40"/>
+          <p:cNvSpPr/>
+          <p:nvPr/>
+        </p:nvSpPr>
+        <p:spPr>
+          <a:xfrm>
+            <a:off x="4718304" y="4023360"/>
+            <a:ext cx="2011680" cy="402336"/>
+          </a:xfrm>
+          <a:prstGeom prst="rect">
+            <a:avLst>
+              <a:gd name="adj" fmla="val 13636"/>
+            </a:avLst>
+          </a:prstGeom>
+          <a:solidFill>
+            <a:srgbClr val="EEF2FF"/>
+          </a:solidFill>
+          <a:ln w="12700">
+            <a:solidFill>
+              <a:srgbClr val="6366F1"/>
+            </a:solidFill>
+            <a:prstDash val="solid"/>
+          </a:ln>
+        </p:spPr>
       </p:sp>
       <p:sp>
         <p:nvSpPr>
@@ -35308,32 +37010,32 @@
         </p:nvSpPr>
         <p:spPr>
           <a:xfrm>
-            <a:off x="365760" y="3611880"/>
-            <a:ext cx="1828800" cy="347472"/>
-          </a:xfrm>
-          <a:prstGeom prst="rect">
-            <a:avLst/>
-          </a:prstGeom>
-          <a:noFill/>
-          <a:ln/>
-        </p:spPr>
-        <p:txBody>
-          <a:bodyPr wrap="square" lIns="0" tIns="0" rIns="0" bIns="0" rtlCol="0" anchor="ctr"/>
-          <a:lstStyle/>
-          <a:p>
-            <a:pPr algn="l" indent="0" marL="0">
+            <a:off x="4718304" y="4023360"/>
+            <a:ext cx="2011680" cy="402336"/>
+          </a:xfrm>
+          <a:prstGeom prst="rect">
+            <a:avLst/>
+          </a:prstGeom>
+          <a:noFill/>
+          <a:ln/>
+        </p:spPr>
+        <p:txBody>
+          <a:bodyPr wrap="square" lIns="0" tIns="0" rIns="0" bIns="0" rtlCol="0" anchor="ctr"/>
+          <a:lstStyle/>
+          <a:p>
+            <a:pPr algn="ctr" indent="0" marL="0">
               <a:buNone/>
             </a:pPr>
             <a:r>
               <a:rPr lang="en-US" sz="1200" b="1" dirty="0">
                 <a:solidFill>
-                  <a:srgbClr val="0F172A"/>
+                  <a:srgbClr val="4338CA"/>
                 </a:solidFill>
                 <a:latin typeface="Trebuchet MS" pitchFamily="34" charset="0"/>
                 <a:ea typeface="Trebuchet MS" pitchFamily="34" charset="-122"/>
                 <a:cs typeface="Trebuchet MS" pitchFamily="34" charset="-120"/>
               </a:rPr>
-              <a:t>Sample words:</a:t>
+              <a:t>heated</a:t>
             </a:r>
             <a:endParaRPr lang="en-US" sz="1200" dirty="0"/>
           </a:p>
@@ -35347,7 +37049,7 @@
         </p:nvSpPr>
         <p:spPr>
           <a:xfrm>
-            <a:off x="365760" y="4023360"/>
+            <a:off x="6894576" y="4023360"/>
             <a:ext cx="2011680" cy="402336"/>
           </a:xfrm>
           <a:prstGeom prst="rect">
@@ -35374,7 +37076,7 @@
         </p:nvSpPr>
         <p:spPr>
           <a:xfrm>
-            <a:off x="365760" y="4023360"/>
+            <a:off x="6894576" y="4023360"/>
             <a:ext cx="2011680" cy="402336"/>
           </a:xfrm>
           <a:prstGeom prst="rect">
@@ -35399,7 +37101,7 @@
                 <a:ea typeface="Trebuchet MS" pitchFamily="34" charset="-122"/>
                 <a:cs typeface="Trebuchet MS" pitchFamily="34" charset="-120"/>
               </a:rPr>
-              <a:t>heated</a:t>
+              <a:t>heater</a:t>
             </a:r>
             <a:endParaRPr lang="en-US" sz="1200" dirty="0"/>
           </a:p>
@@ -35413,7 +37115,7 @@
         </p:nvSpPr>
         <p:spPr>
           <a:xfrm>
-            <a:off x="2542032" y="4023360"/>
+            <a:off x="365760" y="4498848"/>
             <a:ext cx="2011680" cy="402336"/>
           </a:xfrm>
           <a:prstGeom prst="rect">
@@ -35440,7 +37142,7 @@
         </p:nvSpPr>
         <p:spPr>
           <a:xfrm>
-            <a:off x="2542032" y="4023360"/>
+            <a:off x="365760" y="4498848"/>
             <a:ext cx="2011680" cy="402336"/>
           </a:xfrm>
           <a:prstGeom prst="rect">
@@ -35465,7 +37167,7 @@
                 <a:ea typeface="Trebuchet MS" pitchFamily="34" charset="-122"/>
                 <a:cs typeface="Trebuchet MS" pitchFamily="34" charset="-120"/>
               </a:rPr>
-              <a:t>heater</a:t>
+              <a:t>reheat</a:t>
             </a:r>
             <a:endParaRPr lang="en-US" sz="1200" dirty="0"/>
           </a:p>
@@ -35479,7 +37181,7 @@
         </p:nvSpPr>
         <p:spPr>
           <a:xfrm>
-            <a:off x="4718304" y="4023360"/>
+            <a:off x="2542032" y="4498848"/>
             <a:ext cx="2011680" cy="402336"/>
           </a:xfrm>
           <a:prstGeom prst="rect">
@@ -35506,7 +37208,7 @@
         </p:nvSpPr>
         <p:spPr>
           <a:xfrm>
-            <a:off x="4718304" y="4023360"/>
+            <a:off x="2542032" y="4498848"/>
             <a:ext cx="2011680" cy="402336"/>
           </a:xfrm>
           <a:prstGeom prst="rect">
@@ -35531,7 +37233,7 @@
                 <a:ea typeface="Trebuchet MS" pitchFamily="34" charset="-122"/>
                 <a:cs typeface="Trebuchet MS" pitchFamily="34" charset="-120"/>
               </a:rPr>
-              <a:t>heating</a:t>
+              <a:t>heaters</a:t>
             </a:r>
             <a:endParaRPr lang="en-US" sz="1200" dirty="0"/>
           </a:p>
@@ -35545,7 +37247,7 @@
         </p:nvSpPr>
         <p:spPr>
           <a:xfrm>
-            <a:off x="6894576" y="4023360"/>
+            <a:off x="4718304" y="4498848"/>
             <a:ext cx="2011680" cy="402336"/>
           </a:xfrm>
           <a:prstGeom prst="rect">
@@ -35572,7 +37274,7 @@
         </p:nvSpPr>
         <p:spPr>
           <a:xfrm>
-            <a:off x="6894576" y="4023360"/>
+            <a:off x="4718304" y="4498848"/>
             <a:ext cx="2011680" cy="402336"/>
           </a:xfrm>
           <a:prstGeom prst="rect">
@@ -35597,271 +37299,7 @@
                 <a:ea typeface="Trebuchet MS" pitchFamily="34" charset="-122"/>
                 <a:cs typeface="Trebuchet MS" pitchFamily="34" charset="-120"/>
               </a:rPr>
-              <a:t>overheated</a:t>
-            </a:r>
-            <a:endParaRPr lang="en-US" sz="1200" dirty="0"/>
-          </a:p>
-        </p:txBody>
-      </p:sp>
-      <p:sp>
-        <p:nvSpPr>
-          <p:cNvPr id="52" name="Shape 50"/>
-          <p:cNvSpPr/>
-          <p:nvPr/>
-        </p:nvSpPr>
-        <p:spPr>
-          <a:xfrm>
-            <a:off x="365760" y="4498848"/>
-            <a:ext cx="2011680" cy="402336"/>
-          </a:xfrm>
-          <a:prstGeom prst="rect">
-            <a:avLst>
-              <a:gd name="adj" fmla="val 13636"/>
-            </a:avLst>
-          </a:prstGeom>
-          <a:solidFill>
-            <a:srgbClr val="EEF2FF"/>
-          </a:solidFill>
-          <a:ln w="12700">
-            <a:solidFill>
-              <a:srgbClr val="6366F1"/>
-            </a:solidFill>
-            <a:prstDash val="solid"/>
-          </a:ln>
-        </p:spPr>
-      </p:sp>
-      <p:sp>
-        <p:nvSpPr>
-          <p:cNvPr id="53" name="Text 51"/>
-          <p:cNvSpPr/>
-          <p:nvPr/>
-        </p:nvSpPr>
-        <p:spPr>
-          <a:xfrm>
-            <a:off x="365760" y="4498848"/>
-            <a:ext cx="2011680" cy="402336"/>
-          </a:xfrm>
-          <a:prstGeom prst="rect">
-            <a:avLst/>
-          </a:prstGeom>
-          <a:noFill/>
-          <a:ln/>
-        </p:spPr>
-        <p:txBody>
-          <a:bodyPr wrap="square" lIns="0" tIns="0" rIns="0" bIns="0" rtlCol="0" anchor="ctr"/>
-          <a:lstStyle/>
-          <a:p>
-            <a:pPr algn="ctr" indent="0" marL="0">
-              <a:buNone/>
-            </a:pPr>
-            <a:r>
-              <a:rPr lang="en-US" sz="1200" b="1" dirty="0">
-                <a:solidFill>
-                  <a:srgbClr val="4338CA"/>
-                </a:solidFill>
-                <a:latin typeface="Trebuchet MS" pitchFamily="34" charset="0"/>
-                <a:ea typeface="Trebuchet MS" pitchFamily="34" charset="-122"/>
-                <a:cs typeface="Trebuchet MS" pitchFamily="34" charset="-120"/>
-              </a:rPr>
-              <a:t>reheated</a:t>
-            </a:r>
-            <a:endParaRPr lang="en-US" sz="1200" dirty="0"/>
-          </a:p>
-        </p:txBody>
-      </p:sp>
-      <p:sp>
-        <p:nvSpPr>
-          <p:cNvPr id="54" name="Shape 52"/>
-          <p:cNvSpPr/>
-          <p:nvPr/>
-        </p:nvSpPr>
-        <p:spPr>
-          <a:xfrm>
-            <a:off x="2542032" y="4498848"/>
-            <a:ext cx="2011680" cy="402336"/>
-          </a:xfrm>
-          <a:prstGeom prst="rect">
-            <a:avLst>
-              <a:gd name="adj" fmla="val 13636"/>
-            </a:avLst>
-          </a:prstGeom>
-          <a:solidFill>
-            <a:srgbClr val="EEF2FF"/>
-          </a:solidFill>
-          <a:ln w="12700">
-            <a:solidFill>
-              <a:srgbClr val="6366F1"/>
-            </a:solidFill>
-            <a:prstDash val="solid"/>
-          </a:ln>
-        </p:spPr>
-      </p:sp>
-      <p:sp>
-        <p:nvSpPr>
-          <p:cNvPr id="55" name="Text 53"/>
-          <p:cNvSpPr/>
-          <p:nvPr/>
-        </p:nvSpPr>
-        <p:spPr>
-          <a:xfrm>
-            <a:off x="2542032" y="4498848"/>
-            <a:ext cx="2011680" cy="402336"/>
-          </a:xfrm>
-          <a:prstGeom prst="rect">
-            <a:avLst/>
-          </a:prstGeom>
-          <a:noFill/>
-          <a:ln/>
-        </p:spPr>
-        <p:txBody>
-          <a:bodyPr wrap="square" lIns="0" tIns="0" rIns="0" bIns="0" rtlCol="0" anchor="ctr"/>
-          <a:lstStyle/>
-          <a:p>
-            <a:pPr algn="ctr" indent="0" marL="0">
-              <a:buNone/>
-            </a:pPr>
-            <a:r>
-              <a:rPr lang="en-US" sz="1200" b="1" dirty="0">
-                <a:solidFill>
-                  <a:srgbClr val="4338CA"/>
-                </a:solidFill>
-                <a:latin typeface="Trebuchet MS" pitchFamily="34" charset="0"/>
-                <a:ea typeface="Trebuchet MS" pitchFamily="34" charset="-122"/>
-                <a:cs typeface="Trebuchet MS" pitchFamily="34" charset="-120"/>
-              </a:rPr>
-              <a:t>preheat</a:t>
-            </a:r>
-            <a:endParaRPr lang="en-US" sz="1200" dirty="0"/>
-          </a:p>
-        </p:txBody>
-      </p:sp>
-      <p:sp>
-        <p:nvSpPr>
-          <p:cNvPr id="56" name="Shape 54"/>
-          <p:cNvSpPr/>
-          <p:nvPr/>
-        </p:nvSpPr>
-        <p:spPr>
-          <a:xfrm>
-            <a:off x="4718304" y="4498848"/>
-            <a:ext cx="2011680" cy="402336"/>
-          </a:xfrm>
-          <a:prstGeom prst="rect">
-            <a:avLst>
-              <a:gd name="adj" fmla="val 13636"/>
-            </a:avLst>
-          </a:prstGeom>
-          <a:solidFill>
-            <a:srgbClr val="EEF2FF"/>
-          </a:solidFill>
-          <a:ln w="12700">
-            <a:solidFill>
-              <a:srgbClr val="6366F1"/>
-            </a:solidFill>
-            <a:prstDash val="solid"/>
-          </a:ln>
-        </p:spPr>
-      </p:sp>
-      <p:sp>
-        <p:nvSpPr>
-          <p:cNvPr id="57" name="Text 55"/>
-          <p:cNvSpPr/>
-          <p:nvPr/>
-        </p:nvSpPr>
-        <p:spPr>
-          <a:xfrm>
-            <a:off x="4718304" y="4498848"/>
-            <a:ext cx="2011680" cy="402336"/>
-          </a:xfrm>
-          <a:prstGeom prst="rect">
-            <a:avLst/>
-          </a:prstGeom>
-          <a:noFill/>
-          <a:ln/>
-        </p:spPr>
-        <p:txBody>
-          <a:bodyPr wrap="square" lIns="0" tIns="0" rIns="0" bIns="0" rtlCol="0" anchor="ctr"/>
-          <a:lstStyle/>
-          <a:p>
-            <a:pPr algn="ctr" indent="0" marL="0">
-              <a:buNone/>
-            </a:pPr>
-            <a:r>
-              <a:rPr lang="en-US" sz="1200" b="1" dirty="0">
-                <a:solidFill>
-                  <a:srgbClr val="4338CA"/>
-                </a:solidFill>
-                <a:latin typeface="Trebuchet MS" pitchFamily="34" charset="0"/>
-                <a:ea typeface="Trebuchet MS" pitchFamily="34" charset="-122"/>
-                <a:cs typeface="Trebuchet MS" pitchFamily="34" charset="-120"/>
-              </a:rPr>
-              <a:t>heatwave</a:t>
-            </a:r>
-            <a:endParaRPr lang="en-US" sz="1200" dirty="0"/>
-          </a:p>
-        </p:txBody>
-      </p:sp>
-      <p:sp>
-        <p:nvSpPr>
-          <p:cNvPr id="58" name="Shape 56"/>
-          <p:cNvSpPr/>
-          <p:nvPr/>
-        </p:nvSpPr>
-        <p:spPr>
-          <a:xfrm>
-            <a:off x="6894576" y="4498848"/>
-            <a:ext cx="2011680" cy="402336"/>
-          </a:xfrm>
-          <a:prstGeom prst="rect">
-            <a:avLst>
-              <a:gd name="adj" fmla="val 13636"/>
-            </a:avLst>
-          </a:prstGeom>
-          <a:solidFill>
-            <a:srgbClr val="EEF2FF"/>
-          </a:solidFill>
-          <a:ln w="12700">
-            <a:solidFill>
-              <a:srgbClr val="6366F1"/>
-            </a:solidFill>
-            <a:prstDash val="solid"/>
-          </a:ln>
-        </p:spPr>
-      </p:sp>
-      <p:sp>
-        <p:nvSpPr>
-          <p:cNvPr id="59" name="Text 57"/>
-          <p:cNvSpPr/>
-          <p:nvPr/>
-        </p:nvSpPr>
-        <p:spPr>
-          <a:xfrm>
-            <a:off x="6894576" y="4498848"/>
-            <a:ext cx="2011680" cy="402336"/>
-          </a:xfrm>
-          <a:prstGeom prst="rect">
-            <a:avLst/>
-          </a:prstGeom>
-          <a:noFill/>
-          <a:ln/>
-        </p:spPr>
-        <p:txBody>
-          <a:bodyPr wrap="square" lIns="0" tIns="0" rIns="0" bIns="0" rtlCol="0" anchor="ctr"/>
-          <a:lstStyle/>
-          <a:p>
-            <a:pPr algn="ctr" indent="0" marL="0">
-              <a:buNone/>
-            </a:pPr>
-            <a:r>
-              <a:rPr lang="en-US" sz="1200" b="1" dirty="0">
-                <a:solidFill>
-                  <a:srgbClr val="4338CA"/>
-                </a:solidFill>
-                <a:latin typeface="Trebuchet MS" pitchFamily="34" charset="0"/>
-                <a:ea typeface="Trebuchet MS" pitchFamily="34" charset="-122"/>
-                <a:cs typeface="Trebuchet MS" pitchFamily="34" charset="-120"/>
-              </a:rPr>
-              <a:t>heatstroke</a:t>
+              <a:t>heating</a:t>
             </a:r>
             <a:endParaRPr lang="en-US" sz="1200" dirty="0"/>
           </a:p>
@@ -36153,7 +37591,7 @@
                 <a:ea typeface="Calibri" pitchFamily="34" charset="-122"/>
                 <a:cs typeface="Calibri" pitchFamily="34" charset="-120"/>
               </a:rPr>
-              <a:t>Word Labs  •  wordlabs.app  •  Root: 'heat' = warmth or high temperature</a:t>
+              <a:t>Word Labs  •  wordlabs.app  •  Root: 'heat' = warmth; to make warm</a:t>
             </a:r>
             <a:endParaRPr lang="en-US" sz="800" dirty="0"/>
           </a:p>
@@ -36317,7 +37755,7 @@
                 <a:ea typeface="Calibri" pitchFamily="34" charset="-122"/>
                 <a:cs typeface="Calibri" pitchFamily="34" charset="-120"/>
               </a:rPr>
-              <a:t>The core part of a word carrying its basic meaning. For example, 'heat' means 'warmth or high temperature'.</a:t>
+              <a:t>The core part of a word carrying its basic meaning. For example, 'heat' means 'warmth; to make warm'.</a:t>
             </a:r>
             <a:endParaRPr lang="en-US" sz="1350" dirty="0"/>
           </a:p>
@@ -36937,7 +38375,7 @@
                 <a:ea typeface="Calibri" pitchFamily="34" charset="-122"/>
                 <a:cs typeface="Calibri" pitchFamily="34" charset="-120"/>
               </a:rPr>
-              <a:t>Word Labs  •  wordlabs.app  •  Root: 'heat' = warmth or high temperature</a:t>
+              <a:t>Word Labs  •  wordlabs.app  •  Root: 'heat' = warmth; to make warm</a:t>
             </a:r>
             <a:endParaRPr lang="en-US" sz="800" dirty="0"/>
           </a:p>
@@ -37049,7 +38487,7 @@
                 <a:ea typeface="Calibri" pitchFamily="34" charset="-122"/>
                 <a:cs typeface="Calibri" pitchFamily="34" charset="-120"/>
               </a:rPr>
-              <a:t>1.  The prefix 're' in 'reheated' means before.</a:t>
+              <a:t>1.  'heat' means 'the quality of being hot; warmth'.</a:t>
             </a:r>
             <a:endParaRPr lang="en-US" sz="1300" dirty="0"/>
           </a:p>
@@ -37072,11 +38510,11 @@
             </a:avLst>
           </a:prstGeom>
           <a:solidFill>
-            <a:srgbClr val="FEE2E2"/>
-          </a:solidFill>
-          <a:ln w="12700">
-            <a:solidFill>
-              <a:srgbClr val="DC2626"/>
+            <a:srgbClr val="DCFCE7"/>
+          </a:solidFill>
+          <a:ln w="12700">
+            <a:solidFill>
+              <a:srgbClr val="16A34A"/>
             </a:solidFill>
             <a:prstDash val="solid"/>
           </a:ln>
@@ -37109,13 +38547,13 @@
             <a:r>
               <a:rPr lang="en-US" sz="1100" b="1" dirty="0">
                 <a:solidFill>
-                  <a:srgbClr val="DC2626"/>
+                  <a:srgbClr val="16A34A"/>
                 </a:solidFill>
                 <a:latin typeface="Trebuchet MS" pitchFamily="34" charset="0"/>
                 <a:ea typeface="Trebuchet MS" pitchFamily="34" charset="-122"/>
                 <a:cs typeface="Trebuchet MS" pitchFamily="34" charset="-120"/>
               </a:rPr>
-              <a:t>FALSE</a:t>
+              <a:t>TRUE</a:t>
             </a:r>
             <a:endParaRPr lang="en-US" sz="1100" dirty="0"/>
           </a:p>
@@ -37188,7 +38626,7 @@
                 <a:ea typeface="Calibri" pitchFamily="34" charset="-122"/>
                 <a:cs typeface="Calibri" pitchFamily="34" charset="-120"/>
               </a:rPr>
-              <a:t>2.  A heatwave is a type of ocean wave caused by warm water.</a:t>
+              <a:t>2.  'heat' means 'warmth; to make warm'.</a:t>
             </a:r>
             <a:endParaRPr lang="en-US" sz="1300" dirty="0"/>
           </a:p>
@@ -37211,11 +38649,11 @@
             </a:avLst>
           </a:prstGeom>
           <a:solidFill>
-            <a:srgbClr val="FEE2E2"/>
-          </a:solidFill>
-          <a:ln w="12700">
-            <a:solidFill>
-              <a:srgbClr val="DC2626"/>
+            <a:srgbClr val="DCFCE7"/>
+          </a:solidFill>
+          <a:ln w="12700">
+            <a:solidFill>
+              <a:srgbClr val="16A34A"/>
             </a:solidFill>
             <a:prstDash val="solid"/>
           </a:ln>
@@ -37248,13 +38686,13 @@
             <a:r>
               <a:rPr lang="en-US" sz="1100" b="1" dirty="0">
                 <a:solidFill>
-                  <a:srgbClr val="DC2626"/>
+                  <a:srgbClr val="16A34A"/>
                 </a:solidFill>
                 <a:latin typeface="Trebuchet MS" pitchFamily="34" charset="0"/>
                 <a:ea typeface="Trebuchet MS" pitchFamily="34" charset="-122"/>
                 <a:cs typeface="Trebuchet MS" pitchFamily="34" charset="-120"/>
               </a:rPr>
-              <a:t>FALSE</a:t>
+              <a:t>TRUE</a:t>
             </a:r>
             <a:endParaRPr lang="en-US" sz="1100" dirty="0"/>
           </a:p>
@@ -37327,7 +38765,7 @@
                 <a:ea typeface="Calibri" pitchFamily="34" charset="-122"/>
                 <a:cs typeface="Calibri" pitchFamily="34" charset="-120"/>
               </a:rPr>
-              <a:t>3.  The root 'heat' can be found in the word 'overheated'.</a:t>
+              <a:t>3.  'heats' means 'makes something warm (present tense)'.</a:t>
             </a:r>
             <a:endParaRPr lang="en-US" sz="1300" dirty="0"/>
           </a:p>
@@ -37466,7 +38904,7 @@
                 <a:ea typeface="Calibri" pitchFamily="34" charset="-122"/>
                 <a:cs typeface="Calibri" pitchFamily="34" charset="-120"/>
               </a:rPr>
-              <a:t>4.  Heatstroke is a condition that can happen in very hot weather.</a:t>
+              <a:t>4.  'heat' means 'a feeling of great sadness'.</a:t>
             </a:r>
             <a:endParaRPr lang="en-US" sz="1300" dirty="0"/>
           </a:p>
@@ -37489,11 +38927,11 @@
             </a:avLst>
           </a:prstGeom>
           <a:solidFill>
-            <a:srgbClr val="DCFCE7"/>
-          </a:solidFill>
-          <a:ln w="12700">
-            <a:solidFill>
-              <a:srgbClr val="16A34A"/>
+            <a:srgbClr val="FEE2E2"/>
+          </a:solidFill>
+          <a:ln w="12700">
+            <a:solidFill>
+              <a:srgbClr val="DC2626"/>
             </a:solidFill>
             <a:prstDash val="solid"/>
           </a:ln>
@@ -37526,13 +38964,13 @@
             <a:r>
               <a:rPr lang="en-US" sz="1100" b="1" dirty="0">
                 <a:solidFill>
-                  <a:srgbClr val="16A34A"/>
+                  <a:srgbClr val="DC2626"/>
                 </a:solidFill>
                 <a:latin typeface="Trebuchet MS" pitchFamily="34" charset="0"/>
                 <a:ea typeface="Trebuchet MS" pitchFamily="34" charset="-122"/>
                 <a:cs typeface="Trebuchet MS" pitchFamily="34" charset="-120"/>
               </a:rPr>
-              <a:t>TRUE</a:t>
+              <a:t>FALSE</a:t>
             </a:r>
             <a:endParaRPr lang="en-US" sz="1100" dirty="0"/>
           </a:p>
@@ -37605,7 +39043,7 @@
                 <a:ea typeface="Calibri" pitchFamily="34" charset="-122"/>
                 <a:cs typeface="Calibri" pitchFamily="34" charset="-120"/>
               </a:rPr>
-              <a:t>5.  The word 'preheat' means to heat something before use.</a:t>
+              <a:t>5.  'heats' means 'cuts something into pieces'.</a:t>
             </a:r>
             <a:endParaRPr lang="en-US" sz="1300" dirty="0"/>
           </a:p>
@@ -37628,11 +39066,11 @@
             </a:avLst>
           </a:prstGeom>
           <a:solidFill>
-            <a:srgbClr val="DCFCE7"/>
-          </a:solidFill>
-          <a:ln w="12700">
-            <a:solidFill>
-              <a:srgbClr val="16A34A"/>
+            <a:srgbClr val="FEE2E2"/>
+          </a:solidFill>
+          <a:ln w="12700">
+            <a:solidFill>
+              <a:srgbClr val="DC2626"/>
             </a:solidFill>
             <a:prstDash val="solid"/>
           </a:ln>
@@ -37665,13 +39103,13 @@
             <a:r>
               <a:rPr lang="en-US" sz="1100" b="1" dirty="0">
                 <a:solidFill>
-                  <a:srgbClr val="16A34A"/>
+                  <a:srgbClr val="DC2626"/>
                 </a:solidFill>
                 <a:latin typeface="Trebuchet MS" pitchFamily="34" charset="0"/>
                 <a:ea typeface="Trebuchet MS" pitchFamily="34" charset="-122"/>
                 <a:cs typeface="Trebuchet MS" pitchFamily="34" charset="-120"/>
               </a:rPr>
-              <a:t>TRUE</a:t>
+              <a:t>FALSE</a:t>
             </a:r>
             <a:endParaRPr lang="en-US" sz="1100" dirty="0"/>
           </a:p>
@@ -37963,7 +39401,7 @@
                 <a:ea typeface="Calibri" pitchFamily="34" charset="-122"/>
                 <a:cs typeface="Calibri" pitchFamily="34" charset="-120"/>
               </a:rPr>
-              <a:t>Word Labs  •  wordlabs.app  •  Root: 'heat' = warmth or high temperature</a:t>
+              <a:t>Word Labs  •  wordlabs.app  •  Root: 'heat' = warmth; to make warm</a:t>
             </a:r>
             <a:endParaRPr lang="en-US" sz="800" dirty="0"/>
           </a:p>
@@ -38100,7 +39538,7 @@
                 <a:ea typeface="Trebuchet MS" pitchFamily="34" charset="-122"/>
                 <a:cs typeface="Trebuchet MS" pitchFamily="34" charset="-120"/>
               </a:rPr>
-              <a:t>warmth or high temperature</a:t>
+              <a:t>warmth; to make warm</a:t>
             </a:r>
             <a:endParaRPr lang="en-US" sz="2000" dirty="0"/>
           </a:p>
@@ -38139,7 +39577,7 @@
                 <a:ea typeface="Calibri" pitchFamily="34" charset="-122"/>
                 <a:cs typeface="Calibri" pitchFamily="34" charset="-120"/>
               </a:rPr>
-              <a:t>Origin: Latin: calor</a:t>
+              <a:t>Origin: Anglo-Saxon (Old English) root</a:t>
             </a:r>
             <a:endParaRPr lang="en-US" sz="1100" dirty="0"/>
           </a:p>
@@ -38244,7 +39682,7 @@
                 <a:ea typeface="Trebuchet MS" pitchFamily="34" charset="-122"/>
                 <a:cs typeface="Trebuchet MS" pitchFamily="34" charset="-120"/>
               </a:rPr>
-              <a:t>heated</a:t>
+              <a:t>heat</a:t>
             </a:r>
             <a:endParaRPr lang="en-US" sz="1300" dirty="0"/>
           </a:p>
@@ -38310,7 +39748,7 @@
                 <a:ea typeface="Trebuchet MS" pitchFamily="34" charset="-122"/>
                 <a:cs typeface="Trebuchet MS" pitchFamily="34" charset="-120"/>
               </a:rPr>
-              <a:t>heater</a:t>
+              <a:t>heats</a:t>
             </a:r>
             <a:endParaRPr lang="en-US" sz="1300" dirty="0"/>
           </a:p>
@@ -38376,7 +39814,7 @@
                 <a:ea typeface="Trebuchet MS" pitchFamily="34" charset="-122"/>
                 <a:cs typeface="Trebuchet MS" pitchFamily="34" charset="-120"/>
               </a:rPr>
-              <a:t>heating</a:t>
+              <a:t>heated</a:t>
             </a:r>
             <a:endParaRPr lang="en-US" sz="1300" dirty="0"/>
           </a:p>
@@ -38442,7 +39880,7 @@
                 <a:ea typeface="Trebuchet MS" pitchFamily="34" charset="-122"/>
                 <a:cs typeface="Trebuchet MS" pitchFamily="34" charset="-120"/>
               </a:rPr>
-              <a:t>overheated</a:t>
+              <a:t>heater</a:t>
             </a:r>
             <a:endParaRPr lang="en-US" sz="1300" dirty="0"/>
           </a:p>
@@ -38508,7 +39946,7 @@
                 <a:ea typeface="Trebuchet MS" pitchFamily="34" charset="-122"/>
                 <a:cs typeface="Trebuchet MS" pitchFamily="34" charset="-120"/>
               </a:rPr>
-              <a:t>reheated</a:t>
+              <a:t>reheat</a:t>
             </a:r>
             <a:endParaRPr lang="en-US" sz="1300" dirty="0"/>
           </a:p>
@@ -38574,7 +40012,7 @@
                 <a:ea typeface="Trebuchet MS" pitchFamily="34" charset="-122"/>
                 <a:cs typeface="Trebuchet MS" pitchFamily="34" charset="-120"/>
               </a:rPr>
-              <a:t>preheat</a:t>
+              <a:t>heaters</a:t>
             </a:r>
             <a:endParaRPr lang="en-US" sz="1300" dirty="0"/>
           </a:p>
@@ -38640,7 +40078,7 @@
                 <a:ea typeface="Trebuchet MS" pitchFamily="34" charset="-122"/>
                 <a:cs typeface="Trebuchet MS" pitchFamily="34" charset="-120"/>
               </a:rPr>
-              <a:t>heatwave</a:t>
+              <a:t>heating</a:t>
             </a:r>
             <a:endParaRPr lang="en-US" sz="1300" dirty="0"/>
           </a:p>
@@ -38932,7 +40370,7 @@
                 <a:ea typeface="Calibri" pitchFamily="34" charset="-122"/>
                 <a:cs typeface="Calibri" pitchFamily="34" charset="-120"/>
               </a:rPr>
-              <a:t>Word Labs  •  wordlabs.app  •  Root: 'heat' = warmth or high temperature</a:t>
+              <a:t>Word Labs  •  wordlabs.app  •  Root: 'heat' = warmth; to make warm</a:t>
             </a:r>
             <a:endParaRPr lang="en-US" sz="800" dirty="0"/>
           </a:p>
@@ -39688,7 +41126,7 @@
             <a:avLst/>
           </a:prstGeom>
           <a:solidFill>
-            <a:srgbClr val="DDD6FE"/>
+            <a:srgbClr val="F1F5F9"/>
           </a:solidFill>
           <a:ln w="12700">
             <a:solidFill>
@@ -39700,18 +41138,68 @@
       </p:sp>
       <p:sp>
         <p:nvSpPr>
-          <p:cNvPr id="34" name="Text 32"/>
-          <p:cNvSpPr/>
-          <p:nvPr/>
-        </p:nvSpPr>
-        <p:spPr>
-          <a:xfrm>
-            <a:off x="640080" y="3127248"/>
+          <p:cNvPr id="34" name="Shape 32"/>
+          <p:cNvSpPr/>
+          <p:nvPr/>
+        </p:nvSpPr>
+        <p:spPr>
+          <a:xfrm>
+            <a:off x="3291840" y="3127248"/>
+            <a:ext cx="1645920" cy="420624"/>
+          </a:xfrm>
+          <a:prstGeom prst="rect">
+            <a:avLst/>
+          </a:prstGeom>
+          <a:solidFill>
+            <a:srgbClr val="F1F5F9"/>
+          </a:solidFill>
+          <a:ln w="12700">
+            <a:solidFill>
+              <a:srgbClr val="E5E7EB"/>
+            </a:solidFill>
+            <a:prstDash val="solid"/>
+          </a:ln>
+        </p:spPr>
+      </p:sp>
+      <p:sp>
+        <p:nvSpPr>
+          <p:cNvPr id="35" name="Shape 33"/>
+          <p:cNvSpPr/>
+          <p:nvPr/>
+        </p:nvSpPr>
+        <p:spPr>
+          <a:xfrm>
+            <a:off x="5943600" y="3127248"/>
             <a:ext cx="1463040" cy="420624"/>
           </a:xfrm>
           <a:prstGeom prst="rect">
             <a:avLst/>
           </a:prstGeom>
+          <a:solidFill>
+            <a:srgbClr val="FCE7F3"/>
+          </a:solidFill>
+          <a:ln w="12700">
+            <a:solidFill>
+              <a:srgbClr val="E5E7EB"/>
+            </a:solidFill>
+            <a:prstDash val="solid"/>
+          </a:ln>
+        </p:spPr>
+      </p:sp>
+      <p:sp>
+        <p:nvSpPr>
+          <p:cNvPr id="36" name="Text 34"/>
+          <p:cNvSpPr/>
+          <p:nvPr/>
+        </p:nvSpPr>
+        <p:spPr>
+          <a:xfrm>
+            <a:off x="5943600" y="3127248"/>
+            <a:ext cx="1463040" cy="420624"/>
+          </a:xfrm>
+          <a:prstGeom prst="rect">
+            <a:avLst/>
+          </a:prstGeom>
           <a:noFill/>
           <a:ln/>
         </p:spPr>
@@ -39725,13 +41213,13 @@
             <a:r>
               <a:rPr lang="en-US" sz="1300" b="1" dirty="0">
                 <a:solidFill>
-                  <a:srgbClr val="4C1D95"/>
+                  <a:srgbClr val="9D174D"/>
                 </a:solidFill>
                 <a:latin typeface="Trebuchet MS" pitchFamily="34" charset="0"/>
                 <a:ea typeface="Trebuchet MS" pitchFamily="34" charset="-122"/>
                 <a:cs typeface="Trebuchet MS" pitchFamily="34" charset="-120"/>
               </a:rPr>
-              <a:t>un-</a:t>
+              <a:t>-s</a:t>
             </a:r>
             <a:endParaRPr lang="en-US" sz="1300" dirty="0"/>
           </a:p>
@@ -39739,255 +41227,13 @@
       </p:sp>
       <p:sp>
         <p:nvSpPr>
-          <p:cNvPr id="35" name="Shape 33"/>
-          <p:cNvSpPr/>
-          <p:nvPr/>
-        </p:nvSpPr>
-        <p:spPr>
-          <a:xfrm>
-            <a:off x="3291840" y="3127248"/>
-            <a:ext cx="1645920" cy="420624"/>
-          </a:xfrm>
-          <a:prstGeom prst="rect">
-            <a:avLst/>
-          </a:prstGeom>
-          <a:solidFill>
-            <a:srgbClr val="F1F5F9"/>
-          </a:solidFill>
-          <a:ln w="12700">
-            <a:solidFill>
-              <a:srgbClr val="E5E7EB"/>
-            </a:solidFill>
-            <a:prstDash val="solid"/>
-          </a:ln>
-        </p:spPr>
-      </p:sp>
-      <p:sp>
-        <p:nvSpPr>
-          <p:cNvPr id="36" name="Shape 34"/>
-          <p:cNvSpPr/>
-          <p:nvPr/>
-        </p:nvSpPr>
-        <p:spPr>
-          <a:xfrm>
-            <a:off x="5943600" y="3127248"/>
-            <a:ext cx="1463040" cy="420624"/>
-          </a:xfrm>
-          <a:prstGeom prst="rect">
-            <a:avLst/>
-          </a:prstGeom>
-          <a:solidFill>
-            <a:srgbClr val="FCE7F3"/>
-          </a:solidFill>
-          <a:ln w="12700">
-            <a:solidFill>
-              <a:srgbClr val="E5E7EB"/>
-            </a:solidFill>
-            <a:prstDash val="solid"/>
-          </a:ln>
-        </p:spPr>
-      </p:sp>
-      <p:sp>
-        <p:nvSpPr>
           <p:cNvPr id="37" name="Text 35"/>
           <p:cNvSpPr/>
           <p:nvPr/>
         </p:nvSpPr>
         <p:spPr>
           <a:xfrm>
-            <a:off x="5943600" y="3127248"/>
-            <a:ext cx="1463040" cy="420624"/>
-          </a:xfrm>
-          <a:prstGeom prst="rect">
-            <a:avLst/>
-          </a:prstGeom>
-          <a:noFill/>
-          <a:ln/>
-        </p:spPr>
-        <p:txBody>
-          <a:bodyPr wrap="square" lIns="0" tIns="0" rIns="0" bIns="0" rtlCol="0" anchor="ctr"/>
-          <a:lstStyle/>
-          <a:p>
-            <a:pPr algn="ctr" indent="0" marL="0">
-              <a:buNone/>
-            </a:pPr>
-            <a:r>
-              <a:rPr lang="en-US" sz="1300" b="1" dirty="0">
-                <a:solidFill>
-                  <a:srgbClr val="9D174D"/>
-                </a:solidFill>
-                <a:latin typeface="Trebuchet MS" pitchFamily="34" charset="0"/>
-                <a:ea typeface="Trebuchet MS" pitchFamily="34" charset="-122"/>
-                <a:cs typeface="Trebuchet MS" pitchFamily="34" charset="-120"/>
-              </a:rPr>
-              <a:t>-wave</a:t>
-            </a:r>
-            <a:endParaRPr lang="en-US" sz="1300" dirty="0"/>
-          </a:p>
-        </p:txBody>
-      </p:sp>
-      <p:sp>
-        <p:nvSpPr>
-          <p:cNvPr id="38" name="Shape 36"/>
-          <p:cNvSpPr/>
-          <p:nvPr/>
-        </p:nvSpPr>
-        <p:spPr>
-          <a:xfrm>
-            <a:off x="640080" y="3584448"/>
-            <a:ext cx="1463040" cy="420624"/>
-          </a:xfrm>
-          <a:prstGeom prst="rect">
-            <a:avLst/>
-          </a:prstGeom>
-          <a:solidFill>
-            <a:srgbClr val="DDD6FE"/>
-          </a:solidFill>
-          <a:ln w="12700">
-            <a:solidFill>
-              <a:srgbClr val="E5E7EB"/>
-            </a:solidFill>
-            <a:prstDash val="solid"/>
-          </a:ln>
-        </p:spPr>
-      </p:sp>
-      <p:sp>
-        <p:nvSpPr>
-          <p:cNvPr id="39" name="Text 37"/>
-          <p:cNvSpPr/>
-          <p:nvPr/>
-        </p:nvSpPr>
-        <p:spPr>
-          <a:xfrm>
-            <a:off x="640080" y="3584448"/>
-            <a:ext cx="1463040" cy="420624"/>
-          </a:xfrm>
-          <a:prstGeom prst="rect">
-            <a:avLst/>
-          </a:prstGeom>
-          <a:noFill/>
-          <a:ln/>
-        </p:spPr>
-        <p:txBody>
-          <a:bodyPr wrap="square" lIns="0" tIns="0" rIns="0" bIns="0" rtlCol="0" anchor="ctr"/>
-          <a:lstStyle/>
-          <a:p>
-            <a:pPr algn="ctr" indent="0" marL="0">
-              <a:buNone/>
-            </a:pPr>
-            <a:r>
-              <a:rPr lang="en-US" sz="1300" b="1" dirty="0">
-                <a:solidFill>
-                  <a:srgbClr val="4C1D95"/>
-                </a:solidFill>
-                <a:latin typeface="Trebuchet MS" pitchFamily="34" charset="0"/>
-                <a:ea typeface="Trebuchet MS" pitchFamily="34" charset="-122"/>
-                <a:cs typeface="Trebuchet MS" pitchFamily="34" charset="-120"/>
-              </a:rPr>
-              <a:t>super-</a:t>
-            </a:r>
-            <a:endParaRPr lang="en-US" sz="1300" dirty="0"/>
-          </a:p>
-        </p:txBody>
-      </p:sp>
-      <p:sp>
-        <p:nvSpPr>
-          <p:cNvPr id="40" name="Shape 38"/>
-          <p:cNvSpPr/>
-          <p:nvPr/>
-        </p:nvSpPr>
-        <p:spPr>
-          <a:xfrm>
-            <a:off x="3291840" y="3584448"/>
-            <a:ext cx="1645920" cy="420624"/>
-          </a:xfrm>
-          <a:prstGeom prst="rect">
-            <a:avLst/>
-          </a:prstGeom>
-          <a:solidFill>
-            <a:srgbClr val="F8FAFC"/>
-          </a:solidFill>
-          <a:ln w="12700">
-            <a:solidFill>
-              <a:srgbClr val="E5E7EB"/>
-            </a:solidFill>
-            <a:prstDash val="solid"/>
-          </a:ln>
-        </p:spPr>
-      </p:sp>
-      <p:sp>
-        <p:nvSpPr>
-          <p:cNvPr id="41" name="Shape 39"/>
-          <p:cNvSpPr/>
-          <p:nvPr/>
-        </p:nvSpPr>
-        <p:spPr>
-          <a:xfrm>
-            <a:off x="5943600" y="3584448"/>
-            <a:ext cx="1463040" cy="420624"/>
-          </a:xfrm>
-          <a:prstGeom prst="rect">
-            <a:avLst/>
-          </a:prstGeom>
-          <a:solidFill>
-            <a:srgbClr val="FCE7F3"/>
-          </a:solidFill>
-          <a:ln w="12700">
-            <a:solidFill>
-              <a:srgbClr val="E5E7EB"/>
-            </a:solidFill>
-            <a:prstDash val="solid"/>
-          </a:ln>
-        </p:spPr>
-      </p:sp>
-      <p:sp>
-        <p:nvSpPr>
-          <p:cNvPr id="42" name="Text 40"/>
-          <p:cNvSpPr/>
-          <p:nvPr/>
-        </p:nvSpPr>
-        <p:spPr>
-          <a:xfrm>
-            <a:off x="5943600" y="3584448"/>
-            <a:ext cx="1463040" cy="420624"/>
-          </a:xfrm>
-          <a:prstGeom prst="rect">
-            <a:avLst/>
-          </a:prstGeom>
-          <a:noFill/>
-          <a:ln/>
-        </p:spPr>
-        <p:txBody>
-          <a:bodyPr wrap="square" lIns="0" tIns="0" rIns="0" bIns="0" rtlCol="0" anchor="ctr"/>
-          <a:lstStyle/>
-          <a:p>
-            <a:pPr algn="ctr" indent="0" marL="0">
-              <a:buNone/>
-            </a:pPr>
-            <a:r>
-              <a:rPr lang="en-US" sz="1300" b="1" dirty="0">
-                <a:solidFill>
-                  <a:srgbClr val="9D174D"/>
-                </a:solidFill>
-                <a:latin typeface="Trebuchet MS" pitchFamily="34" charset="0"/>
-                <a:ea typeface="Trebuchet MS" pitchFamily="34" charset="-122"/>
-                <a:cs typeface="Trebuchet MS" pitchFamily="34" charset="-120"/>
-              </a:rPr>
-              <a:t>-stroke</a:t>
-            </a:r>
-            <a:endParaRPr lang="en-US" sz="1300" dirty="0"/>
-          </a:p>
-        </p:txBody>
-      </p:sp>
-      <p:sp>
-        <p:nvSpPr>
-          <p:cNvPr id="43" name="Text 41"/>
-          <p:cNvSpPr/>
-          <p:nvPr/>
-        </p:nvSpPr>
-        <p:spPr>
-          <a:xfrm>
-            <a:off x="365760" y="4178808"/>
+            <a:off x="365760" y="3721608"/>
             <a:ext cx="1097280" cy="420624"/>
           </a:xfrm>
           <a:prstGeom prst="rect">
@@ -40020,13 +41266,13 @@
       </p:sp>
       <p:sp>
         <p:nvSpPr>
-          <p:cNvPr id="44" name="Shape 42"/>
-          <p:cNvSpPr/>
-          <p:nvPr/>
-        </p:nvSpPr>
-        <p:spPr>
-          <a:xfrm>
-            <a:off x="1508760" y="4178808"/>
+          <p:cNvPr id="38" name="Shape 36"/>
+          <p:cNvSpPr/>
+          <p:nvPr/>
+        </p:nvSpPr>
+        <p:spPr>
+          <a:xfrm>
+            <a:off x="1508760" y="3721608"/>
             <a:ext cx="1097280" cy="420624"/>
           </a:xfrm>
           <a:prstGeom prst="rect">
@@ -40054,13 +41300,13 @@
       </p:sp>
       <p:sp>
         <p:nvSpPr>
-          <p:cNvPr id="45" name="Text 43"/>
-          <p:cNvSpPr/>
-          <p:nvPr/>
-        </p:nvSpPr>
-        <p:spPr>
-          <a:xfrm>
-            <a:off x="1508760" y="4178808"/>
+          <p:cNvPr id="39" name="Text 37"/>
+          <p:cNvSpPr/>
+          <p:nvPr/>
+        </p:nvSpPr>
+        <p:spPr>
+          <a:xfrm>
+            <a:off x="1508760" y="3721608"/>
             <a:ext cx="1097280" cy="420624"/>
           </a:xfrm>
           <a:prstGeom prst="rect">
@@ -40093,13 +41339,13 @@
       </p:sp>
       <p:sp>
         <p:nvSpPr>
-          <p:cNvPr id="46" name="Text 44"/>
-          <p:cNvSpPr/>
-          <p:nvPr/>
-        </p:nvSpPr>
-        <p:spPr>
-          <a:xfrm>
-            <a:off x="2633472" y="4178808"/>
+          <p:cNvPr id="40" name="Text 38"/>
+          <p:cNvSpPr/>
+          <p:nvPr/>
+        </p:nvSpPr>
+        <p:spPr>
+          <a:xfrm>
+            <a:off x="2633472" y="3721608"/>
             <a:ext cx="320040" cy="420624"/>
           </a:xfrm>
           <a:prstGeom prst="rect">
@@ -40132,13 +41378,13 @@
       </p:sp>
       <p:sp>
         <p:nvSpPr>
-          <p:cNvPr id="47" name="Shape 45"/>
-          <p:cNvSpPr/>
-          <p:nvPr/>
-        </p:nvSpPr>
-        <p:spPr>
-          <a:xfrm>
-            <a:off x="2980944" y="4178808"/>
+          <p:cNvPr id="41" name="Shape 39"/>
+          <p:cNvSpPr/>
+          <p:nvPr/>
+        </p:nvSpPr>
+        <p:spPr>
+          <a:xfrm>
+            <a:off x="2980944" y="3721608"/>
             <a:ext cx="1243584" cy="420624"/>
           </a:xfrm>
           <a:prstGeom prst="rect">
@@ -40166,13 +41412,13 @@
       </p:sp>
       <p:sp>
         <p:nvSpPr>
-          <p:cNvPr id="48" name="Text 46"/>
-          <p:cNvSpPr/>
-          <p:nvPr/>
-        </p:nvSpPr>
-        <p:spPr>
-          <a:xfrm>
-            <a:off x="2980944" y="4178808"/>
+          <p:cNvPr id="42" name="Text 40"/>
+          <p:cNvSpPr/>
+          <p:nvPr/>
+        </p:nvSpPr>
+        <p:spPr>
+          <a:xfrm>
+            <a:off x="2980944" y="3721608"/>
             <a:ext cx="1243584" cy="420624"/>
           </a:xfrm>
           <a:prstGeom prst="rect">
@@ -40205,13 +41451,13 @@
       </p:sp>
       <p:sp>
         <p:nvSpPr>
-          <p:cNvPr id="49" name="Text 47"/>
-          <p:cNvSpPr/>
-          <p:nvPr/>
-        </p:nvSpPr>
-        <p:spPr>
-          <a:xfrm>
-            <a:off x="4251960" y="4178808"/>
+          <p:cNvPr id="43" name="Text 41"/>
+          <p:cNvSpPr/>
+          <p:nvPr/>
+        </p:nvSpPr>
+        <p:spPr>
+          <a:xfrm>
+            <a:off x="4251960" y="3721608"/>
             <a:ext cx="320040" cy="420624"/>
           </a:xfrm>
           <a:prstGeom prst="rect">
@@ -40244,13 +41490,13 @@
       </p:sp>
       <p:sp>
         <p:nvSpPr>
-          <p:cNvPr id="50" name="Shape 48"/>
-          <p:cNvSpPr/>
-          <p:nvPr/>
-        </p:nvSpPr>
-        <p:spPr>
-          <a:xfrm>
-            <a:off x="4599432" y="4178808"/>
+          <p:cNvPr id="44" name="Shape 42"/>
+          <p:cNvSpPr/>
+          <p:nvPr/>
+        </p:nvSpPr>
+        <p:spPr>
+          <a:xfrm>
+            <a:off x="4599432" y="3721608"/>
             <a:ext cx="822960" cy="420624"/>
           </a:xfrm>
           <a:prstGeom prst="rect">
@@ -40278,13 +41524,13 @@
       </p:sp>
       <p:sp>
         <p:nvSpPr>
-          <p:cNvPr id="51" name="Text 49"/>
-          <p:cNvSpPr/>
-          <p:nvPr/>
-        </p:nvSpPr>
-        <p:spPr>
-          <a:xfrm>
-            <a:off x="4599432" y="4178808"/>
+          <p:cNvPr id="45" name="Text 43"/>
+          <p:cNvSpPr/>
+          <p:nvPr/>
+        </p:nvSpPr>
+        <p:spPr>
+          <a:xfrm>
+            <a:off x="4599432" y="3721608"/>
             <a:ext cx="822960" cy="420624"/>
           </a:xfrm>
           <a:prstGeom prst="rect">
@@ -40317,13 +41563,13 @@
       </p:sp>
       <p:sp>
         <p:nvSpPr>
-          <p:cNvPr id="52" name="Text 50"/>
-          <p:cNvSpPr/>
-          <p:nvPr/>
-        </p:nvSpPr>
-        <p:spPr>
-          <a:xfrm>
-            <a:off x="5495544" y="4178808"/>
+          <p:cNvPr id="46" name="Text 44"/>
+          <p:cNvSpPr/>
+          <p:nvPr/>
+        </p:nvSpPr>
+        <p:spPr>
+          <a:xfrm>
+            <a:off x="5495544" y="3721608"/>
             <a:ext cx="365760" cy="420624"/>
           </a:xfrm>
           <a:prstGeom prst="rect">
@@ -40356,13 +41602,13 @@
       </p:sp>
       <p:sp>
         <p:nvSpPr>
-          <p:cNvPr id="53" name="Shape 51"/>
-          <p:cNvSpPr/>
-          <p:nvPr/>
-        </p:nvSpPr>
-        <p:spPr>
-          <a:xfrm>
-            <a:off x="5907024" y="4178808"/>
+          <p:cNvPr id="47" name="Shape 45"/>
+          <p:cNvSpPr/>
+          <p:nvPr/>
+        </p:nvSpPr>
+        <p:spPr>
+          <a:xfrm>
+            <a:off x="5907024" y="3721608"/>
             <a:ext cx="2194560" cy="420624"/>
           </a:xfrm>
           <a:prstGeom prst="rect">
@@ -40383,13 +41629,13 @@
       </p:sp>
       <p:sp>
         <p:nvSpPr>
-          <p:cNvPr id="54" name="Text 52"/>
-          <p:cNvSpPr/>
-          <p:nvPr/>
-        </p:nvSpPr>
-        <p:spPr>
-          <a:xfrm>
-            <a:off x="5907024" y="4178808"/>
+          <p:cNvPr id="48" name="Text 46"/>
+          <p:cNvSpPr/>
+          <p:nvPr/>
+        </p:nvSpPr>
+        <p:spPr>
+          <a:xfrm>
+            <a:off x="5907024" y="3721608"/>
             <a:ext cx="2194560" cy="420624"/>
           </a:xfrm>
           <a:prstGeom prst="rect">
@@ -40414,7 +41660,7 @@
                 <a:ea typeface="Trebuchet MS" pitchFamily="34" charset="-122"/>
                 <a:cs typeface="Trebuchet MS" pitchFamily="34" charset="-120"/>
               </a:rPr>
-              <a:t>heated</a:t>
+              <a:t>heat</a:t>
             </a:r>
             <a:endParaRPr lang="en-US" sz="1400" dirty="0"/>
           </a:p>
@@ -40706,7 +41952,7 @@
                 <a:ea typeface="Calibri" pitchFamily="34" charset="-122"/>
                 <a:cs typeface="Calibri" pitchFamily="34" charset="-120"/>
               </a:rPr>
-              <a:t>Word Labs  •  wordlabs.app  •  Root: 'heat' = warmth or high temperature</a:t>
+              <a:t>Word Labs  •  wordlabs.app  •  Root: 'heat' = warmth; to make warm</a:t>
             </a:r>
             <a:endParaRPr lang="en-US" sz="800" dirty="0"/>
           </a:p>
@@ -40818,7 +42064,7 @@
                 <a:ea typeface="Trebuchet MS" pitchFamily="34" charset="-122"/>
                 <a:cs typeface="Trebuchet MS" pitchFamily="34" charset="-120"/>
               </a:rPr>
-              <a:t>heated</a:t>
+              <a:t>heat</a:t>
             </a:r>
             <a:endParaRPr lang="en-US" sz="1200" dirty="0"/>
           </a:p>
@@ -40884,7 +42130,7 @@
                 <a:ea typeface="Calibri" pitchFamily="34" charset="-122"/>
                 <a:cs typeface="Calibri" pitchFamily="34" charset="-120"/>
               </a:rPr>
-              <a:t>When food or liquid has been warmed up again after going cold.</a:t>
+              <a:t>to heat food again after it has gone cold</a:t>
             </a:r>
             <a:endParaRPr lang="en-US" sz="1200" dirty="0"/>
           </a:p>
@@ -40957,7 +42203,7 @@
                 <a:ea typeface="Trebuchet MS" pitchFamily="34" charset="-122"/>
                 <a:cs typeface="Trebuchet MS" pitchFamily="34" charset="-120"/>
               </a:rPr>
-              <a:t>heater</a:t>
+              <a:t>heats</a:t>
             </a:r>
             <a:endParaRPr lang="en-US" sz="1200" dirty="0"/>
           </a:p>
@@ -41023,7 +42269,7 @@
                 <a:ea typeface="Calibri" pitchFamily="34" charset="-122"/>
                 <a:cs typeface="Calibri" pitchFamily="34" charset="-120"/>
               </a:rPr>
-              <a:t>The process of making something warm, like the heating system in a building.</a:t>
+              <a:t>made warm or hot</a:t>
             </a:r>
             <a:endParaRPr lang="en-US" sz="1200" dirty="0"/>
           </a:p>
@@ -41096,7 +42342,7 @@
                 <a:ea typeface="Trebuchet MS" pitchFamily="34" charset="-122"/>
                 <a:cs typeface="Trebuchet MS" pitchFamily="34" charset="-120"/>
               </a:rPr>
-              <a:t>heating</a:t>
+              <a:t>heated</a:t>
             </a:r>
             <a:endParaRPr lang="en-US" sz="1200" dirty="0"/>
           </a:p>
@@ -41162,7 +42408,7 @@
                 <a:ea typeface="Calibri" pitchFamily="34" charset="-122"/>
                 <a:cs typeface="Calibri" pitchFamily="34" charset="-120"/>
               </a:rPr>
-              <a:t>To heat something like an oven before you start cooking.</a:t>
+              <a:t>more than one device that makes a place warm</a:t>
             </a:r>
             <a:endParaRPr lang="en-US" sz="1200" dirty="0"/>
           </a:p>
@@ -41235,7 +42481,7 @@
                 <a:ea typeface="Trebuchet MS" pitchFamily="34" charset="-122"/>
                 <a:cs typeface="Trebuchet MS" pitchFamily="34" charset="-120"/>
               </a:rPr>
-              <a:t>overheated</a:t>
+              <a:t>heater</a:t>
             </a:r>
             <a:endParaRPr lang="en-US" sz="1200" dirty="0"/>
           </a:p>
@@ -41301,7 +42547,7 @@
                 <a:ea typeface="Calibri" pitchFamily="34" charset="-122"/>
                 <a:cs typeface="Calibri" pitchFamily="34" charset="-120"/>
               </a:rPr>
-              <a:t>When something has become too hot, like a car engine that gets too warm.</a:t>
+              <a:t>a device that makes a place or thing warm</a:t>
             </a:r>
             <a:endParaRPr lang="en-US" sz="1200" dirty="0"/>
           </a:p>
@@ -41374,7 +42620,7 @@
                 <a:ea typeface="Trebuchet MS" pitchFamily="34" charset="-122"/>
                 <a:cs typeface="Trebuchet MS" pitchFamily="34" charset="-120"/>
               </a:rPr>
-              <a:t>reheated</a:t>
+              <a:t>reheat</a:t>
             </a:r>
             <a:endParaRPr lang="en-US" sz="1200" dirty="0"/>
           </a:p>
@@ -41440,7 +42686,7 @@
                 <a:ea typeface="Calibri" pitchFamily="34" charset="-122"/>
                 <a:cs typeface="Calibri" pitchFamily="34" charset="-120"/>
               </a:rPr>
-              <a:t>Made warm or hot, or used to describe an argument that became very intense.</a:t>
+              <a:t>the quality of being hot; warmth</a:t>
             </a:r>
             <a:endParaRPr lang="en-US" sz="1200" dirty="0"/>
           </a:p>
@@ -41513,7 +42759,7 @@
                 <a:ea typeface="Trebuchet MS" pitchFamily="34" charset="-122"/>
                 <a:cs typeface="Trebuchet MS" pitchFamily="34" charset="-120"/>
               </a:rPr>
-              <a:t>preheat</a:t>
+              <a:t>heaters</a:t>
             </a:r>
             <a:endParaRPr lang="en-US" sz="1200" dirty="0"/>
           </a:p>
@@ -41579,7 +42825,7 @@
                 <a:ea typeface="Calibri" pitchFamily="34" charset="-122"/>
                 <a:cs typeface="Calibri" pitchFamily="34" charset="-120"/>
               </a:rPr>
-              <a:t>A long stretch of unusually hot weather that can last for days or weeks.</a:t>
+              <a:t>making something warm, or a system that warms a building</a:t>
             </a:r>
             <a:endParaRPr lang="en-US" sz="1200" dirty="0"/>
           </a:p>
@@ -41652,7 +42898,7 @@
                 <a:ea typeface="Trebuchet MS" pitchFamily="34" charset="-122"/>
                 <a:cs typeface="Trebuchet MS" pitchFamily="34" charset="-120"/>
               </a:rPr>
-              <a:t>heatwave</a:t>
+              <a:t>heating</a:t>
             </a:r>
             <a:endParaRPr lang="en-US" sz="1200" dirty="0"/>
           </a:p>
@@ -41718,7 +42964,7 @@
                 <a:ea typeface="Calibri" pitchFamily="34" charset="-122"/>
                 <a:cs typeface="Calibri" pitchFamily="34" charset="-120"/>
               </a:rPr>
-              <a:t>A machine or device used to make a room or water warm.</a:t>
+              <a:t>makes something warm (present tense)</a:t>
             </a:r>
             <a:endParaRPr lang="en-US" sz="1200" dirty="0"/>
           </a:p>
@@ -42010,7 +43256,7 @@
                 <a:ea typeface="Calibri" pitchFamily="34" charset="-122"/>
                 <a:cs typeface="Calibri" pitchFamily="34" charset="-120"/>
               </a:rPr>
-              <a:t>Word Labs  •  wordlabs.app  •  Root: 'heat' = warmth or high temperature</a:t>
+              <a:t>Word Labs  •  wordlabs.app  •  Root: 'heat' = warmth; to make warm</a:t>
             </a:r>
             <a:endParaRPr lang="en-US" sz="800" dirty="0"/>
           </a:p>
@@ -42213,7 +43459,7 @@
                 <a:ea typeface="Calibri" pitchFamily="34" charset="-122"/>
                 <a:cs typeface="Calibri" pitchFamily="34" charset="-120"/>
               </a:rPr>
-              <a:t>Remember to preheat the oven to 180 degrees before you put the cake inside.</a:t>
+              <a:t>The heat from the fire warmed the whole room.</a:t>
             </a:r>
             <a:endParaRPr lang="en-US" sz="1500" dirty="0"/>
           </a:p>
@@ -42377,7 +43623,7 @@
                 <a:ea typeface="Calibri" pitchFamily="34" charset="-122"/>
                 <a:cs typeface="Calibri" pitchFamily="34" charset="-120"/>
               </a:rPr>
-              <a:t>After playing sport in the sun all afternoon, the coach warned the students about the dangers of heatstroke.</a:t>
+              <a:t>The sun heats the sand until it is too hot to walk on.</a:t>
             </a:r>
             <a:endParaRPr lang="en-US" sz="1500" dirty="0"/>
           </a:p>
@@ -42541,7 +43787,7 @@
                 <a:ea typeface="Calibri" pitchFamily="34" charset="-122"/>
                 <a:cs typeface="Calibri" pitchFamily="34" charset="-120"/>
               </a:rPr>
-              <a:t>The mechanic said the car had overheated because it did not have enough water in the engine.</a:t>
+              <a:t>The soup was heated on the stove before dinner.</a:t>
             </a:r>
             <a:endParaRPr lang="en-US" sz="1500" dirty="0"/>
           </a:p>
